--- a/presentations/04-testovanie-debugging-kvalita.sk.pptx
+++ b/presentations/04-testovanie-debugging-kvalita.sk.pptx
@@ -3399,7 +3399,7 @@
                 <a:ea typeface="Consolas" pitchFamily="34" charset="-122"/>
                 <a:cs typeface="Consolas" pitchFamily="34" charset="-120"/>
               </a:rPr>
-              <a:t>PREDNÁŠKA 01</a:t>
+              <a:t>PREDNÁŠKA 04</a:t>
             </a:r>
             <a:endParaRPr lang="en-US" sz="900" dirty="0"/>
           </a:p>
@@ -3896,7 +3896,7 @@
                 <a:ea typeface="Consolas" pitchFamily="34" charset="-122"/>
                 <a:cs typeface="Consolas" pitchFamily="34" charset="-120"/>
               </a:rPr>
-              <a:t>PREDNÁŠKA 01</a:t>
+              <a:t>PREDNÁŠKA 04</a:t>
             </a:r>
             <a:endParaRPr lang="en-US" sz="900" dirty="0"/>
           </a:p>
@@ -4270,7 +4270,7 @@
                 <a:ea typeface="Consolas" pitchFamily="34" charset="-122"/>
                 <a:cs typeface="Consolas" pitchFamily="34" charset="-120"/>
               </a:rPr>
-              <a:t>PREDNÁŠKA 01</a:t>
+              <a:t>PREDNÁŠKA 04</a:t>
             </a:r>
             <a:endParaRPr lang="en-US" sz="900" dirty="0"/>
           </a:p>
@@ -4825,7 +4825,7 @@
                 <a:ea typeface="Consolas" pitchFamily="34" charset="-122"/>
                 <a:cs typeface="Consolas" pitchFamily="34" charset="-120"/>
               </a:rPr>
-              <a:t>PREDNÁŠKA 01</a:t>
+              <a:t>PREDNÁŠKA 04</a:t>
             </a:r>
             <a:endParaRPr lang="en-US" sz="900" dirty="0"/>
           </a:p>
@@ -5367,7 +5367,7 @@
                 <a:ea typeface="Consolas" pitchFamily="34" charset="-122"/>
                 <a:cs typeface="Consolas" pitchFamily="34" charset="-120"/>
               </a:rPr>
-              <a:t>PREDNÁŠKA 01</a:t>
+              <a:t>PREDNÁŠKA 04</a:t>
             </a:r>
             <a:endParaRPr lang="en-US" sz="900" dirty="0"/>
           </a:p>
@@ -5864,7 +5864,7 @@
                 <a:ea typeface="Consolas" pitchFamily="34" charset="-122"/>
                 <a:cs typeface="Consolas" pitchFamily="34" charset="-120"/>
               </a:rPr>
-              <a:t>PREDNÁŠKA 01</a:t>
+              <a:t>PREDNÁŠKA 04</a:t>
             </a:r>
             <a:endParaRPr lang="en-US" sz="900" dirty="0"/>
           </a:p>
@@ -6250,7 +6250,7 @@
                 <a:ea typeface="Consolas" pitchFamily="34" charset="-122"/>
                 <a:cs typeface="Consolas" pitchFamily="34" charset="-120"/>
               </a:rPr>
-              <a:t>PREDNÁŠKA 01</a:t>
+              <a:t>PREDNÁŠKA 04</a:t>
             </a:r>
             <a:endParaRPr lang="en-US" sz="900" dirty="0"/>
           </a:p>
@@ -6624,7 +6624,7 @@
                 <a:ea typeface="Consolas" pitchFamily="34" charset="-122"/>
                 <a:cs typeface="Consolas" pitchFamily="34" charset="-120"/>
               </a:rPr>
-              <a:t>PREDNÁŠKA 01</a:t>
+              <a:t>PREDNÁŠKA 04</a:t>
             </a:r>
             <a:endParaRPr lang="en-US" sz="900" dirty="0"/>
           </a:p>
@@ -7238,7 +7238,7 @@
                 <a:ea typeface="Consolas" pitchFamily="34" charset="-122"/>
                 <a:cs typeface="Consolas" pitchFamily="34" charset="-120"/>
               </a:rPr>
-              <a:t>PREDNÁŠKA 01</a:t>
+              <a:t>PREDNÁŠKA 04</a:t>
             </a:r>
             <a:endParaRPr lang="en-US" sz="900" dirty="0"/>
           </a:p>
@@ -7601,7 +7601,7 @@
                 <a:ea typeface="Consolas" pitchFamily="34" charset="-122"/>
                 <a:cs typeface="Consolas" pitchFamily="34" charset="-120"/>
               </a:rPr>
-              <a:t>PREDNÁŠKA 01</a:t>
+              <a:t>PREDNÁŠKA 04</a:t>
             </a:r>
             <a:endParaRPr lang="en-US" sz="900" dirty="0"/>
           </a:p>
@@ -8098,7 +8098,7 @@
                 <a:ea typeface="Consolas" pitchFamily="34" charset="-122"/>
                 <a:cs typeface="Consolas" pitchFamily="34" charset="-120"/>
               </a:rPr>
-              <a:t>PREDNÁŠKA 01</a:t>
+              <a:t>PREDNÁŠKA 04</a:t>
             </a:r>
             <a:endParaRPr lang="en-US" sz="900" dirty="0"/>
           </a:p>
@@ -8461,7 +8461,7 @@
                 <a:ea typeface="Consolas" pitchFamily="34" charset="-122"/>
                 <a:cs typeface="Consolas" pitchFamily="34" charset="-120"/>
               </a:rPr>
-              <a:t>PREDNÁŠKA 01</a:t>
+              <a:t>PREDNÁŠKA 04</a:t>
             </a:r>
             <a:endParaRPr lang="en-US" sz="900" dirty="0"/>
           </a:p>
@@ -8835,7 +8835,7 @@
                 <a:ea typeface="Consolas" pitchFamily="34" charset="-122"/>
                 <a:cs typeface="Consolas" pitchFamily="34" charset="-120"/>
               </a:rPr>
-              <a:t>PREDNÁŠKA 01</a:t>
+              <a:t>PREDNÁŠKA 04</a:t>
             </a:r>
             <a:endParaRPr lang="en-US" sz="900" dirty="0"/>
           </a:p>
@@ -10311,7 +10311,7 @@
                 <a:ea typeface="Consolas" pitchFamily="34" charset="-122"/>
                 <a:cs typeface="Consolas" pitchFamily="34" charset="-120"/>
               </a:rPr>
-              <a:t>PREDNÁŠKA 01</a:t>
+              <a:t>PREDNÁŠKA 04</a:t>
             </a:r>
             <a:endParaRPr lang="en-US" sz="900" dirty="0"/>
           </a:p>
@@ -10791,7 +10791,7 @@
                 <a:ea typeface="Consolas" pitchFamily="34" charset="-122"/>
                 <a:cs typeface="Consolas" pitchFamily="34" charset="-120"/>
               </a:rPr>
-              <a:t>PREDNÁŠKA 01</a:t>
+              <a:t>PREDNÁŠKA 04</a:t>
             </a:r>
             <a:endParaRPr lang="en-US" sz="900" dirty="0"/>
           </a:p>
@@ -11195,7 +11195,7 @@
                 <a:ea typeface="Consolas" pitchFamily="34" charset="-122"/>
                 <a:cs typeface="Consolas" pitchFamily="34" charset="-120"/>
               </a:rPr>
-              <a:t>PREDNÁŠKA 01</a:t>
+              <a:t>PREDNÁŠKA 04</a:t>
             </a:r>
             <a:endParaRPr lang="en-US" sz="900" dirty="0"/>
           </a:p>
@@ -11845,7 +11845,7 @@
                 <a:ea typeface="Consolas" pitchFamily="34" charset="-122"/>
                 <a:cs typeface="Consolas" pitchFamily="34" charset="-120"/>
               </a:rPr>
-              <a:t>PREDNÁŠKA 01</a:t>
+              <a:t>PREDNÁŠKA 04</a:t>
             </a:r>
             <a:endParaRPr lang="en-US" sz="900" dirty="0"/>
           </a:p>
@@ -12400,7 +12400,7 @@
                 <a:ea typeface="Consolas" pitchFamily="34" charset="-122"/>
                 <a:cs typeface="Consolas" pitchFamily="34" charset="-120"/>
               </a:rPr>
-              <a:t>PREDNÁŠKA 01</a:t>
+              <a:t>PREDNÁŠKA 04</a:t>
             </a:r>
             <a:endParaRPr lang="en-US" sz="900" dirty="0"/>
           </a:p>
@@ -13014,7 +13014,7 @@
                 <a:ea typeface="Consolas" pitchFamily="34" charset="-122"/>
                 <a:cs typeface="Consolas" pitchFamily="34" charset="-120"/>
               </a:rPr>
-              <a:t>PREDNÁŠKA 01</a:t>
+              <a:t>PREDNÁŠKA 04</a:t>
             </a:r>
             <a:endParaRPr lang="en-US" sz="900" dirty="0"/>
           </a:p>
@@ -13388,7 +13388,7 @@
                 <a:ea typeface="Consolas" pitchFamily="34" charset="-122"/>
                 <a:cs typeface="Consolas" pitchFamily="34" charset="-120"/>
               </a:rPr>
-              <a:t>PREDNÁŠKA 01</a:t>
+              <a:t>PREDNÁŠKA 04</a:t>
             </a:r>
             <a:endParaRPr lang="en-US" sz="900" dirty="0"/>
           </a:p>
@@ -13868,7 +13868,7 @@
                 <a:ea typeface="Consolas" pitchFamily="34" charset="-122"/>
                 <a:cs typeface="Consolas" pitchFamily="34" charset="-120"/>
               </a:rPr>
-              <a:t>PREDNÁŠKA 01</a:t>
+              <a:t>PREDNÁŠKA 04</a:t>
             </a:r>
             <a:endParaRPr lang="en-US" sz="900" dirty="0"/>
           </a:p>
@@ -14348,7 +14348,7 @@
                 <a:ea typeface="Consolas" pitchFamily="34" charset="-122"/>
                 <a:cs typeface="Consolas" pitchFamily="34" charset="-120"/>
               </a:rPr>
-              <a:t>PREDNÁŠKA 01</a:t>
+              <a:t>PREDNÁŠKA 04</a:t>
             </a:r>
             <a:endParaRPr lang="en-US" sz="900" dirty="0"/>
           </a:p>
@@ -14711,7 +14711,7 @@
                 <a:ea typeface="Consolas" pitchFamily="34" charset="-122"/>
                 <a:cs typeface="Consolas" pitchFamily="34" charset="-120"/>
               </a:rPr>
-              <a:t>PREDNÁŠKA 01</a:t>
+              <a:t>PREDNÁŠKA 04</a:t>
             </a:r>
             <a:endParaRPr lang="en-US" sz="900" dirty="0"/>
           </a:p>

--- a/presentations/04-testovanie-debugging-kvalita.sk.pptx
+++ b/presentations/04-testovanie-debugging-kvalita.sk.pptx
@@ -23,16 +23,9 @@
     <p:sldId id="271" r:id="rId17"/>
     <p:sldId id="272" r:id="rId18"/>
     <p:sldId id="273" r:id="rId19"/>
-    <p:sldId id="274" r:id="rId20"/>
-    <p:sldId id="275" r:id="rId21"/>
-    <p:sldId id="276" r:id="rId22"/>
-    <p:sldId id="277" r:id="rId23"/>
-    <p:sldId id="278" r:id="rId24"/>
-    <p:sldId id="279" r:id="rId25"/>
-    <p:sldId id="280" r:id="rId26"/>
   </p:sldIdLst>
   <p:notesMasterIdLst>
-    <p:notesMasterId r:id="rId27"/>
+    <p:notesMasterId r:id="rId20"/>
   </p:notesMasterIdLst>
   <p:sldSz cx="12192000" cy="6858000"/>
   <p:notesSz cx="6858000" cy="12192000"/>
@@ -1360,94 +1353,6 @@
 </p:notes>
 </file>
 
-<file path=ppt/notesSlides/notesSlide19.xml><?xml version="1.0" encoding="utf-8"?>
-<p:notes xmlns:a="http://schemas.openxmlformats.org/drawingml/2006/main" xmlns:r="http://schemas.openxmlformats.org/officeDocument/2006/relationships" xmlns:p="http://schemas.openxmlformats.org/presentationml/2006/main">
-  <p:cSld>
-    <p:spTree>
-      <p:nvGrpSpPr>
-        <p:cNvPr id="1" name=""/>
-        <p:cNvGrpSpPr/>
-        <p:nvPr/>
-      </p:nvGrpSpPr>
-      <p:grpSpPr>
-        <a:xfrm>
-          <a:off x="0" y="0"/>
-          <a:ext cx="0" cy="0"/>
-          <a:chOff x="0" y="0"/>
-          <a:chExt cx="0" cy="0"/>
-        </a:xfrm>
-      </p:grpSpPr>
-      <p:sp>
-        <p:nvSpPr>
-          <p:cNvPr id="2" name="Slide Image Placeholder 1"/>
-          <p:cNvSpPr>
-            <a:spLocks noGrp="1" noRot="1" noChangeAspect="1"/>
-          </p:cNvSpPr>
-          <p:nvPr>
-            <p:ph type="sldImg"/>
-          </p:nvPr>
-        </p:nvSpPr>
-        <p:spPr/>
-      </p:sp>
-      <p:sp>
-        <p:nvSpPr>
-          <p:cNvPr id="3" name="Notes Placeholder 2"/>
-          <p:cNvSpPr>
-            <a:spLocks noGrp="1"/>
-          </p:cNvSpPr>
-          <p:nvPr>
-            <p:ph type="body" idx="1"/>
-          </p:nvPr>
-        </p:nvSpPr>
-        <p:spPr/>
-        <p:txBody>
-          <a:bodyPr/>
-          <a:lstStyle/>
-          <a:p>
-            <a:r>
-              <a:rPr lang="en-US" dirty="0"/>
-              <a:t/>
-            </a:r>
-            <a:endParaRPr lang="en-US" dirty="0"/>
-          </a:p>
-        </p:txBody>
-      </p:sp>
-      <p:sp>
-        <p:nvSpPr>
-          <p:cNvPr id="4" name="Slide Number Placeholder 3"/>
-          <p:cNvSpPr>
-            <a:spLocks noGrp="1"/>
-          </p:cNvSpPr>
-          <p:nvPr>
-            <p:ph type="sldNum" sz="quarter" idx="10"/>
-          </p:nvPr>
-        </p:nvSpPr>
-        <p:spPr/>
-        <p:txBody>
-          <a:bodyPr/>
-          <a:lstStyle/>
-          <a:p>
-            <a:fld id="{F7021451-1387-4CA6-816F-3879F97B5CBC}" type="slidenum">
-              <a:rPr lang="en-US"/>
-              <a:t>19</a:t>
-            </a:fld>
-            <a:endParaRPr lang="en-US"/>
-          </a:p>
-        </p:txBody>
-      </p:sp>
-    </p:spTree>
-    <p:extLst>
-      <p:ext uri="{BB962C8B-B14F-4D97-AF65-F5344CB8AC3E}">
-        <p14:creationId xmlns:p14="http://schemas.microsoft.com/office/powerpoint/2010/main" val="1024086991"/>
-      </p:ext>
-    </p:extLst>
-  </p:cSld>
-  <p:clrMapOvr>
-    <a:masterClrMapping/>
-  </p:clrMapOvr>
-</p:notes>
-</file>
-
 <file path=ppt/notesSlides/notesSlide2.xml><?xml version="1.0" encoding="utf-8"?>
 <p:notes xmlns:a="http://schemas.openxmlformats.org/drawingml/2006/main" xmlns:r="http://schemas.openxmlformats.org/officeDocument/2006/relationships" xmlns:p="http://schemas.openxmlformats.org/presentationml/2006/main">
   <p:cSld>
@@ -1518,534 +1423,6 @@
             <a:fld id="{F7021451-1387-4CA6-816F-3879F97B5CBC}" type="slidenum">
               <a:rPr lang="en-US"/>
               <a:t>2</a:t>
-            </a:fld>
-            <a:endParaRPr lang="en-US"/>
-          </a:p>
-        </p:txBody>
-      </p:sp>
-    </p:spTree>
-    <p:extLst>
-      <p:ext uri="{BB962C8B-B14F-4D97-AF65-F5344CB8AC3E}">
-        <p14:creationId xmlns:p14="http://schemas.microsoft.com/office/powerpoint/2010/main" val="1024086991"/>
-      </p:ext>
-    </p:extLst>
-  </p:cSld>
-  <p:clrMapOvr>
-    <a:masterClrMapping/>
-  </p:clrMapOvr>
-</p:notes>
-</file>
-
-<file path=ppt/notesSlides/notesSlide20.xml><?xml version="1.0" encoding="utf-8"?>
-<p:notes xmlns:a="http://schemas.openxmlformats.org/drawingml/2006/main" xmlns:r="http://schemas.openxmlformats.org/officeDocument/2006/relationships" xmlns:p="http://schemas.openxmlformats.org/presentationml/2006/main">
-  <p:cSld>
-    <p:spTree>
-      <p:nvGrpSpPr>
-        <p:cNvPr id="1" name=""/>
-        <p:cNvGrpSpPr/>
-        <p:nvPr/>
-      </p:nvGrpSpPr>
-      <p:grpSpPr>
-        <a:xfrm>
-          <a:off x="0" y="0"/>
-          <a:ext cx="0" cy="0"/>
-          <a:chOff x="0" y="0"/>
-          <a:chExt cx="0" cy="0"/>
-        </a:xfrm>
-      </p:grpSpPr>
-      <p:sp>
-        <p:nvSpPr>
-          <p:cNvPr id="2" name="Slide Image Placeholder 1"/>
-          <p:cNvSpPr>
-            <a:spLocks noGrp="1" noRot="1" noChangeAspect="1"/>
-          </p:cNvSpPr>
-          <p:nvPr>
-            <p:ph type="sldImg"/>
-          </p:nvPr>
-        </p:nvSpPr>
-        <p:spPr/>
-      </p:sp>
-      <p:sp>
-        <p:nvSpPr>
-          <p:cNvPr id="3" name="Notes Placeholder 2"/>
-          <p:cNvSpPr>
-            <a:spLocks noGrp="1"/>
-          </p:cNvSpPr>
-          <p:nvPr>
-            <p:ph type="body" idx="1"/>
-          </p:nvPr>
-        </p:nvSpPr>
-        <p:spPr/>
-        <p:txBody>
-          <a:bodyPr/>
-          <a:lstStyle/>
-          <a:p>
-            <a:r>
-              <a:rPr lang="en-US" dirty="0"/>
-              <a:t/>
-            </a:r>
-            <a:endParaRPr lang="en-US" dirty="0"/>
-          </a:p>
-        </p:txBody>
-      </p:sp>
-      <p:sp>
-        <p:nvSpPr>
-          <p:cNvPr id="4" name="Slide Number Placeholder 3"/>
-          <p:cNvSpPr>
-            <a:spLocks noGrp="1"/>
-          </p:cNvSpPr>
-          <p:nvPr>
-            <p:ph type="sldNum" sz="quarter" idx="10"/>
-          </p:nvPr>
-        </p:nvSpPr>
-        <p:spPr/>
-        <p:txBody>
-          <a:bodyPr/>
-          <a:lstStyle/>
-          <a:p>
-            <a:fld id="{F7021451-1387-4CA6-816F-3879F97B5CBC}" type="slidenum">
-              <a:rPr lang="en-US"/>
-              <a:t>20</a:t>
-            </a:fld>
-            <a:endParaRPr lang="en-US"/>
-          </a:p>
-        </p:txBody>
-      </p:sp>
-    </p:spTree>
-    <p:extLst>
-      <p:ext uri="{BB962C8B-B14F-4D97-AF65-F5344CB8AC3E}">
-        <p14:creationId xmlns:p14="http://schemas.microsoft.com/office/powerpoint/2010/main" val="1024086991"/>
-      </p:ext>
-    </p:extLst>
-  </p:cSld>
-  <p:clrMapOvr>
-    <a:masterClrMapping/>
-  </p:clrMapOvr>
-</p:notes>
-</file>
-
-<file path=ppt/notesSlides/notesSlide21.xml><?xml version="1.0" encoding="utf-8"?>
-<p:notes xmlns:a="http://schemas.openxmlformats.org/drawingml/2006/main" xmlns:r="http://schemas.openxmlformats.org/officeDocument/2006/relationships" xmlns:p="http://schemas.openxmlformats.org/presentationml/2006/main">
-  <p:cSld>
-    <p:spTree>
-      <p:nvGrpSpPr>
-        <p:cNvPr id="1" name=""/>
-        <p:cNvGrpSpPr/>
-        <p:nvPr/>
-      </p:nvGrpSpPr>
-      <p:grpSpPr>
-        <a:xfrm>
-          <a:off x="0" y="0"/>
-          <a:ext cx="0" cy="0"/>
-          <a:chOff x="0" y="0"/>
-          <a:chExt cx="0" cy="0"/>
-        </a:xfrm>
-      </p:grpSpPr>
-      <p:sp>
-        <p:nvSpPr>
-          <p:cNvPr id="2" name="Slide Image Placeholder 1"/>
-          <p:cNvSpPr>
-            <a:spLocks noGrp="1" noRot="1" noChangeAspect="1"/>
-          </p:cNvSpPr>
-          <p:nvPr>
-            <p:ph type="sldImg"/>
-          </p:nvPr>
-        </p:nvSpPr>
-        <p:spPr/>
-      </p:sp>
-      <p:sp>
-        <p:nvSpPr>
-          <p:cNvPr id="3" name="Notes Placeholder 2"/>
-          <p:cNvSpPr>
-            <a:spLocks noGrp="1"/>
-          </p:cNvSpPr>
-          <p:nvPr>
-            <p:ph type="body" idx="1"/>
-          </p:nvPr>
-        </p:nvSpPr>
-        <p:spPr/>
-        <p:txBody>
-          <a:bodyPr/>
-          <a:lstStyle/>
-          <a:p>
-            <a:r>
-              <a:rPr lang="en-US" dirty="0"/>
-              <a:t/>
-            </a:r>
-            <a:endParaRPr lang="en-US" dirty="0"/>
-          </a:p>
-        </p:txBody>
-      </p:sp>
-      <p:sp>
-        <p:nvSpPr>
-          <p:cNvPr id="4" name="Slide Number Placeholder 3"/>
-          <p:cNvSpPr>
-            <a:spLocks noGrp="1"/>
-          </p:cNvSpPr>
-          <p:nvPr>
-            <p:ph type="sldNum" sz="quarter" idx="10"/>
-          </p:nvPr>
-        </p:nvSpPr>
-        <p:spPr/>
-        <p:txBody>
-          <a:bodyPr/>
-          <a:lstStyle/>
-          <a:p>
-            <a:fld id="{F7021451-1387-4CA6-816F-3879F97B5CBC}" type="slidenum">
-              <a:rPr lang="en-US"/>
-              <a:t>21</a:t>
-            </a:fld>
-            <a:endParaRPr lang="en-US"/>
-          </a:p>
-        </p:txBody>
-      </p:sp>
-    </p:spTree>
-    <p:extLst>
-      <p:ext uri="{BB962C8B-B14F-4D97-AF65-F5344CB8AC3E}">
-        <p14:creationId xmlns:p14="http://schemas.microsoft.com/office/powerpoint/2010/main" val="1024086991"/>
-      </p:ext>
-    </p:extLst>
-  </p:cSld>
-  <p:clrMapOvr>
-    <a:masterClrMapping/>
-  </p:clrMapOvr>
-</p:notes>
-</file>
-
-<file path=ppt/notesSlides/notesSlide22.xml><?xml version="1.0" encoding="utf-8"?>
-<p:notes xmlns:a="http://schemas.openxmlformats.org/drawingml/2006/main" xmlns:r="http://schemas.openxmlformats.org/officeDocument/2006/relationships" xmlns:p="http://schemas.openxmlformats.org/presentationml/2006/main">
-  <p:cSld>
-    <p:spTree>
-      <p:nvGrpSpPr>
-        <p:cNvPr id="1" name=""/>
-        <p:cNvGrpSpPr/>
-        <p:nvPr/>
-      </p:nvGrpSpPr>
-      <p:grpSpPr>
-        <a:xfrm>
-          <a:off x="0" y="0"/>
-          <a:ext cx="0" cy="0"/>
-          <a:chOff x="0" y="0"/>
-          <a:chExt cx="0" cy="0"/>
-        </a:xfrm>
-      </p:grpSpPr>
-      <p:sp>
-        <p:nvSpPr>
-          <p:cNvPr id="2" name="Slide Image Placeholder 1"/>
-          <p:cNvSpPr>
-            <a:spLocks noGrp="1" noRot="1" noChangeAspect="1"/>
-          </p:cNvSpPr>
-          <p:nvPr>
-            <p:ph type="sldImg"/>
-          </p:nvPr>
-        </p:nvSpPr>
-        <p:spPr/>
-      </p:sp>
-      <p:sp>
-        <p:nvSpPr>
-          <p:cNvPr id="3" name="Notes Placeholder 2"/>
-          <p:cNvSpPr>
-            <a:spLocks noGrp="1"/>
-          </p:cNvSpPr>
-          <p:nvPr>
-            <p:ph type="body" idx="1"/>
-          </p:nvPr>
-        </p:nvSpPr>
-        <p:spPr/>
-        <p:txBody>
-          <a:bodyPr/>
-          <a:lstStyle/>
-          <a:p>
-            <a:r>
-              <a:rPr lang="en-US" dirty="0"/>
-              <a:t/>
-            </a:r>
-            <a:endParaRPr lang="en-US" dirty="0"/>
-          </a:p>
-        </p:txBody>
-      </p:sp>
-      <p:sp>
-        <p:nvSpPr>
-          <p:cNvPr id="4" name="Slide Number Placeholder 3"/>
-          <p:cNvSpPr>
-            <a:spLocks noGrp="1"/>
-          </p:cNvSpPr>
-          <p:nvPr>
-            <p:ph type="sldNum" sz="quarter" idx="10"/>
-          </p:nvPr>
-        </p:nvSpPr>
-        <p:spPr/>
-        <p:txBody>
-          <a:bodyPr/>
-          <a:lstStyle/>
-          <a:p>
-            <a:fld id="{F7021451-1387-4CA6-816F-3879F97B5CBC}" type="slidenum">
-              <a:rPr lang="en-US"/>
-              <a:t>22</a:t>
-            </a:fld>
-            <a:endParaRPr lang="en-US"/>
-          </a:p>
-        </p:txBody>
-      </p:sp>
-    </p:spTree>
-    <p:extLst>
-      <p:ext uri="{BB962C8B-B14F-4D97-AF65-F5344CB8AC3E}">
-        <p14:creationId xmlns:p14="http://schemas.microsoft.com/office/powerpoint/2010/main" val="1024086991"/>
-      </p:ext>
-    </p:extLst>
-  </p:cSld>
-  <p:clrMapOvr>
-    <a:masterClrMapping/>
-  </p:clrMapOvr>
-</p:notes>
-</file>
-
-<file path=ppt/notesSlides/notesSlide23.xml><?xml version="1.0" encoding="utf-8"?>
-<p:notes xmlns:a="http://schemas.openxmlformats.org/drawingml/2006/main" xmlns:r="http://schemas.openxmlformats.org/officeDocument/2006/relationships" xmlns:p="http://schemas.openxmlformats.org/presentationml/2006/main">
-  <p:cSld>
-    <p:spTree>
-      <p:nvGrpSpPr>
-        <p:cNvPr id="1" name=""/>
-        <p:cNvGrpSpPr/>
-        <p:nvPr/>
-      </p:nvGrpSpPr>
-      <p:grpSpPr>
-        <a:xfrm>
-          <a:off x="0" y="0"/>
-          <a:ext cx="0" cy="0"/>
-          <a:chOff x="0" y="0"/>
-          <a:chExt cx="0" cy="0"/>
-        </a:xfrm>
-      </p:grpSpPr>
-      <p:sp>
-        <p:nvSpPr>
-          <p:cNvPr id="2" name="Slide Image Placeholder 1"/>
-          <p:cNvSpPr>
-            <a:spLocks noGrp="1" noRot="1" noChangeAspect="1"/>
-          </p:cNvSpPr>
-          <p:nvPr>
-            <p:ph type="sldImg"/>
-          </p:nvPr>
-        </p:nvSpPr>
-        <p:spPr/>
-      </p:sp>
-      <p:sp>
-        <p:nvSpPr>
-          <p:cNvPr id="3" name="Notes Placeholder 2"/>
-          <p:cNvSpPr>
-            <a:spLocks noGrp="1"/>
-          </p:cNvSpPr>
-          <p:nvPr>
-            <p:ph type="body" idx="1"/>
-          </p:nvPr>
-        </p:nvSpPr>
-        <p:spPr/>
-        <p:txBody>
-          <a:bodyPr/>
-          <a:lstStyle/>
-          <a:p>
-            <a:r>
-              <a:rPr lang="en-US" dirty="0"/>
-              <a:t/>
-            </a:r>
-            <a:endParaRPr lang="en-US" dirty="0"/>
-          </a:p>
-        </p:txBody>
-      </p:sp>
-      <p:sp>
-        <p:nvSpPr>
-          <p:cNvPr id="4" name="Slide Number Placeholder 3"/>
-          <p:cNvSpPr>
-            <a:spLocks noGrp="1"/>
-          </p:cNvSpPr>
-          <p:nvPr>
-            <p:ph type="sldNum" sz="quarter" idx="10"/>
-          </p:nvPr>
-        </p:nvSpPr>
-        <p:spPr/>
-        <p:txBody>
-          <a:bodyPr/>
-          <a:lstStyle/>
-          <a:p>
-            <a:fld id="{F7021451-1387-4CA6-816F-3879F97B5CBC}" type="slidenum">
-              <a:rPr lang="en-US"/>
-              <a:t>23</a:t>
-            </a:fld>
-            <a:endParaRPr lang="en-US"/>
-          </a:p>
-        </p:txBody>
-      </p:sp>
-    </p:spTree>
-    <p:extLst>
-      <p:ext uri="{BB962C8B-B14F-4D97-AF65-F5344CB8AC3E}">
-        <p14:creationId xmlns:p14="http://schemas.microsoft.com/office/powerpoint/2010/main" val="1024086991"/>
-      </p:ext>
-    </p:extLst>
-  </p:cSld>
-  <p:clrMapOvr>
-    <a:masterClrMapping/>
-  </p:clrMapOvr>
-</p:notes>
-</file>
-
-<file path=ppt/notesSlides/notesSlide24.xml><?xml version="1.0" encoding="utf-8"?>
-<p:notes xmlns:a="http://schemas.openxmlformats.org/drawingml/2006/main" xmlns:r="http://schemas.openxmlformats.org/officeDocument/2006/relationships" xmlns:p="http://schemas.openxmlformats.org/presentationml/2006/main">
-  <p:cSld>
-    <p:spTree>
-      <p:nvGrpSpPr>
-        <p:cNvPr id="1" name=""/>
-        <p:cNvGrpSpPr/>
-        <p:nvPr/>
-      </p:nvGrpSpPr>
-      <p:grpSpPr>
-        <a:xfrm>
-          <a:off x="0" y="0"/>
-          <a:ext cx="0" cy="0"/>
-          <a:chOff x="0" y="0"/>
-          <a:chExt cx="0" cy="0"/>
-        </a:xfrm>
-      </p:grpSpPr>
-      <p:sp>
-        <p:nvSpPr>
-          <p:cNvPr id="2" name="Slide Image Placeholder 1"/>
-          <p:cNvSpPr>
-            <a:spLocks noGrp="1" noRot="1" noChangeAspect="1"/>
-          </p:cNvSpPr>
-          <p:nvPr>
-            <p:ph type="sldImg"/>
-          </p:nvPr>
-        </p:nvSpPr>
-        <p:spPr/>
-      </p:sp>
-      <p:sp>
-        <p:nvSpPr>
-          <p:cNvPr id="3" name="Notes Placeholder 2"/>
-          <p:cNvSpPr>
-            <a:spLocks noGrp="1"/>
-          </p:cNvSpPr>
-          <p:nvPr>
-            <p:ph type="body" idx="1"/>
-          </p:nvPr>
-        </p:nvSpPr>
-        <p:spPr/>
-        <p:txBody>
-          <a:bodyPr/>
-          <a:lstStyle/>
-          <a:p>
-            <a:r>
-              <a:rPr lang="en-US" dirty="0"/>
-              <a:t/>
-            </a:r>
-            <a:endParaRPr lang="en-US" dirty="0"/>
-          </a:p>
-        </p:txBody>
-      </p:sp>
-      <p:sp>
-        <p:nvSpPr>
-          <p:cNvPr id="4" name="Slide Number Placeholder 3"/>
-          <p:cNvSpPr>
-            <a:spLocks noGrp="1"/>
-          </p:cNvSpPr>
-          <p:nvPr>
-            <p:ph type="sldNum" sz="quarter" idx="10"/>
-          </p:nvPr>
-        </p:nvSpPr>
-        <p:spPr/>
-        <p:txBody>
-          <a:bodyPr/>
-          <a:lstStyle/>
-          <a:p>
-            <a:fld id="{F7021451-1387-4CA6-816F-3879F97B5CBC}" type="slidenum">
-              <a:rPr lang="en-US"/>
-              <a:t>24</a:t>
-            </a:fld>
-            <a:endParaRPr lang="en-US"/>
-          </a:p>
-        </p:txBody>
-      </p:sp>
-    </p:spTree>
-    <p:extLst>
-      <p:ext uri="{BB962C8B-B14F-4D97-AF65-F5344CB8AC3E}">
-        <p14:creationId xmlns:p14="http://schemas.microsoft.com/office/powerpoint/2010/main" val="1024086991"/>
-      </p:ext>
-    </p:extLst>
-  </p:cSld>
-  <p:clrMapOvr>
-    <a:masterClrMapping/>
-  </p:clrMapOvr>
-</p:notes>
-</file>
-
-<file path=ppt/notesSlides/notesSlide25.xml><?xml version="1.0" encoding="utf-8"?>
-<p:notes xmlns:a="http://schemas.openxmlformats.org/drawingml/2006/main" xmlns:r="http://schemas.openxmlformats.org/officeDocument/2006/relationships" xmlns:p="http://schemas.openxmlformats.org/presentationml/2006/main">
-  <p:cSld>
-    <p:spTree>
-      <p:nvGrpSpPr>
-        <p:cNvPr id="1" name=""/>
-        <p:cNvGrpSpPr/>
-        <p:nvPr/>
-      </p:nvGrpSpPr>
-      <p:grpSpPr>
-        <a:xfrm>
-          <a:off x="0" y="0"/>
-          <a:ext cx="0" cy="0"/>
-          <a:chOff x="0" y="0"/>
-          <a:chExt cx="0" cy="0"/>
-        </a:xfrm>
-      </p:grpSpPr>
-      <p:sp>
-        <p:nvSpPr>
-          <p:cNvPr id="2" name="Slide Image Placeholder 1"/>
-          <p:cNvSpPr>
-            <a:spLocks noGrp="1" noRot="1" noChangeAspect="1"/>
-          </p:cNvSpPr>
-          <p:nvPr>
-            <p:ph type="sldImg"/>
-          </p:nvPr>
-        </p:nvSpPr>
-        <p:spPr/>
-      </p:sp>
-      <p:sp>
-        <p:nvSpPr>
-          <p:cNvPr id="3" name="Notes Placeholder 2"/>
-          <p:cNvSpPr>
-            <a:spLocks noGrp="1"/>
-          </p:cNvSpPr>
-          <p:nvPr>
-            <p:ph type="body" idx="1"/>
-          </p:nvPr>
-        </p:nvSpPr>
-        <p:spPr/>
-        <p:txBody>
-          <a:bodyPr/>
-          <a:lstStyle/>
-          <a:p>
-            <a:r>
-              <a:rPr lang="en-US" dirty="0"/>
-              <a:t/>
-            </a:r>
-            <a:endParaRPr lang="en-US" dirty="0"/>
-          </a:p>
-        </p:txBody>
-      </p:sp>
-      <p:sp>
-        <p:nvSpPr>
-          <p:cNvPr id="4" name="Slide Number Placeholder 3"/>
-          <p:cNvSpPr>
-            <a:spLocks noGrp="1"/>
-          </p:cNvSpPr>
-          <p:nvPr>
-            <p:ph type="sldNum" sz="quarter" idx="10"/>
-          </p:nvPr>
-        </p:nvSpPr>
-        <p:spPr/>
-        <p:txBody>
-          <a:bodyPr/>
-          <a:lstStyle/>
-          <a:p>
-            <a:fld id="{F7021451-1387-4CA6-816F-3879F97B5CBC}" type="slidenum">
-              <a:rPr lang="en-US"/>
-              <a:t>25</a:t>
             </a:fld>
             <a:endParaRPr lang="en-US"/>
           </a:p>
@@ -3153,7 +2530,7 @@
                 <a:ea typeface="Aptos" pitchFamily="34" charset="-122"/>
                 <a:cs typeface="Aptos" pitchFamily="34" charset="-120"/>
               </a:rPr>
-              <a:t>Od náhodného skúšania k reprodukovateľnému overovaniu</a:t>
+              <a:t>Od bug reportu k opakovateľnému vývojovému workflow</a:t>
             </a:r>
             <a:endParaRPr lang="en-US" sz="2000" dirty="0"/>
           </a:p>
@@ -3500,8 +2877,8 @@
         </p:nvSpPr>
         <p:spPr>
           <a:xfrm>
-            <a:off x="658368" y="932688"/>
-            <a:ext cx="10789920" cy="713232"/>
+            <a:off x="749808" y="1554480"/>
+            <a:ext cx="10424160" cy="1508760"/>
           </a:xfrm>
           <a:prstGeom prst="rect">
             <a:avLst/>
@@ -3519,7 +2896,7 @@
               <a:buNone/>
             </a:pPr>
             <a:r>
-              <a:rPr lang="en-US" sz="2900" b="1" dirty="0">
+              <a:rPr lang="en-US" sz="3400" b="1" dirty="0">
                 <a:solidFill>
                   <a:srgbClr val="16324F"/>
                 </a:solidFill>
@@ -3527,9 +2904,9 @@
                 <a:ea typeface="Aptos" pitchFamily="34" charset="-122"/>
                 <a:cs typeface="Aptos" pitchFamily="34" charset="-120"/>
               </a:rPr>
-              <a:t>Testovanie výnimky</a:t>
-            </a:r>
-            <a:endParaRPr lang="en-US" sz="2900" dirty="0"/>
+              <a:t>Regression test zostáva po oprave v projekte.</a:t>
+            </a:r>
+            <a:endParaRPr lang="en-US" sz="3400" dirty="0"/>
           </a:p>
         </p:txBody>
       </p:sp>
@@ -3541,20 +2918,18 @@
         </p:nvSpPr>
         <p:spPr>
           <a:xfrm>
-            <a:off x="658368" y="1828800"/>
-            <a:ext cx="6812280" cy="4069080"/>
-          </a:xfrm>
-          <a:prstGeom prst="roundRect">
-            <a:avLst>
-              <a:gd name="adj" fmla="val 1348"/>
-            </a:avLst>
+            <a:off x="768096" y="3456432"/>
+            <a:ext cx="1417320" cy="109728"/>
+          </a:xfrm>
+          <a:prstGeom prst="rect">
+            <a:avLst/>
           </a:prstGeom>
           <a:solidFill>
-            <a:srgbClr val="17212B"/>
+            <a:srgbClr val="E0A03A"/>
           </a:solidFill>
           <a:ln w="12700">
             <a:solidFill>
-              <a:srgbClr val="17212B"/>
+              <a:srgbClr val="E0A03A"/>
             </a:solidFill>
             <a:prstDash val="solid"/>
           </a:ln>
@@ -3568,49 +2943,8 @@
         </p:nvSpPr>
         <p:spPr>
           <a:xfrm>
-            <a:off x="868680" y="2029968"/>
-            <a:ext cx="6309360" cy="182880"/>
-          </a:xfrm>
-          <a:prstGeom prst="rect">
-            <a:avLst/>
-          </a:prstGeom>
-          <a:noFill/>
-          <a:ln/>
-        </p:spPr>
-        <p:txBody>
-          <a:bodyPr wrap="square" lIns="0" tIns="0" rIns="0" bIns="0" rtlCol="0" anchor="ctr">
-            <a:normAutofit/>
-          </a:bodyPr>
-          <a:lstStyle/>
-          <a:p>
-            <a:pPr algn="l" indent="0" marL="0">
-              <a:buNone/>
-            </a:pPr>
-            <a:r>
-              <a:rPr lang="en-US" sz="850" b="1" spc="70" kern="0" dirty="0">
-                <a:solidFill>
-                  <a:srgbClr val="8FD3FF"/>
-                </a:solidFill>
-                <a:latin typeface="Consolas" pitchFamily="34" charset="0"/>
-                <a:ea typeface="Consolas" pitchFamily="34" charset="-122"/>
-                <a:cs typeface="Consolas" pitchFamily="34" charset="-120"/>
-              </a:rPr>
-              <a:t>python</a:t>
-            </a:r>
-            <a:endParaRPr lang="en-US" sz="850" dirty="0"/>
-          </a:p>
-        </p:txBody>
-      </p:sp>
-      <p:sp>
-        <p:nvSpPr>
-          <p:cNvPr id="11" name="Text 9"/>
-          <p:cNvSpPr/>
-          <p:nvPr/>
-        </p:nvSpPr>
-        <p:spPr>
-          <a:xfrm>
-            <a:off x="877824" y="2395728"/>
-            <a:ext cx="6327648" cy="3246120"/>
+            <a:off x="768096" y="3913632"/>
+            <a:ext cx="8869680" cy="731520"/>
           </a:xfrm>
           <a:prstGeom prst="rect">
             <a:avLst/>
@@ -3628,128 +2962,7 @@
               <a:buNone/>
             </a:pPr>
             <a:r>
-              <a:rPr lang="en-US" sz="1650" dirty="0">
-                <a:solidFill>
-                  <a:srgbClr val="F4F7FA"/>
-                </a:solidFill>
-                <a:latin typeface="Consolas" pitchFamily="34" charset="0"/>
-                <a:ea typeface="Consolas" pitchFamily="34" charset="-122"/>
-                <a:cs typeface="Consolas" pitchFamily="34" charset="-120"/>
-              </a:rPr>
-              <a:t>import pytest</a:t>
-            </a:r>
-            <a:endParaRPr lang="en-US" sz="1650" dirty="0"/>
-          </a:p>
-          <a:p>
-            <a:pPr algn="l" indent="0" marL="0">
-              <a:buNone/>
-            </a:pPr>
-            <a:endParaRPr lang="en-US" sz="1650" dirty="0"/>
-          </a:p>
-          <a:p>
-            <a:pPr algn="l" indent="0" marL="0">
-              <a:buNone/>
-            </a:pPr>
-            <a:r>
-              <a:rPr lang="en-US" sz="1650" dirty="0">
-                <a:solidFill>
-                  <a:srgbClr val="F4F7FA"/>
-                </a:solidFill>
-                <a:latin typeface="Consolas" pitchFamily="34" charset="0"/>
-                <a:ea typeface="Consolas" pitchFamily="34" charset="-122"/>
-                <a:cs typeface="Consolas" pitchFamily="34" charset="-120"/>
-              </a:rPr>
-              <a:t>def test_average_rejects_empty_values() -&gt; None:</a:t>
-            </a:r>
-            <a:endParaRPr lang="en-US" sz="1650" dirty="0"/>
-          </a:p>
-          <a:p>
-            <a:pPr algn="l" indent="0" marL="0">
-              <a:buNone/>
-            </a:pPr>
-            <a:r>
-              <a:rPr lang="en-US" sz="1650" dirty="0">
-                <a:solidFill>
-                  <a:srgbClr val="F4F7FA"/>
-                </a:solidFill>
-                <a:latin typeface="Consolas" pitchFamily="34" charset="0"/>
-                <a:ea typeface="Consolas" pitchFamily="34" charset="-122"/>
-                <a:cs typeface="Consolas" pitchFamily="34" charset="-120"/>
-              </a:rPr>
-              <a:t>    with pytest.raises(ValueError):</a:t>
-            </a:r>
-            <a:endParaRPr lang="en-US" sz="1650" dirty="0"/>
-          </a:p>
-          <a:p>
-            <a:pPr algn="l" indent="0" marL="0">
-              <a:buNone/>
-            </a:pPr>
-            <a:r>
-              <a:rPr lang="en-US" sz="1650" dirty="0">
-                <a:solidFill>
-                  <a:srgbClr val="F4F7FA"/>
-                </a:solidFill>
-                <a:latin typeface="Consolas" pitchFamily="34" charset="0"/>
-                <a:ea typeface="Consolas" pitchFamily="34" charset="-122"/>
-                <a:cs typeface="Consolas" pitchFamily="34" charset="-120"/>
-              </a:rPr>
-              <a:t>        average([])</a:t>
-            </a:r>
-            <a:endParaRPr lang="en-US" sz="1650" dirty="0"/>
-          </a:p>
-        </p:txBody>
-      </p:sp>
-      <p:sp>
-        <p:nvSpPr>
-          <p:cNvPr id="12" name="Shape 10"/>
-          <p:cNvSpPr/>
-          <p:nvPr/>
-        </p:nvSpPr>
-        <p:spPr>
-          <a:xfrm>
-            <a:off x="7909560" y="1901952"/>
-            <a:ext cx="0" cy="3566160"/>
-          </a:xfrm>
-          <a:prstGeom prst="line">
-            <a:avLst/>
-          </a:prstGeom>
-          <a:noFill/>
-          <a:ln w="12700">
-            <a:solidFill>
-              <a:srgbClr val="1877B9"/>
-            </a:solidFill>
-            <a:prstDash val="solid"/>
-          </a:ln>
-        </p:spPr>
-      </p:sp>
-      <p:sp>
-        <p:nvSpPr>
-          <p:cNvPr id="13" name="Text 11"/>
-          <p:cNvSpPr/>
-          <p:nvPr/>
-        </p:nvSpPr>
-        <p:spPr>
-          <a:xfrm>
-            <a:off x="8229600" y="2130552"/>
-            <a:ext cx="2743200" cy="2468880"/>
-          </a:xfrm>
-          <a:prstGeom prst="rect">
-            <a:avLst/>
-          </a:prstGeom>
-          <a:noFill/>
-          <a:ln/>
-        </p:spPr>
-        <p:txBody>
-          <a:bodyPr wrap="square" lIns="0" tIns="0" rIns="0" bIns="0" rtlCol="0" anchor="t">
-            <a:normAutofit/>
-          </a:bodyPr>
-          <a:lstStyle/>
-          <a:p>
-            <a:pPr algn="l" indent="0" marL="0">
-              <a:buNone/>
-            </a:pPr>
-            <a:r>
-              <a:rPr lang="en-US" sz="1800" dirty="0">
+              <a:rPr lang="en-US" sz="2200" dirty="0">
                 <a:solidFill>
                   <a:srgbClr val="5E6B78"/>
                 </a:solidFill>
@@ -3757,9 +2970,9 @@
                 <a:ea typeface="Aptos" pitchFamily="34" charset="-122"/>
                 <a:cs typeface="Aptos" pitchFamily="34" charset="-120"/>
               </a:rPr>
-              <a:t>Výnimka je súčasťou kontraktu funkcie, ak je neplatný vstup očakávaný.</a:t>
-            </a:r>
-            <a:endParaRPr lang="en-US" sz="1800" dirty="0"/>
+              <a:t>Chráni presne ten prípad, ktorý už raz zlyhal, pred návratom pri ďalšej zmene.</a:t>
+            </a:r>
+            <a:endParaRPr lang="en-US" sz="2200" dirty="0"/>
           </a:p>
         </p:txBody>
       </p:sp>
@@ -3997,8 +3210,152 @@
         </p:nvSpPr>
         <p:spPr>
           <a:xfrm>
-            <a:off x="713232" y="1353312"/>
-            <a:ext cx="1280160" cy="548640"/>
+            <a:off x="658368" y="932688"/>
+            <a:ext cx="10789920" cy="713232"/>
+          </a:xfrm>
+          <a:prstGeom prst="rect">
+            <a:avLst/>
+          </a:prstGeom>
+          <a:noFill/>
+          <a:ln/>
+        </p:spPr>
+        <p:txBody>
+          <a:bodyPr wrap="square" lIns="0" tIns="0" rIns="0" bIns="0" rtlCol="0" anchor="t">
+            <a:normAutofit/>
+          </a:bodyPr>
+          <a:lstStyle/>
+          <a:p>
+            <a:pPr algn="l" indent="0" marL="0">
+              <a:buNone/>
+            </a:pPr>
+            <a:r>
+              <a:rPr lang="en-US" sz="2900" b="1" dirty="0">
+                <a:solidFill>
+                  <a:srgbClr val="16324F"/>
+                </a:solidFill>
+                <a:latin typeface="Aptos" pitchFamily="34" charset="0"/>
+                <a:ea typeface="Aptos" pitchFamily="34" charset="-122"/>
+                <a:cs typeface="Aptos" pitchFamily="34" charset="-120"/>
+              </a:rPr>
+              <a:t>Fixture pripraví opakovaný kontext</a:t>
+            </a:r>
+            <a:endParaRPr lang="en-US" sz="2900" dirty="0"/>
+          </a:p>
+        </p:txBody>
+      </p:sp>
+      <p:sp>
+        <p:nvSpPr>
+          <p:cNvPr id="9" name="Text 7"/>
+          <p:cNvSpPr/>
+          <p:nvPr/>
+        </p:nvSpPr>
+        <p:spPr>
+          <a:xfrm>
+            <a:off x="749808" y="1920240"/>
+            <a:ext cx="4160520" cy="3886200"/>
+          </a:xfrm>
+          <a:prstGeom prst="rect">
+            <a:avLst/>
+          </a:prstGeom>
+          <a:noFill/>
+          <a:ln/>
+        </p:spPr>
+        <p:txBody>
+          <a:bodyPr wrap="square" lIns="508" tIns="508" rIns="508" bIns="508" rtlCol="0" anchor="t">
+            <a:normAutofit/>
+          </a:bodyPr>
+          <a:lstStyle/>
+          <a:p>
+            <a:pPr marL="228600" indent="-228600">
+              <a:buSzPct val="100000"/>
+              <a:buChar char="•"/>
+            </a:pPr>
+            <a:r>
+              <a:rPr lang="en-US" sz="1700" dirty="0">
+                <a:solidFill>
+                  <a:srgbClr val="18212B"/>
+                </a:solidFill>
+                <a:latin typeface="Aptos" pitchFamily="34" charset="0"/>
+                <a:ea typeface="Aptos" pitchFamily="34" charset="-122"/>
+                <a:cs typeface="Aptos" pitchFamily="34" charset="-120"/>
+              </a:rPr>
+              <a:t>setup sa neopakuje v každom teste</a:t>
+            </a:r>
+            <a:endParaRPr lang="en-US" sz="1700" dirty="0"/>
+          </a:p>
+          <a:p>
+            <a:pPr marL="228600" indent="-228600">
+              <a:buSzPct val="100000"/>
+              <a:buChar char="•"/>
+            </a:pPr>
+            <a:r>
+              <a:rPr lang="en-US" sz="1700" dirty="0">
+                <a:solidFill>
+                  <a:srgbClr val="18212B"/>
+                </a:solidFill>
+                <a:latin typeface="Aptos" pitchFamily="34" charset="0"/>
+                <a:ea typeface="Aptos" pitchFamily="34" charset="-122"/>
+                <a:cs typeface="Aptos" pitchFamily="34" charset="-120"/>
+              </a:rPr>
+              <a:t>fixture má opisovať dáta, nie testovací framework</a:t>
+            </a:r>
+            <a:endParaRPr lang="en-US" sz="1700" dirty="0"/>
+          </a:p>
+          <a:p>
+            <a:pPr marL="228600" indent="-228600">
+              <a:buSzPct val="100000"/>
+              <a:buChar char="•"/>
+            </a:pPr>
+            <a:r>
+              <a:rPr lang="en-US" sz="1700" dirty="0">
+                <a:solidFill>
+                  <a:srgbClr val="18212B"/>
+                </a:solidFill>
+                <a:latin typeface="Aptos" pitchFamily="34" charset="0"/>
+                <a:ea typeface="Aptos" pitchFamily="34" charset="-122"/>
+                <a:cs typeface="Aptos" pitchFamily="34" charset="-120"/>
+              </a:rPr>
+              <a:t>malé testy ostávajú samostatné</a:t>
+            </a:r>
+            <a:endParaRPr lang="en-US" sz="1700" dirty="0"/>
+          </a:p>
+        </p:txBody>
+      </p:sp>
+      <p:sp>
+        <p:nvSpPr>
+          <p:cNvPr id="10" name="Shape 8"/>
+          <p:cNvSpPr/>
+          <p:nvPr/>
+        </p:nvSpPr>
+        <p:spPr>
+          <a:xfrm>
+            <a:off x="5394960" y="1792224"/>
+            <a:ext cx="5943600" cy="4160520"/>
+          </a:xfrm>
+          <a:prstGeom prst="rect">
+            <a:avLst/>
+          </a:prstGeom>
+          <a:solidFill>
+            <a:srgbClr val="17212B"/>
+          </a:solidFill>
+          <a:ln w="12700">
+            <a:solidFill>
+              <a:srgbClr val="17212B"/>
+            </a:solidFill>
+            <a:prstDash val="solid"/>
+          </a:ln>
+        </p:spPr>
+      </p:sp>
+      <p:sp>
+        <p:nvSpPr>
+          <p:cNvPr id="11" name="Text 9"/>
+          <p:cNvSpPr/>
+          <p:nvPr/>
+        </p:nvSpPr>
+        <p:spPr>
+          <a:xfrm>
+            <a:off x="5641848" y="1993392"/>
+            <a:ext cx="5394960" cy="182880"/>
           </a:xfrm>
           <a:prstGeom prst="rect">
             <a:avLst/>
@@ -4016,30 +3373,30 @@
               <a:buNone/>
             </a:pPr>
             <a:r>
-              <a:rPr lang="en-US" sz="1800" b="1" dirty="0">
-                <a:solidFill>
-                  <a:srgbClr val="1877B9"/>
+              <a:rPr lang="en-US" sz="850" b="1" spc="70" kern="0" dirty="0">
+                <a:solidFill>
+                  <a:srgbClr val="8FD3FF"/>
                 </a:solidFill>
                 <a:latin typeface="Consolas" pitchFamily="34" charset="0"/>
                 <a:ea typeface="Consolas" pitchFamily="34" charset="-122"/>
                 <a:cs typeface="Consolas" pitchFamily="34" charset="-120"/>
               </a:rPr>
-              <a:t>02</a:t>
-            </a:r>
-            <a:endParaRPr lang="en-US" sz="1800" dirty="0"/>
-          </a:p>
-        </p:txBody>
-      </p:sp>
-      <p:sp>
-        <p:nvSpPr>
-          <p:cNvPr id="9" name="Text 7"/>
-          <p:cNvSpPr/>
-          <p:nvPr/>
-        </p:nvSpPr>
-        <p:spPr>
-          <a:xfrm>
-            <a:off x="713232" y="2011680"/>
-            <a:ext cx="9875520" cy="822960"/>
+              <a:t>python</a:t>
+            </a:r>
+            <a:endParaRPr lang="en-US" sz="850" dirty="0"/>
+          </a:p>
+        </p:txBody>
+      </p:sp>
+      <p:sp>
+        <p:nvSpPr>
+          <p:cNvPr id="12" name="Text 10"/>
+          <p:cNvSpPr/>
+          <p:nvPr/>
+        </p:nvSpPr>
+        <p:spPr>
+          <a:xfrm>
+            <a:off x="5641848" y="2395728"/>
+            <a:ext cx="5330952" cy="3127248"/>
           </a:xfrm>
           <a:prstGeom prst="rect">
             <a:avLst/>
@@ -4057,85 +3414,144 @@
               <a:buNone/>
             </a:pPr>
             <a:r>
-              <a:rPr lang="en-US" sz="3700" b="1" dirty="0">
-                <a:solidFill>
-                  <a:srgbClr val="16324F"/>
-                </a:solidFill>
-                <a:latin typeface="Aptos" pitchFamily="34" charset="0"/>
-                <a:ea typeface="Aptos" pitchFamily="34" charset="-122"/>
-                <a:cs typeface="Aptos" pitchFamily="34" charset="-120"/>
-              </a:rPr>
-              <a:t>Testovateľný návrh</a:t>
-            </a:r>
-            <a:endParaRPr lang="en-US" sz="3700" dirty="0"/>
-          </a:p>
-        </p:txBody>
-      </p:sp>
-      <p:sp>
-        <p:nvSpPr>
-          <p:cNvPr id="10" name="Text 8"/>
-          <p:cNvSpPr/>
-          <p:nvPr/>
-        </p:nvSpPr>
-        <p:spPr>
-          <a:xfrm>
-            <a:off x="749808" y="3063240"/>
-            <a:ext cx="7863840" cy="411480"/>
-          </a:xfrm>
-          <a:prstGeom prst="rect">
-            <a:avLst/>
-          </a:prstGeom>
-          <a:noFill/>
-          <a:ln/>
-        </p:spPr>
-        <p:txBody>
-          <a:bodyPr wrap="square" lIns="0" tIns="0" rIns="0" bIns="0" rtlCol="0" anchor="t">
-            <a:normAutofit/>
-          </a:bodyPr>
-          <a:lstStyle/>
+              <a:rPr lang="en-US" sz="1560" dirty="0">
+                <a:solidFill>
+                  <a:srgbClr val="F4F7FA"/>
+                </a:solidFill>
+                <a:latin typeface="Consolas" pitchFamily="34" charset="0"/>
+                <a:ea typeface="Consolas" pitchFamily="34" charset="-122"/>
+                <a:cs typeface="Consolas" pitchFamily="34" charset="-120"/>
+              </a:rPr>
+              <a:t>@pytest.fixture</a:t>
+            </a:r>
+            <a:endParaRPr lang="en-US" sz="1560" dirty="0"/>
+          </a:p>
           <a:p>
             <a:pPr algn="l" indent="0" marL="0">
               <a:buNone/>
             </a:pPr>
             <a:r>
-              <a:rPr lang="en-US" sz="2000" dirty="0">
-                <a:solidFill>
-                  <a:srgbClr val="5E6B78"/>
-                </a:solidFill>
-                <a:latin typeface="Aptos" pitchFamily="34" charset="0"/>
-                <a:ea typeface="Aptos" pitchFamily="34" charset="-122"/>
-                <a:cs typeface="Aptos" pitchFamily="34" charset="-120"/>
-              </a:rPr>
-              <a:t>Oddelenie logiky z Prednášky 03 má konkrétny dôvod.</a:t>
-            </a:r>
-            <a:endParaRPr lang="en-US" sz="2000" dirty="0"/>
-          </a:p>
-        </p:txBody>
-      </p:sp>
-      <p:sp>
-        <p:nvSpPr>
-          <p:cNvPr id="11" name="Shape 9"/>
-          <p:cNvSpPr/>
-          <p:nvPr/>
-        </p:nvSpPr>
-        <p:spPr>
-          <a:xfrm>
-            <a:off x="731520" y="3977640"/>
-            <a:ext cx="2834640" cy="128016"/>
-          </a:xfrm>
-          <a:prstGeom prst="rect">
-            <a:avLst/>
-          </a:prstGeom>
-          <a:solidFill>
-            <a:srgbClr val="1877B9"/>
-          </a:solidFill>
-          <a:ln w="12700">
-            <a:solidFill>
-              <a:srgbClr val="1877B9"/>
-            </a:solidFill>
-            <a:prstDash val="solid"/>
-          </a:ln>
-        </p:spPr>
+              <a:rPr lang="en-US" sz="1560" dirty="0">
+                <a:solidFill>
+                  <a:srgbClr val="F4F7FA"/>
+                </a:solidFill>
+                <a:latin typeface="Consolas" pitchFamily="34" charset="0"/>
+                <a:ea typeface="Consolas" pitchFamily="34" charset="-122"/>
+                <a:cs typeface="Consolas" pitchFamily="34" charset="-120"/>
+              </a:rPr>
+              <a:t>def sample_results() -&gt; list[Result]:</a:t>
+            </a:r>
+            <a:endParaRPr lang="en-US" sz="1560" dirty="0"/>
+          </a:p>
+          <a:p>
+            <a:pPr algn="l" indent="0" marL="0">
+              <a:buNone/>
+            </a:pPr>
+            <a:r>
+              <a:rPr lang="en-US" sz="1560" dirty="0">
+                <a:solidFill>
+                  <a:srgbClr val="F4F7FA"/>
+                </a:solidFill>
+                <a:latin typeface="Consolas" pitchFamily="34" charset="0"/>
+                <a:ea typeface="Consolas" pitchFamily="34" charset="-122"/>
+                <a:cs typeface="Consolas" pitchFamily="34" charset="-120"/>
+              </a:rPr>
+              <a:t>    return [</a:t>
+            </a:r>
+            <a:endParaRPr lang="en-US" sz="1560" dirty="0"/>
+          </a:p>
+          <a:p>
+            <a:pPr algn="l" indent="0" marL="0">
+              <a:buNone/>
+            </a:pPr>
+            <a:r>
+              <a:rPr lang="en-US" sz="1560" dirty="0">
+                <a:solidFill>
+                  <a:srgbClr val="F4F7FA"/>
+                </a:solidFill>
+                <a:latin typeface="Consolas" pitchFamily="34" charset="0"/>
+                <a:ea typeface="Consolas" pitchFamily="34" charset="-122"/>
+                <a:cs typeface="Consolas" pitchFamily="34" charset="-120"/>
+              </a:rPr>
+              <a:t>        Result("Anna", "Python", 92),</a:t>
+            </a:r>
+            <a:endParaRPr lang="en-US" sz="1560" dirty="0"/>
+          </a:p>
+          <a:p>
+            <a:pPr algn="l" indent="0" marL="0">
+              <a:buNone/>
+            </a:pPr>
+            <a:r>
+              <a:rPr lang="en-US" sz="1560" dirty="0">
+                <a:solidFill>
+                  <a:srgbClr val="F4F7FA"/>
+                </a:solidFill>
+                <a:latin typeface="Consolas" pitchFamily="34" charset="0"/>
+                <a:ea typeface="Consolas" pitchFamily="34" charset="-122"/>
+                <a:cs typeface="Consolas" pitchFamily="34" charset="-120"/>
+              </a:rPr>
+              <a:t>        Result("Peter", "Python", 67),</a:t>
+            </a:r>
+            <a:endParaRPr lang="en-US" sz="1560" dirty="0"/>
+          </a:p>
+          <a:p>
+            <a:pPr algn="l" indent="0" marL="0">
+              <a:buNone/>
+            </a:pPr>
+            <a:r>
+              <a:rPr lang="en-US" sz="1560" dirty="0">
+                <a:solidFill>
+                  <a:srgbClr val="F4F7FA"/>
+                </a:solidFill>
+                <a:latin typeface="Consolas" pitchFamily="34" charset="0"/>
+                <a:ea typeface="Consolas" pitchFamily="34" charset="-122"/>
+                <a:cs typeface="Consolas" pitchFamily="34" charset="-120"/>
+              </a:rPr>
+              <a:t>    ]</a:t>
+            </a:r>
+            <a:endParaRPr lang="en-US" sz="1560" dirty="0"/>
+          </a:p>
+          <a:p>
+            <a:pPr algn="l" indent="0" marL="0">
+              <a:buNone/>
+            </a:pPr>
+            <a:endParaRPr lang="en-US" sz="1560" dirty="0"/>
+          </a:p>
+          <a:p>
+            <a:pPr algn="l" indent="0" marL="0">
+              <a:buNone/>
+            </a:pPr>
+            <a:r>
+              <a:rPr lang="en-US" sz="1560" dirty="0">
+                <a:solidFill>
+                  <a:srgbClr val="F4F7FA"/>
+                </a:solidFill>
+                <a:latin typeface="Consolas" pitchFamily="34" charset="0"/>
+                <a:ea typeface="Consolas" pitchFamily="34" charset="-122"/>
+                <a:cs typeface="Consolas" pitchFamily="34" charset="-120"/>
+              </a:rPr>
+              <a:t>def test_average(sample_results):</a:t>
+            </a:r>
+            <a:endParaRPr lang="en-US" sz="1560" dirty="0"/>
+          </a:p>
+          <a:p>
+            <a:pPr algn="l" indent="0" marL="0">
+              <a:buNone/>
+            </a:pPr>
+            <a:r>
+              <a:rPr lang="en-US" sz="1560" dirty="0">
+                <a:solidFill>
+                  <a:srgbClr val="F4F7FA"/>
+                </a:solidFill>
+                <a:latin typeface="Consolas" pitchFamily="34" charset="0"/>
+                <a:ea typeface="Consolas" pitchFamily="34" charset="-122"/>
+                <a:cs typeface="Consolas" pitchFamily="34" charset="-120"/>
+              </a:rPr>
+              <a:t>    assert average(sample_results) == 79.5</a:t>
+            </a:r>
+            <a:endParaRPr lang="en-US" sz="1560" dirty="0"/>
+          </a:p>
+        </p:txBody>
       </p:sp>
     </p:spTree>
   </p:cSld>
@@ -4398,7 +3814,7 @@
                 <a:ea typeface="Aptos" pitchFamily="34" charset="-122"/>
                 <a:cs typeface="Aptos" pitchFamily="34" charset="-120"/>
               </a:rPr>
-              <a:t>Čo sa testuje ľahšie?</a:t>
+              <a:t>tmp_path izoluje prácu so súborom</a:t>
             </a:r>
             <a:endParaRPr lang="en-US" sz="2900" dirty="0"/>
           </a:p>
@@ -4412,18 +3828,20 @@
         </p:nvSpPr>
         <p:spPr>
           <a:xfrm>
-            <a:off x="713232" y="1874520"/>
-            <a:ext cx="5010912" cy="109728"/>
-          </a:xfrm>
-          <a:prstGeom prst="rect">
-            <a:avLst/>
+            <a:off x="658368" y="1828800"/>
+            <a:ext cx="6812280" cy="4069080"/>
+          </a:xfrm>
+          <a:prstGeom prst="roundRect">
+            <a:avLst>
+              <a:gd name="adj" fmla="val 1348"/>
+            </a:avLst>
           </a:prstGeom>
           <a:solidFill>
-            <a:srgbClr val="167C80"/>
+            <a:srgbClr val="17212B"/>
           </a:solidFill>
           <a:ln w="12700">
             <a:solidFill>
-              <a:srgbClr val="167C80"/>
+              <a:srgbClr val="17212B"/>
             </a:solidFill>
             <a:prstDash val="solid"/>
           </a:ln>
@@ -4437,8 +3855,8 @@
         </p:nvSpPr>
         <p:spPr>
           <a:xfrm>
-            <a:off x="713232" y="2212848"/>
-            <a:ext cx="5010912" cy="365760"/>
+            <a:off x="868680" y="2029968"/>
+            <a:ext cx="6309360" cy="182880"/>
           </a:xfrm>
           <a:prstGeom prst="rect">
             <a:avLst/>
@@ -4456,239 +3874,179 @@
               <a:buNone/>
             </a:pPr>
             <a:r>
-              <a:rPr lang="en-US" sz="2000" b="1" dirty="0">
-                <a:solidFill>
-                  <a:srgbClr val="16324F"/>
+              <a:rPr lang="en-US" sz="850" b="1" spc="70" kern="0" dirty="0">
+                <a:solidFill>
+                  <a:srgbClr val="8FD3FF"/>
+                </a:solidFill>
+                <a:latin typeface="Consolas" pitchFamily="34" charset="0"/>
+                <a:ea typeface="Consolas" pitchFamily="34" charset="-122"/>
+                <a:cs typeface="Consolas" pitchFamily="34" charset="-120"/>
+              </a:rPr>
+              <a:t>python</a:t>
+            </a:r>
+            <a:endParaRPr lang="en-US" sz="850" dirty="0"/>
+          </a:p>
+        </p:txBody>
+      </p:sp>
+      <p:sp>
+        <p:nvSpPr>
+          <p:cNvPr id="11" name="Text 9"/>
+          <p:cNvSpPr/>
+          <p:nvPr/>
+        </p:nvSpPr>
+        <p:spPr>
+          <a:xfrm>
+            <a:off x="877824" y="2395728"/>
+            <a:ext cx="6327648" cy="3246120"/>
+          </a:xfrm>
+          <a:prstGeom prst="rect">
+            <a:avLst/>
+          </a:prstGeom>
+          <a:noFill/>
+          <a:ln/>
+        </p:spPr>
+        <p:txBody>
+          <a:bodyPr wrap="square" lIns="0" tIns="0" rIns="0" bIns="0" rtlCol="0" anchor="t">
+            <a:normAutofit/>
+          </a:bodyPr>
+          <a:lstStyle/>
+          <a:p>
+            <a:pPr algn="l" indent="0" marL="0">
+              <a:buNone/>
+            </a:pPr>
+            <a:r>
+              <a:rPr lang="en-US" sz="1650" dirty="0">
+                <a:solidFill>
+                  <a:srgbClr val="F4F7FA"/>
+                </a:solidFill>
+                <a:latin typeface="Consolas" pitchFamily="34" charset="0"/>
+                <a:ea typeface="Consolas" pitchFamily="34" charset="-122"/>
+                <a:cs typeface="Consolas" pitchFamily="34" charset="-120"/>
+              </a:rPr>
+              <a:t>def test_save_report(tmp_path) -&gt; None:</a:t>
+            </a:r>
+            <a:endParaRPr lang="en-US" sz="1650" dirty="0"/>
+          </a:p>
+          <a:p>
+            <a:pPr algn="l" indent="0" marL="0">
+              <a:buNone/>
+            </a:pPr>
+            <a:r>
+              <a:rPr lang="en-US" sz="1650" dirty="0">
+                <a:solidFill>
+                  <a:srgbClr val="F4F7FA"/>
+                </a:solidFill>
+                <a:latin typeface="Consolas" pitchFamily="34" charset="0"/>
+                <a:ea typeface="Consolas" pitchFamily="34" charset="-122"/>
+                <a:cs typeface="Consolas" pitchFamily="34" charset="-120"/>
+              </a:rPr>
+              <a:t>    path = tmp_path / "report.txt"</a:t>
+            </a:r>
+            <a:endParaRPr lang="en-US" sz="1650" dirty="0"/>
+          </a:p>
+          <a:p>
+            <a:pPr algn="l" indent="0" marL="0">
+              <a:buNone/>
+            </a:pPr>
+            <a:r>
+              <a:rPr lang="en-US" sz="1650" dirty="0">
+                <a:solidFill>
+                  <a:srgbClr val="F4F7FA"/>
+                </a:solidFill>
+                <a:latin typeface="Consolas" pitchFamily="34" charset="0"/>
+                <a:ea typeface="Consolas" pitchFamily="34" charset="-122"/>
+                <a:cs typeface="Consolas" pitchFamily="34" charset="-120"/>
+              </a:rPr>
+              <a:t>    save_report(path, "Done")</a:t>
+            </a:r>
+            <a:endParaRPr lang="en-US" sz="1650" dirty="0"/>
+          </a:p>
+          <a:p>
+            <a:pPr algn="l" indent="0" marL="0">
+              <a:buNone/>
+            </a:pPr>
+            <a:endParaRPr lang="en-US" sz="1650" dirty="0"/>
+          </a:p>
+          <a:p>
+            <a:pPr algn="l" indent="0" marL="0">
+              <a:buNone/>
+            </a:pPr>
+            <a:r>
+              <a:rPr lang="en-US" sz="1650" dirty="0">
+                <a:solidFill>
+                  <a:srgbClr val="F4F7FA"/>
+                </a:solidFill>
+                <a:latin typeface="Consolas" pitchFamily="34" charset="0"/>
+                <a:ea typeface="Consolas" pitchFamily="34" charset="-122"/>
+                <a:cs typeface="Consolas" pitchFamily="34" charset="-120"/>
+              </a:rPr>
+              <a:t>    assert path.read_text(encoding="utf-8") == "Done"</a:t>
+            </a:r>
+            <a:endParaRPr lang="en-US" sz="1650" dirty="0"/>
+          </a:p>
+        </p:txBody>
+      </p:sp>
+      <p:sp>
+        <p:nvSpPr>
+          <p:cNvPr id="12" name="Shape 10"/>
+          <p:cNvSpPr/>
+          <p:nvPr/>
+        </p:nvSpPr>
+        <p:spPr>
+          <a:xfrm>
+            <a:off x="7909560" y="1901952"/>
+            <a:ext cx="0" cy="3566160"/>
+          </a:xfrm>
+          <a:prstGeom prst="line">
+            <a:avLst/>
+          </a:prstGeom>
+          <a:noFill/>
+          <a:ln w="12700">
+            <a:solidFill>
+              <a:srgbClr val="1877B9"/>
+            </a:solidFill>
+            <a:prstDash val="solid"/>
+          </a:ln>
+        </p:spPr>
+      </p:sp>
+      <p:sp>
+        <p:nvSpPr>
+          <p:cNvPr id="13" name="Text 11"/>
+          <p:cNvSpPr/>
+          <p:nvPr/>
+        </p:nvSpPr>
+        <p:spPr>
+          <a:xfrm>
+            <a:off x="8229600" y="2130552"/>
+            <a:ext cx="2743200" cy="2468880"/>
+          </a:xfrm>
+          <a:prstGeom prst="rect">
+            <a:avLst/>
+          </a:prstGeom>
+          <a:noFill/>
+          <a:ln/>
+        </p:spPr>
+        <p:txBody>
+          <a:bodyPr wrap="square" lIns="0" tIns="0" rIns="0" bIns="0" rtlCol="0" anchor="t">
+            <a:normAutofit/>
+          </a:bodyPr>
+          <a:lstStyle/>
+          <a:p>
+            <a:pPr algn="l" indent="0" marL="0">
+              <a:buNone/>
+            </a:pPr>
+            <a:r>
+              <a:rPr lang="en-US" sz="1800" dirty="0">
+                <a:solidFill>
+                  <a:srgbClr val="5E6B78"/>
                 </a:solidFill>
                 <a:latin typeface="Aptos" pitchFamily="34" charset="0"/>
                 <a:ea typeface="Aptos" pitchFamily="34" charset="-122"/>
                 <a:cs typeface="Aptos" pitchFamily="34" charset="-120"/>
               </a:rPr>
-              <a:t>GUI callback</a:t>
-            </a:r>
-            <a:endParaRPr lang="en-US" sz="2000" dirty="0"/>
-          </a:p>
-        </p:txBody>
-      </p:sp>
-      <p:sp>
-        <p:nvSpPr>
-          <p:cNvPr id="11" name="Text 9"/>
-          <p:cNvSpPr/>
-          <p:nvPr/>
-        </p:nvSpPr>
-        <p:spPr>
-          <a:xfrm>
-            <a:off x="768096" y="2788920"/>
-            <a:ext cx="4919472" cy="3886200"/>
-          </a:xfrm>
-          <a:prstGeom prst="rect">
-            <a:avLst/>
-          </a:prstGeom>
-          <a:noFill/>
-          <a:ln/>
-        </p:spPr>
-        <p:txBody>
-          <a:bodyPr wrap="square" lIns="508" tIns="508" rIns="508" bIns="508" rtlCol="0" anchor="t">
-            <a:normAutofit/>
-          </a:bodyPr>
-          <a:lstStyle/>
-          <a:p>
-            <a:pPr marL="228600" indent="-228600">
-              <a:buSzPct val="100000"/>
-              <a:buChar char="•"/>
-            </a:pPr>
-            <a:r>
-              <a:rPr lang="en-US" sz="1650" dirty="0">
-                <a:solidFill>
-                  <a:srgbClr val="18212B"/>
-                </a:solidFill>
-                <a:latin typeface="Aptos" pitchFamily="34" charset="0"/>
-                <a:ea typeface="Aptos" pitchFamily="34" charset="-122"/>
-                <a:cs typeface="Aptos" pitchFamily="34" charset="-120"/>
-              </a:rPr>
-              <a:t>čítanie Entry</a:t>
-            </a:r>
-            <a:endParaRPr lang="en-US" sz="1650" dirty="0"/>
-          </a:p>
-          <a:p>
-            <a:pPr marL="228600" indent="-228600">
-              <a:buSzPct val="100000"/>
-              <a:buChar char="•"/>
-            </a:pPr>
-            <a:r>
-              <a:rPr lang="en-US" sz="1650" dirty="0">
-                <a:solidFill>
-                  <a:srgbClr val="18212B"/>
-                </a:solidFill>
-                <a:latin typeface="Aptos" pitchFamily="34" charset="0"/>
-                <a:ea typeface="Aptos" pitchFamily="34" charset="-122"/>
-                <a:cs typeface="Aptos" pitchFamily="34" charset="-120"/>
-              </a:rPr>
-              <a:t>messagebox a Label</a:t>
-            </a:r>
-            <a:endParaRPr lang="en-US" sz="1650" dirty="0"/>
-          </a:p>
-          <a:p>
-            <a:pPr marL="228600" indent="-228600">
-              <a:buSzPct val="100000"/>
-              <a:buChar char="•"/>
-            </a:pPr>
-            <a:r>
-              <a:rPr lang="en-US" sz="1650" dirty="0">
-                <a:solidFill>
-                  <a:srgbClr val="18212B"/>
-                </a:solidFill>
-                <a:latin typeface="Aptos" pitchFamily="34" charset="0"/>
-                <a:ea typeface="Aptos" pitchFamily="34" charset="-122"/>
-                <a:cs typeface="Aptos" pitchFamily="34" charset="-120"/>
-              </a:rPr>
-              <a:t>ťažšie nastaviť izolovane</a:t>
-            </a:r>
-            <a:endParaRPr lang="en-US" sz="1650" dirty="0"/>
-          </a:p>
-        </p:txBody>
-      </p:sp>
-      <p:sp>
-        <p:nvSpPr>
-          <p:cNvPr id="12" name="Shape 10"/>
-          <p:cNvSpPr/>
-          <p:nvPr/>
-        </p:nvSpPr>
-        <p:spPr>
-          <a:xfrm>
-            <a:off x="6373368" y="1874520"/>
-            <a:ext cx="5010912" cy="109728"/>
-          </a:xfrm>
-          <a:prstGeom prst="rect">
-            <a:avLst/>
-          </a:prstGeom>
-          <a:solidFill>
-            <a:srgbClr val="E0A03A"/>
-          </a:solidFill>
-          <a:ln w="12700">
-            <a:solidFill>
-              <a:srgbClr val="E0A03A"/>
-            </a:solidFill>
-            <a:prstDash val="solid"/>
-          </a:ln>
-        </p:spPr>
-      </p:sp>
-      <p:sp>
-        <p:nvSpPr>
-          <p:cNvPr id="13" name="Text 11"/>
-          <p:cNvSpPr/>
-          <p:nvPr/>
-        </p:nvSpPr>
-        <p:spPr>
-          <a:xfrm>
-            <a:off x="6373368" y="2212848"/>
-            <a:ext cx="5010912" cy="365760"/>
-          </a:xfrm>
-          <a:prstGeom prst="rect">
-            <a:avLst/>
-          </a:prstGeom>
-          <a:noFill/>
-          <a:ln/>
-        </p:spPr>
-        <p:txBody>
-          <a:bodyPr wrap="square" lIns="0" tIns="0" rIns="0" bIns="0" rtlCol="0" anchor="ctr">
-            <a:normAutofit/>
-          </a:bodyPr>
-          <a:lstStyle/>
-          <a:p>
-            <a:pPr algn="l" indent="0" marL="0">
-              <a:buNone/>
-            </a:pPr>
-            <a:r>
-              <a:rPr lang="en-US" sz="2000" b="1" dirty="0">
-                <a:solidFill>
-                  <a:srgbClr val="16324F"/>
-                </a:solidFill>
-                <a:latin typeface="Aptos" pitchFamily="34" charset="0"/>
-                <a:ea typeface="Aptos" pitchFamily="34" charset="-122"/>
-                <a:cs typeface="Aptos" pitchFamily="34" charset="-120"/>
-              </a:rPr>
-              <a:t>Čistá funkcia</a:t>
-            </a:r>
-            <a:endParaRPr lang="en-US" sz="2000" dirty="0"/>
-          </a:p>
-        </p:txBody>
-      </p:sp>
-      <p:sp>
-        <p:nvSpPr>
-          <p:cNvPr id="14" name="Text 12"/>
-          <p:cNvSpPr/>
-          <p:nvPr/>
-        </p:nvSpPr>
-        <p:spPr>
-          <a:xfrm>
-            <a:off x="6428232" y="2788920"/>
-            <a:ext cx="4919472" cy="3886200"/>
-          </a:xfrm>
-          <a:prstGeom prst="rect">
-            <a:avLst/>
-          </a:prstGeom>
-          <a:noFill/>
-          <a:ln/>
-        </p:spPr>
-        <p:txBody>
-          <a:bodyPr wrap="square" lIns="508" tIns="508" rIns="508" bIns="508" rtlCol="0" anchor="t">
-            <a:normAutofit/>
-          </a:bodyPr>
-          <a:lstStyle/>
-          <a:p>
-            <a:pPr marL="228600" indent="-228600">
-              <a:buSzPct val="100000"/>
-              <a:buChar char="•"/>
-            </a:pPr>
-            <a:r>
-              <a:rPr lang="en-US" sz="1650" dirty="0">
-                <a:solidFill>
-                  <a:srgbClr val="18212B"/>
-                </a:solidFill>
-                <a:latin typeface="Aptos" pitchFamily="34" charset="0"/>
-                <a:ea typeface="Aptos" pitchFamily="34" charset="-122"/>
-                <a:cs typeface="Aptos" pitchFamily="34" charset="-120"/>
-              </a:rPr>
-              <a:t>text → TextStats</a:t>
-            </a:r>
-            <a:endParaRPr lang="en-US" sz="1650" dirty="0"/>
-          </a:p>
-          <a:p>
-            <a:pPr marL="228600" indent="-228600">
-              <a:buSzPct val="100000"/>
-              <a:buChar char="•"/>
-            </a:pPr>
-            <a:r>
-              <a:rPr lang="en-US" sz="1650" dirty="0">
-                <a:solidFill>
-                  <a:srgbClr val="18212B"/>
-                </a:solidFill>
-                <a:latin typeface="Aptos" pitchFamily="34" charset="0"/>
-                <a:ea typeface="Aptos" pitchFamily="34" charset="-122"/>
-                <a:cs typeface="Aptos" pitchFamily="34" charset="-120"/>
-              </a:rPr>
-              <a:t>bez okna a súboru</a:t>
-            </a:r>
-            <a:endParaRPr lang="en-US" sz="1650" dirty="0"/>
-          </a:p>
-          <a:p>
-            <a:pPr marL="228600" indent="-228600">
-              <a:buSzPct val="100000"/>
-              <a:buChar char="•"/>
-            </a:pPr>
-            <a:r>
-              <a:rPr lang="en-US" sz="1650" dirty="0">
-                <a:solidFill>
-                  <a:srgbClr val="18212B"/>
-                </a:solidFill>
-                <a:latin typeface="Aptos" pitchFamily="34" charset="0"/>
-                <a:ea typeface="Aptos" pitchFamily="34" charset="-122"/>
-                <a:cs typeface="Aptos" pitchFamily="34" charset="-120"/>
-              </a:rPr>
-              <a:t>rýchly a presný test</a:t>
-            </a:r>
-            <a:endParaRPr lang="en-US" sz="1650" dirty="0"/>
+              <a:t>Test nezapisuje do Downloads ani do repozitára. pytest vytvorí vlastný dočasný adresár.</a:t>
+            </a:r>
+            <a:endParaRPr lang="en-US" sz="1800" dirty="0"/>
           </a:p>
         </p:txBody>
       </p:sp>
@@ -4953,7 +4311,7 @@
                 <a:ea typeface="Aptos" pitchFamily="34" charset="-122"/>
                 <a:cs typeface="Aptos" pitchFamily="34" charset="-120"/>
               </a:rPr>
-              <a:t>Text Analyzer bez GUI</a:t>
+              <a:t>Test alebo debugger?</a:t>
             </a:r>
             <a:endParaRPr lang="en-US" sz="2900" dirty="0"/>
           </a:p>
@@ -4967,20 +4325,18 @@
         </p:nvSpPr>
         <p:spPr>
           <a:xfrm>
-            <a:off x="658368" y="1828800"/>
-            <a:ext cx="6812280" cy="4069080"/>
-          </a:xfrm>
-          <a:prstGeom prst="roundRect">
-            <a:avLst>
-              <a:gd name="adj" fmla="val 1348"/>
-            </a:avLst>
+            <a:off x="713232" y="1874520"/>
+            <a:ext cx="5010912" cy="109728"/>
+          </a:xfrm>
+          <a:prstGeom prst="rect">
+            <a:avLst/>
           </a:prstGeom>
           <a:solidFill>
-            <a:srgbClr val="17212B"/>
+            <a:srgbClr val="167C80"/>
           </a:solidFill>
           <a:ln w="12700">
             <a:solidFill>
-              <a:srgbClr val="17212B"/>
+              <a:srgbClr val="167C80"/>
             </a:solidFill>
             <a:prstDash val="solid"/>
           </a:ln>
@@ -4994,8 +4350,8 @@
         </p:nvSpPr>
         <p:spPr>
           <a:xfrm>
-            <a:off x="868680" y="2029968"/>
-            <a:ext cx="6309360" cy="182880"/>
+            <a:off x="713232" y="2212848"/>
+            <a:ext cx="5010912" cy="365760"/>
           </a:xfrm>
           <a:prstGeom prst="rect">
             <a:avLst/>
@@ -5013,17 +4369,17 @@
               <a:buNone/>
             </a:pPr>
             <a:r>
-              <a:rPr lang="en-US" sz="850" b="1" spc="70" kern="0" dirty="0">
-                <a:solidFill>
-                  <a:srgbClr val="8FD3FF"/>
-                </a:solidFill>
-                <a:latin typeface="Consolas" pitchFamily="34" charset="0"/>
-                <a:ea typeface="Consolas" pitchFamily="34" charset="-122"/>
-                <a:cs typeface="Consolas" pitchFamily="34" charset="-120"/>
-              </a:rPr>
-              <a:t>python</a:t>
-            </a:r>
-            <a:endParaRPr lang="en-US" sz="850" dirty="0"/>
+              <a:rPr lang="en-US" sz="2000" b="1" dirty="0">
+                <a:solidFill>
+                  <a:srgbClr val="16324F"/>
+                </a:solidFill>
+                <a:latin typeface="Aptos" pitchFamily="34" charset="0"/>
+                <a:ea typeface="Aptos" pitchFamily="34" charset="-122"/>
+                <a:cs typeface="Aptos" pitchFamily="34" charset="-120"/>
+              </a:rPr>
+              <a:t>Test</a:t>
+            </a:r>
+            <a:endParaRPr lang="en-US" sz="2000" dirty="0"/>
           </a:p>
         </p:txBody>
       </p:sp>
@@ -5035,8 +4391,8 @@
         </p:nvSpPr>
         <p:spPr>
           <a:xfrm>
-            <a:off x="877824" y="2395728"/>
-            <a:ext cx="6327648" cy="3246120"/>
+            <a:off x="768096" y="2788920"/>
+            <a:ext cx="4919472" cy="3886200"/>
           </a:xfrm>
           <a:prstGeom prst="rect">
             <a:avLst/>
@@ -5045,129 +4401,64 @@
           <a:ln/>
         </p:spPr>
         <p:txBody>
-          <a:bodyPr wrap="square" lIns="0" tIns="0" rIns="0" bIns="0" rtlCol="0" anchor="t">
+          <a:bodyPr wrap="square" lIns="508" tIns="508" rIns="508" bIns="508" rtlCol="0" anchor="t">
             <a:normAutofit/>
           </a:bodyPr>
           <a:lstStyle/>
           <a:p>
-            <a:pPr algn="l" indent="0" marL="0">
-              <a:buNone/>
+            <a:pPr marL="228600" indent="-228600">
+              <a:buSzPct val="100000"/>
+              <a:buChar char="•"/>
             </a:pPr>
             <a:r>
               <a:rPr lang="en-US" sz="1650" dirty="0">
                 <a:solidFill>
-                  <a:srgbClr val="F4F7FA"/>
-                </a:solidFill>
-                <a:latin typeface="Consolas" pitchFamily="34" charset="0"/>
-                <a:ea typeface="Consolas" pitchFamily="34" charset="-122"/>
-                <a:cs typeface="Consolas" pitchFamily="34" charset="-120"/>
-              </a:rPr>
-              <a:t>def analyze_text(text: str) -&gt; TextStats:</a:t>
+                  <a:srgbClr val="18212B"/>
+                </a:solidFill>
+                <a:latin typeface="Aptos" pitchFamily="34" charset="0"/>
+                <a:ea typeface="Aptos" pitchFamily="34" charset="-122"/>
+                <a:cs typeface="Aptos" pitchFamily="34" charset="-120"/>
+              </a:rPr>
+              <a:t>čo má program robiť</a:t>
             </a:r>
             <a:endParaRPr lang="en-US" sz="1650" dirty="0"/>
           </a:p>
           <a:p>
-            <a:pPr algn="l" indent="0" marL="0">
-              <a:buNone/>
+            <a:pPr marL="228600" indent="-228600">
+              <a:buSzPct val="100000"/>
+              <a:buChar char="•"/>
             </a:pPr>
             <a:r>
               <a:rPr lang="en-US" sz="1650" dirty="0">
                 <a:solidFill>
-                  <a:srgbClr val="F4F7FA"/>
-                </a:solidFill>
-                <a:latin typeface="Consolas" pitchFamily="34" charset="0"/>
-                <a:ea typeface="Consolas" pitchFamily="34" charset="-122"/>
-                <a:cs typeface="Consolas" pitchFamily="34" charset="-120"/>
-              </a:rPr>
-              <a:t>    words = text.split()</a:t>
+                  <a:srgbClr val="18212B"/>
+                </a:solidFill>
+                <a:latin typeface="Aptos" pitchFamily="34" charset="0"/>
+                <a:ea typeface="Aptos" pitchFamily="34" charset="-122"/>
+                <a:cs typeface="Aptos" pitchFamily="34" charset="-120"/>
+              </a:rPr>
+              <a:t>opakovateľný scenár</a:t>
             </a:r>
             <a:endParaRPr lang="en-US" sz="1650" dirty="0"/>
           </a:p>
           <a:p>
-            <a:pPr algn="l" indent="0" marL="0">
-              <a:buNone/>
+            <a:pPr marL="228600" indent="-228600">
+              <a:buSzPct val="100000"/>
+              <a:buChar char="•"/>
             </a:pPr>
             <a:r>
               <a:rPr lang="en-US" sz="1650" dirty="0">
                 <a:solidFill>
-                  <a:srgbClr val="F4F7FA"/>
-                </a:solidFill>
-                <a:latin typeface="Consolas" pitchFamily="34" charset="0"/>
-                <a:ea typeface="Consolas" pitchFamily="34" charset="-122"/>
-                <a:cs typeface="Consolas" pitchFamily="34" charset="-120"/>
-              </a:rPr>
-              <a:t>    return TextStats(</a:t>
+                  <a:srgbClr val="18212B"/>
+                </a:solidFill>
+                <a:latin typeface="Aptos" pitchFamily="34" charset="0"/>
+                <a:ea typeface="Aptos" pitchFamily="34" charset="-122"/>
+                <a:cs typeface="Aptos" pitchFamily="34" charset="-120"/>
+              </a:rPr>
+              <a:t>ochrana pred regresiou</a:t>
             </a:r>
             <a:endParaRPr lang="en-US" sz="1650" dirty="0"/>
           </a:p>
-          <a:p>
-            <a:pPr algn="l" indent="0" marL="0">
-              <a:buNone/>
-            </a:pPr>
-            <a:r>
-              <a:rPr lang="en-US" sz="1650" dirty="0">
-                <a:solidFill>
-                  <a:srgbClr val="F4F7FA"/>
-                </a:solidFill>
-                <a:latin typeface="Consolas" pitchFamily="34" charset="0"/>
-                <a:ea typeface="Consolas" pitchFamily="34" charset="-122"/>
-                <a:cs typeface="Consolas" pitchFamily="34" charset="-120"/>
-              </a:rPr>
-              <a:t>        lines=text.count("\n") + 1 if text else 0,</a:t>
-            </a:r>
-            <a:endParaRPr lang="en-US" sz="1650" dirty="0"/>
-          </a:p>
-          <a:p>
-            <a:pPr algn="l" indent="0" marL="0">
-              <a:buNone/>
-            </a:pPr>
-            <a:r>
-              <a:rPr lang="en-US" sz="1650" dirty="0">
-                <a:solidFill>
-                  <a:srgbClr val="F4F7FA"/>
-                </a:solidFill>
-                <a:latin typeface="Consolas" pitchFamily="34" charset="0"/>
-                <a:ea typeface="Consolas" pitchFamily="34" charset="-122"/>
-                <a:cs typeface="Consolas" pitchFamily="34" charset="-120"/>
-              </a:rPr>
-              <a:t>        words=len(words),</a:t>
-            </a:r>
-            <a:endParaRPr lang="en-US" sz="1650" dirty="0"/>
-          </a:p>
-          <a:p>
-            <a:pPr algn="l" indent="0" marL="0">
-              <a:buNone/>
-            </a:pPr>
-            <a:r>
-              <a:rPr lang="en-US" sz="1650" dirty="0">
-                <a:solidFill>
-                  <a:srgbClr val="F4F7FA"/>
-                </a:solidFill>
-                <a:latin typeface="Consolas" pitchFamily="34" charset="0"/>
-                <a:ea typeface="Consolas" pitchFamily="34" charset="-122"/>
-                <a:cs typeface="Consolas" pitchFamily="34" charset="-120"/>
-              </a:rPr>
-              <a:t>        characters=len(text),</a:t>
-            </a:r>
-            <a:endParaRPr lang="en-US" sz="1650" dirty="0"/>
-          </a:p>
-          <a:p>
-            <a:pPr algn="l" indent="0" marL="0">
-              <a:buNone/>
-            </a:pPr>
-            <a:r>
-              <a:rPr lang="en-US" sz="1650" dirty="0">
-                <a:solidFill>
-                  <a:srgbClr val="F4F7FA"/>
-                </a:solidFill>
-                <a:latin typeface="Consolas" pitchFamily="34" charset="0"/>
-                <a:ea typeface="Consolas" pitchFamily="34" charset="-122"/>
-                <a:cs typeface="Consolas" pitchFamily="34" charset="-120"/>
-              </a:rPr>
-              <a:t>    )</a:t>
-            </a:r>
-            <a:endParaRPr lang="en-US" sz="1650" dirty="0"/>
-          </a:p>
         </p:txBody>
       </p:sp>
       <p:sp>
@@ -5178,16 +4469,18 @@
         </p:nvSpPr>
         <p:spPr>
           <a:xfrm>
-            <a:off x="7909560" y="1901952"/>
-            <a:ext cx="0" cy="3566160"/>
-          </a:xfrm>
-          <a:prstGeom prst="line">
-            <a:avLst/>
-          </a:prstGeom>
-          <a:noFill/>
+            <a:off x="6373368" y="1874520"/>
+            <a:ext cx="5010912" cy="109728"/>
+          </a:xfrm>
+          <a:prstGeom prst="rect">
+            <a:avLst/>
+          </a:prstGeom>
+          <a:solidFill>
+            <a:srgbClr val="E0A03A"/>
+          </a:solidFill>
           <a:ln w="12700">
             <a:solidFill>
-              <a:srgbClr val="1877B9"/>
+              <a:srgbClr val="E0A03A"/>
             </a:solidFill>
             <a:prstDash val="solid"/>
           </a:ln>
@@ -5201,8 +4494,8 @@
         </p:nvSpPr>
         <p:spPr>
           <a:xfrm>
-            <a:off x="8229600" y="2130552"/>
-            <a:ext cx="2743200" cy="2468880"/>
+            <a:off x="6373368" y="2212848"/>
+            <a:ext cx="5010912" cy="365760"/>
           </a:xfrm>
           <a:prstGeom prst="rect">
             <a:avLst/>
@@ -5211,7 +4504,7 @@
           <a:ln/>
         </p:spPr>
         <p:txBody>
-          <a:bodyPr wrap="square" lIns="0" tIns="0" rIns="0" bIns="0" rtlCol="0" anchor="t">
+          <a:bodyPr wrap="square" lIns="0" tIns="0" rIns="0" bIns="0" rtlCol="0" anchor="ctr">
             <a:normAutofit/>
           </a:bodyPr>
           <a:lstStyle/>
@@ -5220,17 +4513,95 @@
               <a:buNone/>
             </a:pPr>
             <a:r>
-              <a:rPr lang="en-US" sz="1800" dirty="0">
-                <a:solidFill>
-                  <a:srgbClr val="5E6B78"/>
+              <a:rPr lang="en-US" sz="2000" b="1" dirty="0">
+                <a:solidFill>
+                  <a:srgbClr val="16324F"/>
                 </a:solidFill>
                 <a:latin typeface="Aptos" pitchFamily="34" charset="0"/>
                 <a:ea typeface="Aptos" pitchFamily="34" charset="-122"/>
                 <a:cs typeface="Aptos" pitchFamily="34" charset="-120"/>
               </a:rPr>
-              <a:t>Funkcia má jasný vstup a návratovú hodnotu. GUI ju iba zavolá.</a:t>
-            </a:r>
-            <a:endParaRPr lang="en-US" sz="1800" dirty="0"/>
+              <a:t>Debugger</a:t>
+            </a:r>
+            <a:endParaRPr lang="en-US" sz="2000" dirty="0"/>
+          </a:p>
+        </p:txBody>
+      </p:sp>
+      <p:sp>
+        <p:nvSpPr>
+          <p:cNvPr id="14" name="Text 12"/>
+          <p:cNvSpPr/>
+          <p:nvPr/>
+        </p:nvSpPr>
+        <p:spPr>
+          <a:xfrm>
+            <a:off x="6428232" y="2788920"/>
+            <a:ext cx="4919472" cy="3886200"/>
+          </a:xfrm>
+          <a:prstGeom prst="rect">
+            <a:avLst/>
+          </a:prstGeom>
+          <a:noFill/>
+          <a:ln/>
+        </p:spPr>
+        <p:txBody>
+          <a:bodyPr wrap="square" lIns="508" tIns="508" rIns="508" bIns="508" rtlCol="0" anchor="t">
+            <a:normAutofit/>
+          </a:bodyPr>
+          <a:lstStyle/>
+          <a:p>
+            <a:pPr marL="228600" indent="-228600">
+              <a:buSzPct val="100000"/>
+              <a:buChar char="•"/>
+            </a:pPr>
+            <a:r>
+              <a:rPr lang="en-US" sz="1650" dirty="0">
+                <a:solidFill>
+                  <a:srgbClr val="18212B"/>
+                </a:solidFill>
+                <a:latin typeface="Aptos" pitchFamily="34" charset="0"/>
+                <a:ea typeface="Aptos" pitchFamily="34" charset="-122"/>
+                <a:cs typeface="Aptos" pitchFamily="34" charset="-120"/>
+              </a:rPr>
+              <a:t>čo robí práve teraz</a:t>
+            </a:r>
+            <a:endParaRPr lang="en-US" sz="1650" dirty="0"/>
+          </a:p>
+          <a:p>
+            <a:pPr marL="228600" indent="-228600">
+              <a:buSzPct val="100000"/>
+              <a:buChar char="•"/>
+            </a:pPr>
+            <a:r>
+              <a:rPr lang="en-US" sz="1650" dirty="0">
+                <a:solidFill>
+                  <a:srgbClr val="18212B"/>
+                </a:solidFill>
+                <a:latin typeface="Aptos" pitchFamily="34" charset="0"/>
+                <a:ea typeface="Aptos" pitchFamily="34" charset="-122"/>
+                <a:cs typeface="Aptos" pitchFamily="34" charset="-120"/>
+              </a:rPr>
+              <a:t>hodnoty a vetvy</a:t>
+            </a:r>
+            <a:endParaRPr lang="en-US" sz="1650" dirty="0"/>
+          </a:p>
+          <a:p>
+            <a:pPr marL="228600" indent="-228600">
+              <a:buSzPct val="100000"/>
+              <a:buChar char="•"/>
+            </a:pPr>
+            <a:r>
+              <a:rPr lang="en-US" sz="1650" dirty="0">
+                <a:solidFill>
+                  <a:srgbClr val="18212B"/>
+                </a:solidFill>
+                <a:latin typeface="Aptos" pitchFamily="34" charset="0"/>
+                <a:ea typeface="Aptos" pitchFamily="34" charset="-122"/>
+                <a:cs typeface="Aptos" pitchFamily="34" charset="-120"/>
+              </a:rPr>
+              <a:t>vyšetrovanie nejasného stavu</a:t>
+            </a:r>
+            <a:endParaRPr lang="en-US" sz="1650" dirty="0"/>
           </a:p>
         </p:txBody>
       </p:sp>
@@ -5495,7 +4866,7 @@
                 <a:ea typeface="Aptos" pitchFamily="34" charset="-122"/>
                 <a:cs typeface="Aptos" pitchFamily="34" charset="-120"/>
               </a:rPr>
-              <a:t>Dočasný súbor cez tmp_path</a:t>
+              <a:t>Traceback čítame od konca</a:t>
             </a:r>
             <a:endParaRPr lang="en-US" sz="2900" dirty="0"/>
           </a:p>
@@ -5509,20 +4880,20 @@
         </p:nvSpPr>
         <p:spPr>
           <a:xfrm>
-            <a:off x="658368" y="1828800"/>
-            <a:ext cx="6812280" cy="4069080"/>
+            <a:off x="731520" y="2834640"/>
+            <a:ext cx="2450592" cy="1042416"/>
           </a:xfrm>
           <a:prstGeom prst="roundRect">
             <a:avLst>
-              <a:gd name="adj" fmla="val 1348"/>
+              <a:gd name="adj" fmla="val 4386"/>
             </a:avLst>
           </a:prstGeom>
           <a:solidFill>
-            <a:srgbClr val="17212B"/>
+            <a:srgbClr val="F3F6F8"/>
           </a:solidFill>
           <a:ln w="12700">
             <a:solidFill>
-              <a:srgbClr val="17212B"/>
+              <a:srgbClr val="D8E0E6"/>
             </a:solidFill>
             <a:prstDash val="solid"/>
           </a:ln>
@@ -5536,8 +4907,8 @@
         </p:nvSpPr>
         <p:spPr>
           <a:xfrm>
-            <a:off x="868680" y="2029968"/>
-            <a:ext cx="6309360" cy="182880"/>
+            <a:off x="877824" y="3063240"/>
+            <a:ext cx="2157984" cy="548640"/>
           </a:xfrm>
           <a:prstGeom prst="rect">
             <a:avLst/>
@@ -5551,137 +4922,41 @@
           </a:bodyPr>
           <a:lstStyle/>
           <a:p>
-            <a:pPr algn="l" indent="0" marL="0">
-              <a:buNone/>
-            </a:pPr>
-            <a:r>
-              <a:rPr lang="en-US" sz="850" b="1" spc="70" kern="0" dirty="0">
-                <a:solidFill>
-                  <a:srgbClr val="8FD3FF"/>
-                </a:solidFill>
-                <a:latin typeface="Consolas" pitchFamily="34" charset="0"/>
-                <a:ea typeface="Consolas" pitchFamily="34" charset="-122"/>
-                <a:cs typeface="Consolas" pitchFamily="34" charset="-120"/>
-              </a:rPr>
-              <a:t>python</a:t>
-            </a:r>
-            <a:endParaRPr lang="en-US" sz="850" dirty="0"/>
-          </a:p>
-        </p:txBody>
-      </p:sp>
-      <p:sp>
-        <p:nvSpPr>
-          <p:cNvPr id="11" name="Text 9"/>
-          <p:cNvSpPr/>
-          <p:nvPr/>
-        </p:nvSpPr>
-        <p:spPr>
-          <a:xfrm>
-            <a:off x="877824" y="2395728"/>
-            <a:ext cx="6327648" cy="3246120"/>
-          </a:xfrm>
-          <a:prstGeom prst="rect">
-            <a:avLst/>
-          </a:prstGeom>
-          <a:noFill/>
-          <a:ln/>
-        </p:spPr>
-        <p:txBody>
-          <a:bodyPr wrap="square" lIns="0" tIns="0" rIns="0" bIns="0" rtlCol="0" anchor="t">
-            <a:normAutofit/>
-          </a:bodyPr>
-          <a:lstStyle/>
-          <a:p>
-            <a:pPr algn="l" indent="0" marL="0">
-              <a:buNone/>
-            </a:pPr>
-            <a:r>
-              <a:rPr lang="en-US" sz="1650" dirty="0">
-                <a:solidFill>
-                  <a:srgbClr val="F4F7FA"/>
-                </a:solidFill>
-                <a:latin typeface="Consolas" pitchFamily="34" charset="0"/>
-                <a:ea typeface="Consolas" pitchFamily="34" charset="-122"/>
-                <a:cs typeface="Consolas" pitchFamily="34" charset="-120"/>
-              </a:rPr>
-              <a:t>def test_save_report(tmp_path) -&gt; None:</a:t>
-            </a:r>
-            <a:endParaRPr lang="en-US" sz="1650" dirty="0"/>
-          </a:p>
-          <a:p>
-            <a:pPr algn="l" indent="0" marL="0">
-              <a:buNone/>
-            </a:pPr>
-            <a:r>
-              <a:rPr lang="en-US" sz="1650" dirty="0">
-                <a:solidFill>
-                  <a:srgbClr val="F4F7FA"/>
-                </a:solidFill>
-                <a:latin typeface="Consolas" pitchFamily="34" charset="0"/>
-                <a:ea typeface="Consolas" pitchFamily="34" charset="-122"/>
-                <a:cs typeface="Consolas" pitchFamily="34" charset="-120"/>
-              </a:rPr>
-              <a:t>    path = tmp_path / "report.txt"</a:t>
-            </a:r>
-            <a:endParaRPr lang="en-US" sz="1650" dirty="0"/>
-          </a:p>
-          <a:p>
-            <a:pPr algn="l" indent="0" marL="0">
-              <a:buNone/>
-            </a:pPr>
-            <a:r>
-              <a:rPr lang="en-US" sz="1650" dirty="0">
-                <a:solidFill>
-                  <a:srgbClr val="F4F7FA"/>
-                </a:solidFill>
-                <a:latin typeface="Consolas" pitchFamily="34" charset="0"/>
-                <a:ea typeface="Consolas" pitchFamily="34" charset="-122"/>
-                <a:cs typeface="Consolas" pitchFamily="34" charset="-120"/>
-              </a:rPr>
-              <a:t>    save_report(path, "Done")</a:t>
-            </a:r>
-            <a:endParaRPr lang="en-US" sz="1650" dirty="0"/>
-          </a:p>
-          <a:p>
-            <a:pPr algn="l" indent="0" marL="0">
-              <a:buNone/>
-            </a:pPr>
-            <a:endParaRPr lang="en-US" sz="1650" dirty="0"/>
-          </a:p>
-          <a:p>
-            <a:pPr algn="l" indent="0" marL="0">
-              <a:buNone/>
-            </a:pPr>
-            <a:r>
-              <a:rPr lang="en-US" sz="1650" dirty="0">
-                <a:solidFill>
-                  <a:srgbClr val="F4F7FA"/>
-                </a:solidFill>
-                <a:latin typeface="Consolas" pitchFamily="34" charset="0"/>
-                <a:ea typeface="Consolas" pitchFamily="34" charset="-122"/>
-                <a:cs typeface="Consolas" pitchFamily="34" charset="-120"/>
-              </a:rPr>
-              <a:t>    assert path.read_text(encoding="utf-8") == "Done"</a:t>
-            </a:r>
-            <a:endParaRPr lang="en-US" sz="1650" dirty="0"/>
-          </a:p>
-        </p:txBody>
-      </p:sp>
-      <p:sp>
-        <p:nvSpPr>
-          <p:cNvPr id="12" name="Shape 10"/>
-          <p:cNvSpPr/>
-          <p:nvPr/>
-        </p:nvSpPr>
-        <p:spPr>
-          <a:xfrm>
-            <a:off x="7909560" y="1901952"/>
-            <a:ext cx="0" cy="3566160"/>
-          </a:xfrm>
-          <a:prstGeom prst="line">
-            <a:avLst/>
-          </a:prstGeom>
-          <a:noFill/>
+            <a:pPr algn="ctr" indent="0" marL="0">
+              <a:buNone/>
+            </a:pPr>
+            <a:r>
+              <a:rPr lang="en-US" sz="1700" b="1" dirty="0">
+                <a:solidFill>
+                  <a:srgbClr val="16324F"/>
+                </a:solidFill>
+                <a:latin typeface="Aptos" pitchFamily="34" charset="0"/>
+                <a:ea typeface="Aptos" pitchFamily="34" charset="-122"/>
+                <a:cs typeface="Aptos" pitchFamily="34" charset="-120"/>
+              </a:rPr>
+              <a:t>typ výnimky</a:t>
+            </a:r>
+            <a:endParaRPr lang="en-US" sz="1700" dirty="0"/>
+          </a:p>
+        </p:txBody>
+      </p:sp>
+      <p:sp>
+        <p:nvSpPr>
+          <p:cNvPr id="11" name="Shape 9"/>
+          <p:cNvSpPr/>
+          <p:nvPr/>
+        </p:nvSpPr>
+        <p:spPr>
+          <a:xfrm>
+            <a:off x="3319272" y="3209544"/>
+            <a:ext cx="182880" cy="292608"/>
+          </a:xfrm>
+          <a:prstGeom prst="chevron">
+            <a:avLst/>
+          </a:prstGeom>
+          <a:solidFill>
+            <a:srgbClr val="1877B9"/>
+          </a:solidFill>
           <a:ln w="12700">
             <a:solidFill>
               <a:srgbClr val="1877B9"/>
@@ -5692,14 +4967,41 @@
       </p:sp>
       <p:sp>
         <p:nvSpPr>
+          <p:cNvPr id="12" name="Shape 10"/>
+          <p:cNvSpPr/>
+          <p:nvPr/>
+        </p:nvSpPr>
+        <p:spPr>
+          <a:xfrm>
+            <a:off x="3593592" y="2834640"/>
+            <a:ext cx="2450592" cy="1042416"/>
+          </a:xfrm>
+          <a:prstGeom prst="roundRect">
+            <a:avLst>
+              <a:gd name="adj" fmla="val 4386"/>
+            </a:avLst>
+          </a:prstGeom>
+          <a:solidFill>
+            <a:srgbClr val="EAF3F7"/>
+          </a:solidFill>
+          <a:ln w="12700">
+            <a:solidFill>
+              <a:srgbClr val="9DCCDD"/>
+            </a:solidFill>
+            <a:prstDash val="solid"/>
+          </a:ln>
+        </p:spPr>
+      </p:sp>
+      <p:sp>
+        <p:nvSpPr>
           <p:cNvPr id="13" name="Text 11"/>
           <p:cNvSpPr/>
           <p:nvPr/>
         </p:nvSpPr>
         <p:spPr>
           <a:xfrm>
-            <a:off x="8229600" y="2130552"/>
-            <a:ext cx="2743200" cy="2468880"/>
+            <a:off x="3739896" y="3063240"/>
+            <a:ext cx="2157984" cy="548640"/>
           </a:xfrm>
           <a:prstGeom prst="rect">
             <a:avLst/>
@@ -5708,26 +5010,212 @@
           <a:ln/>
         </p:spPr>
         <p:txBody>
-          <a:bodyPr wrap="square" lIns="0" tIns="0" rIns="0" bIns="0" rtlCol="0" anchor="t">
+          <a:bodyPr wrap="square" lIns="0" tIns="0" rIns="0" bIns="0" rtlCol="0" anchor="ctr">
             <a:normAutofit/>
           </a:bodyPr>
           <a:lstStyle/>
           <a:p>
-            <a:pPr algn="l" indent="0" marL="0">
-              <a:buNone/>
-            </a:pPr>
-            <a:r>
-              <a:rPr lang="en-US" sz="1800" dirty="0">
-                <a:solidFill>
-                  <a:srgbClr val="5E6B78"/>
+            <a:pPr algn="ctr" indent="0" marL="0">
+              <a:buNone/>
+            </a:pPr>
+            <a:r>
+              <a:rPr lang="en-US" sz="1700" b="1" dirty="0">
+                <a:solidFill>
+                  <a:srgbClr val="16324F"/>
                 </a:solidFill>
                 <a:latin typeface="Aptos" pitchFamily="34" charset="0"/>
                 <a:ea typeface="Aptos" pitchFamily="34" charset="-122"/>
                 <a:cs typeface="Aptos" pitchFamily="34" charset="-120"/>
               </a:rPr>
-              <a:t>Test nezapisuje do vášho Downloads ani do repozitára. pytest vytvorí izolovaný adresár.</a:t>
-            </a:r>
-            <a:endParaRPr lang="en-US" sz="1800" dirty="0"/>
+              <a:t>správa</a:t>
+            </a:r>
+            <a:endParaRPr lang="en-US" sz="1700" dirty="0"/>
+          </a:p>
+        </p:txBody>
+      </p:sp>
+      <p:sp>
+        <p:nvSpPr>
+          <p:cNvPr id="14" name="Shape 12"/>
+          <p:cNvSpPr/>
+          <p:nvPr/>
+        </p:nvSpPr>
+        <p:spPr>
+          <a:xfrm>
+            <a:off x="6181344" y="3209544"/>
+            <a:ext cx="182880" cy="292608"/>
+          </a:xfrm>
+          <a:prstGeom prst="chevron">
+            <a:avLst/>
+          </a:prstGeom>
+          <a:solidFill>
+            <a:srgbClr val="1877B9"/>
+          </a:solidFill>
+          <a:ln w="12700">
+            <a:solidFill>
+              <a:srgbClr val="1877B9"/>
+            </a:solidFill>
+            <a:prstDash val="solid"/>
+          </a:ln>
+        </p:spPr>
+      </p:sp>
+      <p:sp>
+        <p:nvSpPr>
+          <p:cNvPr id="15" name="Shape 13"/>
+          <p:cNvSpPr/>
+          <p:nvPr/>
+        </p:nvSpPr>
+        <p:spPr>
+          <a:xfrm>
+            <a:off x="6455664" y="2834640"/>
+            <a:ext cx="2450592" cy="1042416"/>
+          </a:xfrm>
+          <a:prstGeom prst="roundRect">
+            <a:avLst>
+              <a:gd name="adj" fmla="val 4386"/>
+            </a:avLst>
+          </a:prstGeom>
+          <a:solidFill>
+            <a:srgbClr val="F3F6F8"/>
+          </a:solidFill>
+          <a:ln w="12700">
+            <a:solidFill>
+              <a:srgbClr val="D8E0E6"/>
+            </a:solidFill>
+            <a:prstDash val="solid"/>
+          </a:ln>
+        </p:spPr>
+      </p:sp>
+      <p:sp>
+        <p:nvSpPr>
+          <p:cNvPr id="16" name="Text 14"/>
+          <p:cNvSpPr/>
+          <p:nvPr/>
+        </p:nvSpPr>
+        <p:spPr>
+          <a:xfrm>
+            <a:off x="6601968" y="3063240"/>
+            <a:ext cx="2157984" cy="548640"/>
+          </a:xfrm>
+          <a:prstGeom prst="rect">
+            <a:avLst/>
+          </a:prstGeom>
+          <a:noFill/>
+          <a:ln/>
+        </p:spPr>
+        <p:txBody>
+          <a:bodyPr wrap="square" lIns="0" tIns="0" rIns="0" bIns="0" rtlCol="0" anchor="ctr">
+            <a:normAutofit/>
+          </a:bodyPr>
+          <a:lstStyle/>
+          <a:p>
+            <a:pPr algn="ctr" indent="0" marL="0">
+              <a:buNone/>
+            </a:pPr>
+            <a:r>
+              <a:rPr lang="en-US" sz="1700" b="1" dirty="0">
+                <a:solidFill>
+                  <a:srgbClr val="16324F"/>
+                </a:solidFill>
+                <a:latin typeface="Aptos" pitchFamily="34" charset="0"/>
+                <a:ea typeface="Aptos" pitchFamily="34" charset="-122"/>
+                <a:cs typeface="Aptos" pitchFamily="34" charset="-120"/>
+              </a:rPr>
+              <a:t>váš riadok</a:t>
+            </a:r>
+            <a:endParaRPr lang="en-US" sz="1700" dirty="0"/>
+          </a:p>
+        </p:txBody>
+      </p:sp>
+      <p:sp>
+        <p:nvSpPr>
+          <p:cNvPr id="17" name="Shape 15"/>
+          <p:cNvSpPr/>
+          <p:nvPr/>
+        </p:nvSpPr>
+        <p:spPr>
+          <a:xfrm>
+            <a:off x="9043416" y="3209544"/>
+            <a:ext cx="182880" cy="292608"/>
+          </a:xfrm>
+          <a:prstGeom prst="chevron">
+            <a:avLst/>
+          </a:prstGeom>
+          <a:solidFill>
+            <a:srgbClr val="1877B9"/>
+          </a:solidFill>
+          <a:ln w="12700">
+            <a:solidFill>
+              <a:srgbClr val="1877B9"/>
+            </a:solidFill>
+            <a:prstDash val="solid"/>
+          </a:ln>
+        </p:spPr>
+      </p:sp>
+      <p:sp>
+        <p:nvSpPr>
+          <p:cNvPr id="18" name="Shape 16"/>
+          <p:cNvSpPr/>
+          <p:nvPr/>
+        </p:nvSpPr>
+        <p:spPr>
+          <a:xfrm>
+            <a:off x="9317736" y="2834640"/>
+            <a:ext cx="2450592" cy="1042416"/>
+          </a:xfrm>
+          <a:prstGeom prst="roundRect">
+            <a:avLst>
+              <a:gd name="adj" fmla="val 4386"/>
+            </a:avLst>
+          </a:prstGeom>
+          <a:solidFill>
+            <a:srgbClr val="EAF3F7"/>
+          </a:solidFill>
+          <a:ln w="12700">
+            <a:solidFill>
+              <a:srgbClr val="9DCCDD"/>
+            </a:solidFill>
+            <a:prstDash val="solid"/>
+          </a:ln>
+        </p:spPr>
+      </p:sp>
+      <p:sp>
+        <p:nvSpPr>
+          <p:cNvPr id="19" name="Text 17"/>
+          <p:cNvSpPr/>
+          <p:nvPr/>
+        </p:nvSpPr>
+        <p:spPr>
+          <a:xfrm>
+            <a:off x="9464040" y="3063240"/>
+            <a:ext cx="2157984" cy="548640"/>
+          </a:xfrm>
+          <a:prstGeom prst="rect">
+            <a:avLst/>
+          </a:prstGeom>
+          <a:noFill/>
+          <a:ln/>
+        </p:spPr>
+        <p:txBody>
+          <a:bodyPr wrap="square" lIns="0" tIns="0" rIns="0" bIns="0" rtlCol="0" anchor="ctr">
+            <a:normAutofit/>
+          </a:bodyPr>
+          <a:lstStyle/>
+          <a:p>
+            <a:pPr algn="ctr" indent="0" marL="0">
+              <a:buNone/>
+            </a:pPr>
+            <a:r>
+              <a:rPr lang="en-US" sz="1700" b="1" dirty="0">
+                <a:solidFill>
+                  <a:srgbClr val="16324F"/>
+                </a:solidFill>
+                <a:latin typeface="Aptos" pitchFamily="34" charset="0"/>
+                <a:ea typeface="Aptos" pitchFamily="34" charset="-122"/>
+                <a:cs typeface="Aptos" pitchFamily="34" charset="-120"/>
+              </a:rPr>
+              <a:t>cesta k príčine</a:t>
+            </a:r>
+            <a:endParaRPr lang="en-US" sz="1700" dirty="0"/>
           </a:p>
         </p:txBody>
       </p:sp>
@@ -5992,7 +5480,7 @@
                 <a:ea typeface="Aptos" pitchFamily="34" charset="-122"/>
                 <a:cs typeface="Aptos" pitchFamily="34" charset="-120"/>
               </a:rPr>
-              <a:t>Regression test</a:t>
+              <a:t>Breakpoint je konkrétna otázka</a:t>
             </a:r>
             <a:endParaRPr lang="en-US" sz="2900" dirty="0"/>
           </a:p>
@@ -6006,8 +5494,8 @@
         </p:nvSpPr>
         <p:spPr>
           <a:xfrm>
-            <a:off x="685800" y="1719072"/>
-            <a:ext cx="9966960" cy="475488"/>
+            <a:off x="868680" y="1938528"/>
+            <a:ext cx="9921240" cy="3886200"/>
           </a:xfrm>
           <a:prstGeom prst="rect">
             <a:avLst/>
@@ -6016,51 +5504,28 @@
           <a:ln/>
         </p:spPr>
         <p:txBody>
-          <a:bodyPr wrap="square" lIns="0" tIns="0" rIns="0" bIns="0" rtlCol="0" anchor="t">
+          <a:bodyPr wrap="square" lIns="508" tIns="508" rIns="508" bIns="508" rtlCol="0" anchor="t">
             <a:normAutofit/>
           </a:bodyPr>
           <a:lstStyle/>
           <a:p>
-            <a:pPr algn="l" indent="0" marL="0">
-              <a:buNone/>
+            <a:pPr marL="228600" indent="-228600">
+              <a:buSzPct val="100000"/>
+              <a:buChar char="•"/>
             </a:pPr>
             <a:r>
               <a:rPr lang="en-US" sz="1800" dirty="0">
                 <a:solidFill>
-                  <a:srgbClr val="5E6B78"/>
+                  <a:srgbClr val="18212B"/>
                 </a:solidFill>
                 <a:latin typeface="Aptos" pitchFamily="34" charset="0"/>
                 <a:ea typeface="Aptos" pitchFamily="34" charset="-122"/>
                 <a:cs typeface="Aptos" pitchFamily="34" charset="-120"/>
               </a:rPr>
-              <a:t>Najprv vytvoríme test, ktorý reprodukuje chybu. Až potom meníme implementáciu.</a:t>
+              <a:t>akú hodnotu má premenná?</a:t>
             </a:r>
             <a:endParaRPr lang="en-US" sz="1800" dirty="0"/>
           </a:p>
-        </p:txBody>
-      </p:sp>
-      <p:sp>
-        <p:nvSpPr>
-          <p:cNvPr id="10" name="Text 8"/>
-          <p:cNvSpPr/>
-          <p:nvPr/>
-        </p:nvSpPr>
-        <p:spPr>
-          <a:xfrm>
-            <a:off x="868680" y="2487168"/>
-            <a:ext cx="9921240" cy="3886200"/>
-          </a:xfrm>
-          <a:prstGeom prst="rect">
-            <a:avLst/>
-          </a:prstGeom>
-          <a:noFill/>
-          <a:ln/>
-        </p:spPr>
-        <p:txBody>
-          <a:bodyPr wrap="square" lIns="508" tIns="508" rIns="508" bIns="508" rtlCol="0" anchor="t">
-            <a:normAutofit/>
-          </a:bodyPr>
-          <a:lstStyle/>
           <a:p>
             <a:pPr marL="228600" indent="-228600">
               <a:buSzPct val="100000"/>
@@ -6075,7 +5540,7 @@
                 <a:ea typeface="Aptos" pitchFamily="34" charset="-122"/>
                 <a:cs typeface="Aptos" pitchFamily="34" charset="-120"/>
               </a:rPr>
-              <a:t>test najprv zlyhá</a:t>
+              <a:t>ktorá vetva sa vykonala?</a:t>
             </a:r>
             <a:endParaRPr lang="en-US" sz="1800" dirty="0"/>
           </a:p>
@@ -6093,7 +5558,7 @@
                 <a:ea typeface="Aptos" pitchFamily="34" charset="-122"/>
                 <a:cs typeface="Aptos" pitchFamily="34" charset="-120"/>
               </a:rPr>
-              <a:t>oprava zmení implementáciu</a:t>
+              <a:t>kto zavolal túto funkciu?</a:t>
             </a:r>
             <a:endParaRPr lang="en-US" sz="1800" dirty="0"/>
           </a:p>
@@ -6111,7 +5576,7 @@
                 <a:ea typeface="Aptos" pitchFamily="34" charset="-122"/>
                 <a:cs typeface="Aptos" pitchFamily="34" charset="-120"/>
               </a:rPr>
-              <a:t>test potom chráni pred návratom chyby</a:t>
+              <a:t>čo sa zmenilo od posledného kroku?</a:t>
             </a:r>
             <a:endParaRPr lang="en-US" sz="1800" dirty="0"/>
           </a:p>
@@ -6351,8 +5816,76 @@
         </p:nvSpPr>
         <p:spPr>
           <a:xfrm>
-            <a:off x="713232" y="1353312"/>
-            <a:ext cx="1280160" cy="548640"/>
+            <a:off x="658368" y="932688"/>
+            <a:ext cx="10789920" cy="713232"/>
+          </a:xfrm>
+          <a:prstGeom prst="rect">
+            <a:avLst/>
+          </a:prstGeom>
+          <a:noFill/>
+          <a:ln/>
+        </p:spPr>
+        <p:txBody>
+          <a:bodyPr wrap="square" lIns="0" tIns="0" rIns="0" bIns="0" rtlCol="0" anchor="t">
+            <a:normAutofit/>
+          </a:bodyPr>
+          <a:lstStyle/>
+          <a:p>
+            <a:pPr algn="l" indent="0" marL="0">
+              <a:buNone/>
+            </a:pPr>
+            <a:r>
+              <a:rPr lang="en-US" sz="2900" b="1" dirty="0">
+                <a:solidFill>
+                  <a:srgbClr val="16324F"/>
+                </a:solidFill>
+                <a:latin typeface="Aptos" pitchFamily="34" charset="0"/>
+                <a:ea typeface="Aptos" pitchFamily="34" charset="-122"/>
+                <a:cs typeface="Aptos" pitchFamily="34" charset="-120"/>
+              </a:rPr>
+              <a:t>Logging je diagnostika, nie náhodný print</a:t>
+            </a:r>
+            <a:endParaRPr lang="en-US" sz="2900" dirty="0"/>
+          </a:p>
+        </p:txBody>
+      </p:sp>
+      <p:sp>
+        <p:nvSpPr>
+          <p:cNvPr id="9" name="Shape 7"/>
+          <p:cNvSpPr/>
+          <p:nvPr/>
+        </p:nvSpPr>
+        <p:spPr>
+          <a:xfrm>
+            <a:off x="658368" y="1828800"/>
+            <a:ext cx="6812280" cy="4069080"/>
+          </a:xfrm>
+          <a:prstGeom prst="roundRect">
+            <a:avLst>
+              <a:gd name="adj" fmla="val 1348"/>
+            </a:avLst>
+          </a:prstGeom>
+          <a:solidFill>
+            <a:srgbClr val="17212B"/>
+          </a:solidFill>
+          <a:ln w="12700">
+            <a:solidFill>
+              <a:srgbClr val="17212B"/>
+            </a:solidFill>
+            <a:prstDash val="solid"/>
+          </a:ln>
+        </p:spPr>
+      </p:sp>
+      <p:sp>
+        <p:nvSpPr>
+          <p:cNvPr id="10" name="Text 8"/>
+          <p:cNvSpPr/>
+          <p:nvPr/>
+        </p:nvSpPr>
+        <p:spPr>
+          <a:xfrm>
+            <a:off x="868680" y="2029968"/>
+            <a:ext cx="6309360" cy="182880"/>
           </a:xfrm>
           <a:prstGeom prst="rect">
             <a:avLst/>
@@ -6370,30 +5903,30 @@
               <a:buNone/>
             </a:pPr>
             <a:r>
-              <a:rPr lang="en-US" sz="1800" b="1" dirty="0">
-                <a:solidFill>
-                  <a:srgbClr val="1877B9"/>
+              <a:rPr lang="en-US" sz="850" b="1" spc="70" kern="0" dirty="0">
+                <a:solidFill>
+                  <a:srgbClr val="8FD3FF"/>
                 </a:solidFill>
                 <a:latin typeface="Consolas" pitchFamily="34" charset="0"/>
                 <a:ea typeface="Consolas" pitchFamily="34" charset="-122"/>
                 <a:cs typeface="Consolas" pitchFamily="34" charset="-120"/>
               </a:rPr>
-              <a:t>03</a:t>
-            </a:r>
-            <a:endParaRPr lang="en-US" sz="1800" dirty="0"/>
-          </a:p>
-        </p:txBody>
-      </p:sp>
-      <p:sp>
-        <p:nvSpPr>
-          <p:cNvPr id="9" name="Text 7"/>
-          <p:cNvSpPr/>
-          <p:nvPr/>
-        </p:nvSpPr>
-        <p:spPr>
-          <a:xfrm>
-            <a:off x="713232" y="2011680"/>
-            <a:ext cx="9875520" cy="822960"/>
+              <a:t>python</a:t>
+            </a:r>
+            <a:endParaRPr lang="en-US" sz="850" dirty="0"/>
+          </a:p>
+        </p:txBody>
+      </p:sp>
+      <p:sp>
+        <p:nvSpPr>
+          <p:cNvPr id="11" name="Text 9"/>
+          <p:cNvSpPr/>
+          <p:nvPr/>
+        </p:nvSpPr>
+        <p:spPr>
+          <a:xfrm>
+            <a:off x="877824" y="2395728"/>
+            <a:ext cx="6327648" cy="3246120"/>
           </a:xfrm>
           <a:prstGeom prst="rect">
             <a:avLst/>
@@ -6411,78 +5944,92 @@
               <a:buNone/>
             </a:pPr>
             <a:r>
-              <a:rPr lang="en-US" sz="3700" b="1" dirty="0">
-                <a:solidFill>
-                  <a:srgbClr val="16324F"/>
-                </a:solidFill>
-                <a:latin typeface="Aptos" pitchFamily="34" charset="0"/>
-                <a:ea typeface="Aptos" pitchFamily="34" charset="-122"/>
-                <a:cs typeface="Aptos" pitchFamily="34" charset="-120"/>
-              </a:rPr>
-              <a:t>Debugging</a:t>
-            </a:r>
-            <a:endParaRPr lang="en-US" sz="3700" dirty="0"/>
-          </a:p>
-        </p:txBody>
-      </p:sp>
-      <p:sp>
-        <p:nvSpPr>
-          <p:cNvPr id="10" name="Text 8"/>
-          <p:cNvSpPr/>
-          <p:nvPr/>
-        </p:nvSpPr>
-        <p:spPr>
-          <a:xfrm>
-            <a:off x="749808" y="3063240"/>
-            <a:ext cx="7863840" cy="411480"/>
-          </a:xfrm>
-          <a:prstGeom prst="rect">
-            <a:avLst/>
-          </a:prstGeom>
-          <a:noFill/>
-          <a:ln/>
-        </p:spPr>
-        <p:txBody>
-          <a:bodyPr wrap="square" lIns="0" tIns="0" rIns="0" bIns="0" rtlCol="0" anchor="t">
-            <a:normAutofit/>
-          </a:bodyPr>
-          <a:lstStyle/>
+              <a:rPr lang="en-US" sz="1650" dirty="0">
+                <a:solidFill>
+                  <a:srgbClr val="F4F7FA"/>
+                </a:solidFill>
+                <a:latin typeface="Consolas" pitchFamily="34" charset="0"/>
+                <a:ea typeface="Consolas" pitchFamily="34" charset="-122"/>
+                <a:cs typeface="Consolas" pitchFamily="34" charset="-120"/>
+              </a:rPr>
+              <a:t>import logging</a:t>
+            </a:r>
+            <a:endParaRPr lang="en-US" sz="1650" dirty="0"/>
+          </a:p>
           <a:p>
             <a:pPr algn="l" indent="0" marL="0">
               <a:buNone/>
             </a:pPr>
-            <a:r>
-              <a:rPr lang="en-US" sz="2000" dirty="0">
-                <a:solidFill>
-                  <a:srgbClr val="5E6B78"/>
-                </a:solidFill>
-                <a:latin typeface="Aptos" pitchFamily="34" charset="0"/>
-                <a:ea typeface="Aptos" pitchFamily="34" charset="-122"/>
-                <a:cs typeface="Aptos" pitchFamily="34" charset="-120"/>
-              </a:rPr>
-              <a:t>Nie hádanie. Získavanie dôkazu o stave programu.</a:t>
-            </a:r>
-            <a:endParaRPr lang="en-US" sz="2000" dirty="0"/>
-          </a:p>
-        </p:txBody>
-      </p:sp>
-      <p:sp>
-        <p:nvSpPr>
-          <p:cNvPr id="11" name="Shape 9"/>
-          <p:cNvSpPr/>
-          <p:nvPr/>
-        </p:nvSpPr>
-        <p:spPr>
-          <a:xfrm>
-            <a:off x="731520" y="3977640"/>
-            <a:ext cx="2834640" cy="128016"/>
-          </a:xfrm>
-          <a:prstGeom prst="rect">
-            <a:avLst/>
-          </a:prstGeom>
-          <a:solidFill>
-            <a:srgbClr val="1877B9"/>
-          </a:solidFill>
+            <a:endParaRPr lang="en-US" sz="1650" dirty="0"/>
+          </a:p>
+          <a:p>
+            <a:pPr algn="l" indent="0" marL="0">
+              <a:buNone/>
+            </a:pPr>
+            <a:r>
+              <a:rPr lang="en-US" sz="1650" dirty="0">
+                <a:solidFill>
+                  <a:srgbClr val="F4F7FA"/>
+                </a:solidFill>
+                <a:latin typeface="Consolas" pitchFamily="34" charset="0"/>
+                <a:ea typeface="Consolas" pitchFamily="34" charset="-122"/>
+                <a:cs typeface="Consolas" pitchFamily="34" charset="-120"/>
+              </a:rPr>
+              <a:t>logging.info("Processing %s records", len(records))</a:t>
+            </a:r>
+            <a:endParaRPr lang="en-US" sz="1650" dirty="0"/>
+          </a:p>
+          <a:p>
+            <a:pPr algn="l" indent="0" marL="0">
+              <a:buNone/>
+            </a:pPr>
+            <a:r>
+              <a:rPr lang="en-US" sz="1650" dirty="0">
+                <a:solidFill>
+                  <a:srgbClr val="F4F7FA"/>
+                </a:solidFill>
+                <a:latin typeface="Consolas" pitchFamily="34" charset="0"/>
+                <a:ea typeface="Consolas" pitchFamily="34" charset="-122"/>
+                <a:cs typeface="Consolas" pitchFamily="34" charset="-120"/>
+              </a:rPr>
+              <a:t>logging.warning("Unknown course: %s", course)</a:t>
+            </a:r>
+            <a:endParaRPr lang="en-US" sz="1650" dirty="0"/>
+          </a:p>
+          <a:p>
+            <a:pPr algn="l" indent="0" marL="0">
+              <a:buNone/>
+            </a:pPr>
+            <a:r>
+              <a:rPr lang="en-US" sz="1650" dirty="0">
+                <a:solidFill>
+                  <a:srgbClr val="F4F7FA"/>
+                </a:solidFill>
+                <a:latin typeface="Consolas" pitchFamily="34" charset="0"/>
+                <a:ea typeface="Consolas" pitchFamily="34" charset="-122"/>
+                <a:cs typeface="Consolas" pitchFamily="34" charset="-120"/>
+              </a:rPr>
+              <a:t>logging.error("Cannot read %s", path)</a:t>
+            </a:r>
+            <a:endParaRPr lang="en-US" sz="1650" dirty="0"/>
+          </a:p>
+        </p:txBody>
+      </p:sp>
+      <p:sp>
+        <p:nvSpPr>
+          <p:cNvPr id="12" name="Shape 10"/>
+          <p:cNvSpPr/>
+          <p:nvPr/>
+        </p:nvSpPr>
+        <p:spPr>
+          <a:xfrm>
+            <a:off x="7909560" y="1901952"/>
+            <a:ext cx="0" cy="3566160"/>
+          </a:xfrm>
+          <a:prstGeom prst="line">
+            <a:avLst/>
+          </a:prstGeom>
+          <a:noFill/>
           <a:ln w="12700">
             <a:solidFill>
               <a:srgbClr val="1877B9"/>
@@ -6490,6 +6037,47 @@
             <a:prstDash val="solid"/>
           </a:ln>
         </p:spPr>
+      </p:sp>
+      <p:sp>
+        <p:nvSpPr>
+          <p:cNvPr id="13" name="Text 11"/>
+          <p:cNvSpPr/>
+          <p:nvPr/>
+        </p:nvSpPr>
+        <p:spPr>
+          <a:xfrm>
+            <a:off x="8229600" y="2130552"/>
+            <a:ext cx="2743200" cy="2468880"/>
+          </a:xfrm>
+          <a:prstGeom prst="rect">
+            <a:avLst/>
+          </a:prstGeom>
+          <a:noFill/>
+          <a:ln/>
+        </p:spPr>
+        <p:txBody>
+          <a:bodyPr wrap="square" lIns="0" tIns="0" rIns="0" bIns="0" rtlCol="0" anchor="t">
+            <a:normAutofit/>
+          </a:bodyPr>
+          <a:lstStyle/>
+          <a:p>
+            <a:pPr algn="l" indent="0" marL="0">
+              <a:buNone/>
+            </a:pPr>
+            <a:r>
+              <a:rPr lang="en-US" sz="1800" dirty="0">
+                <a:solidFill>
+                  <a:srgbClr val="5E6B78"/>
+                </a:solidFill>
+                <a:latin typeface="Aptos" pitchFamily="34" charset="0"/>
+                <a:ea typeface="Aptos" pitchFamily="34" charset="-122"/>
+                <a:cs typeface="Aptos" pitchFamily="34" charset="-120"/>
+              </a:rPr>
+              <a:t>Úrovne logov umožnia zapnúť diagnostiku podľa potreby bez miešania s používateľským výstupom.</a:t>
+            </a:r>
+            <a:endParaRPr lang="en-US" sz="1800" dirty="0"/>
+          </a:p>
+        </p:txBody>
       </p:sp>
     </p:spTree>
   </p:cSld>
@@ -6752,2218 +6340,7 @@
                 <a:ea typeface="Aptos" pitchFamily="34" charset="-122"/>
                 <a:cs typeface="Aptos" pitchFamily="34" charset="-120"/>
               </a:rPr>
-              <a:t>Traceback čítajte od konca</a:t>
-            </a:r>
-            <a:endParaRPr lang="en-US" sz="2900" dirty="0"/>
-          </a:p>
-        </p:txBody>
-      </p:sp>
-      <p:sp>
-        <p:nvSpPr>
-          <p:cNvPr id="9" name="Shape 7"/>
-          <p:cNvSpPr/>
-          <p:nvPr/>
-        </p:nvSpPr>
-        <p:spPr>
-          <a:xfrm>
-            <a:off x="731520" y="2834640"/>
-            <a:ext cx="2450592" cy="1042416"/>
-          </a:xfrm>
-          <a:prstGeom prst="roundRect">
-            <a:avLst>
-              <a:gd name="adj" fmla="val 4386"/>
-            </a:avLst>
-          </a:prstGeom>
-          <a:solidFill>
-            <a:srgbClr val="F3F6F8"/>
-          </a:solidFill>
-          <a:ln w="12700">
-            <a:solidFill>
-              <a:srgbClr val="D8E0E6"/>
-            </a:solidFill>
-            <a:prstDash val="solid"/>
-          </a:ln>
-        </p:spPr>
-      </p:sp>
-      <p:sp>
-        <p:nvSpPr>
-          <p:cNvPr id="10" name="Text 8"/>
-          <p:cNvSpPr/>
-          <p:nvPr/>
-        </p:nvSpPr>
-        <p:spPr>
-          <a:xfrm>
-            <a:off x="877824" y="3063240"/>
-            <a:ext cx="2157984" cy="548640"/>
-          </a:xfrm>
-          <a:prstGeom prst="rect">
-            <a:avLst/>
-          </a:prstGeom>
-          <a:noFill/>
-          <a:ln/>
-        </p:spPr>
-        <p:txBody>
-          <a:bodyPr wrap="square" lIns="0" tIns="0" rIns="0" bIns="0" rtlCol="0" anchor="ctr">
-            <a:normAutofit/>
-          </a:bodyPr>
-          <a:lstStyle/>
-          <a:p>
-            <a:pPr algn="ctr" indent="0" marL="0">
-              <a:buNone/>
-            </a:pPr>
-            <a:r>
-              <a:rPr lang="en-US" sz="1700" b="1" dirty="0">
-                <a:solidFill>
-                  <a:srgbClr val="16324F"/>
-                </a:solidFill>
-                <a:latin typeface="Aptos" pitchFamily="34" charset="0"/>
-                <a:ea typeface="Aptos" pitchFamily="34" charset="-122"/>
-                <a:cs typeface="Aptos" pitchFamily="34" charset="-120"/>
-              </a:rPr>
-              <a:t>typ výnimky</a:t>
-            </a:r>
-            <a:endParaRPr lang="en-US" sz="1700" dirty="0"/>
-          </a:p>
-        </p:txBody>
-      </p:sp>
-      <p:sp>
-        <p:nvSpPr>
-          <p:cNvPr id="11" name="Shape 9"/>
-          <p:cNvSpPr/>
-          <p:nvPr/>
-        </p:nvSpPr>
-        <p:spPr>
-          <a:xfrm>
-            <a:off x="3319272" y="3209544"/>
-            <a:ext cx="182880" cy="292608"/>
-          </a:xfrm>
-          <a:prstGeom prst="chevron">
-            <a:avLst/>
-          </a:prstGeom>
-          <a:solidFill>
-            <a:srgbClr val="1877B9"/>
-          </a:solidFill>
-          <a:ln w="12700">
-            <a:solidFill>
-              <a:srgbClr val="1877B9"/>
-            </a:solidFill>
-            <a:prstDash val="solid"/>
-          </a:ln>
-        </p:spPr>
-      </p:sp>
-      <p:sp>
-        <p:nvSpPr>
-          <p:cNvPr id="12" name="Shape 10"/>
-          <p:cNvSpPr/>
-          <p:nvPr/>
-        </p:nvSpPr>
-        <p:spPr>
-          <a:xfrm>
-            <a:off x="3593592" y="2834640"/>
-            <a:ext cx="2450592" cy="1042416"/>
-          </a:xfrm>
-          <a:prstGeom prst="roundRect">
-            <a:avLst>
-              <a:gd name="adj" fmla="val 4386"/>
-            </a:avLst>
-          </a:prstGeom>
-          <a:solidFill>
-            <a:srgbClr val="EAF3F7"/>
-          </a:solidFill>
-          <a:ln w="12700">
-            <a:solidFill>
-              <a:srgbClr val="9DCCDD"/>
-            </a:solidFill>
-            <a:prstDash val="solid"/>
-          </a:ln>
-        </p:spPr>
-      </p:sp>
-      <p:sp>
-        <p:nvSpPr>
-          <p:cNvPr id="13" name="Text 11"/>
-          <p:cNvSpPr/>
-          <p:nvPr/>
-        </p:nvSpPr>
-        <p:spPr>
-          <a:xfrm>
-            <a:off x="3739896" y="3063240"/>
-            <a:ext cx="2157984" cy="548640"/>
-          </a:xfrm>
-          <a:prstGeom prst="rect">
-            <a:avLst/>
-          </a:prstGeom>
-          <a:noFill/>
-          <a:ln/>
-        </p:spPr>
-        <p:txBody>
-          <a:bodyPr wrap="square" lIns="0" tIns="0" rIns="0" bIns="0" rtlCol="0" anchor="ctr">
-            <a:normAutofit/>
-          </a:bodyPr>
-          <a:lstStyle/>
-          <a:p>
-            <a:pPr algn="ctr" indent="0" marL="0">
-              <a:buNone/>
-            </a:pPr>
-            <a:r>
-              <a:rPr lang="en-US" sz="1700" b="1" dirty="0">
-                <a:solidFill>
-                  <a:srgbClr val="16324F"/>
-                </a:solidFill>
-                <a:latin typeface="Aptos" pitchFamily="34" charset="0"/>
-                <a:ea typeface="Aptos" pitchFamily="34" charset="-122"/>
-                <a:cs typeface="Aptos" pitchFamily="34" charset="-120"/>
-              </a:rPr>
-              <a:t>správa</a:t>
-            </a:r>
-            <a:endParaRPr lang="en-US" sz="1700" dirty="0"/>
-          </a:p>
-        </p:txBody>
-      </p:sp>
-      <p:sp>
-        <p:nvSpPr>
-          <p:cNvPr id="14" name="Shape 12"/>
-          <p:cNvSpPr/>
-          <p:nvPr/>
-        </p:nvSpPr>
-        <p:spPr>
-          <a:xfrm>
-            <a:off x="6181344" y="3209544"/>
-            <a:ext cx="182880" cy="292608"/>
-          </a:xfrm>
-          <a:prstGeom prst="chevron">
-            <a:avLst/>
-          </a:prstGeom>
-          <a:solidFill>
-            <a:srgbClr val="1877B9"/>
-          </a:solidFill>
-          <a:ln w="12700">
-            <a:solidFill>
-              <a:srgbClr val="1877B9"/>
-            </a:solidFill>
-            <a:prstDash val="solid"/>
-          </a:ln>
-        </p:spPr>
-      </p:sp>
-      <p:sp>
-        <p:nvSpPr>
-          <p:cNvPr id="15" name="Shape 13"/>
-          <p:cNvSpPr/>
-          <p:nvPr/>
-        </p:nvSpPr>
-        <p:spPr>
-          <a:xfrm>
-            <a:off x="6455664" y="2834640"/>
-            <a:ext cx="2450592" cy="1042416"/>
-          </a:xfrm>
-          <a:prstGeom prst="roundRect">
-            <a:avLst>
-              <a:gd name="adj" fmla="val 4386"/>
-            </a:avLst>
-          </a:prstGeom>
-          <a:solidFill>
-            <a:srgbClr val="F3F6F8"/>
-          </a:solidFill>
-          <a:ln w="12700">
-            <a:solidFill>
-              <a:srgbClr val="D8E0E6"/>
-            </a:solidFill>
-            <a:prstDash val="solid"/>
-          </a:ln>
-        </p:spPr>
-      </p:sp>
-      <p:sp>
-        <p:nvSpPr>
-          <p:cNvPr id="16" name="Text 14"/>
-          <p:cNvSpPr/>
-          <p:nvPr/>
-        </p:nvSpPr>
-        <p:spPr>
-          <a:xfrm>
-            <a:off x="6601968" y="3063240"/>
-            <a:ext cx="2157984" cy="548640"/>
-          </a:xfrm>
-          <a:prstGeom prst="rect">
-            <a:avLst/>
-          </a:prstGeom>
-          <a:noFill/>
-          <a:ln/>
-        </p:spPr>
-        <p:txBody>
-          <a:bodyPr wrap="square" lIns="0" tIns="0" rIns="0" bIns="0" rtlCol="0" anchor="ctr">
-            <a:normAutofit/>
-          </a:bodyPr>
-          <a:lstStyle/>
-          <a:p>
-            <a:pPr algn="ctr" indent="0" marL="0">
-              <a:buNone/>
-            </a:pPr>
-            <a:r>
-              <a:rPr lang="en-US" sz="1700" b="1" dirty="0">
-                <a:solidFill>
-                  <a:srgbClr val="16324F"/>
-                </a:solidFill>
-                <a:latin typeface="Aptos" pitchFamily="34" charset="0"/>
-                <a:ea typeface="Aptos" pitchFamily="34" charset="-122"/>
-                <a:cs typeface="Aptos" pitchFamily="34" charset="-120"/>
-              </a:rPr>
-              <a:t>váš riadok</a:t>
-            </a:r>
-            <a:endParaRPr lang="en-US" sz="1700" dirty="0"/>
-          </a:p>
-        </p:txBody>
-      </p:sp>
-      <p:sp>
-        <p:nvSpPr>
-          <p:cNvPr id="17" name="Shape 15"/>
-          <p:cNvSpPr/>
-          <p:nvPr/>
-        </p:nvSpPr>
-        <p:spPr>
-          <a:xfrm>
-            <a:off x="9043416" y="3209544"/>
-            <a:ext cx="182880" cy="292608"/>
-          </a:xfrm>
-          <a:prstGeom prst="chevron">
-            <a:avLst/>
-          </a:prstGeom>
-          <a:solidFill>
-            <a:srgbClr val="1877B9"/>
-          </a:solidFill>
-          <a:ln w="12700">
-            <a:solidFill>
-              <a:srgbClr val="1877B9"/>
-            </a:solidFill>
-            <a:prstDash val="solid"/>
-          </a:ln>
-        </p:spPr>
-      </p:sp>
-      <p:sp>
-        <p:nvSpPr>
-          <p:cNvPr id="18" name="Shape 16"/>
-          <p:cNvSpPr/>
-          <p:nvPr/>
-        </p:nvSpPr>
-        <p:spPr>
-          <a:xfrm>
-            <a:off x="9317736" y="2834640"/>
-            <a:ext cx="2450592" cy="1042416"/>
-          </a:xfrm>
-          <a:prstGeom prst="roundRect">
-            <a:avLst>
-              <a:gd name="adj" fmla="val 4386"/>
-            </a:avLst>
-          </a:prstGeom>
-          <a:solidFill>
-            <a:srgbClr val="EAF3F7"/>
-          </a:solidFill>
-          <a:ln w="12700">
-            <a:solidFill>
-              <a:srgbClr val="9DCCDD"/>
-            </a:solidFill>
-            <a:prstDash val="solid"/>
-          </a:ln>
-        </p:spPr>
-      </p:sp>
-      <p:sp>
-        <p:nvSpPr>
-          <p:cNvPr id="19" name="Text 17"/>
-          <p:cNvSpPr/>
-          <p:nvPr/>
-        </p:nvSpPr>
-        <p:spPr>
-          <a:xfrm>
-            <a:off x="9464040" y="3063240"/>
-            <a:ext cx="2157984" cy="548640"/>
-          </a:xfrm>
-          <a:prstGeom prst="rect">
-            <a:avLst/>
-          </a:prstGeom>
-          <a:noFill/>
-          <a:ln/>
-        </p:spPr>
-        <p:txBody>
-          <a:bodyPr wrap="square" lIns="0" tIns="0" rIns="0" bIns="0" rtlCol="0" anchor="ctr">
-            <a:normAutofit/>
-          </a:bodyPr>
-          <a:lstStyle/>
-          <a:p>
-            <a:pPr algn="ctr" indent="0" marL="0">
-              <a:buNone/>
-            </a:pPr>
-            <a:r>
-              <a:rPr lang="en-US" sz="1700" b="1" dirty="0">
-                <a:solidFill>
-                  <a:srgbClr val="16324F"/>
-                </a:solidFill>
-                <a:latin typeface="Aptos" pitchFamily="34" charset="0"/>
-                <a:ea typeface="Aptos" pitchFamily="34" charset="-122"/>
-                <a:cs typeface="Aptos" pitchFamily="34" charset="-120"/>
-              </a:rPr>
-              <a:t>cesta k príčine</a:t>
-            </a:r>
-            <a:endParaRPr lang="en-US" sz="1700" dirty="0"/>
-          </a:p>
-        </p:txBody>
-      </p:sp>
-    </p:spTree>
-  </p:cSld>
-  <p:clrMapOvr>
-    <a:masterClrMapping/>
-  </p:clrMapOvr>
-</p:sld>
-</file>
-
-<file path=ppt/slides/slide18.xml><?xml version="1.0" encoding="utf-8"?>
-<p:sld xmlns:a="http://schemas.openxmlformats.org/drawingml/2006/main" xmlns:r="http://schemas.openxmlformats.org/officeDocument/2006/relationships" xmlns:p="http://schemas.openxmlformats.org/presentationml/2006/main">
-  <p:cSld name="Slide 18">
-    <p:bg>
-      <p:bgPr>
-        <a:solidFill>
-          <a:srgbClr val="FFFFFF"/>
-        </a:solidFill>
-      </p:bgPr>
-    </p:bg>
-    <p:spTree>
-      <p:nvGrpSpPr>
-        <p:cNvPr id="1" name=""/>
-        <p:cNvGrpSpPr/>
-        <p:nvPr/>
-      </p:nvGrpSpPr>
-      <p:grpSpPr>
-        <a:xfrm>
-          <a:off x="0" y="0"/>
-          <a:ext cx="0" cy="0"/>
-          <a:chOff x="0" y="0"/>
-          <a:chExt cx="0" cy="0"/>
-        </a:xfrm>
-      </p:grpSpPr>
-      <p:sp>
-        <p:nvSpPr>
-          <p:cNvPr id="2" name="Shape 0"/>
-          <p:cNvSpPr/>
-          <p:nvPr/>
-        </p:nvSpPr>
-        <p:spPr>
-          <a:xfrm>
-            <a:off x="0" y="0"/>
-            <a:ext cx="12191695" cy="155448"/>
-          </a:xfrm>
-          <a:prstGeom prst="rect">
-            <a:avLst/>
-          </a:prstGeom>
-          <a:solidFill>
-            <a:srgbClr val="1877B9"/>
-          </a:solidFill>
-          <a:ln w="12700">
-            <a:solidFill>
-              <a:srgbClr val="1877B9"/>
-            </a:solidFill>
-            <a:prstDash val="solid"/>
-          </a:ln>
-        </p:spPr>
-      </p:sp>
-      <p:sp>
-        <p:nvSpPr>
-          <p:cNvPr id="3" name="Text 1"/>
-          <p:cNvSpPr/>
-          <p:nvPr/>
-        </p:nvSpPr>
-        <p:spPr>
-          <a:xfrm>
-            <a:off x="566928" y="320040"/>
-            <a:ext cx="4663440" cy="182880"/>
-          </a:xfrm>
-          <a:prstGeom prst="rect">
-            <a:avLst/>
-          </a:prstGeom>
-          <a:noFill/>
-          <a:ln/>
-        </p:spPr>
-        <p:txBody>
-          <a:bodyPr wrap="square" lIns="0" tIns="0" rIns="0" bIns="0" rtlCol="0" anchor="ctr">
-            <a:normAutofit/>
-          </a:bodyPr>
-          <a:lstStyle/>
-          <a:p>
-            <a:pPr algn="l" indent="0" marL="0">
-              <a:buNone/>
-            </a:pPr>
-            <a:r>
-              <a:rPr lang="en-US" sz="900" b="1" spc="80" kern="0" dirty="0">
-                <a:solidFill>
-                  <a:srgbClr val="1877B9"/>
-                </a:solidFill>
-                <a:latin typeface="Aptos" pitchFamily="34" charset="0"/>
-                <a:ea typeface="Aptos" pitchFamily="34" charset="-122"/>
-                <a:cs typeface="Aptos" pitchFamily="34" charset="-120"/>
-              </a:rPr>
-              <a:t>PROGRAMOVANIE V PYTHONE</a:t>
-            </a:r>
-            <a:endParaRPr lang="en-US" sz="900" dirty="0"/>
-          </a:p>
-        </p:txBody>
-      </p:sp>
-      <p:sp>
-        <p:nvSpPr>
-          <p:cNvPr id="4" name="Text 2"/>
-          <p:cNvSpPr/>
-          <p:nvPr/>
-        </p:nvSpPr>
-        <p:spPr>
-          <a:xfrm>
-            <a:off x="9829800" y="320040"/>
-            <a:ext cx="1783080" cy="182880"/>
-          </a:xfrm>
-          <a:prstGeom prst="rect">
-            <a:avLst/>
-          </a:prstGeom>
-          <a:noFill/>
-          <a:ln/>
-        </p:spPr>
-        <p:txBody>
-          <a:bodyPr wrap="square" lIns="0" tIns="0" rIns="0" bIns="0" rtlCol="0" anchor="ctr">
-            <a:normAutofit/>
-          </a:bodyPr>
-          <a:lstStyle/>
-          <a:p>
-            <a:pPr algn="r" indent="0" marL="0">
-              <a:buNone/>
-            </a:pPr>
-            <a:r>
-              <a:rPr lang="en-US" sz="900" b="1" dirty="0">
-                <a:solidFill>
-                  <a:srgbClr val="5E6B78"/>
-                </a:solidFill>
-                <a:latin typeface="Consolas" pitchFamily="34" charset="0"/>
-                <a:ea typeface="Consolas" pitchFamily="34" charset="-122"/>
-                <a:cs typeface="Consolas" pitchFamily="34" charset="-120"/>
-              </a:rPr>
-              <a:t>PREDNÁŠKA 04</a:t>
-            </a:r>
-            <a:endParaRPr lang="en-US" sz="900" dirty="0"/>
-          </a:p>
-        </p:txBody>
-      </p:sp>
-      <p:sp>
-        <p:nvSpPr>
-          <p:cNvPr id="5" name="Shape 3"/>
-          <p:cNvSpPr/>
-          <p:nvPr/>
-        </p:nvSpPr>
-        <p:spPr>
-          <a:xfrm>
-            <a:off x="566928" y="658368"/>
-            <a:ext cx="11045952" cy="0"/>
-          </a:xfrm>
-          <a:prstGeom prst="line">
-            <a:avLst/>
-          </a:prstGeom>
-          <a:noFill/>
-          <a:ln w="12700">
-            <a:solidFill>
-              <a:srgbClr val="D8E0E6"/>
-            </a:solidFill>
-            <a:prstDash val="solid"/>
-          </a:ln>
-        </p:spPr>
-      </p:sp>
-      <p:sp>
-        <p:nvSpPr>
-          <p:cNvPr id="6" name="Shape 4"/>
-          <p:cNvSpPr/>
-          <p:nvPr/>
-        </p:nvSpPr>
-        <p:spPr>
-          <a:xfrm>
-            <a:off x="566928" y="6419088"/>
-            <a:ext cx="11045952" cy="0"/>
-          </a:xfrm>
-          <a:prstGeom prst="line">
-            <a:avLst/>
-          </a:prstGeom>
-          <a:noFill/>
-          <a:ln w="12700">
-            <a:solidFill>
-              <a:srgbClr val="D8E0E6"/>
-            </a:solidFill>
-            <a:prstDash val="solid"/>
-          </a:ln>
-        </p:spPr>
-      </p:sp>
-      <p:sp>
-        <p:nvSpPr>
-          <p:cNvPr id="7" name="Text 5"/>
-          <p:cNvSpPr/>
-          <p:nvPr/>
-        </p:nvSpPr>
-        <p:spPr>
-          <a:xfrm>
-            <a:off x="11109960" y="6501384"/>
-            <a:ext cx="457200" cy="146304"/>
-          </a:xfrm>
-          <a:prstGeom prst="rect">
-            <a:avLst/>
-          </a:prstGeom>
-          <a:noFill/>
-          <a:ln/>
-        </p:spPr>
-        <p:txBody>
-          <a:bodyPr wrap="square" lIns="0" tIns="0" rIns="0" bIns="0" rtlCol="0" anchor="ctr">
-            <a:normAutofit/>
-          </a:bodyPr>
-          <a:lstStyle/>
-          <a:p>
-            <a:pPr algn="r" indent="0" marL="0">
-              <a:buNone/>
-            </a:pPr>
-            <a:r>
-              <a:rPr lang="en-US" sz="800" dirty="0">
-                <a:solidFill>
-                  <a:srgbClr val="5E6B78"/>
-                </a:solidFill>
-                <a:latin typeface="Consolas" pitchFamily="34" charset="0"/>
-                <a:ea typeface="Consolas" pitchFamily="34" charset="-122"/>
-                <a:cs typeface="Consolas" pitchFamily="34" charset="-120"/>
-              </a:rPr>
-              <a:t>18</a:t>
-            </a:r>
-            <a:endParaRPr lang="en-US" sz="800" dirty="0"/>
-          </a:p>
-        </p:txBody>
-      </p:sp>
-      <p:sp>
-        <p:nvSpPr>
-          <p:cNvPr id="8" name="Text 6"/>
-          <p:cNvSpPr/>
-          <p:nvPr/>
-        </p:nvSpPr>
-        <p:spPr>
-          <a:xfrm>
-            <a:off x="658368" y="932688"/>
-            <a:ext cx="10789920" cy="713232"/>
-          </a:xfrm>
-          <a:prstGeom prst="rect">
-            <a:avLst/>
-          </a:prstGeom>
-          <a:noFill/>
-          <a:ln/>
-        </p:spPr>
-        <p:txBody>
-          <a:bodyPr wrap="square" lIns="0" tIns="0" rIns="0" bIns="0" rtlCol="0" anchor="t">
-            <a:normAutofit/>
-          </a:bodyPr>
-          <a:lstStyle/>
-          <a:p>
-            <a:pPr algn="l" indent="0" marL="0">
-              <a:buNone/>
-            </a:pPr>
-            <a:r>
-              <a:rPr lang="en-US" sz="2900" b="1" dirty="0">
-                <a:solidFill>
-                  <a:srgbClr val="16324F"/>
-                </a:solidFill>
-                <a:latin typeface="Aptos" pitchFamily="34" charset="0"/>
-                <a:ea typeface="Aptos" pitchFamily="34" charset="-122"/>
-                <a:cs typeface="Aptos" pitchFamily="34" charset="-120"/>
-              </a:rPr>
-              <a:t>Breakpoint je otázka</a:t>
-            </a:r>
-            <a:endParaRPr lang="en-US" sz="2900" dirty="0"/>
-          </a:p>
-        </p:txBody>
-      </p:sp>
-      <p:sp>
-        <p:nvSpPr>
-          <p:cNvPr id="9" name="Text 7"/>
-          <p:cNvSpPr/>
-          <p:nvPr/>
-        </p:nvSpPr>
-        <p:spPr>
-          <a:xfrm>
-            <a:off x="868680" y="1938528"/>
-            <a:ext cx="9921240" cy="3886200"/>
-          </a:xfrm>
-          <a:prstGeom prst="rect">
-            <a:avLst/>
-          </a:prstGeom>
-          <a:noFill/>
-          <a:ln/>
-        </p:spPr>
-        <p:txBody>
-          <a:bodyPr wrap="square" lIns="508" tIns="508" rIns="508" bIns="508" rtlCol="0" anchor="t">
-            <a:normAutofit/>
-          </a:bodyPr>
-          <a:lstStyle/>
-          <a:p>
-            <a:pPr marL="228600" indent="-228600">
-              <a:buSzPct val="100000"/>
-              <a:buChar char="•"/>
-            </a:pPr>
-            <a:r>
-              <a:rPr lang="en-US" sz="1800" dirty="0">
-                <a:solidFill>
-                  <a:srgbClr val="18212B"/>
-                </a:solidFill>
-                <a:latin typeface="Aptos" pitchFamily="34" charset="0"/>
-                <a:ea typeface="Aptos" pitchFamily="34" charset="-122"/>
-                <a:cs typeface="Aptos" pitchFamily="34" charset="-120"/>
-              </a:rPr>
-              <a:t>akú hodnotu má premenná práve teraz?</a:t>
-            </a:r>
-            <a:endParaRPr lang="en-US" sz="1800" dirty="0"/>
-          </a:p>
-          <a:p>
-            <a:pPr marL="228600" indent="-228600">
-              <a:buSzPct val="100000"/>
-              <a:buChar char="•"/>
-            </a:pPr>
-            <a:r>
-              <a:rPr lang="en-US" sz="1800" dirty="0">
-                <a:solidFill>
-                  <a:srgbClr val="18212B"/>
-                </a:solidFill>
-                <a:latin typeface="Aptos" pitchFamily="34" charset="0"/>
-                <a:ea typeface="Aptos" pitchFamily="34" charset="-122"/>
-                <a:cs typeface="Aptos" pitchFamily="34" charset="-120"/>
-              </a:rPr>
-              <a:t>ktorá vetva sa vykonala?</a:t>
-            </a:r>
-            <a:endParaRPr lang="en-US" sz="1800" dirty="0"/>
-          </a:p>
-          <a:p>
-            <a:pPr marL="228600" indent="-228600">
-              <a:buSzPct val="100000"/>
-              <a:buChar char="•"/>
-            </a:pPr>
-            <a:r>
-              <a:rPr lang="en-US" sz="1800" dirty="0">
-                <a:solidFill>
-                  <a:srgbClr val="18212B"/>
-                </a:solidFill>
-                <a:latin typeface="Aptos" pitchFamily="34" charset="0"/>
-                <a:ea typeface="Aptos" pitchFamily="34" charset="-122"/>
-                <a:cs typeface="Aptos" pitchFamily="34" charset="-120"/>
-              </a:rPr>
-              <a:t>kto zavolal túto funkciu?</a:t>
-            </a:r>
-            <a:endParaRPr lang="en-US" sz="1800" dirty="0"/>
-          </a:p>
-          <a:p>
-            <a:pPr marL="228600" indent="-228600">
-              <a:buSzPct val="100000"/>
-              <a:buChar char="•"/>
-            </a:pPr>
-            <a:r>
-              <a:rPr lang="en-US" sz="1800" dirty="0">
-                <a:solidFill>
-                  <a:srgbClr val="18212B"/>
-                </a:solidFill>
-                <a:latin typeface="Aptos" pitchFamily="34" charset="0"/>
-                <a:ea typeface="Aptos" pitchFamily="34" charset="-122"/>
-                <a:cs typeface="Aptos" pitchFamily="34" charset="-120"/>
-              </a:rPr>
-              <a:t>čo sa zmenilo od posledného kroku?</a:t>
-            </a:r>
-            <a:endParaRPr lang="en-US" sz="1800" dirty="0"/>
-          </a:p>
-        </p:txBody>
-      </p:sp>
-    </p:spTree>
-  </p:cSld>
-  <p:clrMapOvr>
-    <a:masterClrMapping/>
-  </p:clrMapOvr>
-</p:sld>
-</file>
-
-<file path=ppt/slides/slide19.xml><?xml version="1.0" encoding="utf-8"?>
-<p:sld xmlns:a="http://schemas.openxmlformats.org/drawingml/2006/main" xmlns:r="http://schemas.openxmlformats.org/officeDocument/2006/relationships" xmlns:p="http://schemas.openxmlformats.org/presentationml/2006/main">
-  <p:cSld name="Slide 19">
-    <p:bg>
-      <p:bgPr>
-        <a:solidFill>
-          <a:srgbClr val="FFFFFF"/>
-        </a:solidFill>
-      </p:bgPr>
-    </p:bg>
-    <p:spTree>
-      <p:nvGrpSpPr>
-        <p:cNvPr id="1" name=""/>
-        <p:cNvGrpSpPr/>
-        <p:nvPr/>
-      </p:nvGrpSpPr>
-      <p:grpSpPr>
-        <a:xfrm>
-          <a:off x="0" y="0"/>
-          <a:ext cx="0" cy="0"/>
-          <a:chOff x="0" y="0"/>
-          <a:chExt cx="0" cy="0"/>
-        </a:xfrm>
-      </p:grpSpPr>
-      <p:sp>
-        <p:nvSpPr>
-          <p:cNvPr id="2" name="Shape 0"/>
-          <p:cNvSpPr/>
-          <p:nvPr/>
-        </p:nvSpPr>
-        <p:spPr>
-          <a:xfrm>
-            <a:off x="0" y="0"/>
-            <a:ext cx="12191695" cy="155448"/>
-          </a:xfrm>
-          <a:prstGeom prst="rect">
-            <a:avLst/>
-          </a:prstGeom>
-          <a:solidFill>
-            <a:srgbClr val="1877B9"/>
-          </a:solidFill>
-          <a:ln w="12700">
-            <a:solidFill>
-              <a:srgbClr val="1877B9"/>
-            </a:solidFill>
-            <a:prstDash val="solid"/>
-          </a:ln>
-        </p:spPr>
-      </p:sp>
-      <p:sp>
-        <p:nvSpPr>
-          <p:cNvPr id="3" name="Text 1"/>
-          <p:cNvSpPr/>
-          <p:nvPr/>
-        </p:nvSpPr>
-        <p:spPr>
-          <a:xfrm>
-            <a:off x="566928" y="320040"/>
-            <a:ext cx="4663440" cy="182880"/>
-          </a:xfrm>
-          <a:prstGeom prst="rect">
-            <a:avLst/>
-          </a:prstGeom>
-          <a:noFill/>
-          <a:ln/>
-        </p:spPr>
-        <p:txBody>
-          <a:bodyPr wrap="square" lIns="0" tIns="0" rIns="0" bIns="0" rtlCol="0" anchor="ctr">
-            <a:normAutofit/>
-          </a:bodyPr>
-          <a:lstStyle/>
-          <a:p>
-            <a:pPr algn="l" indent="0" marL="0">
-              <a:buNone/>
-            </a:pPr>
-            <a:r>
-              <a:rPr lang="en-US" sz="900" b="1" spc="80" kern="0" dirty="0">
-                <a:solidFill>
-                  <a:srgbClr val="1877B9"/>
-                </a:solidFill>
-                <a:latin typeface="Aptos" pitchFamily="34" charset="0"/>
-                <a:ea typeface="Aptos" pitchFamily="34" charset="-122"/>
-                <a:cs typeface="Aptos" pitchFamily="34" charset="-120"/>
-              </a:rPr>
-              <a:t>PROGRAMOVANIE V PYTHONE</a:t>
-            </a:r>
-            <a:endParaRPr lang="en-US" sz="900" dirty="0"/>
-          </a:p>
-        </p:txBody>
-      </p:sp>
-      <p:sp>
-        <p:nvSpPr>
-          <p:cNvPr id="4" name="Text 2"/>
-          <p:cNvSpPr/>
-          <p:nvPr/>
-        </p:nvSpPr>
-        <p:spPr>
-          <a:xfrm>
-            <a:off x="9829800" y="320040"/>
-            <a:ext cx="1783080" cy="182880"/>
-          </a:xfrm>
-          <a:prstGeom prst="rect">
-            <a:avLst/>
-          </a:prstGeom>
-          <a:noFill/>
-          <a:ln/>
-        </p:spPr>
-        <p:txBody>
-          <a:bodyPr wrap="square" lIns="0" tIns="0" rIns="0" bIns="0" rtlCol="0" anchor="ctr">
-            <a:normAutofit/>
-          </a:bodyPr>
-          <a:lstStyle/>
-          <a:p>
-            <a:pPr algn="r" indent="0" marL="0">
-              <a:buNone/>
-            </a:pPr>
-            <a:r>
-              <a:rPr lang="en-US" sz="900" b="1" dirty="0">
-                <a:solidFill>
-                  <a:srgbClr val="5E6B78"/>
-                </a:solidFill>
-                <a:latin typeface="Consolas" pitchFamily="34" charset="0"/>
-                <a:ea typeface="Consolas" pitchFamily="34" charset="-122"/>
-                <a:cs typeface="Consolas" pitchFamily="34" charset="-120"/>
-              </a:rPr>
-              <a:t>PREDNÁŠKA 04</a:t>
-            </a:r>
-            <a:endParaRPr lang="en-US" sz="900" dirty="0"/>
-          </a:p>
-        </p:txBody>
-      </p:sp>
-      <p:sp>
-        <p:nvSpPr>
-          <p:cNvPr id="5" name="Shape 3"/>
-          <p:cNvSpPr/>
-          <p:nvPr/>
-        </p:nvSpPr>
-        <p:spPr>
-          <a:xfrm>
-            <a:off x="566928" y="658368"/>
-            <a:ext cx="11045952" cy="0"/>
-          </a:xfrm>
-          <a:prstGeom prst="line">
-            <a:avLst/>
-          </a:prstGeom>
-          <a:noFill/>
-          <a:ln w="12700">
-            <a:solidFill>
-              <a:srgbClr val="D8E0E6"/>
-            </a:solidFill>
-            <a:prstDash val="solid"/>
-          </a:ln>
-        </p:spPr>
-      </p:sp>
-      <p:sp>
-        <p:nvSpPr>
-          <p:cNvPr id="6" name="Shape 4"/>
-          <p:cNvSpPr/>
-          <p:nvPr/>
-        </p:nvSpPr>
-        <p:spPr>
-          <a:xfrm>
-            <a:off x="566928" y="6419088"/>
-            <a:ext cx="11045952" cy="0"/>
-          </a:xfrm>
-          <a:prstGeom prst="line">
-            <a:avLst/>
-          </a:prstGeom>
-          <a:noFill/>
-          <a:ln w="12700">
-            <a:solidFill>
-              <a:srgbClr val="D8E0E6"/>
-            </a:solidFill>
-            <a:prstDash val="solid"/>
-          </a:ln>
-        </p:spPr>
-      </p:sp>
-      <p:sp>
-        <p:nvSpPr>
-          <p:cNvPr id="7" name="Text 5"/>
-          <p:cNvSpPr/>
-          <p:nvPr/>
-        </p:nvSpPr>
-        <p:spPr>
-          <a:xfrm>
-            <a:off x="11109960" y="6501384"/>
-            <a:ext cx="457200" cy="146304"/>
-          </a:xfrm>
-          <a:prstGeom prst="rect">
-            <a:avLst/>
-          </a:prstGeom>
-          <a:noFill/>
-          <a:ln/>
-        </p:spPr>
-        <p:txBody>
-          <a:bodyPr wrap="square" lIns="0" tIns="0" rIns="0" bIns="0" rtlCol="0" anchor="ctr">
-            <a:normAutofit/>
-          </a:bodyPr>
-          <a:lstStyle/>
-          <a:p>
-            <a:pPr algn="r" indent="0" marL="0">
-              <a:buNone/>
-            </a:pPr>
-            <a:r>
-              <a:rPr lang="en-US" sz="800" dirty="0">
-                <a:solidFill>
-                  <a:srgbClr val="5E6B78"/>
-                </a:solidFill>
-                <a:latin typeface="Consolas" pitchFamily="34" charset="0"/>
-                <a:ea typeface="Consolas" pitchFamily="34" charset="-122"/>
-                <a:cs typeface="Consolas" pitchFamily="34" charset="-120"/>
-              </a:rPr>
-              <a:t>19</a:t>
-            </a:r>
-            <a:endParaRPr lang="en-US" sz="800" dirty="0"/>
-          </a:p>
-        </p:txBody>
-      </p:sp>
-      <p:sp>
-        <p:nvSpPr>
-          <p:cNvPr id="8" name="Text 6"/>
-          <p:cNvSpPr/>
-          <p:nvPr/>
-        </p:nvSpPr>
-        <p:spPr>
-          <a:xfrm>
-            <a:off x="658368" y="932688"/>
-            <a:ext cx="10789920" cy="713232"/>
-          </a:xfrm>
-          <a:prstGeom prst="rect">
-            <a:avLst/>
-          </a:prstGeom>
-          <a:noFill/>
-          <a:ln/>
-        </p:spPr>
-        <p:txBody>
-          <a:bodyPr wrap="square" lIns="0" tIns="0" rIns="0" bIns="0" rtlCol="0" anchor="t">
-            <a:normAutofit/>
-          </a:bodyPr>
-          <a:lstStyle/>
-          <a:p>
-            <a:pPr algn="l" indent="0" marL="0">
-              <a:buNone/>
-            </a:pPr>
-            <a:r>
-              <a:rPr lang="en-US" sz="2900" b="1" dirty="0">
-                <a:solidFill>
-                  <a:srgbClr val="16324F"/>
-                </a:solidFill>
-                <a:latin typeface="Aptos" pitchFamily="34" charset="0"/>
-                <a:ea typeface="Aptos" pitchFamily="34" charset="-122"/>
-                <a:cs typeface="Aptos" pitchFamily="34" charset="-120"/>
-              </a:rPr>
-              <a:t>Logging namiesto náhodných printov</a:t>
-            </a:r>
-            <a:endParaRPr lang="en-US" sz="2900" dirty="0"/>
-          </a:p>
-        </p:txBody>
-      </p:sp>
-      <p:sp>
-        <p:nvSpPr>
-          <p:cNvPr id="9" name="Shape 7"/>
-          <p:cNvSpPr/>
-          <p:nvPr/>
-        </p:nvSpPr>
-        <p:spPr>
-          <a:xfrm>
-            <a:off x="658368" y="1828800"/>
-            <a:ext cx="6812280" cy="4069080"/>
-          </a:xfrm>
-          <a:prstGeom prst="roundRect">
-            <a:avLst>
-              <a:gd name="adj" fmla="val 1348"/>
-            </a:avLst>
-          </a:prstGeom>
-          <a:solidFill>
-            <a:srgbClr val="17212B"/>
-          </a:solidFill>
-          <a:ln w="12700">
-            <a:solidFill>
-              <a:srgbClr val="17212B"/>
-            </a:solidFill>
-            <a:prstDash val="solid"/>
-          </a:ln>
-        </p:spPr>
-      </p:sp>
-      <p:sp>
-        <p:nvSpPr>
-          <p:cNvPr id="10" name="Text 8"/>
-          <p:cNvSpPr/>
-          <p:nvPr/>
-        </p:nvSpPr>
-        <p:spPr>
-          <a:xfrm>
-            <a:off x="868680" y="2029968"/>
-            <a:ext cx="6309360" cy="182880"/>
-          </a:xfrm>
-          <a:prstGeom prst="rect">
-            <a:avLst/>
-          </a:prstGeom>
-          <a:noFill/>
-          <a:ln/>
-        </p:spPr>
-        <p:txBody>
-          <a:bodyPr wrap="square" lIns="0" tIns="0" rIns="0" bIns="0" rtlCol="0" anchor="ctr">
-            <a:normAutofit/>
-          </a:bodyPr>
-          <a:lstStyle/>
-          <a:p>
-            <a:pPr algn="l" indent="0" marL="0">
-              <a:buNone/>
-            </a:pPr>
-            <a:r>
-              <a:rPr lang="en-US" sz="850" b="1" spc="70" kern="0" dirty="0">
-                <a:solidFill>
-                  <a:srgbClr val="8FD3FF"/>
-                </a:solidFill>
-                <a:latin typeface="Consolas" pitchFamily="34" charset="0"/>
-                <a:ea typeface="Consolas" pitchFamily="34" charset="-122"/>
-                <a:cs typeface="Consolas" pitchFamily="34" charset="-120"/>
-              </a:rPr>
-              <a:t>python</a:t>
-            </a:r>
-            <a:endParaRPr lang="en-US" sz="850" dirty="0"/>
-          </a:p>
-        </p:txBody>
-      </p:sp>
-      <p:sp>
-        <p:nvSpPr>
-          <p:cNvPr id="11" name="Text 9"/>
-          <p:cNvSpPr/>
-          <p:nvPr/>
-        </p:nvSpPr>
-        <p:spPr>
-          <a:xfrm>
-            <a:off x="877824" y="2395728"/>
-            <a:ext cx="6327648" cy="3246120"/>
-          </a:xfrm>
-          <a:prstGeom prst="rect">
-            <a:avLst/>
-          </a:prstGeom>
-          <a:noFill/>
-          <a:ln/>
-        </p:spPr>
-        <p:txBody>
-          <a:bodyPr wrap="square" lIns="0" tIns="0" rIns="0" bIns="0" rtlCol="0" anchor="t">
-            <a:normAutofit/>
-          </a:bodyPr>
-          <a:lstStyle/>
-          <a:p>
-            <a:pPr algn="l" indent="0" marL="0">
-              <a:buNone/>
-            </a:pPr>
-            <a:r>
-              <a:rPr lang="en-US" sz="1650" dirty="0">
-                <a:solidFill>
-                  <a:srgbClr val="F4F7FA"/>
-                </a:solidFill>
-                <a:latin typeface="Consolas" pitchFamily="34" charset="0"/>
-                <a:ea typeface="Consolas" pitchFamily="34" charset="-122"/>
-                <a:cs typeface="Consolas" pitchFamily="34" charset="-120"/>
-              </a:rPr>
-              <a:t>import logging</a:t>
-            </a:r>
-            <a:endParaRPr lang="en-US" sz="1650" dirty="0"/>
-          </a:p>
-          <a:p>
-            <a:pPr algn="l" indent="0" marL="0">
-              <a:buNone/>
-            </a:pPr>
-            <a:endParaRPr lang="en-US" sz="1650" dirty="0"/>
-          </a:p>
-          <a:p>
-            <a:pPr algn="l" indent="0" marL="0">
-              <a:buNone/>
-            </a:pPr>
-            <a:r>
-              <a:rPr lang="en-US" sz="1650" dirty="0">
-                <a:solidFill>
-                  <a:srgbClr val="F4F7FA"/>
-                </a:solidFill>
-                <a:latin typeface="Consolas" pitchFamily="34" charset="0"/>
-                <a:ea typeface="Consolas" pitchFamily="34" charset="-122"/>
-                <a:cs typeface="Consolas" pitchFamily="34" charset="-120"/>
-              </a:rPr>
-              <a:t>logging.info("Processing %s files", len(files))</a:t>
-            </a:r>
-            <a:endParaRPr lang="en-US" sz="1650" dirty="0"/>
-          </a:p>
-          <a:p>
-            <a:pPr algn="l" indent="0" marL="0">
-              <a:buNone/>
-            </a:pPr>
-            <a:r>
-              <a:rPr lang="en-US" sz="1650" dirty="0">
-                <a:solidFill>
-                  <a:srgbClr val="F4F7FA"/>
-                </a:solidFill>
-                <a:latin typeface="Consolas" pitchFamily="34" charset="0"/>
-                <a:ea typeface="Consolas" pitchFamily="34" charset="-122"/>
-                <a:cs typeface="Consolas" pitchFamily="34" charset="-120"/>
-              </a:rPr>
-              <a:t>logging.warning("Unknown suffix: %s", path.suffix)</a:t>
-            </a:r>
-            <a:endParaRPr lang="en-US" sz="1650" dirty="0"/>
-          </a:p>
-          <a:p>
-            <a:pPr algn="l" indent="0" marL="0">
-              <a:buNone/>
-            </a:pPr>
-            <a:r>
-              <a:rPr lang="en-US" sz="1650" dirty="0">
-                <a:solidFill>
-                  <a:srgbClr val="F4F7FA"/>
-                </a:solidFill>
-                <a:latin typeface="Consolas" pitchFamily="34" charset="0"/>
-                <a:ea typeface="Consolas" pitchFamily="34" charset="-122"/>
-                <a:cs typeface="Consolas" pitchFamily="34" charset="-120"/>
-              </a:rPr>
-              <a:t>logging.error("Cannot read %s", path)</a:t>
-            </a:r>
-            <a:endParaRPr lang="en-US" sz="1650" dirty="0"/>
-          </a:p>
-        </p:txBody>
-      </p:sp>
-      <p:sp>
-        <p:nvSpPr>
-          <p:cNvPr id="12" name="Shape 10"/>
-          <p:cNvSpPr/>
-          <p:nvPr/>
-        </p:nvSpPr>
-        <p:spPr>
-          <a:xfrm>
-            <a:off x="7909560" y="1901952"/>
-            <a:ext cx="0" cy="3566160"/>
-          </a:xfrm>
-          <a:prstGeom prst="line">
-            <a:avLst/>
-          </a:prstGeom>
-          <a:noFill/>
-          <a:ln w="12700">
-            <a:solidFill>
-              <a:srgbClr val="1877B9"/>
-            </a:solidFill>
-            <a:prstDash val="solid"/>
-          </a:ln>
-        </p:spPr>
-      </p:sp>
-      <p:sp>
-        <p:nvSpPr>
-          <p:cNvPr id="13" name="Text 11"/>
-          <p:cNvSpPr/>
-          <p:nvPr/>
-        </p:nvSpPr>
-        <p:spPr>
-          <a:xfrm>
-            <a:off x="8229600" y="2130552"/>
-            <a:ext cx="2743200" cy="2468880"/>
-          </a:xfrm>
-          <a:prstGeom prst="rect">
-            <a:avLst/>
-          </a:prstGeom>
-          <a:noFill/>
-          <a:ln/>
-        </p:spPr>
-        <p:txBody>
-          <a:bodyPr wrap="square" lIns="0" tIns="0" rIns="0" bIns="0" rtlCol="0" anchor="t">
-            <a:normAutofit/>
-          </a:bodyPr>
-          <a:lstStyle/>
-          <a:p>
-            <a:pPr algn="l" indent="0" marL="0">
-              <a:buNone/>
-            </a:pPr>
-            <a:r>
-              <a:rPr lang="en-US" sz="1800" dirty="0">
-                <a:solidFill>
-                  <a:srgbClr val="5E6B78"/>
-                </a:solidFill>
-                <a:latin typeface="Aptos" pitchFamily="34" charset="0"/>
-                <a:ea typeface="Aptos" pitchFamily="34" charset="-122"/>
-                <a:cs typeface="Aptos" pitchFamily="34" charset="-120"/>
-              </a:rPr>
-              <a:t>Logging má úrovne a dá sa zapnúť podľa potreby. Nezamieňajte ho s návratovou hodnotou alebo testom.</a:t>
-            </a:r>
-            <a:endParaRPr lang="en-US" sz="1800" dirty="0"/>
-          </a:p>
-        </p:txBody>
-      </p:sp>
-    </p:spTree>
-  </p:cSld>
-  <p:clrMapOvr>
-    <a:masterClrMapping/>
-  </p:clrMapOvr>
-</p:sld>
-</file>
-
-<file path=ppt/slides/slide2.xml><?xml version="1.0" encoding="utf-8"?>
-<p:sld xmlns:a="http://schemas.openxmlformats.org/drawingml/2006/main" xmlns:r="http://schemas.openxmlformats.org/officeDocument/2006/relationships" xmlns:p="http://schemas.openxmlformats.org/presentationml/2006/main">
-  <p:cSld name="Slide 2">
-    <p:bg>
-      <p:bgPr>
-        <a:solidFill>
-          <a:srgbClr val="FFFFFF"/>
-        </a:solidFill>
-      </p:bgPr>
-    </p:bg>
-    <p:spTree>
-      <p:nvGrpSpPr>
-        <p:cNvPr id="1" name=""/>
-        <p:cNvGrpSpPr/>
-        <p:nvPr/>
-      </p:nvGrpSpPr>
-      <p:grpSpPr>
-        <a:xfrm>
-          <a:off x="0" y="0"/>
-          <a:ext cx="0" cy="0"/>
-          <a:chOff x="0" y="0"/>
-          <a:chExt cx="0" cy="0"/>
-        </a:xfrm>
-      </p:grpSpPr>
-      <p:sp>
-        <p:nvSpPr>
-          <p:cNvPr id="2" name="Shape 0"/>
-          <p:cNvSpPr/>
-          <p:nvPr/>
-        </p:nvSpPr>
-        <p:spPr>
-          <a:xfrm>
-            <a:off x="0" y="0"/>
-            <a:ext cx="12191695" cy="155448"/>
-          </a:xfrm>
-          <a:prstGeom prst="rect">
-            <a:avLst/>
-          </a:prstGeom>
-          <a:solidFill>
-            <a:srgbClr val="1877B9"/>
-          </a:solidFill>
-          <a:ln w="12700">
-            <a:solidFill>
-              <a:srgbClr val="1877B9"/>
-            </a:solidFill>
-            <a:prstDash val="solid"/>
-          </a:ln>
-        </p:spPr>
-      </p:sp>
-      <p:sp>
-        <p:nvSpPr>
-          <p:cNvPr id="3" name="Text 1"/>
-          <p:cNvSpPr/>
-          <p:nvPr/>
-        </p:nvSpPr>
-        <p:spPr>
-          <a:xfrm>
-            <a:off x="566928" y="320040"/>
-            <a:ext cx="4663440" cy="182880"/>
-          </a:xfrm>
-          <a:prstGeom prst="rect">
-            <a:avLst/>
-          </a:prstGeom>
-          <a:noFill/>
-          <a:ln/>
-        </p:spPr>
-        <p:txBody>
-          <a:bodyPr wrap="square" lIns="0" tIns="0" rIns="0" bIns="0" rtlCol="0" anchor="ctr">
-            <a:normAutofit/>
-          </a:bodyPr>
-          <a:lstStyle/>
-          <a:p>
-            <a:pPr algn="l" indent="0" marL="0">
-              <a:buNone/>
-            </a:pPr>
-            <a:r>
-              <a:rPr lang="en-US" sz="900" b="1" spc="80" kern="0" dirty="0">
-                <a:solidFill>
-                  <a:srgbClr val="1877B9"/>
-                </a:solidFill>
-                <a:latin typeface="Aptos" pitchFamily="34" charset="0"/>
-                <a:ea typeface="Aptos" pitchFamily="34" charset="-122"/>
-                <a:cs typeface="Aptos" pitchFamily="34" charset="-120"/>
-              </a:rPr>
-              <a:t>PROGRAMOVANIE V PYTHONE</a:t>
-            </a:r>
-            <a:endParaRPr lang="en-US" sz="900" dirty="0"/>
-          </a:p>
-        </p:txBody>
-      </p:sp>
-      <p:sp>
-        <p:nvSpPr>
-          <p:cNvPr id="4" name="Text 2"/>
-          <p:cNvSpPr/>
-          <p:nvPr/>
-        </p:nvSpPr>
-        <p:spPr>
-          <a:xfrm>
-            <a:off x="9829800" y="320040"/>
-            <a:ext cx="1783080" cy="182880"/>
-          </a:xfrm>
-          <a:prstGeom prst="rect">
-            <a:avLst/>
-          </a:prstGeom>
-          <a:noFill/>
-          <a:ln/>
-        </p:spPr>
-        <p:txBody>
-          <a:bodyPr wrap="square" lIns="0" tIns="0" rIns="0" bIns="0" rtlCol="0" anchor="ctr">
-            <a:normAutofit/>
-          </a:bodyPr>
-          <a:lstStyle/>
-          <a:p>
-            <a:pPr algn="r" indent="0" marL="0">
-              <a:buNone/>
-            </a:pPr>
-            <a:r>
-              <a:rPr lang="en-US" sz="900" b="1" dirty="0">
-                <a:solidFill>
-                  <a:srgbClr val="5E6B78"/>
-                </a:solidFill>
-                <a:latin typeface="Consolas" pitchFamily="34" charset="0"/>
-                <a:ea typeface="Consolas" pitchFamily="34" charset="-122"/>
-                <a:cs typeface="Consolas" pitchFamily="34" charset="-120"/>
-              </a:rPr>
-              <a:t>PREDNÁŠKA 04</a:t>
-            </a:r>
-            <a:endParaRPr lang="en-US" sz="900" dirty="0"/>
-          </a:p>
-        </p:txBody>
-      </p:sp>
-      <p:sp>
-        <p:nvSpPr>
-          <p:cNvPr id="5" name="Shape 3"/>
-          <p:cNvSpPr/>
-          <p:nvPr/>
-        </p:nvSpPr>
-        <p:spPr>
-          <a:xfrm>
-            <a:off x="566928" y="658368"/>
-            <a:ext cx="11045952" cy="0"/>
-          </a:xfrm>
-          <a:prstGeom prst="line">
-            <a:avLst/>
-          </a:prstGeom>
-          <a:noFill/>
-          <a:ln w="12700">
-            <a:solidFill>
-              <a:srgbClr val="D8E0E6"/>
-            </a:solidFill>
-            <a:prstDash val="solid"/>
-          </a:ln>
-        </p:spPr>
-      </p:sp>
-      <p:sp>
-        <p:nvSpPr>
-          <p:cNvPr id="6" name="Shape 4"/>
-          <p:cNvSpPr/>
-          <p:nvPr/>
-        </p:nvSpPr>
-        <p:spPr>
-          <a:xfrm>
-            <a:off x="566928" y="6419088"/>
-            <a:ext cx="11045952" cy="0"/>
-          </a:xfrm>
-          <a:prstGeom prst="line">
-            <a:avLst/>
-          </a:prstGeom>
-          <a:noFill/>
-          <a:ln w="12700">
-            <a:solidFill>
-              <a:srgbClr val="D8E0E6"/>
-            </a:solidFill>
-            <a:prstDash val="solid"/>
-          </a:ln>
-        </p:spPr>
-      </p:sp>
-      <p:sp>
-        <p:nvSpPr>
-          <p:cNvPr id="7" name="Text 5"/>
-          <p:cNvSpPr/>
-          <p:nvPr/>
-        </p:nvSpPr>
-        <p:spPr>
-          <a:xfrm>
-            <a:off x="11109960" y="6501384"/>
-            <a:ext cx="457200" cy="146304"/>
-          </a:xfrm>
-          <a:prstGeom prst="rect">
-            <a:avLst/>
-          </a:prstGeom>
-          <a:noFill/>
-          <a:ln/>
-        </p:spPr>
-        <p:txBody>
-          <a:bodyPr wrap="square" lIns="0" tIns="0" rIns="0" bIns="0" rtlCol="0" anchor="ctr">
-            <a:normAutofit/>
-          </a:bodyPr>
-          <a:lstStyle/>
-          <a:p>
-            <a:pPr algn="r" indent="0" marL="0">
-              <a:buNone/>
-            </a:pPr>
-            <a:r>
-              <a:rPr lang="en-US" sz="800" dirty="0">
-                <a:solidFill>
-                  <a:srgbClr val="5E6B78"/>
-                </a:solidFill>
-                <a:latin typeface="Consolas" pitchFamily="34" charset="0"/>
-                <a:ea typeface="Consolas" pitchFamily="34" charset="-122"/>
-                <a:cs typeface="Consolas" pitchFamily="34" charset="-120"/>
-              </a:rPr>
-              <a:t>02</a:t>
-            </a:r>
-            <a:endParaRPr lang="en-US" sz="800" dirty="0"/>
-          </a:p>
-        </p:txBody>
-      </p:sp>
-      <p:sp>
-        <p:nvSpPr>
-          <p:cNvPr id="8" name="Text 6"/>
-          <p:cNvSpPr/>
-          <p:nvPr/>
-        </p:nvSpPr>
-        <p:spPr>
-          <a:xfrm>
-            <a:off x="658368" y="932688"/>
-            <a:ext cx="10789920" cy="713232"/>
-          </a:xfrm>
-          <a:prstGeom prst="rect">
-            <a:avLst/>
-          </a:prstGeom>
-          <a:noFill/>
-          <a:ln/>
-        </p:spPr>
-        <p:txBody>
-          <a:bodyPr wrap="square" lIns="0" tIns="0" rIns="0" bIns="0" rtlCol="0" anchor="t">
-            <a:normAutofit/>
-          </a:bodyPr>
-          <a:lstStyle/>
-          <a:p>
-            <a:pPr algn="l" indent="0" marL="0">
-              <a:buNone/>
-            </a:pPr>
-            <a:r>
-              <a:rPr lang="en-US" sz="2900" b="1" dirty="0">
-                <a:solidFill>
-                  <a:srgbClr val="16324F"/>
-                </a:solidFill>
-                <a:latin typeface="Aptos" pitchFamily="34" charset="0"/>
-                <a:ea typeface="Aptos" pitchFamily="34" charset="-122"/>
-                <a:cs typeface="Aptos" pitchFamily="34" charset="-120"/>
-              </a:rPr>
-              <a:t>Cieľ prednášky</a:t>
-            </a:r>
-            <a:endParaRPr lang="en-US" sz="2900" dirty="0"/>
-          </a:p>
-        </p:txBody>
-      </p:sp>
-      <p:sp>
-        <p:nvSpPr>
-          <p:cNvPr id="9" name="Text 7"/>
-          <p:cNvSpPr/>
-          <p:nvPr/>
-        </p:nvSpPr>
-        <p:spPr>
-          <a:xfrm>
-            <a:off x="868680" y="1938528"/>
-            <a:ext cx="9921240" cy="3886200"/>
-          </a:xfrm>
-          <a:prstGeom prst="rect">
-            <a:avLst/>
-          </a:prstGeom>
-          <a:noFill/>
-          <a:ln/>
-        </p:spPr>
-        <p:txBody>
-          <a:bodyPr wrap="square" lIns="508" tIns="508" rIns="508" bIns="508" rtlCol="0" anchor="t">
-            <a:normAutofit/>
-          </a:bodyPr>
-          <a:lstStyle/>
-          <a:p>
-            <a:pPr marL="228600" indent="-228600">
-              <a:buSzPct val="100000"/>
-              <a:buChar char="•"/>
-            </a:pPr>
-            <a:r>
-              <a:rPr lang="en-US" sz="1800" dirty="0">
-                <a:solidFill>
-                  <a:srgbClr val="18212B"/>
-                </a:solidFill>
-                <a:latin typeface="Aptos" pitchFamily="34" charset="0"/>
-                <a:ea typeface="Aptos" pitchFamily="34" charset="-122"/>
-                <a:cs typeface="Aptos" pitchFamily="34" charset="-120"/>
-              </a:rPr>
-              <a:t>napísať malý pytest test</a:t>
-            </a:r>
-            <a:endParaRPr lang="en-US" sz="1800" dirty="0"/>
-          </a:p>
-          <a:p>
-            <a:pPr marL="228600" indent="-228600">
-              <a:buSzPct val="100000"/>
-              <a:buChar char="•"/>
-            </a:pPr>
-            <a:r>
-              <a:rPr lang="en-US" sz="1800" dirty="0">
-                <a:solidFill>
-                  <a:srgbClr val="18212B"/>
-                </a:solidFill>
-                <a:latin typeface="Aptos" pitchFamily="34" charset="0"/>
-                <a:ea typeface="Aptos" pitchFamily="34" charset="-122"/>
-                <a:cs typeface="Aptos" pitchFamily="34" charset="-120"/>
-              </a:rPr>
-              <a:t>rozpoznať edge case a regression</a:t>
-            </a:r>
-            <a:endParaRPr lang="en-US" sz="1800" dirty="0"/>
-          </a:p>
-          <a:p>
-            <a:pPr marL="228600" indent="-228600">
-              <a:buSzPct val="100000"/>
-              <a:buChar char="•"/>
-            </a:pPr>
-            <a:r>
-              <a:rPr lang="en-US" sz="1800" dirty="0">
-                <a:solidFill>
-                  <a:srgbClr val="18212B"/>
-                </a:solidFill>
-                <a:latin typeface="Aptos" pitchFamily="34" charset="0"/>
-                <a:ea typeface="Aptos" pitchFamily="34" charset="-122"/>
-                <a:cs typeface="Aptos" pitchFamily="34" charset="-120"/>
-              </a:rPr>
-              <a:t>nájsť chybu cez traceback a debugger</a:t>
-            </a:r>
-            <a:endParaRPr lang="en-US" sz="1800" dirty="0"/>
-          </a:p>
-          <a:p>
-            <a:pPr marL="228600" indent="-228600">
-              <a:buSzPct val="100000"/>
-              <a:buChar char="•"/>
-            </a:pPr>
-            <a:r>
-              <a:rPr lang="en-US" sz="1800" dirty="0">
-                <a:solidFill>
-                  <a:srgbClr val="18212B"/>
-                </a:solidFill>
-                <a:latin typeface="Aptos" pitchFamily="34" charset="0"/>
-                <a:ea typeface="Aptos" pitchFamily="34" charset="-122"/>
-                <a:cs typeface="Aptos" pitchFamily="34" charset="-120"/>
-              </a:rPr>
-              <a:t>použiť logging a nástroje Ruff</a:t>
-            </a:r>
-            <a:endParaRPr lang="en-US" sz="1800" dirty="0"/>
-          </a:p>
-        </p:txBody>
-      </p:sp>
-    </p:spTree>
-  </p:cSld>
-  <p:clrMapOvr>
-    <a:masterClrMapping/>
-  </p:clrMapOvr>
-</p:sld>
-</file>
-
-<file path=ppt/slides/slide20.xml><?xml version="1.0" encoding="utf-8"?>
-<p:sld xmlns:a="http://schemas.openxmlformats.org/drawingml/2006/main" xmlns:r="http://schemas.openxmlformats.org/officeDocument/2006/relationships" xmlns:p="http://schemas.openxmlformats.org/presentationml/2006/main">
-  <p:cSld name="Slide 20">
-    <p:bg>
-      <p:bgPr>
-        <a:solidFill>
-          <a:srgbClr val="FFFFFF"/>
-        </a:solidFill>
-      </p:bgPr>
-    </p:bg>
-    <p:spTree>
-      <p:nvGrpSpPr>
-        <p:cNvPr id="1" name=""/>
-        <p:cNvGrpSpPr/>
-        <p:nvPr/>
-      </p:nvGrpSpPr>
-      <p:grpSpPr>
-        <a:xfrm>
-          <a:off x="0" y="0"/>
-          <a:ext cx="0" cy="0"/>
-          <a:chOff x="0" y="0"/>
-          <a:chExt cx="0" cy="0"/>
-        </a:xfrm>
-      </p:grpSpPr>
-      <p:sp>
-        <p:nvSpPr>
-          <p:cNvPr id="2" name="Shape 0"/>
-          <p:cNvSpPr/>
-          <p:nvPr/>
-        </p:nvSpPr>
-        <p:spPr>
-          <a:xfrm>
-            <a:off x="0" y="0"/>
-            <a:ext cx="12191695" cy="155448"/>
-          </a:xfrm>
-          <a:prstGeom prst="rect">
-            <a:avLst/>
-          </a:prstGeom>
-          <a:solidFill>
-            <a:srgbClr val="1877B9"/>
-          </a:solidFill>
-          <a:ln w="12700">
-            <a:solidFill>
-              <a:srgbClr val="1877B9"/>
-            </a:solidFill>
-            <a:prstDash val="solid"/>
-          </a:ln>
-        </p:spPr>
-      </p:sp>
-      <p:sp>
-        <p:nvSpPr>
-          <p:cNvPr id="3" name="Text 1"/>
-          <p:cNvSpPr/>
-          <p:nvPr/>
-        </p:nvSpPr>
-        <p:spPr>
-          <a:xfrm>
-            <a:off x="566928" y="320040"/>
-            <a:ext cx="4663440" cy="182880"/>
-          </a:xfrm>
-          <a:prstGeom prst="rect">
-            <a:avLst/>
-          </a:prstGeom>
-          <a:noFill/>
-          <a:ln/>
-        </p:spPr>
-        <p:txBody>
-          <a:bodyPr wrap="square" lIns="0" tIns="0" rIns="0" bIns="0" rtlCol="0" anchor="ctr">
-            <a:normAutofit/>
-          </a:bodyPr>
-          <a:lstStyle/>
-          <a:p>
-            <a:pPr algn="l" indent="0" marL="0">
-              <a:buNone/>
-            </a:pPr>
-            <a:r>
-              <a:rPr lang="en-US" sz="900" b="1" spc="80" kern="0" dirty="0">
-                <a:solidFill>
-                  <a:srgbClr val="1877B9"/>
-                </a:solidFill>
-                <a:latin typeface="Aptos" pitchFamily="34" charset="0"/>
-                <a:ea typeface="Aptos" pitchFamily="34" charset="-122"/>
-                <a:cs typeface="Aptos" pitchFamily="34" charset="-120"/>
-              </a:rPr>
-              <a:t>PROGRAMOVANIE V PYTHONE</a:t>
-            </a:r>
-            <a:endParaRPr lang="en-US" sz="900" dirty="0"/>
-          </a:p>
-        </p:txBody>
-      </p:sp>
-      <p:sp>
-        <p:nvSpPr>
-          <p:cNvPr id="4" name="Text 2"/>
-          <p:cNvSpPr/>
-          <p:nvPr/>
-        </p:nvSpPr>
-        <p:spPr>
-          <a:xfrm>
-            <a:off x="9829800" y="320040"/>
-            <a:ext cx="1783080" cy="182880"/>
-          </a:xfrm>
-          <a:prstGeom prst="rect">
-            <a:avLst/>
-          </a:prstGeom>
-          <a:noFill/>
-          <a:ln/>
-        </p:spPr>
-        <p:txBody>
-          <a:bodyPr wrap="square" lIns="0" tIns="0" rIns="0" bIns="0" rtlCol="0" anchor="ctr">
-            <a:normAutofit/>
-          </a:bodyPr>
-          <a:lstStyle/>
-          <a:p>
-            <a:pPr algn="r" indent="0" marL="0">
-              <a:buNone/>
-            </a:pPr>
-            <a:r>
-              <a:rPr lang="en-US" sz="900" b="1" dirty="0">
-                <a:solidFill>
-                  <a:srgbClr val="5E6B78"/>
-                </a:solidFill>
-                <a:latin typeface="Consolas" pitchFamily="34" charset="0"/>
-                <a:ea typeface="Consolas" pitchFamily="34" charset="-122"/>
-                <a:cs typeface="Consolas" pitchFamily="34" charset="-120"/>
-              </a:rPr>
-              <a:t>PREDNÁŠKA 04</a:t>
-            </a:r>
-            <a:endParaRPr lang="en-US" sz="900" dirty="0"/>
-          </a:p>
-        </p:txBody>
-      </p:sp>
-      <p:sp>
-        <p:nvSpPr>
-          <p:cNvPr id="5" name="Shape 3"/>
-          <p:cNvSpPr/>
-          <p:nvPr/>
-        </p:nvSpPr>
-        <p:spPr>
-          <a:xfrm>
-            <a:off x="566928" y="658368"/>
-            <a:ext cx="11045952" cy="0"/>
-          </a:xfrm>
-          <a:prstGeom prst="line">
-            <a:avLst/>
-          </a:prstGeom>
-          <a:noFill/>
-          <a:ln w="12700">
-            <a:solidFill>
-              <a:srgbClr val="D8E0E6"/>
-            </a:solidFill>
-            <a:prstDash val="solid"/>
-          </a:ln>
-        </p:spPr>
-      </p:sp>
-      <p:sp>
-        <p:nvSpPr>
-          <p:cNvPr id="6" name="Shape 4"/>
-          <p:cNvSpPr/>
-          <p:nvPr/>
-        </p:nvSpPr>
-        <p:spPr>
-          <a:xfrm>
-            <a:off x="566928" y="6419088"/>
-            <a:ext cx="11045952" cy="0"/>
-          </a:xfrm>
-          <a:prstGeom prst="line">
-            <a:avLst/>
-          </a:prstGeom>
-          <a:noFill/>
-          <a:ln w="12700">
-            <a:solidFill>
-              <a:srgbClr val="D8E0E6"/>
-            </a:solidFill>
-            <a:prstDash val="solid"/>
-          </a:ln>
-        </p:spPr>
-      </p:sp>
-      <p:sp>
-        <p:nvSpPr>
-          <p:cNvPr id="7" name="Text 5"/>
-          <p:cNvSpPr/>
-          <p:nvPr/>
-        </p:nvSpPr>
-        <p:spPr>
-          <a:xfrm>
-            <a:off x="11109960" y="6501384"/>
-            <a:ext cx="457200" cy="146304"/>
-          </a:xfrm>
-          <a:prstGeom prst="rect">
-            <a:avLst/>
-          </a:prstGeom>
-          <a:noFill/>
-          <a:ln/>
-        </p:spPr>
-        <p:txBody>
-          <a:bodyPr wrap="square" lIns="0" tIns="0" rIns="0" bIns="0" rtlCol="0" anchor="ctr">
-            <a:normAutofit/>
-          </a:bodyPr>
-          <a:lstStyle/>
-          <a:p>
-            <a:pPr algn="r" indent="0" marL="0">
-              <a:buNone/>
-            </a:pPr>
-            <a:r>
-              <a:rPr lang="en-US" sz="800" dirty="0">
-                <a:solidFill>
-                  <a:srgbClr val="5E6B78"/>
-                </a:solidFill>
-                <a:latin typeface="Consolas" pitchFamily="34" charset="0"/>
-                <a:ea typeface="Consolas" pitchFamily="34" charset="-122"/>
-                <a:cs typeface="Consolas" pitchFamily="34" charset="-120"/>
-              </a:rPr>
-              <a:t>20</a:t>
-            </a:r>
-            <a:endParaRPr lang="en-US" sz="800" dirty="0"/>
-          </a:p>
-        </p:txBody>
-      </p:sp>
-      <p:sp>
-        <p:nvSpPr>
-          <p:cNvPr id="8" name="Text 6"/>
-          <p:cNvSpPr/>
-          <p:nvPr/>
-        </p:nvSpPr>
-        <p:spPr>
-          <a:xfrm>
-            <a:off x="713232" y="1353312"/>
-            <a:ext cx="1280160" cy="548640"/>
-          </a:xfrm>
-          <a:prstGeom prst="rect">
-            <a:avLst/>
-          </a:prstGeom>
-          <a:noFill/>
-          <a:ln/>
-        </p:spPr>
-        <p:txBody>
-          <a:bodyPr wrap="square" lIns="0" tIns="0" rIns="0" bIns="0" rtlCol="0" anchor="ctr">
-            <a:normAutofit/>
-          </a:bodyPr>
-          <a:lstStyle/>
-          <a:p>
-            <a:pPr algn="l" indent="0" marL="0">
-              <a:buNone/>
-            </a:pPr>
-            <a:r>
-              <a:rPr lang="en-US" sz="1800" b="1" dirty="0">
-                <a:solidFill>
-                  <a:srgbClr val="1877B9"/>
-                </a:solidFill>
-                <a:latin typeface="Consolas" pitchFamily="34" charset="0"/>
-                <a:ea typeface="Consolas" pitchFamily="34" charset="-122"/>
-                <a:cs typeface="Consolas" pitchFamily="34" charset="-120"/>
-              </a:rPr>
-              <a:t>04</a:t>
-            </a:r>
-            <a:endParaRPr lang="en-US" sz="1800" dirty="0"/>
-          </a:p>
-        </p:txBody>
-      </p:sp>
-      <p:sp>
-        <p:nvSpPr>
-          <p:cNvPr id="9" name="Text 7"/>
-          <p:cNvSpPr/>
-          <p:nvPr/>
-        </p:nvSpPr>
-        <p:spPr>
-          <a:xfrm>
-            <a:off x="713232" y="2011680"/>
-            <a:ext cx="9875520" cy="822960"/>
-          </a:xfrm>
-          <a:prstGeom prst="rect">
-            <a:avLst/>
-          </a:prstGeom>
-          <a:noFill/>
-          <a:ln/>
-        </p:spPr>
-        <p:txBody>
-          <a:bodyPr wrap="square" lIns="0" tIns="0" rIns="0" bIns="0" rtlCol="0" anchor="t">
-            <a:normAutofit/>
-          </a:bodyPr>
-          <a:lstStyle/>
-          <a:p>
-            <a:pPr algn="l" indent="0" marL="0">
-              <a:buNone/>
-            </a:pPr>
-            <a:r>
-              <a:rPr lang="en-US" sz="3700" b="1" dirty="0">
-                <a:solidFill>
-                  <a:srgbClr val="16324F"/>
-                </a:solidFill>
-                <a:latin typeface="Aptos" pitchFamily="34" charset="0"/>
-                <a:ea typeface="Aptos" pitchFamily="34" charset="-122"/>
-                <a:cs typeface="Aptos" pitchFamily="34" charset="-120"/>
-              </a:rPr>
-              <a:t>Kvalita kódu</a:t>
-            </a:r>
-            <a:endParaRPr lang="en-US" sz="3700" dirty="0"/>
-          </a:p>
-        </p:txBody>
-      </p:sp>
-      <p:sp>
-        <p:nvSpPr>
-          <p:cNvPr id="10" name="Text 8"/>
-          <p:cNvSpPr/>
-          <p:nvPr/>
-        </p:nvSpPr>
-        <p:spPr>
-          <a:xfrm>
-            <a:off x="749808" y="3063240"/>
-            <a:ext cx="7863840" cy="411480"/>
-          </a:xfrm>
-          <a:prstGeom prst="rect">
-            <a:avLst/>
-          </a:prstGeom>
-          <a:noFill/>
-          <a:ln/>
-        </p:spPr>
-        <p:txBody>
-          <a:bodyPr wrap="square" lIns="0" tIns="0" rIns="0" bIns="0" rtlCol="0" anchor="t">
-            <a:normAutofit/>
-          </a:bodyPr>
-          <a:lstStyle/>
-          <a:p>
-            <a:pPr algn="l" indent="0" marL="0">
-              <a:buNone/>
-            </a:pPr>
-            <a:r>
-              <a:rPr lang="en-US" sz="2000" dirty="0">
-                <a:solidFill>
-                  <a:srgbClr val="5E6B78"/>
-                </a:solidFill>
-                <a:latin typeface="Aptos" pitchFamily="34" charset="0"/>
-                <a:ea typeface="Aptos" pitchFamily="34" charset="-122"/>
-                <a:cs typeface="Aptos" pitchFamily="34" charset="-120"/>
-              </a:rPr>
-              <a:t>Rôzne nástroje hľadajú rôzne problémy.</a:t>
-            </a:r>
-            <a:endParaRPr lang="en-US" sz="2000" dirty="0"/>
-          </a:p>
-        </p:txBody>
-      </p:sp>
-      <p:sp>
-        <p:nvSpPr>
-          <p:cNvPr id="11" name="Shape 9"/>
-          <p:cNvSpPr/>
-          <p:nvPr/>
-        </p:nvSpPr>
-        <p:spPr>
-          <a:xfrm>
-            <a:off x="731520" y="3977640"/>
-            <a:ext cx="2834640" cy="128016"/>
-          </a:xfrm>
-          <a:prstGeom prst="rect">
-            <a:avLst/>
-          </a:prstGeom>
-          <a:solidFill>
-            <a:srgbClr val="1877B9"/>
-          </a:solidFill>
-          <a:ln w="12700">
-            <a:solidFill>
-              <a:srgbClr val="1877B9"/>
-            </a:solidFill>
-            <a:prstDash val="solid"/>
-          </a:ln>
-        </p:spPr>
-      </p:sp>
-    </p:spTree>
-  </p:cSld>
-  <p:clrMapOvr>
-    <a:masterClrMapping/>
-  </p:clrMapOvr>
-</p:sld>
-</file>
-
-<file path=ppt/slides/slide21.xml><?xml version="1.0" encoding="utf-8"?>
-<p:sld xmlns:a="http://schemas.openxmlformats.org/drawingml/2006/main" xmlns:r="http://schemas.openxmlformats.org/officeDocument/2006/relationships" xmlns:p="http://schemas.openxmlformats.org/presentationml/2006/main">
-  <p:cSld name="Slide 21">
-    <p:bg>
-      <p:bgPr>
-        <a:solidFill>
-          <a:srgbClr val="FFFFFF"/>
-        </a:solidFill>
-      </p:bgPr>
-    </p:bg>
-    <p:spTree>
-      <p:nvGrpSpPr>
-        <p:cNvPr id="1" name=""/>
-        <p:cNvGrpSpPr/>
-        <p:nvPr/>
-      </p:nvGrpSpPr>
-      <p:grpSpPr>
-        <a:xfrm>
-          <a:off x="0" y="0"/>
-          <a:ext cx="0" cy="0"/>
-          <a:chOff x="0" y="0"/>
-          <a:chExt cx="0" cy="0"/>
-        </a:xfrm>
-      </p:grpSpPr>
-      <p:sp>
-        <p:nvSpPr>
-          <p:cNvPr id="2" name="Shape 0"/>
-          <p:cNvSpPr/>
-          <p:nvPr/>
-        </p:nvSpPr>
-        <p:spPr>
-          <a:xfrm>
-            <a:off x="0" y="0"/>
-            <a:ext cx="12191695" cy="155448"/>
-          </a:xfrm>
-          <a:prstGeom prst="rect">
-            <a:avLst/>
-          </a:prstGeom>
-          <a:solidFill>
-            <a:srgbClr val="1877B9"/>
-          </a:solidFill>
-          <a:ln w="12700">
-            <a:solidFill>
-              <a:srgbClr val="1877B9"/>
-            </a:solidFill>
-            <a:prstDash val="solid"/>
-          </a:ln>
-        </p:spPr>
-      </p:sp>
-      <p:sp>
-        <p:nvSpPr>
-          <p:cNvPr id="3" name="Text 1"/>
-          <p:cNvSpPr/>
-          <p:nvPr/>
-        </p:nvSpPr>
-        <p:spPr>
-          <a:xfrm>
-            <a:off x="566928" y="320040"/>
-            <a:ext cx="4663440" cy="182880"/>
-          </a:xfrm>
-          <a:prstGeom prst="rect">
-            <a:avLst/>
-          </a:prstGeom>
-          <a:noFill/>
-          <a:ln/>
-        </p:spPr>
-        <p:txBody>
-          <a:bodyPr wrap="square" lIns="0" tIns="0" rIns="0" bIns="0" rtlCol="0" anchor="ctr">
-            <a:normAutofit/>
-          </a:bodyPr>
-          <a:lstStyle/>
-          <a:p>
-            <a:pPr algn="l" indent="0" marL="0">
-              <a:buNone/>
-            </a:pPr>
-            <a:r>
-              <a:rPr lang="en-US" sz="900" b="1" spc="80" kern="0" dirty="0">
-                <a:solidFill>
-                  <a:srgbClr val="1877B9"/>
-                </a:solidFill>
-                <a:latin typeface="Aptos" pitchFamily="34" charset="0"/>
-                <a:ea typeface="Aptos" pitchFamily="34" charset="-122"/>
-                <a:cs typeface="Aptos" pitchFamily="34" charset="-120"/>
-              </a:rPr>
-              <a:t>PROGRAMOVANIE V PYTHONE</a:t>
-            </a:r>
-            <a:endParaRPr lang="en-US" sz="900" dirty="0"/>
-          </a:p>
-        </p:txBody>
-      </p:sp>
-      <p:sp>
-        <p:nvSpPr>
-          <p:cNvPr id="4" name="Text 2"/>
-          <p:cNvSpPr/>
-          <p:nvPr/>
-        </p:nvSpPr>
-        <p:spPr>
-          <a:xfrm>
-            <a:off x="9829800" y="320040"/>
-            <a:ext cx="1783080" cy="182880"/>
-          </a:xfrm>
-          <a:prstGeom prst="rect">
-            <a:avLst/>
-          </a:prstGeom>
-          <a:noFill/>
-          <a:ln/>
-        </p:spPr>
-        <p:txBody>
-          <a:bodyPr wrap="square" lIns="0" tIns="0" rIns="0" bIns="0" rtlCol="0" anchor="ctr">
-            <a:normAutofit/>
-          </a:bodyPr>
-          <a:lstStyle/>
-          <a:p>
-            <a:pPr algn="r" indent="0" marL="0">
-              <a:buNone/>
-            </a:pPr>
-            <a:r>
-              <a:rPr lang="en-US" sz="900" b="1" dirty="0">
-                <a:solidFill>
-                  <a:srgbClr val="5E6B78"/>
-                </a:solidFill>
-                <a:latin typeface="Consolas" pitchFamily="34" charset="0"/>
-                <a:ea typeface="Consolas" pitchFamily="34" charset="-122"/>
-                <a:cs typeface="Consolas" pitchFamily="34" charset="-120"/>
-              </a:rPr>
-              <a:t>PREDNÁŠKA 04</a:t>
-            </a:r>
-            <a:endParaRPr lang="en-US" sz="900" dirty="0"/>
-          </a:p>
-        </p:txBody>
-      </p:sp>
-      <p:sp>
-        <p:nvSpPr>
-          <p:cNvPr id="5" name="Shape 3"/>
-          <p:cNvSpPr/>
-          <p:nvPr/>
-        </p:nvSpPr>
-        <p:spPr>
-          <a:xfrm>
-            <a:off x="566928" y="658368"/>
-            <a:ext cx="11045952" cy="0"/>
-          </a:xfrm>
-          <a:prstGeom prst="line">
-            <a:avLst/>
-          </a:prstGeom>
-          <a:noFill/>
-          <a:ln w="12700">
-            <a:solidFill>
-              <a:srgbClr val="D8E0E6"/>
-            </a:solidFill>
-            <a:prstDash val="solid"/>
-          </a:ln>
-        </p:spPr>
-      </p:sp>
-      <p:sp>
-        <p:nvSpPr>
-          <p:cNvPr id="6" name="Shape 4"/>
-          <p:cNvSpPr/>
-          <p:nvPr/>
-        </p:nvSpPr>
-        <p:spPr>
-          <a:xfrm>
-            <a:off x="566928" y="6419088"/>
-            <a:ext cx="11045952" cy="0"/>
-          </a:xfrm>
-          <a:prstGeom prst="line">
-            <a:avLst/>
-          </a:prstGeom>
-          <a:noFill/>
-          <a:ln w="12700">
-            <a:solidFill>
-              <a:srgbClr val="D8E0E6"/>
-            </a:solidFill>
-            <a:prstDash val="solid"/>
-          </a:ln>
-        </p:spPr>
-      </p:sp>
-      <p:sp>
-        <p:nvSpPr>
-          <p:cNvPr id="7" name="Text 5"/>
-          <p:cNvSpPr/>
-          <p:nvPr/>
-        </p:nvSpPr>
-        <p:spPr>
-          <a:xfrm>
-            <a:off x="11109960" y="6501384"/>
-            <a:ext cx="457200" cy="146304"/>
-          </a:xfrm>
-          <a:prstGeom prst="rect">
-            <a:avLst/>
-          </a:prstGeom>
-          <a:noFill/>
-          <a:ln/>
-        </p:spPr>
-        <p:txBody>
-          <a:bodyPr wrap="square" lIns="0" tIns="0" rIns="0" bIns="0" rtlCol="0" anchor="ctr">
-            <a:normAutofit/>
-          </a:bodyPr>
-          <a:lstStyle/>
-          <a:p>
-            <a:pPr algn="r" indent="0" marL="0">
-              <a:buNone/>
-            </a:pPr>
-            <a:r>
-              <a:rPr lang="en-US" sz="800" dirty="0">
-                <a:solidFill>
-                  <a:srgbClr val="5E6B78"/>
-                </a:solidFill>
-                <a:latin typeface="Consolas" pitchFamily="34" charset="0"/>
-                <a:ea typeface="Consolas" pitchFamily="34" charset="-122"/>
-                <a:cs typeface="Consolas" pitchFamily="34" charset="-120"/>
-              </a:rPr>
-              <a:t>21</a:t>
-            </a:r>
-            <a:endParaRPr lang="en-US" sz="800" dirty="0"/>
-          </a:p>
-        </p:txBody>
-      </p:sp>
-      <p:sp>
-        <p:nvSpPr>
-          <p:cNvPr id="8" name="Text 6"/>
-          <p:cNvSpPr/>
-          <p:nvPr/>
-        </p:nvSpPr>
-        <p:spPr>
-          <a:xfrm>
-            <a:off x="658368" y="932688"/>
-            <a:ext cx="10789920" cy="713232"/>
-          </a:xfrm>
-          <a:prstGeom prst="rect">
-            <a:avLst/>
-          </a:prstGeom>
-          <a:noFill/>
-          <a:ln/>
-        </p:spPr>
-        <p:txBody>
-          <a:bodyPr wrap="square" lIns="0" tIns="0" rIns="0" bIns="0" rtlCol="0" anchor="t">
-            <a:normAutofit/>
-          </a:bodyPr>
-          <a:lstStyle/>
-          <a:p>
-            <a:pPr algn="l" indent="0" marL="0">
-              <a:buNone/>
-            </a:pPr>
-            <a:r>
-              <a:rPr lang="en-US" sz="2900" b="1" dirty="0">
-                <a:solidFill>
-                  <a:srgbClr val="16324F"/>
-                </a:solidFill>
-                <a:latin typeface="Aptos" pitchFamily="34" charset="0"/>
-                <a:ea typeface="Aptos" pitchFamily="34" charset="-122"/>
-                <a:cs typeface="Aptos" pitchFamily="34" charset="-120"/>
-              </a:rPr>
-              <a:t>Nástroj a jeho otázka</a:t>
+              <a:t>Nástroje odpovedajú na rozdielne otázky</a:t>
             </a:r>
             <a:endParaRPr lang="en-US" sz="2900" dirty="0"/>
           </a:p>
@@ -8971,7 +6348,7 @@
       </p:sp>
       <p:graphicFrame>
         <p:nvGraphicFramePr>
-          <p:cNvPr id="22" name="Table 0"/>
+          <p:cNvPr id="18" name="Table 0"/>
           <p:cNvGraphicFramePr>
             <a:graphicFrameLocks noGrp="1"/>
           </p:cNvGraphicFramePr>
@@ -9220,7 +6597,7 @@
                           <a:ea typeface="Aptos" pitchFamily="34" charset="-122"/>
                           <a:cs typeface="Aptos" pitchFamily="34" charset="-120"/>
                         </a:rPr>
-                        <a:t>pytest</a:t>
+                        <a:t>formatter</a:t>
                       </a:r>
                       <a:endParaRPr lang="en-US" sz="1550" dirty="0">
                         <a:latin typeface="Aptos" charset="0"/>
@@ -9288,7 +6665,7 @@
                           <a:ea typeface="Aptos" pitchFamily="34" charset="-122"/>
                           <a:cs typeface="Aptos" pitchFamily="34" charset="-120"/>
                         </a:rPr>
-                        <a:t>funguje správanie?</a:t>
+                        <a:t>je zápis konzistentný?</a:t>
                       </a:r>
                       <a:endParaRPr lang="en-US" sz="1550" dirty="0">
                         <a:latin typeface="Aptos" charset="0"/>
@@ -9356,7 +6733,7 @@
                           <a:ea typeface="Aptos" pitchFamily="34" charset="-122"/>
                           <a:cs typeface="Aptos" pitchFamily="34" charset="-120"/>
                         </a:rPr>
-                        <a:t>assert expected == actual</a:t>
+                        <a:t>ruff format .</a:t>
                       </a:r>
                       <a:endParaRPr lang="en-US" sz="1550" dirty="0">
                         <a:latin typeface="Aptos" charset="0"/>
@@ -9426,7 +6803,7 @@
                           <a:ea typeface="Aptos" pitchFamily="34" charset="-122"/>
                           <a:cs typeface="Aptos" pitchFamily="34" charset="-120"/>
                         </a:rPr>
-                        <a:t>debugger</a:t>
+                        <a:t>linter</a:t>
                       </a:r>
                       <a:endParaRPr lang="en-US" sz="1550" dirty="0">
                         <a:latin typeface="Aptos" charset="0"/>
@@ -9494,213 +6871,7 @@
                           <a:ea typeface="Aptos" pitchFamily="34" charset="-122"/>
                           <a:cs typeface="Aptos" pitchFamily="34" charset="-120"/>
                         </a:rPr>
-                        <a:t>čo sa deje práve teraz?</a:t>
-                      </a:r>
-                      <a:endParaRPr lang="en-US" sz="1550" dirty="0">
-                        <a:latin typeface="Aptos" charset="0"/>
-                        <a:ea typeface="Aptos" charset="0"/>
-                        <a:cs typeface="Aptos" charset="0"/>
-                      </a:endParaRPr>
-                    </a:p>
-                  </a:txBody>
-                  <a:tcPr marL="82296" marR="82296" marT="82296" marB="82296" anchor="mid">
-                    <a:lnL w="7620" cap="flat" cmpd="sng" algn="ctr">
-                      <a:solidFill>
-                        <a:srgbClr val="D8E0E6"/>
-                      </a:solidFill>
-                      <a:prstDash val="solid"/>
-                      <a:round/>
-                      <a:headEnd type="none" w="med" len="med"/>
-                      <a:tailEnd type="none" w="med" len="med"/>
-                    </a:lnL>
-                    <a:lnR w="7620" cap="flat" cmpd="sng" algn="ctr">
-                      <a:solidFill>
-                        <a:srgbClr val="D8E0E6"/>
-                      </a:solidFill>
-                      <a:prstDash val="solid"/>
-                      <a:round/>
-                      <a:headEnd type="none" w="med" len="med"/>
-                      <a:tailEnd type="none" w="med" len="med"/>
-                    </a:lnR>
-                    <a:lnT w="7620" cap="flat" cmpd="sng" algn="ctr">
-                      <a:solidFill>
-                        <a:srgbClr val="D8E0E6"/>
-                      </a:solidFill>
-                      <a:prstDash val="solid"/>
-                      <a:round/>
-                      <a:headEnd type="none" w="med" len="med"/>
-                      <a:tailEnd type="none" w="med" len="med"/>
-                    </a:lnT>
-                    <a:lnB w="7620" cap="flat" cmpd="sng" algn="ctr">
-                      <a:solidFill>
-                        <a:srgbClr val="D8E0E6"/>
-                      </a:solidFill>
-                      <a:prstDash val="solid"/>
-                      <a:round/>
-                      <a:headEnd type="none" w="med" len="med"/>
-                      <a:tailEnd type="none" w="med" len="med"/>
-                    </a:lnB>
-                    <a:solidFill>
-                      <a:srgbClr val="FFFFFF"/>
-                    </a:solidFill>
-                  </a:tcPr>
-                </a:tc>
-                <a:tc>
-                  <a:txBody>
-                    <a:bodyPr/>
-                    <a:lstStyle/>
-                    <a:p>
-                      <a:pPr indent="0" marL="0">
-                        <a:buNone/>
-                      </a:pPr>
-                      <a:r>
-                        <a:rPr lang="en-US" sz="1550" dirty="0">
-                          <a:solidFill>
-                            <a:srgbClr val="18212B"/>
-                          </a:solidFill>
-                          <a:latin typeface="Aptos" pitchFamily="34" charset="0"/>
-                          <a:ea typeface="Aptos" pitchFamily="34" charset="-122"/>
-                          <a:cs typeface="Aptos" pitchFamily="34" charset="-120"/>
-                        </a:rPr>
-                        <a:t>breakpoint, variables</a:t>
-                      </a:r>
-                      <a:endParaRPr lang="en-US" sz="1550" dirty="0">
-                        <a:latin typeface="Aptos" charset="0"/>
-                        <a:ea typeface="Aptos" charset="0"/>
-                        <a:cs typeface="Aptos" charset="0"/>
-                      </a:endParaRPr>
-                    </a:p>
-                  </a:txBody>
-                  <a:tcPr marL="82296" marR="82296" marT="82296" marB="82296" anchor="mid">
-                    <a:lnL w="7620" cap="flat" cmpd="sng" algn="ctr">
-                      <a:solidFill>
-                        <a:srgbClr val="D8E0E6"/>
-                      </a:solidFill>
-                      <a:prstDash val="solid"/>
-                      <a:round/>
-                      <a:headEnd type="none" w="med" len="med"/>
-                      <a:tailEnd type="none" w="med" len="med"/>
-                    </a:lnL>
-                    <a:lnR w="7620" cap="flat" cmpd="sng" algn="ctr">
-                      <a:solidFill>
-                        <a:srgbClr val="D8E0E6"/>
-                      </a:solidFill>
-                      <a:prstDash val="solid"/>
-                      <a:round/>
-                      <a:headEnd type="none" w="med" len="med"/>
-                      <a:tailEnd type="none" w="med" len="med"/>
-                    </a:lnR>
-                    <a:lnT w="7620" cap="flat" cmpd="sng" algn="ctr">
-                      <a:solidFill>
-                        <a:srgbClr val="D8E0E6"/>
-                      </a:solidFill>
-                      <a:prstDash val="solid"/>
-                      <a:round/>
-                      <a:headEnd type="none" w="med" len="med"/>
-                      <a:tailEnd type="none" w="med" len="med"/>
-                    </a:lnT>
-                    <a:lnB w="7620" cap="flat" cmpd="sng" algn="ctr">
-                      <a:solidFill>
-                        <a:srgbClr val="D8E0E6"/>
-                      </a:solidFill>
-                      <a:prstDash val="solid"/>
-                      <a:round/>
-                      <a:headEnd type="none" w="med" len="med"/>
-                      <a:tailEnd type="none" w="med" len="med"/>
-                    </a:lnB>
-                    <a:solidFill>
-                      <a:srgbClr val="FFFFFF"/>
-                    </a:solidFill>
-                  </a:tcPr>
-                </a:tc>
-              </a:tr>
-              <a:tr h="548640">
-                <a:tc>
-                  <a:txBody>
-                    <a:bodyPr/>
-                    <a:lstStyle/>
-                    <a:p>
-                      <a:pPr indent="0" marL="0">
-                        <a:buNone/>
-                      </a:pPr>
-                      <a:r>
-                        <a:rPr lang="en-US" sz="1550" dirty="0">
-                          <a:solidFill>
-                            <a:srgbClr val="18212B"/>
-                          </a:solidFill>
-                          <a:latin typeface="Aptos" pitchFamily="34" charset="0"/>
-                          <a:ea typeface="Aptos" pitchFamily="34" charset="-122"/>
-                          <a:cs typeface="Aptos" pitchFamily="34" charset="-120"/>
-                        </a:rPr>
-                        <a:t>Ruff</a:t>
-                      </a:r>
-                      <a:endParaRPr lang="en-US" sz="1550" dirty="0">
-                        <a:latin typeface="Aptos" charset="0"/>
-                        <a:ea typeface="Aptos" charset="0"/>
-                        <a:cs typeface="Aptos" charset="0"/>
-                      </a:endParaRPr>
-                    </a:p>
-                  </a:txBody>
-                  <a:tcPr marL="82296" marR="82296" marT="82296" marB="82296" anchor="mid">
-                    <a:lnL w="7620" cap="flat" cmpd="sng" algn="ctr">
-                      <a:solidFill>
-                        <a:srgbClr val="D8E0E6"/>
-                      </a:solidFill>
-                      <a:prstDash val="solid"/>
-                      <a:round/>
-                      <a:headEnd type="none" w="med" len="med"/>
-                      <a:tailEnd type="none" w="med" len="med"/>
-                    </a:lnL>
-                    <a:lnR w="7620" cap="flat" cmpd="sng" algn="ctr">
-                      <a:solidFill>
-                        <a:srgbClr val="D8E0E6"/>
-                      </a:solidFill>
-                      <a:prstDash val="solid"/>
-                      <a:round/>
-                      <a:headEnd type="none" w="med" len="med"/>
-                      <a:tailEnd type="none" w="med" len="med"/>
-                    </a:lnR>
-                    <a:lnT w="7620" cap="flat" cmpd="sng" algn="ctr">
-                      <a:solidFill>
-                        <a:srgbClr val="D8E0E6"/>
-                      </a:solidFill>
-                      <a:prstDash val="solid"/>
-                      <a:round/>
-                      <a:headEnd type="none" w="med" len="med"/>
-                      <a:tailEnd type="none" w="med" len="med"/>
-                    </a:lnT>
-                    <a:lnB w="7620" cap="flat" cmpd="sng" algn="ctr">
-                      <a:solidFill>
-                        <a:srgbClr val="D8E0E6"/>
-                      </a:solidFill>
-                      <a:prstDash val="solid"/>
-                      <a:round/>
-                      <a:headEnd type="none" w="med" len="med"/>
-                      <a:tailEnd type="none" w="med" len="med"/>
-                    </a:lnB>
-                    <a:solidFill>
-                      <a:srgbClr val="FFFFFF"/>
-                    </a:solidFill>
-                  </a:tcPr>
-                </a:tc>
-                <a:tc>
-                  <a:txBody>
-                    <a:bodyPr/>
-                    <a:lstStyle/>
-                    <a:p>
-                      <a:pPr indent="0" marL="0">
-                        <a:buNone/>
-                      </a:pPr>
-                      <a:r>
-                        <a:rPr lang="en-US" sz="1550" dirty="0">
-                          <a:solidFill>
-                            <a:srgbClr val="18212B"/>
-                          </a:solidFill>
-                          <a:latin typeface="Aptos" pitchFamily="34" charset="0"/>
-                          <a:ea typeface="Aptos" pitchFamily="34" charset="-122"/>
-                          <a:cs typeface="Aptos" pitchFamily="34" charset="-120"/>
-                        </a:rPr>
-                        <a:t>je kód konzistentný?</a:t>
+                        <a:t>je v kóde podozrivý vzor?</a:t>
                       </a:r>
                       <a:endParaRPr lang="en-US" sz="1550" dirty="0">
                         <a:latin typeface="Aptos" charset="0"/>
@@ -9974,7 +7145,213 @@
                           <a:ea typeface="Aptos" pitchFamily="34" charset="-122"/>
                           <a:cs typeface="Aptos" pitchFamily="34" charset="-120"/>
                         </a:rPr>
-                        <a:t>mypy alebo pyright</a:t>
+                        <a:t>pyright</a:t>
+                      </a:r>
+                      <a:endParaRPr lang="en-US" sz="1550" dirty="0">
+                        <a:latin typeface="Aptos" charset="0"/>
+                        <a:ea typeface="Aptos" charset="0"/>
+                        <a:cs typeface="Aptos" charset="0"/>
+                      </a:endParaRPr>
+                    </a:p>
+                  </a:txBody>
+                  <a:tcPr marL="82296" marR="82296" marT="82296" marB="82296" anchor="mid">
+                    <a:lnL w="7620" cap="flat" cmpd="sng" algn="ctr">
+                      <a:solidFill>
+                        <a:srgbClr val="D8E0E6"/>
+                      </a:solidFill>
+                      <a:prstDash val="solid"/>
+                      <a:round/>
+                      <a:headEnd type="none" w="med" len="med"/>
+                      <a:tailEnd type="none" w="med" len="med"/>
+                    </a:lnL>
+                    <a:lnR w="7620" cap="flat" cmpd="sng" algn="ctr">
+                      <a:solidFill>
+                        <a:srgbClr val="D8E0E6"/>
+                      </a:solidFill>
+                      <a:prstDash val="solid"/>
+                      <a:round/>
+                      <a:headEnd type="none" w="med" len="med"/>
+                      <a:tailEnd type="none" w="med" len="med"/>
+                    </a:lnR>
+                    <a:lnT w="7620" cap="flat" cmpd="sng" algn="ctr">
+                      <a:solidFill>
+                        <a:srgbClr val="D8E0E6"/>
+                      </a:solidFill>
+                      <a:prstDash val="solid"/>
+                      <a:round/>
+                      <a:headEnd type="none" w="med" len="med"/>
+                      <a:tailEnd type="none" w="med" len="med"/>
+                    </a:lnT>
+                    <a:lnB w="7620" cap="flat" cmpd="sng" algn="ctr">
+                      <a:solidFill>
+                        <a:srgbClr val="D8E0E6"/>
+                      </a:solidFill>
+                      <a:prstDash val="solid"/>
+                      <a:round/>
+                      <a:headEnd type="none" w="med" len="med"/>
+                      <a:tailEnd type="none" w="med" len="med"/>
+                    </a:lnB>
+                    <a:solidFill>
+                      <a:srgbClr val="FFFFFF"/>
+                    </a:solidFill>
+                  </a:tcPr>
+                </a:tc>
+              </a:tr>
+              <a:tr h="548640">
+                <a:tc>
+                  <a:txBody>
+                    <a:bodyPr/>
+                    <a:lstStyle/>
+                    <a:p>
+                      <a:pPr indent="0" marL="0">
+                        <a:buNone/>
+                      </a:pPr>
+                      <a:r>
+                        <a:rPr lang="en-US" sz="1550" dirty="0">
+                          <a:solidFill>
+                            <a:srgbClr val="18212B"/>
+                          </a:solidFill>
+                          <a:latin typeface="Aptos" pitchFamily="34" charset="0"/>
+                          <a:ea typeface="Aptos" pitchFamily="34" charset="-122"/>
+                          <a:cs typeface="Aptos" pitchFamily="34" charset="-120"/>
+                        </a:rPr>
+                        <a:t>pytest</a:t>
+                      </a:r>
+                      <a:endParaRPr lang="en-US" sz="1550" dirty="0">
+                        <a:latin typeface="Aptos" charset="0"/>
+                        <a:ea typeface="Aptos" charset="0"/>
+                        <a:cs typeface="Aptos" charset="0"/>
+                      </a:endParaRPr>
+                    </a:p>
+                  </a:txBody>
+                  <a:tcPr marL="82296" marR="82296" marT="82296" marB="82296" anchor="mid">
+                    <a:lnL w="7620" cap="flat" cmpd="sng" algn="ctr">
+                      <a:solidFill>
+                        <a:srgbClr val="D8E0E6"/>
+                      </a:solidFill>
+                      <a:prstDash val="solid"/>
+                      <a:round/>
+                      <a:headEnd type="none" w="med" len="med"/>
+                      <a:tailEnd type="none" w="med" len="med"/>
+                    </a:lnL>
+                    <a:lnR w="7620" cap="flat" cmpd="sng" algn="ctr">
+                      <a:solidFill>
+                        <a:srgbClr val="D8E0E6"/>
+                      </a:solidFill>
+                      <a:prstDash val="solid"/>
+                      <a:round/>
+                      <a:headEnd type="none" w="med" len="med"/>
+                      <a:tailEnd type="none" w="med" len="med"/>
+                    </a:lnR>
+                    <a:lnT w="7620" cap="flat" cmpd="sng" algn="ctr">
+                      <a:solidFill>
+                        <a:srgbClr val="D8E0E6"/>
+                      </a:solidFill>
+                      <a:prstDash val="solid"/>
+                      <a:round/>
+                      <a:headEnd type="none" w="med" len="med"/>
+                      <a:tailEnd type="none" w="med" len="med"/>
+                    </a:lnT>
+                    <a:lnB w="7620" cap="flat" cmpd="sng" algn="ctr">
+                      <a:solidFill>
+                        <a:srgbClr val="D8E0E6"/>
+                      </a:solidFill>
+                      <a:prstDash val="solid"/>
+                      <a:round/>
+                      <a:headEnd type="none" w="med" len="med"/>
+                      <a:tailEnd type="none" w="med" len="med"/>
+                    </a:lnB>
+                    <a:solidFill>
+                      <a:srgbClr val="FFFFFF"/>
+                    </a:solidFill>
+                  </a:tcPr>
+                </a:tc>
+                <a:tc>
+                  <a:txBody>
+                    <a:bodyPr/>
+                    <a:lstStyle/>
+                    <a:p>
+                      <a:pPr indent="0" marL="0">
+                        <a:buNone/>
+                      </a:pPr>
+                      <a:r>
+                        <a:rPr lang="en-US" sz="1550" dirty="0">
+                          <a:solidFill>
+                            <a:srgbClr val="18212B"/>
+                          </a:solidFill>
+                          <a:latin typeface="Aptos" pitchFamily="34" charset="0"/>
+                          <a:ea typeface="Aptos" pitchFamily="34" charset="-122"/>
+                          <a:cs typeface="Aptos" pitchFamily="34" charset="-120"/>
+                        </a:rPr>
+                        <a:t>funguje správanie?</a:t>
+                      </a:r>
+                      <a:endParaRPr lang="en-US" sz="1550" dirty="0">
+                        <a:latin typeface="Aptos" charset="0"/>
+                        <a:ea typeface="Aptos" charset="0"/>
+                        <a:cs typeface="Aptos" charset="0"/>
+                      </a:endParaRPr>
+                    </a:p>
+                  </a:txBody>
+                  <a:tcPr marL="82296" marR="82296" marT="82296" marB="82296" anchor="mid">
+                    <a:lnL w="7620" cap="flat" cmpd="sng" algn="ctr">
+                      <a:solidFill>
+                        <a:srgbClr val="D8E0E6"/>
+                      </a:solidFill>
+                      <a:prstDash val="solid"/>
+                      <a:round/>
+                      <a:headEnd type="none" w="med" len="med"/>
+                      <a:tailEnd type="none" w="med" len="med"/>
+                    </a:lnL>
+                    <a:lnR w="7620" cap="flat" cmpd="sng" algn="ctr">
+                      <a:solidFill>
+                        <a:srgbClr val="D8E0E6"/>
+                      </a:solidFill>
+                      <a:prstDash val="solid"/>
+                      <a:round/>
+                      <a:headEnd type="none" w="med" len="med"/>
+                      <a:tailEnd type="none" w="med" len="med"/>
+                    </a:lnR>
+                    <a:lnT w="7620" cap="flat" cmpd="sng" algn="ctr">
+                      <a:solidFill>
+                        <a:srgbClr val="D8E0E6"/>
+                      </a:solidFill>
+                      <a:prstDash val="solid"/>
+                      <a:round/>
+                      <a:headEnd type="none" w="med" len="med"/>
+                      <a:tailEnd type="none" w="med" len="med"/>
+                    </a:lnT>
+                    <a:lnB w="7620" cap="flat" cmpd="sng" algn="ctr">
+                      <a:solidFill>
+                        <a:srgbClr val="D8E0E6"/>
+                      </a:solidFill>
+                      <a:prstDash val="solid"/>
+                      <a:round/>
+                      <a:headEnd type="none" w="med" len="med"/>
+                      <a:tailEnd type="none" w="med" len="med"/>
+                    </a:lnB>
+                    <a:solidFill>
+                      <a:srgbClr val="FFFFFF"/>
+                    </a:solidFill>
+                  </a:tcPr>
+                </a:tc>
+                <a:tc>
+                  <a:txBody>
+                    <a:bodyPr/>
+                    <a:lstStyle/>
+                    <a:p>
+                      <a:pPr indent="0" marL="0">
+                        <a:buNone/>
+                      </a:pPr>
+                      <a:r>
+                        <a:rPr lang="en-US" sz="1550" dirty="0">
+                          <a:solidFill>
+                            <a:srgbClr val="18212B"/>
+                          </a:solidFill>
+                          <a:latin typeface="Aptos" pitchFamily="34" charset="0"/>
+                          <a:ea typeface="Aptos" pitchFamily="34" charset="-122"/>
+                          <a:cs typeface="Aptos" pitchFamily="34" charset="-120"/>
+                        </a:rPr>
+                        <a:t>python -m pytest</a:t>
                       </a:r>
                       <a:endParaRPr lang="en-US" sz="1550" dirty="0">
                         <a:latin typeface="Aptos" charset="0"/>
@@ -10186,9 +7563,9 @@
 </p:sld>
 </file>
 
-<file path=ppt/slides/slide22.xml><?xml version="1.0" encoding="utf-8"?>
+<file path=ppt/slides/slide18.xml><?xml version="1.0" encoding="utf-8"?>
 <p:sld xmlns:a="http://schemas.openxmlformats.org/drawingml/2006/main" xmlns:r="http://schemas.openxmlformats.org/officeDocument/2006/relationships" xmlns:p="http://schemas.openxmlformats.org/presentationml/2006/main">
-  <p:cSld name="Slide 22">
+  <p:cSld name="Slide 18">
     <p:bg>
       <p:bgPr>
         <a:solidFill>
@@ -10398,7 +7775,7 @@
                 <a:ea typeface="Consolas" pitchFamily="34" charset="-122"/>
                 <a:cs typeface="Consolas" pitchFamily="34" charset="-120"/>
               </a:rPr>
-              <a:t>22</a:t>
+              <a:t>18</a:t>
             </a:r>
             <a:endParaRPr lang="en-US" sz="800" dirty="0"/>
           </a:p>
@@ -10439,7 +7816,7 @@
                 <a:ea typeface="Aptos" pitchFamily="34" charset="-122"/>
                 <a:cs typeface="Aptos" pitchFamily="34" charset="-120"/>
               </a:rPr>
-              <a:t>Ruff v pracovnom cykle</a:t>
+              <a:t>Vývojový cyklus po zmene</a:t>
             </a:r>
             <a:endParaRPr lang="en-US" sz="2900" dirty="0"/>
           </a:p>
@@ -10453,13 +7830,11 @@
         </p:nvSpPr>
         <p:spPr>
           <a:xfrm>
-            <a:off x="658368" y="1828800"/>
-            <a:ext cx="6812280" cy="4069080"/>
-          </a:xfrm>
-          <a:prstGeom prst="roundRect">
-            <a:avLst>
-              <a:gd name="adj" fmla="val 1348"/>
-            </a:avLst>
+            <a:off x="658368" y="1783080"/>
+            <a:ext cx="10899648" cy="4069080"/>
+          </a:xfrm>
+          <a:prstGeom prst="rect">
+            <a:avLst/>
           </a:prstGeom>
           <a:solidFill>
             <a:srgbClr val="17212B"/>
@@ -10480,8 +7855,8 @@
         </p:nvSpPr>
         <p:spPr>
           <a:xfrm>
-            <a:off x="868680" y="2029968"/>
-            <a:ext cx="6309360" cy="182880"/>
+            <a:off x="896112" y="1984248"/>
+            <a:ext cx="9966960" cy="182880"/>
           </a:xfrm>
           <a:prstGeom prst="rect">
             <a:avLst/>
@@ -10521,8 +7896,8 @@
         </p:nvSpPr>
         <p:spPr>
           <a:xfrm>
-            <a:off x="877824" y="2395728"/>
-            <a:ext cx="6327648" cy="3246120"/>
+            <a:off x="896112" y="2395728"/>
+            <a:ext cx="9893808" cy="3063240"/>
           </a:xfrm>
           <a:prstGeom prst="rect">
             <a:avLst/>
@@ -10540,7 +7915,7 @@
               <a:buNone/>
             </a:pPr>
             <a:r>
-              <a:rPr lang="en-US" sz="1650" dirty="0">
+              <a:rPr lang="en-US" sz="1750" dirty="0">
                 <a:solidFill>
                   <a:srgbClr val="F4F7FA"/>
                 </a:solidFill>
@@ -10548,16 +7923,16 @@
                 <a:ea typeface="Consolas" pitchFamily="34" charset="-122"/>
                 <a:cs typeface="Consolas" pitchFamily="34" charset="-120"/>
               </a:rPr>
-              <a:t>ruff check .</a:t>
-            </a:r>
-            <a:endParaRPr lang="en-US" sz="1650" dirty="0"/>
+              <a:t>ruff format .</a:t>
+            </a:r>
+            <a:endParaRPr lang="en-US" sz="1750" dirty="0"/>
           </a:p>
           <a:p>
             <a:pPr algn="l" indent="0" marL="0">
               <a:buNone/>
             </a:pPr>
             <a:r>
-              <a:rPr lang="en-US" sz="1650" dirty="0">
+              <a:rPr lang="en-US" sz="1750" dirty="0">
                 <a:solidFill>
                   <a:srgbClr val="F4F7FA"/>
                 </a:solidFill>
@@ -10565,22 +7940,16 @@
                 <a:ea typeface="Consolas" pitchFamily="34" charset="-122"/>
                 <a:cs typeface="Consolas" pitchFamily="34" charset="-120"/>
               </a:rPr>
-              <a:t>ruff format .</a:t>
-            </a:r>
-            <a:endParaRPr lang="en-US" sz="1650" dirty="0"/>
+              <a:t>ruff check .</a:t>
+            </a:r>
+            <a:endParaRPr lang="en-US" sz="1750" dirty="0"/>
           </a:p>
           <a:p>
             <a:pPr algn="l" indent="0" marL="0">
               <a:buNone/>
             </a:pPr>
-            <a:endParaRPr lang="en-US" sz="1650" dirty="0"/>
-          </a:p>
-          <a:p>
-            <a:pPr algn="l" indent="0" marL="0">
-              <a:buNone/>
-            </a:pPr>
-            <a:r>
-              <a:rPr lang="en-US" sz="1650" dirty="0">
+            <a:r>
+              <a:rPr lang="en-US" sz="1750" dirty="0">
                 <a:solidFill>
                   <a:srgbClr val="F4F7FA"/>
                 </a:solidFill>
@@ -10588,45 +7957,73 @@
                 <a:ea typeface="Consolas" pitchFamily="34" charset="-122"/>
                 <a:cs typeface="Consolas" pitchFamily="34" charset="-120"/>
               </a:rPr>
+              <a:t>pyright</a:t>
+            </a:r>
+            <a:endParaRPr lang="en-US" sz="1750" dirty="0"/>
+          </a:p>
+          <a:p>
+            <a:pPr algn="l" indent="0" marL="0">
+              <a:buNone/>
+            </a:pPr>
+            <a:r>
+              <a:rPr lang="en-US" sz="1750" dirty="0">
+                <a:solidFill>
+                  <a:srgbClr val="F4F7FA"/>
+                </a:solidFill>
+                <a:latin typeface="Consolas" pitchFamily="34" charset="0"/>
+                <a:ea typeface="Consolas" pitchFamily="34" charset="-122"/>
+                <a:cs typeface="Consolas" pitchFamily="34" charset="-120"/>
+              </a:rPr>
               <a:t>python -m pytest</a:t>
             </a:r>
-            <a:endParaRPr lang="en-US" sz="1650" dirty="0"/>
-          </a:p>
-        </p:txBody>
-      </p:sp>
-      <p:sp>
-        <p:nvSpPr>
-          <p:cNvPr id="12" name="Shape 10"/>
-          <p:cNvSpPr/>
-          <p:nvPr/>
-        </p:nvSpPr>
-        <p:spPr>
-          <a:xfrm>
-            <a:off x="7909560" y="1901952"/>
-            <a:ext cx="0" cy="3566160"/>
-          </a:xfrm>
-          <a:prstGeom prst="line">
-            <a:avLst/>
-          </a:prstGeom>
-          <a:noFill/>
-          <a:ln w="12700">
-            <a:solidFill>
-              <a:srgbClr val="1877B9"/>
-            </a:solidFill>
-            <a:prstDash val="solid"/>
-          </a:ln>
-        </p:spPr>
-      </p:sp>
-      <p:sp>
-        <p:nvSpPr>
-          <p:cNvPr id="13" name="Text 11"/>
-          <p:cNvSpPr/>
-          <p:nvPr/>
-        </p:nvSpPr>
-        <p:spPr>
-          <a:xfrm>
-            <a:off x="8229600" y="2130552"/>
-            <a:ext cx="2743200" cy="2468880"/>
+            <a:endParaRPr lang="en-US" sz="1750" dirty="0"/>
+          </a:p>
+          <a:p>
+            <a:pPr algn="l" indent="0" marL="0">
+              <a:buNone/>
+            </a:pPr>
+            <a:r>
+              <a:rPr lang="en-US" sz="1750" dirty="0">
+                <a:solidFill>
+                  <a:srgbClr val="F4F7FA"/>
+                </a:solidFill>
+                <a:latin typeface="Consolas" pitchFamily="34" charset="0"/>
+                <a:ea typeface="Consolas" pitchFamily="34" charset="-122"/>
+                <a:cs typeface="Consolas" pitchFamily="34" charset="-120"/>
+              </a:rPr>
+              <a:t>git diff</a:t>
+            </a:r>
+            <a:endParaRPr lang="en-US" sz="1750" dirty="0"/>
+          </a:p>
+          <a:p>
+            <a:pPr algn="l" indent="0" marL="0">
+              <a:buNone/>
+            </a:pPr>
+            <a:r>
+              <a:rPr lang="en-US" sz="1750" dirty="0">
+                <a:solidFill>
+                  <a:srgbClr val="F4F7FA"/>
+                </a:solidFill>
+                <a:latin typeface="Consolas" pitchFamily="34" charset="0"/>
+                <a:ea typeface="Consolas" pitchFamily="34" charset="-122"/>
+                <a:cs typeface="Consolas" pitchFamily="34" charset="-120"/>
+              </a:rPr>
+              <a:t>git commit -m "Fix discount validation"</a:t>
+            </a:r>
+            <a:endParaRPr lang="en-US" sz="1750" dirty="0"/>
+          </a:p>
+        </p:txBody>
+      </p:sp>
+      <p:sp>
+        <p:nvSpPr>
+          <p:cNvPr id="12" name="Text 10"/>
+          <p:cNvSpPr/>
+          <p:nvPr/>
+        </p:nvSpPr>
+        <p:spPr>
+          <a:xfrm>
+            <a:off x="768096" y="6053328"/>
+            <a:ext cx="9921240" cy="237744"/>
           </a:xfrm>
           <a:prstGeom prst="rect">
             <a:avLst/>
@@ -10644,7 +8041,7 @@
               <a:buNone/>
             </a:pPr>
             <a:r>
-              <a:rPr lang="en-US" sz="1800" dirty="0">
+              <a:rPr lang="en-US" sz="1550" dirty="0">
                 <a:solidFill>
                   <a:srgbClr val="5E6B78"/>
                 </a:solidFill>
@@ -10652,9 +8049,9 @@
                 <a:ea typeface="Aptos" pitchFamily="34" charset="-122"/>
                 <a:cs typeface="Aptos" pitchFamily="34" charset="-120"/>
               </a:rPr>
-              <a:t>Formatter, linter a testy sa dopĺňajú. Žiadny z nich nenahrádza ostatné.</a:t>
-            </a:r>
-            <a:endParaRPr lang="en-US" sz="1800" dirty="0"/>
+              <a:t>Každý nástroj pokrýva inú chybu. Spolu vytvárajú krátky, opakovateľný pracovný cyklus.</a:t>
+            </a:r>
+            <a:endParaRPr lang="en-US" sz="1550" dirty="0"/>
           </a:p>
         </p:txBody>
       </p:sp>
@@ -10666,9 +8063,9 @@
 </p:sld>
 </file>
 
-<file path=ppt/slides/slide23.xml><?xml version="1.0" encoding="utf-8"?>
+<file path=ppt/slides/slide2.xml><?xml version="1.0" encoding="utf-8"?>
 <p:sld xmlns:a="http://schemas.openxmlformats.org/drawingml/2006/main" xmlns:r="http://schemas.openxmlformats.org/officeDocument/2006/relationships" xmlns:p="http://schemas.openxmlformats.org/presentationml/2006/main">
-  <p:cSld name="Slide 23">
+  <p:cSld name="Slide 2">
     <p:bg>
       <p:bgPr>
         <a:solidFill>
@@ -10878,7 +8275,7 @@
                 <a:ea typeface="Consolas" pitchFamily="34" charset="-122"/>
                 <a:cs typeface="Consolas" pitchFamily="34" charset="-120"/>
               </a:rPr>
-              <a:t>23</a:t>
+              <a:t>02</a:t>
             </a:r>
             <a:endParaRPr lang="en-US" sz="800" dirty="0"/>
           </a:p>
@@ -10892,8 +8289,8 @@
         </p:nvSpPr>
         <p:spPr>
           <a:xfrm>
-            <a:off x="658368" y="932688"/>
-            <a:ext cx="10789920" cy="713232"/>
+            <a:off x="749808" y="1554480"/>
+            <a:ext cx="10424160" cy="1508760"/>
           </a:xfrm>
           <a:prstGeom prst="rect">
             <a:avLst/>
@@ -10911,7 +8308,7 @@
               <a:buNone/>
             </a:pPr>
             <a:r>
-              <a:rPr lang="en-US" sz="2900" b="1" dirty="0">
+              <a:rPr lang="en-US" sz="3400" b="1" dirty="0">
                 <a:solidFill>
                   <a:srgbClr val="16324F"/>
                 </a:solidFill>
@@ -10919,702 +8316,22 @@
                 <a:ea typeface="Aptos" pitchFamily="34" charset="-122"/>
                 <a:cs typeface="Aptos" pitchFamily="34" charset="-120"/>
               </a:rPr>
-              <a:t>Krátka ukážka</a:t>
-            </a:r>
-            <a:endParaRPr lang="en-US" sz="2900" dirty="0"/>
-          </a:p>
-        </p:txBody>
-      </p:sp>
-      <p:sp>
-        <p:nvSpPr>
-          <p:cNvPr id="9" name="Text 7"/>
-          <p:cNvSpPr/>
-          <p:nvPr/>
-        </p:nvSpPr>
-        <p:spPr>
-          <a:xfrm>
-            <a:off x="685800" y="1719072"/>
-            <a:ext cx="9966960" cy="475488"/>
-          </a:xfrm>
-          <a:prstGeom prst="rect">
-            <a:avLst/>
-          </a:prstGeom>
-          <a:noFill/>
-          <a:ln/>
-        </p:spPr>
-        <p:txBody>
-          <a:bodyPr wrap="square" lIns="0" tIns="0" rIns="0" bIns="0" rtlCol="0" anchor="t">
-            <a:normAutofit/>
-          </a:bodyPr>
-          <a:lstStyle/>
-          <a:p>
-            <a:pPr algn="l" indent="0" marL="0">
-              <a:buNone/>
-            </a:pPr>
-            <a:r>
-              <a:rPr lang="en-US" sz="1800" dirty="0">
-                <a:solidFill>
-                  <a:srgbClr val="5E6B78"/>
-                </a:solidFill>
-                <a:latin typeface="Aptos" pitchFamily="34" charset="0"/>
-                <a:ea typeface="Aptos" pitchFamily="34" charset="-122"/>
-                <a:cs typeface="Aptos" pitchFamily="34" charset="-120"/>
-              </a:rPr>
-              <a:t>Od chyby v počítaní slov k regression testu.</a:t>
-            </a:r>
-            <a:endParaRPr lang="en-US" sz="1800" dirty="0"/>
-          </a:p>
-        </p:txBody>
-      </p:sp>
-      <p:sp>
-        <p:nvSpPr>
-          <p:cNvPr id="10" name="Text 8"/>
-          <p:cNvSpPr/>
-          <p:nvPr/>
-        </p:nvSpPr>
-        <p:spPr>
-          <a:xfrm>
-            <a:off x="868680" y="2487168"/>
-            <a:ext cx="9921240" cy="3886200"/>
-          </a:xfrm>
-          <a:prstGeom prst="rect">
-            <a:avLst/>
-          </a:prstGeom>
-          <a:noFill/>
-          <a:ln/>
-        </p:spPr>
-        <p:txBody>
-          <a:bodyPr wrap="square" lIns="508" tIns="508" rIns="508" bIns="508" rtlCol="0" anchor="t">
-            <a:normAutofit/>
-          </a:bodyPr>
-          <a:lstStyle/>
-          <a:p>
-            <a:pPr marL="228600" indent="-228600">
-              <a:buSzPct val="100000"/>
-              <a:buChar char="•"/>
-            </a:pPr>
-            <a:r>
-              <a:rPr lang="en-US" sz="1800" dirty="0">
-                <a:solidFill>
-                  <a:srgbClr val="18212B"/>
-                </a:solidFill>
-                <a:latin typeface="Aptos" pitchFamily="34" charset="0"/>
-                <a:ea typeface="Aptos" pitchFamily="34" charset="-122"/>
-                <a:cs typeface="Aptos" pitchFamily="34" charset="-120"/>
-              </a:rPr>
-              <a:t>reprodukovať chybu</a:t>
-            </a:r>
-            <a:endParaRPr lang="en-US" sz="1800" dirty="0"/>
-          </a:p>
-          <a:p>
-            <a:pPr marL="228600" indent="-228600">
-              <a:buSzPct val="100000"/>
-              <a:buChar char="•"/>
-            </a:pPr>
-            <a:r>
-              <a:rPr lang="en-US" sz="1800" dirty="0">
-                <a:solidFill>
-                  <a:srgbClr val="18212B"/>
-                </a:solidFill>
-                <a:latin typeface="Aptos" pitchFamily="34" charset="0"/>
-                <a:ea typeface="Aptos" pitchFamily="34" charset="-122"/>
-                <a:cs typeface="Aptos" pitchFamily="34" charset="-120"/>
-              </a:rPr>
-              <a:t>napísať zlyhávajúci test</a:t>
-            </a:r>
-            <a:endParaRPr lang="en-US" sz="1800" dirty="0"/>
-          </a:p>
-          <a:p>
-            <a:pPr marL="228600" indent="-228600">
-              <a:buSzPct val="100000"/>
-              <a:buChar char="•"/>
-            </a:pPr>
-            <a:r>
-              <a:rPr lang="en-US" sz="1800" dirty="0">
-                <a:solidFill>
-                  <a:srgbClr val="18212B"/>
-                </a:solidFill>
-                <a:latin typeface="Aptos" pitchFamily="34" charset="0"/>
-                <a:ea typeface="Aptos" pitchFamily="34" charset="-122"/>
-                <a:cs typeface="Aptos" pitchFamily="34" charset="-120"/>
-              </a:rPr>
-              <a:t>opraviť jednu funkciu</a:t>
-            </a:r>
-            <a:endParaRPr lang="en-US" sz="1800" dirty="0"/>
-          </a:p>
-          <a:p>
-            <a:pPr marL="228600" indent="-228600">
-              <a:buSzPct val="100000"/>
-              <a:buChar char="•"/>
-            </a:pPr>
-            <a:r>
-              <a:rPr lang="en-US" sz="1800" dirty="0">
-                <a:solidFill>
-                  <a:srgbClr val="18212B"/>
-                </a:solidFill>
-                <a:latin typeface="Aptos" pitchFamily="34" charset="0"/>
-                <a:ea typeface="Aptos" pitchFamily="34" charset="-122"/>
-                <a:cs typeface="Aptos" pitchFamily="34" charset="-120"/>
-              </a:rPr>
-              <a:t>spustiť pytest a Ruff</a:t>
-            </a:r>
-            <a:endParaRPr lang="en-US" sz="1800" dirty="0"/>
-          </a:p>
-        </p:txBody>
-      </p:sp>
-    </p:spTree>
-  </p:cSld>
-  <p:clrMapOvr>
-    <a:masterClrMapping/>
-  </p:clrMapOvr>
-</p:sld>
-</file>
-
-<file path=ppt/slides/slide24.xml><?xml version="1.0" encoding="utf-8"?>
-<p:sld xmlns:a="http://schemas.openxmlformats.org/drawingml/2006/main" xmlns:r="http://schemas.openxmlformats.org/officeDocument/2006/relationships" xmlns:p="http://schemas.openxmlformats.org/presentationml/2006/main">
-  <p:cSld name="Slide 24">
-    <p:bg>
-      <p:bgPr>
-        <a:solidFill>
-          <a:srgbClr val="FFFFFF"/>
-        </a:solidFill>
-      </p:bgPr>
-    </p:bg>
-    <p:spTree>
-      <p:nvGrpSpPr>
-        <p:cNvPr id="1" name=""/>
-        <p:cNvGrpSpPr/>
-        <p:nvPr/>
-      </p:nvGrpSpPr>
-      <p:grpSpPr>
-        <a:xfrm>
-          <a:off x="0" y="0"/>
-          <a:ext cx="0" cy="0"/>
-          <a:chOff x="0" y="0"/>
-          <a:chExt cx="0" cy="0"/>
-        </a:xfrm>
-      </p:grpSpPr>
-      <p:sp>
-        <p:nvSpPr>
-          <p:cNvPr id="2" name="Shape 0"/>
-          <p:cNvSpPr/>
-          <p:nvPr/>
-        </p:nvSpPr>
-        <p:spPr>
-          <a:xfrm>
-            <a:off x="0" y="0"/>
-            <a:ext cx="12191695" cy="155448"/>
-          </a:xfrm>
-          <a:prstGeom prst="rect">
-            <a:avLst/>
-          </a:prstGeom>
-          <a:solidFill>
-            <a:srgbClr val="1877B9"/>
-          </a:solidFill>
-          <a:ln w="12700">
-            <a:solidFill>
-              <a:srgbClr val="1877B9"/>
-            </a:solidFill>
-            <a:prstDash val="solid"/>
-          </a:ln>
-        </p:spPr>
-      </p:sp>
-      <p:sp>
-        <p:nvSpPr>
-          <p:cNvPr id="3" name="Text 1"/>
-          <p:cNvSpPr/>
-          <p:nvPr/>
-        </p:nvSpPr>
-        <p:spPr>
-          <a:xfrm>
-            <a:off x="566928" y="320040"/>
-            <a:ext cx="4663440" cy="182880"/>
-          </a:xfrm>
-          <a:prstGeom prst="rect">
-            <a:avLst/>
-          </a:prstGeom>
-          <a:noFill/>
-          <a:ln/>
-        </p:spPr>
-        <p:txBody>
-          <a:bodyPr wrap="square" lIns="0" tIns="0" rIns="0" bIns="0" rtlCol="0" anchor="ctr">
-            <a:normAutofit/>
-          </a:bodyPr>
-          <a:lstStyle/>
-          <a:p>
-            <a:pPr algn="l" indent="0" marL="0">
-              <a:buNone/>
-            </a:pPr>
-            <a:r>
-              <a:rPr lang="en-US" sz="900" b="1" spc="80" kern="0" dirty="0">
-                <a:solidFill>
-                  <a:srgbClr val="1877B9"/>
-                </a:solidFill>
-                <a:latin typeface="Aptos" pitchFamily="34" charset="0"/>
-                <a:ea typeface="Aptos" pitchFamily="34" charset="-122"/>
-                <a:cs typeface="Aptos" pitchFamily="34" charset="-120"/>
-              </a:rPr>
-              <a:t>PROGRAMOVANIE V PYTHONE</a:t>
-            </a:r>
-            <a:endParaRPr lang="en-US" sz="900" dirty="0"/>
-          </a:p>
-        </p:txBody>
-      </p:sp>
-      <p:sp>
-        <p:nvSpPr>
-          <p:cNvPr id="4" name="Text 2"/>
-          <p:cNvSpPr/>
-          <p:nvPr/>
-        </p:nvSpPr>
-        <p:spPr>
-          <a:xfrm>
-            <a:off x="9829800" y="320040"/>
-            <a:ext cx="1783080" cy="182880"/>
-          </a:xfrm>
-          <a:prstGeom prst="rect">
-            <a:avLst/>
-          </a:prstGeom>
-          <a:noFill/>
-          <a:ln/>
-        </p:spPr>
-        <p:txBody>
-          <a:bodyPr wrap="square" lIns="0" tIns="0" rIns="0" bIns="0" rtlCol="0" anchor="ctr">
-            <a:normAutofit/>
-          </a:bodyPr>
-          <a:lstStyle/>
-          <a:p>
-            <a:pPr algn="r" indent="0" marL="0">
-              <a:buNone/>
-            </a:pPr>
-            <a:r>
-              <a:rPr lang="en-US" sz="900" b="1" dirty="0">
-                <a:solidFill>
-                  <a:srgbClr val="5E6B78"/>
-                </a:solidFill>
-                <a:latin typeface="Consolas" pitchFamily="34" charset="0"/>
-                <a:ea typeface="Consolas" pitchFamily="34" charset="-122"/>
-                <a:cs typeface="Consolas" pitchFamily="34" charset="-120"/>
-              </a:rPr>
-              <a:t>PREDNÁŠKA 04</a:t>
-            </a:r>
-            <a:endParaRPr lang="en-US" sz="900" dirty="0"/>
-          </a:p>
-        </p:txBody>
-      </p:sp>
-      <p:sp>
-        <p:nvSpPr>
-          <p:cNvPr id="5" name="Shape 3"/>
-          <p:cNvSpPr/>
-          <p:nvPr/>
-        </p:nvSpPr>
-        <p:spPr>
-          <a:xfrm>
-            <a:off x="566928" y="658368"/>
-            <a:ext cx="11045952" cy="0"/>
-          </a:xfrm>
-          <a:prstGeom prst="line">
-            <a:avLst/>
-          </a:prstGeom>
-          <a:noFill/>
-          <a:ln w="12700">
-            <a:solidFill>
-              <a:srgbClr val="D8E0E6"/>
-            </a:solidFill>
-            <a:prstDash val="solid"/>
-          </a:ln>
-        </p:spPr>
-      </p:sp>
-      <p:sp>
-        <p:nvSpPr>
-          <p:cNvPr id="6" name="Shape 4"/>
-          <p:cNvSpPr/>
-          <p:nvPr/>
-        </p:nvSpPr>
-        <p:spPr>
-          <a:xfrm>
-            <a:off x="566928" y="6419088"/>
-            <a:ext cx="11045952" cy="0"/>
-          </a:xfrm>
-          <a:prstGeom prst="line">
-            <a:avLst/>
-          </a:prstGeom>
-          <a:noFill/>
-          <a:ln w="12700">
-            <a:solidFill>
-              <a:srgbClr val="D8E0E6"/>
-            </a:solidFill>
-            <a:prstDash val="solid"/>
-          </a:ln>
-        </p:spPr>
-      </p:sp>
-      <p:sp>
-        <p:nvSpPr>
-          <p:cNvPr id="7" name="Text 5"/>
-          <p:cNvSpPr/>
-          <p:nvPr/>
-        </p:nvSpPr>
-        <p:spPr>
-          <a:xfrm>
-            <a:off x="11109960" y="6501384"/>
-            <a:ext cx="457200" cy="146304"/>
-          </a:xfrm>
-          <a:prstGeom prst="rect">
-            <a:avLst/>
-          </a:prstGeom>
-          <a:noFill/>
-          <a:ln/>
-        </p:spPr>
-        <p:txBody>
-          <a:bodyPr wrap="square" lIns="0" tIns="0" rIns="0" bIns="0" rtlCol="0" anchor="ctr">
-            <a:normAutofit/>
-          </a:bodyPr>
-          <a:lstStyle/>
-          <a:p>
-            <a:pPr algn="r" indent="0" marL="0">
-              <a:buNone/>
-            </a:pPr>
-            <a:r>
-              <a:rPr lang="en-US" sz="800" dirty="0">
-                <a:solidFill>
-                  <a:srgbClr val="5E6B78"/>
-                </a:solidFill>
-                <a:latin typeface="Consolas" pitchFamily="34" charset="0"/>
-                <a:ea typeface="Consolas" pitchFamily="34" charset="-122"/>
-                <a:cs typeface="Consolas" pitchFamily="34" charset="-120"/>
-              </a:rPr>
-              <a:t>24</a:t>
-            </a:r>
-            <a:endParaRPr lang="en-US" sz="800" dirty="0"/>
-          </a:p>
-        </p:txBody>
-      </p:sp>
-      <p:sp>
-        <p:nvSpPr>
-          <p:cNvPr id="8" name="Text 6"/>
-          <p:cNvSpPr/>
-          <p:nvPr/>
-        </p:nvSpPr>
-        <p:spPr>
-          <a:xfrm>
-            <a:off x="658368" y="932688"/>
-            <a:ext cx="10789920" cy="713232"/>
-          </a:xfrm>
-          <a:prstGeom prst="rect">
-            <a:avLst/>
-          </a:prstGeom>
-          <a:noFill/>
-          <a:ln/>
-        </p:spPr>
-        <p:txBody>
-          <a:bodyPr wrap="square" lIns="0" tIns="0" rIns="0" bIns="0" rtlCol="0" anchor="t">
-            <a:normAutofit/>
-          </a:bodyPr>
-          <a:lstStyle/>
-          <a:p>
-            <a:pPr algn="l" indent="0" marL="0">
-              <a:buNone/>
-            </a:pPr>
-            <a:r>
-              <a:rPr lang="en-US" sz="2900" b="1" dirty="0">
-                <a:solidFill>
-                  <a:srgbClr val="16324F"/>
-                </a:solidFill>
-                <a:latin typeface="Aptos" pitchFamily="34" charset="0"/>
-                <a:ea typeface="Aptos" pitchFamily="34" charset="-122"/>
-                <a:cs typeface="Aptos" pitchFamily="34" charset="-120"/>
-              </a:rPr>
-              <a:t>Zhrnutie</a:t>
-            </a:r>
-            <a:endParaRPr lang="en-US" sz="2900" dirty="0"/>
-          </a:p>
-        </p:txBody>
-      </p:sp>
-      <p:sp>
-        <p:nvSpPr>
-          <p:cNvPr id="9" name="Text 7"/>
-          <p:cNvSpPr/>
-          <p:nvPr/>
-        </p:nvSpPr>
-        <p:spPr>
-          <a:xfrm>
-            <a:off x="868680" y="1938528"/>
-            <a:ext cx="9921240" cy="3886200"/>
-          </a:xfrm>
-          <a:prstGeom prst="rect">
-            <a:avLst/>
-          </a:prstGeom>
-          <a:noFill/>
-          <a:ln/>
-        </p:spPr>
-        <p:txBody>
-          <a:bodyPr wrap="square" lIns="508" tIns="508" rIns="508" bIns="508" rtlCol="0" anchor="t">
-            <a:normAutofit/>
-          </a:bodyPr>
-          <a:lstStyle/>
-          <a:p>
-            <a:pPr marL="228600" indent="-228600">
-              <a:buSzPct val="100000"/>
-              <a:buChar char="•"/>
-            </a:pPr>
-            <a:r>
-              <a:rPr lang="en-US" sz="1900" dirty="0">
-                <a:solidFill>
-                  <a:srgbClr val="18212B"/>
-                </a:solidFill>
-                <a:latin typeface="Aptos" pitchFamily="34" charset="0"/>
-                <a:ea typeface="Aptos" pitchFamily="34" charset="-122"/>
-                <a:cs typeface="Aptos" pitchFamily="34" charset="-120"/>
-              </a:rPr>
-              <a:t>test je spustiteľný opis očakávaného správania</a:t>
-            </a:r>
-            <a:endParaRPr lang="en-US" sz="1900" dirty="0"/>
-          </a:p>
-          <a:p>
-            <a:pPr marL="228600" indent="-228600">
-              <a:buSzPct val="100000"/>
-              <a:buChar char="•"/>
-            </a:pPr>
-            <a:r>
-              <a:rPr lang="en-US" sz="1900" dirty="0">
-                <a:solidFill>
-                  <a:srgbClr val="18212B"/>
-                </a:solidFill>
-                <a:latin typeface="Aptos" pitchFamily="34" charset="0"/>
-                <a:ea typeface="Aptos" pitchFamily="34" charset="-122"/>
-                <a:cs typeface="Aptos" pitchFamily="34" charset="-120"/>
-              </a:rPr>
-              <a:t>edge cases a regression testy chránia budúce zmeny</a:t>
-            </a:r>
-            <a:endParaRPr lang="en-US" sz="1900" dirty="0"/>
-          </a:p>
-          <a:p>
-            <a:pPr marL="228600" indent="-228600">
-              <a:buSzPct val="100000"/>
-              <a:buChar char="•"/>
-            </a:pPr>
-            <a:r>
-              <a:rPr lang="en-US" sz="1900" dirty="0">
-                <a:solidFill>
-                  <a:srgbClr val="18212B"/>
-                </a:solidFill>
-                <a:latin typeface="Aptos" pitchFamily="34" charset="0"/>
-                <a:ea typeface="Aptos" pitchFamily="34" charset="-122"/>
-                <a:cs typeface="Aptos" pitchFamily="34" charset="-120"/>
-              </a:rPr>
-              <a:t>debugger a logging ukazujú stav, keď test nestačí</a:t>
-            </a:r>
-            <a:endParaRPr lang="en-US" sz="1900" dirty="0"/>
-          </a:p>
-          <a:p>
-            <a:pPr marL="228600" indent="-228600">
-              <a:buSzPct val="100000"/>
-              <a:buChar char="•"/>
-            </a:pPr>
-            <a:r>
-              <a:rPr lang="en-US" sz="1900" dirty="0">
-                <a:solidFill>
-                  <a:srgbClr val="18212B"/>
-                </a:solidFill>
-                <a:latin typeface="Aptos" pitchFamily="34" charset="0"/>
-                <a:ea typeface="Aptos" pitchFamily="34" charset="-122"/>
-                <a:cs typeface="Aptos" pitchFamily="34" charset="-120"/>
-              </a:rPr>
-              <a:t>kvalita vzniká opakovateľným pracovným cyklom</a:t>
-            </a:r>
-            <a:endParaRPr lang="en-US" sz="1900" dirty="0"/>
-          </a:p>
-        </p:txBody>
-      </p:sp>
-    </p:spTree>
-  </p:cSld>
-  <p:clrMapOvr>
-    <a:masterClrMapping/>
-  </p:clrMapOvr>
-</p:sld>
-</file>
-
-<file path=ppt/slides/slide25.xml><?xml version="1.0" encoding="utf-8"?>
-<p:sld xmlns:a="http://schemas.openxmlformats.org/drawingml/2006/main" xmlns:r="http://schemas.openxmlformats.org/officeDocument/2006/relationships" xmlns:p="http://schemas.openxmlformats.org/presentationml/2006/main">
-  <p:cSld name="Slide 25">
-    <p:bg>
-      <p:bgPr>
-        <a:solidFill>
-          <a:srgbClr val="FFFFFF"/>
-        </a:solidFill>
-      </p:bgPr>
-    </p:bg>
-    <p:spTree>
-      <p:nvGrpSpPr>
-        <p:cNvPr id="1" name=""/>
-        <p:cNvGrpSpPr/>
-        <p:nvPr/>
-      </p:nvGrpSpPr>
-      <p:grpSpPr>
-        <a:xfrm>
-          <a:off x="0" y="0"/>
-          <a:ext cx="0" cy="0"/>
-          <a:chOff x="0" y="0"/>
-          <a:chExt cx="0" cy="0"/>
-        </a:xfrm>
-      </p:grpSpPr>
-      <p:sp>
-        <p:nvSpPr>
-          <p:cNvPr id="2" name="Shape 0"/>
-          <p:cNvSpPr/>
-          <p:nvPr/>
-        </p:nvSpPr>
-        <p:spPr>
-          <a:xfrm>
-            <a:off x="0" y="0"/>
-            <a:ext cx="237744" cy="6858000"/>
-          </a:xfrm>
-          <a:prstGeom prst="rect">
-            <a:avLst/>
-          </a:prstGeom>
-          <a:solidFill>
-            <a:srgbClr val="1877B9"/>
-          </a:solidFill>
-          <a:ln w="12700">
-            <a:solidFill>
-              <a:srgbClr val="1877B9"/>
-            </a:solidFill>
-            <a:prstDash val="solid"/>
-          </a:ln>
-        </p:spPr>
-      </p:sp>
-      <p:sp>
-        <p:nvSpPr>
-          <p:cNvPr id="3" name="Text 1"/>
-          <p:cNvSpPr/>
-          <p:nvPr/>
-        </p:nvSpPr>
-        <p:spPr>
-          <a:xfrm>
-            <a:off x="749808" y="685800"/>
-            <a:ext cx="4937760" cy="228600"/>
-          </a:xfrm>
-          <a:prstGeom prst="rect">
-            <a:avLst/>
-          </a:prstGeom>
-          <a:noFill/>
-          <a:ln/>
-        </p:spPr>
-        <p:txBody>
-          <a:bodyPr wrap="square" lIns="0" tIns="0" rIns="0" bIns="0" rtlCol="0" anchor="ctr">
-            <a:normAutofit/>
-          </a:bodyPr>
-          <a:lstStyle/>
-          <a:p>
-            <a:pPr algn="l" indent="0" marL="0">
-              <a:buNone/>
-            </a:pPr>
-            <a:r>
-              <a:rPr lang="en-US" sz="1000" b="1" spc="110" kern="0" dirty="0">
-                <a:solidFill>
-                  <a:srgbClr val="1877B9"/>
-                </a:solidFill>
-                <a:latin typeface="Aptos" pitchFamily="34" charset="0"/>
-                <a:ea typeface="Aptos" pitchFamily="34" charset="-122"/>
-                <a:cs typeface="Aptos" pitchFamily="34" charset="-120"/>
-              </a:rPr>
-              <a:t>PROGRAMOVANIE V PYTHONE</a:t>
-            </a:r>
-            <a:endParaRPr lang="en-US" sz="1000" dirty="0"/>
-          </a:p>
-        </p:txBody>
-      </p:sp>
-      <p:sp>
-        <p:nvSpPr>
-          <p:cNvPr id="4" name="Text 2"/>
-          <p:cNvSpPr/>
-          <p:nvPr/>
-        </p:nvSpPr>
-        <p:spPr>
-          <a:xfrm>
-            <a:off x="749808" y="2148840"/>
-            <a:ext cx="9784080" cy="914400"/>
-          </a:xfrm>
-          <a:prstGeom prst="rect">
-            <a:avLst/>
-          </a:prstGeom>
-          <a:noFill/>
-          <a:ln/>
-        </p:spPr>
-        <p:txBody>
-          <a:bodyPr wrap="square" lIns="0" tIns="0" rIns="0" bIns="0" rtlCol="0" anchor="t">
-            <a:normAutofit/>
-          </a:bodyPr>
-          <a:lstStyle/>
-          <a:p>
-            <a:pPr algn="l" indent="0" marL="0">
-              <a:buNone/>
-            </a:pPr>
-            <a:r>
-              <a:rPr lang="en-US" sz="4200" b="1" dirty="0">
-                <a:solidFill>
-                  <a:srgbClr val="16324F"/>
-                </a:solidFill>
-                <a:latin typeface="Aptos" pitchFamily="34" charset="0"/>
-                <a:ea typeface="Aptos" pitchFamily="34" charset="-122"/>
-                <a:cs typeface="Aptos" pitchFamily="34" charset="-120"/>
-              </a:rPr>
-              <a:t>Ďalej: Internet, HTTP a API</a:t>
-            </a:r>
-            <a:endParaRPr lang="en-US" sz="4200" dirty="0"/>
-          </a:p>
-        </p:txBody>
-      </p:sp>
-      <p:sp>
-        <p:nvSpPr>
-          <p:cNvPr id="5" name="Text 3"/>
-          <p:cNvSpPr/>
-          <p:nvPr/>
-        </p:nvSpPr>
-        <p:spPr>
-          <a:xfrm>
-            <a:off x="786384" y="3310128"/>
-            <a:ext cx="8321040" cy="384048"/>
-          </a:xfrm>
-          <a:prstGeom prst="rect">
-            <a:avLst/>
-          </a:prstGeom>
-          <a:noFill/>
-          <a:ln/>
-        </p:spPr>
-        <p:txBody>
-          <a:bodyPr wrap="square" lIns="0" tIns="0" rIns="0" bIns="0" rtlCol="0" anchor="t">
-            <a:normAutofit/>
-          </a:bodyPr>
-          <a:lstStyle/>
-          <a:p>
-            <a:pPr algn="l" indent="0" marL="0">
-              <a:buNone/>
-            </a:pPr>
-            <a:r>
-              <a:rPr lang="en-US" sz="2000" dirty="0">
-                <a:solidFill>
-                  <a:srgbClr val="5E6B78"/>
-                </a:solidFill>
-                <a:latin typeface="Aptos" pitchFamily="34" charset="0"/>
-                <a:ea typeface="Aptos" pitchFamily="34" charset="-122"/>
-                <a:cs typeface="Aptos" pitchFamily="34" charset="-120"/>
-              </a:rPr>
-              <a:t>Ako bezpečne pracovať s dátami, ktoré nie sú na našom počítači.</a:t>
-            </a:r>
-            <a:endParaRPr lang="en-US" sz="2000" dirty="0"/>
-          </a:p>
-        </p:txBody>
-      </p:sp>
-      <p:sp>
-        <p:nvSpPr>
-          <p:cNvPr id="6" name="Shape 4"/>
-          <p:cNvSpPr/>
-          <p:nvPr/>
-        </p:nvSpPr>
-        <p:spPr>
-          <a:xfrm>
-            <a:off x="749808" y="5193792"/>
-            <a:ext cx="2560320" cy="118872"/>
+              <a:t>Bug report: calculate_discount() niekedy vráti zápornú cenu.</a:t>
+            </a:r>
+            <a:endParaRPr lang="en-US" sz="3400" dirty="0"/>
+          </a:p>
+        </p:txBody>
+      </p:sp>
+      <p:sp>
+        <p:nvSpPr>
+          <p:cNvPr id="9" name="Shape 7"/>
+          <p:cNvSpPr/>
+          <p:nvPr/>
+        </p:nvSpPr>
+        <p:spPr>
+          <a:xfrm>
+            <a:off x="768096" y="3456432"/>
+            <a:ext cx="1417320" cy="109728"/>
           </a:xfrm>
           <a:prstGeom prst="rect">
             <a:avLst/>
@@ -11632,14 +8349,14 @@
       </p:sp>
       <p:sp>
         <p:nvSpPr>
-          <p:cNvPr id="7" name="Text 5"/>
-          <p:cNvSpPr/>
-          <p:nvPr/>
-        </p:nvSpPr>
-        <p:spPr>
-          <a:xfrm>
-            <a:off x="749808" y="5504688"/>
-            <a:ext cx="1828800" cy="182880"/>
+          <p:cNvPr id="10" name="Text 8"/>
+          <p:cNvSpPr/>
+          <p:nvPr/>
+        </p:nvSpPr>
+        <p:spPr>
+          <a:xfrm>
+            <a:off x="768096" y="3913632"/>
+            <a:ext cx="8869680" cy="731520"/>
           </a:xfrm>
           <a:prstGeom prst="rect">
             <a:avLst/>
@@ -11648,7 +8365,7 @@
           <a:ln/>
         </p:spPr>
         <p:txBody>
-          <a:bodyPr wrap="square" lIns="0" tIns="0" rIns="0" bIns="0" rtlCol="0" anchor="ctr">
+          <a:bodyPr wrap="square" lIns="0" tIns="0" rIns="0" bIns="0" rtlCol="0" anchor="t">
             <a:normAutofit/>
           </a:bodyPr>
           <a:lstStyle/>
@@ -11657,7 +8374,7 @@
               <a:buNone/>
             </a:pPr>
             <a:r>
-              <a:rPr lang="en-US" sz="1000" b="1" dirty="0">
+              <a:rPr lang="en-US" sz="2200" dirty="0">
                 <a:solidFill>
                   <a:srgbClr val="5E6B78"/>
                 </a:solidFill>
@@ -11665,50 +8382,9 @@
                 <a:ea typeface="Aptos" pitchFamily="34" charset="-122"/>
                 <a:cs typeface="Aptos" pitchFamily="34" charset="-120"/>
               </a:rPr>
-              <a:t>TUKE FEI</a:t>
-            </a:r>
-            <a:endParaRPr lang="en-US" sz="1000" dirty="0"/>
-          </a:p>
-        </p:txBody>
-      </p:sp>
-      <p:sp>
-        <p:nvSpPr>
-          <p:cNvPr id="8" name="Text 6"/>
-          <p:cNvSpPr/>
-          <p:nvPr/>
-        </p:nvSpPr>
-        <p:spPr>
-          <a:xfrm>
-            <a:off x="10927080" y="6254496"/>
-            <a:ext cx="566928" cy="182880"/>
-          </a:xfrm>
-          <a:prstGeom prst="rect">
-            <a:avLst/>
-          </a:prstGeom>
-          <a:noFill/>
-          <a:ln/>
-        </p:spPr>
-        <p:txBody>
-          <a:bodyPr wrap="square" lIns="0" tIns="0" rIns="0" bIns="0" rtlCol="0" anchor="ctr">
-            <a:normAutofit/>
-          </a:bodyPr>
-          <a:lstStyle/>
-          <a:p>
-            <a:pPr algn="r" indent="0" marL="0">
-              <a:buNone/>
-            </a:pPr>
-            <a:r>
-              <a:rPr lang="en-US" sz="900" dirty="0">
-                <a:solidFill>
-                  <a:srgbClr val="5E6B78"/>
-                </a:solidFill>
-                <a:latin typeface="Consolas" pitchFamily="34" charset="0"/>
-                <a:ea typeface="Consolas" pitchFamily="34" charset="-122"/>
-                <a:cs typeface="Consolas" pitchFamily="34" charset="-120"/>
-              </a:rPr>
-              <a:t>25</a:t>
-            </a:r>
-            <a:endParaRPr lang="en-US" sz="900" dirty="0"/>
+              <a:t>Namiesto hádania najprv vytvoríme malý príklad, ktorý problém spoľahlivo zopakuje.</a:t>
+            </a:r>
+            <a:endParaRPr lang="en-US" sz="2200" dirty="0"/>
           </a:p>
         </p:txBody>
       </p:sp>
@@ -11973,7 +8649,7 @@
                 <a:ea typeface="Aptos" pitchFamily="34" charset="-122"/>
                 <a:cs typeface="Aptos" pitchFamily="34" charset="-120"/>
               </a:rPr>
-              <a:t>Funguje to u mňa</a:t>
+              <a:t>Najmenší reprodukovateľný príklad</a:t>
             </a:r>
             <a:endParaRPr lang="en-US" sz="2900" dirty="0"/>
           </a:p>
@@ -11987,18 +8663,18 @@
         </p:nvSpPr>
         <p:spPr>
           <a:xfrm>
-            <a:off x="713232" y="1874520"/>
-            <a:ext cx="5010912" cy="109728"/>
+            <a:off x="658368" y="1783080"/>
+            <a:ext cx="10899648" cy="4069080"/>
           </a:xfrm>
           <a:prstGeom prst="rect">
             <a:avLst/>
           </a:prstGeom>
           <a:solidFill>
-            <a:srgbClr val="167C80"/>
+            <a:srgbClr val="17212B"/>
           </a:solidFill>
           <a:ln w="12700">
             <a:solidFill>
-              <a:srgbClr val="167C80"/>
+              <a:srgbClr val="17212B"/>
             </a:solidFill>
             <a:prstDash val="solid"/>
           </a:ln>
@@ -12012,8 +8688,8 @@
         </p:nvSpPr>
         <p:spPr>
           <a:xfrm>
-            <a:off x="713232" y="2212848"/>
-            <a:ext cx="5010912" cy="365760"/>
+            <a:off x="896112" y="1984248"/>
+            <a:ext cx="9966960" cy="182880"/>
           </a:xfrm>
           <a:prstGeom prst="rect">
             <a:avLst/>
@@ -12031,239 +8707,156 @@
               <a:buNone/>
             </a:pPr>
             <a:r>
-              <a:rPr lang="en-US" sz="2000" b="1" dirty="0">
-                <a:solidFill>
-                  <a:srgbClr val="16324F"/>
+              <a:rPr lang="en-US" sz="850" b="1" spc="70" kern="0" dirty="0">
+                <a:solidFill>
+                  <a:srgbClr val="8FD3FF"/>
+                </a:solidFill>
+                <a:latin typeface="Consolas" pitchFamily="34" charset="0"/>
+                <a:ea typeface="Consolas" pitchFamily="34" charset="-122"/>
+                <a:cs typeface="Consolas" pitchFamily="34" charset="-120"/>
+              </a:rPr>
+              <a:t>python</a:t>
+            </a:r>
+            <a:endParaRPr lang="en-US" sz="850" dirty="0"/>
+          </a:p>
+        </p:txBody>
+      </p:sp>
+      <p:sp>
+        <p:nvSpPr>
+          <p:cNvPr id="11" name="Text 9"/>
+          <p:cNvSpPr/>
+          <p:nvPr/>
+        </p:nvSpPr>
+        <p:spPr>
+          <a:xfrm>
+            <a:off x="896112" y="2395728"/>
+            <a:ext cx="9893808" cy="3063240"/>
+          </a:xfrm>
+          <a:prstGeom prst="rect">
+            <a:avLst/>
+          </a:prstGeom>
+          <a:noFill/>
+          <a:ln/>
+        </p:spPr>
+        <p:txBody>
+          <a:bodyPr wrap="square" lIns="0" tIns="0" rIns="0" bIns="0" rtlCol="0" anchor="t">
+            <a:normAutofit/>
+          </a:bodyPr>
+          <a:lstStyle/>
+          <a:p>
+            <a:pPr algn="l" indent="0" marL="0">
+              <a:buNone/>
+            </a:pPr>
+            <a:r>
+              <a:rPr lang="en-US" sz="1750" dirty="0">
+                <a:solidFill>
+                  <a:srgbClr val="F4F7FA"/>
+                </a:solidFill>
+                <a:latin typeface="Consolas" pitchFamily="34" charset="0"/>
+                <a:ea typeface="Consolas" pitchFamily="34" charset="-122"/>
+                <a:cs typeface="Consolas" pitchFamily="34" charset="-120"/>
+              </a:rPr>
+              <a:t>def calculate_discount(price: float, discount: float) -&gt; float:</a:t>
+            </a:r>
+            <a:endParaRPr lang="en-US" sz="1750" dirty="0"/>
+          </a:p>
+          <a:p>
+            <a:pPr algn="l" indent="0" marL="0">
+              <a:buNone/>
+            </a:pPr>
+            <a:r>
+              <a:rPr lang="en-US" sz="1750" dirty="0">
+                <a:solidFill>
+                  <a:srgbClr val="F4F7FA"/>
+                </a:solidFill>
+                <a:latin typeface="Consolas" pitchFamily="34" charset="0"/>
+                <a:ea typeface="Consolas" pitchFamily="34" charset="-122"/>
+                <a:cs typeface="Consolas" pitchFamily="34" charset="-120"/>
+              </a:rPr>
+              <a:t>    return price * (1 - discount)</a:t>
+            </a:r>
+            <a:endParaRPr lang="en-US" sz="1750" dirty="0"/>
+          </a:p>
+          <a:p>
+            <a:pPr algn="l" indent="0" marL="0">
+              <a:buNone/>
+            </a:pPr>
+            <a:endParaRPr lang="en-US" sz="1750" dirty="0"/>
+          </a:p>
+          <a:p>
+            <a:pPr algn="l" indent="0" marL="0">
+              <a:buNone/>
+            </a:pPr>
+            <a:r>
+              <a:rPr lang="en-US" sz="1750" dirty="0">
+                <a:solidFill>
+                  <a:srgbClr val="F4F7FA"/>
+                </a:solidFill>
+                <a:latin typeface="Consolas" pitchFamily="34" charset="0"/>
+                <a:ea typeface="Consolas" pitchFamily="34" charset="-122"/>
+                <a:cs typeface="Consolas" pitchFamily="34" charset="-120"/>
+              </a:rPr>
+              <a:t>print(calculate_discount(100, 1.2))</a:t>
+            </a:r>
+            <a:endParaRPr lang="en-US" sz="1750" dirty="0"/>
+          </a:p>
+          <a:p>
+            <a:pPr algn="l" indent="0" marL="0">
+              <a:buNone/>
+            </a:pPr>
+            <a:r>
+              <a:rPr lang="en-US" sz="1750" dirty="0">
+                <a:solidFill>
+                  <a:srgbClr val="F4F7FA"/>
+                </a:solidFill>
+                <a:latin typeface="Consolas" pitchFamily="34" charset="0"/>
+                <a:ea typeface="Consolas" pitchFamily="34" charset="-122"/>
+                <a:cs typeface="Consolas" pitchFamily="34" charset="-120"/>
+              </a:rPr>
+              <a:t># -19.999999999999996</a:t>
+            </a:r>
+            <a:endParaRPr lang="en-US" sz="1750" dirty="0"/>
+          </a:p>
+        </p:txBody>
+      </p:sp>
+      <p:sp>
+        <p:nvSpPr>
+          <p:cNvPr id="12" name="Text 10"/>
+          <p:cNvSpPr/>
+          <p:nvPr/>
+        </p:nvSpPr>
+        <p:spPr>
+          <a:xfrm>
+            <a:off x="768096" y="6053328"/>
+            <a:ext cx="9921240" cy="237744"/>
+          </a:xfrm>
+          <a:prstGeom prst="rect">
+            <a:avLst/>
+          </a:prstGeom>
+          <a:noFill/>
+          <a:ln/>
+        </p:spPr>
+        <p:txBody>
+          <a:bodyPr wrap="square" lIns="0" tIns="0" rIns="0" bIns="0" rtlCol="0" anchor="t">
+            <a:normAutofit/>
+          </a:bodyPr>
+          <a:lstStyle/>
+          <a:p>
+            <a:pPr algn="l" indent="0" marL="0">
+              <a:buNone/>
+            </a:pPr>
+            <a:r>
+              <a:rPr lang="en-US" sz="1550" dirty="0">
+                <a:solidFill>
+                  <a:srgbClr val="5E6B78"/>
                 </a:solidFill>
                 <a:latin typeface="Aptos" pitchFamily="34" charset="0"/>
                 <a:ea typeface="Aptos" pitchFamily="34" charset="-122"/>
                 <a:cs typeface="Aptos" pitchFamily="34" charset="-120"/>
               </a:rPr>
-              <a:t>Manuálne skúšanie</a:t>
-            </a:r>
-            <a:endParaRPr lang="en-US" sz="2000" dirty="0"/>
-          </a:p>
-        </p:txBody>
-      </p:sp>
-      <p:sp>
-        <p:nvSpPr>
-          <p:cNvPr id="11" name="Text 9"/>
-          <p:cNvSpPr/>
-          <p:nvPr/>
-        </p:nvSpPr>
-        <p:spPr>
-          <a:xfrm>
-            <a:off x="768096" y="2788920"/>
-            <a:ext cx="4919472" cy="3886200"/>
-          </a:xfrm>
-          <a:prstGeom prst="rect">
-            <a:avLst/>
-          </a:prstGeom>
-          <a:noFill/>
-          <a:ln/>
-        </p:spPr>
-        <p:txBody>
-          <a:bodyPr wrap="square" lIns="508" tIns="508" rIns="508" bIns="508" rtlCol="0" anchor="t">
-            <a:normAutofit/>
-          </a:bodyPr>
-          <a:lstStyle/>
-          <a:p>
-            <a:pPr marL="228600" indent="-228600">
-              <a:buSzPct val="100000"/>
-              <a:buChar char="•"/>
-            </a:pPr>
-            <a:r>
-              <a:rPr lang="en-US" sz="1650" dirty="0">
-                <a:solidFill>
-                  <a:srgbClr val="18212B"/>
-                </a:solidFill>
-                <a:latin typeface="Aptos" pitchFamily="34" charset="0"/>
-                <a:ea typeface="Aptos" pitchFamily="34" charset="-122"/>
-                <a:cs typeface="Aptos" pitchFamily="34" charset="-120"/>
-              </a:rPr>
-              <a:t>zapamätáme si jeden vstup</a:t>
-            </a:r>
-            <a:endParaRPr lang="en-US" sz="1650" dirty="0"/>
-          </a:p>
-          <a:p>
-            <a:pPr marL="228600" indent="-228600">
-              <a:buSzPct val="100000"/>
-              <a:buChar char="•"/>
-            </a:pPr>
-            <a:r>
-              <a:rPr lang="en-US" sz="1650" dirty="0">
-                <a:solidFill>
-                  <a:srgbClr val="18212B"/>
-                </a:solidFill>
-                <a:latin typeface="Aptos" pitchFamily="34" charset="0"/>
-                <a:ea typeface="Aptos" pitchFamily="34" charset="-122"/>
-                <a:cs typeface="Aptos" pitchFamily="34" charset="-120"/>
-              </a:rPr>
-              <a:t>chybu nevieme presne zopakovať</a:t>
-            </a:r>
-            <a:endParaRPr lang="en-US" sz="1650" dirty="0"/>
-          </a:p>
-          <a:p>
-            <a:pPr marL="228600" indent="-228600">
-              <a:buSzPct val="100000"/>
-              <a:buChar char="•"/>
-            </a:pPr>
-            <a:r>
-              <a:rPr lang="en-US" sz="1650" dirty="0">
-                <a:solidFill>
-                  <a:srgbClr val="18212B"/>
-                </a:solidFill>
-                <a:latin typeface="Aptos" pitchFamily="34" charset="0"/>
-                <a:ea typeface="Aptos" pitchFamily="34" charset="-122"/>
-                <a:cs typeface="Aptos" pitchFamily="34" charset="-120"/>
-              </a:rPr>
-              <a:t>ďalšia zmena môže niečo pokaziť</a:t>
-            </a:r>
-            <a:endParaRPr lang="en-US" sz="1650" dirty="0"/>
-          </a:p>
-        </p:txBody>
-      </p:sp>
-      <p:sp>
-        <p:nvSpPr>
-          <p:cNvPr id="12" name="Shape 10"/>
-          <p:cNvSpPr/>
-          <p:nvPr/>
-        </p:nvSpPr>
-        <p:spPr>
-          <a:xfrm>
-            <a:off x="6373368" y="1874520"/>
-            <a:ext cx="5010912" cy="109728"/>
-          </a:xfrm>
-          <a:prstGeom prst="rect">
-            <a:avLst/>
-          </a:prstGeom>
-          <a:solidFill>
-            <a:srgbClr val="E0A03A"/>
-          </a:solidFill>
-          <a:ln w="12700">
-            <a:solidFill>
-              <a:srgbClr val="E0A03A"/>
-            </a:solidFill>
-            <a:prstDash val="solid"/>
-          </a:ln>
-        </p:spPr>
-      </p:sp>
-      <p:sp>
-        <p:nvSpPr>
-          <p:cNvPr id="13" name="Text 11"/>
-          <p:cNvSpPr/>
-          <p:nvPr/>
-        </p:nvSpPr>
-        <p:spPr>
-          <a:xfrm>
-            <a:off x="6373368" y="2212848"/>
-            <a:ext cx="5010912" cy="365760"/>
-          </a:xfrm>
-          <a:prstGeom prst="rect">
-            <a:avLst/>
-          </a:prstGeom>
-          <a:noFill/>
-          <a:ln/>
-        </p:spPr>
-        <p:txBody>
-          <a:bodyPr wrap="square" lIns="0" tIns="0" rIns="0" bIns="0" rtlCol="0" anchor="ctr">
-            <a:normAutofit/>
-          </a:bodyPr>
-          <a:lstStyle/>
-          <a:p>
-            <a:pPr algn="l" indent="0" marL="0">
-              <a:buNone/>
-            </a:pPr>
-            <a:r>
-              <a:rPr lang="en-US" sz="2000" b="1" dirty="0">
-                <a:solidFill>
-                  <a:srgbClr val="16324F"/>
-                </a:solidFill>
-                <a:latin typeface="Aptos" pitchFamily="34" charset="0"/>
-                <a:ea typeface="Aptos" pitchFamily="34" charset="-122"/>
-                <a:cs typeface="Aptos" pitchFamily="34" charset="-120"/>
-              </a:rPr>
-              <a:t>Automatický test</a:t>
-            </a:r>
-            <a:endParaRPr lang="en-US" sz="2000" dirty="0"/>
-          </a:p>
-        </p:txBody>
-      </p:sp>
-      <p:sp>
-        <p:nvSpPr>
-          <p:cNvPr id="14" name="Text 12"/>
-          <p:cNvSpPr/>
-          <p:nvPr/>
-        </p:nvSpPr>
-        <p:spPr>
-          <a:xfrm>
-            <a:off x="6428232" y="2788920"/>
-            <a:ext cx="4919472" cy="3886200"/>
-          </a:xfrm>
-          <a:prstGeom prst="rect">
-            <a:avLst/>
-          </a:prstGeom>
-          <a:noFill/>
-          <a:ln/>
-        </p:spPr>
-        <p:txBody>
-          <a:bodyPr wrap="square" lIns="508" tIns="508" rIns="508" bIns="508" rtlCol="0" anchor="t">
-            <a:normAutofit/>
-          </a:bodyPr>
-          <a:lstStyle/>
-          <a:p>
-            <a:pPr marL="228600" indent="-228600">
-              <a:buSzPct val="100000"/>
-              <a:buChar char="•"/>
-            </a:pPr>
-            <a:r>
-              <a:rPr lang="en-US" sz="1650" dirty="0">
-                <a:solidFill>
-                  <a:srgbClr val="18212B"/>
-                </a:solidFill>
-                <a:latin typeface="Aptos" pitchFamily="34" charset="0"/>
-                <a:ea typeface="Aptos" pitchFamily="34" charset="-122"/>
-                <a:cs typeface="Aptos" pitchFamily="34" charset="-120"/>
-              </a:rPr>
-              <a:t>vstup a očakávanie sú v kóde</a:t>
-            </a:r>
-            <a:endParaRPr lang="en-US" sz="1650" dirty="0"/>
-          </a:p>
-          <a:p>
-            <a:pPr marL="228600" indent="-228600">
-              <a:buSzPct val="100000"/>
-              <a:buChar char="•"/>
-            </a:pPr>
-            <a:r>
-              <a:rPr lang="en-US" sz="1650" dirty="0">
-                <a:solidFill>
-                  <a:srgbClr val="18212B"/>
-                </a:solidFill>
-                <a:latin typeface="Aptos" pitchFamily="34" charset="0"/>
-                <a:ea typeface="Aptos" pitchFamily="34" charset="-122"/>
-                <a:cs typeface="Aptos" pitchFamily="34" charset="-120"/>
-              </a:rPr>
-              <a:t>spustíme ho kedykoľvek</a:t>
-            </a:r>
-            <a:endParaRPr lang="en-US" sz="1650" dirty="0"/>
-          </a:p>
-          <a:p>
-            <a:pPr marL="228600" indent="-228600">
-              <a:buSzPct val="100000"/>
-              <a:buChar char="•"/>
-            </a:pPr>
-            <a:r>
-              <a:rPr lang="en-US" sz="1650" dirty="0">
-                <a:solidFill>
-                  <a:srgbClr val="18212B"/>
-                </a:solidFill>
-                <a:latin typeface="Aptos" pitchFamily="34" charset="0"/>
-                <a:ea typeface="Aptos" pitchFamily="34" charset="-122"/>
-                <a:cs typeface="Aptos" pitchFamily="34" charset="-120"/>
-              </a:rPr>
-              <a:t>zachytí regresiu</a:t>
-            </a:r>
-            <a:endParaRPr lang="en-US" sz="1650" dirty="0"/>
+              <a:t>Problém už nie je neurčitý. Vieme presne, aký vstup dáva nesprávny výsledok.</a:t>
+            </a:r>
+            <a:endParaRPr lang="en-US" sz="1550" dirty="0"/>
           </a:p>
         </p:txBody>
       </p:sp>
@@ -12528,7 +9121,7 @@
                 <a:ea typeface="Aptos" pitchFamily="34" charset="-122"/>
                 <a:cs typeface="Aptos" pitchFamily="34" charset="-120"/>
               </a:rPr>
-              <a:t>Test porovnáva dve hodnoty</a:t>
+              <a:t>Test je spustiteľné tvrdenie</a:t>
             </a:r>
             <a:endParaRPr lang="en-US" sz="2900" dirty="0"/>
           </a:p>
@@ -12542,20 +9135,20 @@
         </p:nvSpPr>
         <p:spPr>
           <a:xfrm>
-            <a:off x="731520" y="2834640"/>
-            <a:ext cx="2450592" cy="1042416"/>
+            <a:off x="658368" y="1828800"/>
+            <a:ext cx="6812280" cy="4069080"/>
           </a:xfrm>
           <a:prstGeom prst="roundRect">
             <a:avLst>
-              <a:gd name="adj" fmla="val 4386"/>
+              <a:gd name="adj" fmla="val 1348"/>
             </a:avLst>
           </a:prstGeom>
           <a:solidFill>
-            <a:srgbClr val="F3F6F8"/>
+            <a:srgbClr val="17212B"/>
           </a:solidFill>
           <a:ln w="12700">
             <a:solidFill>
-              <a:srgbClr val="D8E0E6"/>
+              <a:srgbClr val="17212B"/>
             </a:solidFill>
             <a:prstDash val="solid"/>
           </a:ln>
@@ -12569,8 +9162,8 @@
         </p:nvSpPr>
         <p:spPr>
           <a:xfrm>
-            <a:off x="877824" y="3063240"/>
-            <a:ext cx="2157984" cy="548640"/>
+            <a:off x="868680" y="2029968"/>
+            <a:ext cx="6309360" cy="182880"/>
           </a:xfrm>
           <a:prstGeom prst="rect">
             <a:avLst/>
@@ -12584,41 +9177,120 @@
           </a:bodyPr>
           <a:lstStyle/>
           <a:p>
-            <a:pPr algn="ctr" indent="0" marL="0">
-              <a:buNone/>
-            </a:pPr>
-            <a:r>
-              <a:rPr lang="en-US" sz="1700" b="1" dirty="0">
-                <a:solidFill>
-                  <a:srgbClr val="16324F"/>
-                </a:solidFill>
-                <a:latin typeface="Aptos" pitchFamily="34" charset="0"/>
-                <a:ea typeface="Aptos" pitchFamily="34" charset="-122"/>
-                <a:cs typeface="Aptos" pitchFamily="34" charset="-120"/>
-              </a:rPr>
-              <a:t>vstup</a:t>
-            </a:r>
-            <a:endParaRPr lang="en-US" sz="1700" dirty="0"/>
-          </a:p>
-        </p:txBody>
-      </p:sp>
-      <p:sp>
-        <p:nvSpPr>
-          <p:cNvPr id="11" name="Shape 9"/>
-          <p:cNvSpPr/>
-          <p:nvPr/>
-        </p:nvSpPr>
-        <p:spPr>
-          <a:xfrm>
-            <a:off x="3319272" y="3209544"/>
-            <a:ext cx="182880" cy="292608"/>
-          </a:xfrm>
-          <a:prstGeom prst="chevron">
-            <a:avLst/>
-          </a:prstGeom>
-          <a:solidFill>
-            <a:srgbClr val="1877B9"/>
-          </a:solidFill>
+            <a:pPr algn="l" indent="0" marL="0">
+              <a:buNone/>
+            </a:pPr>
+            <a:r>
+              <a:rPr lang="en-US" sz="850" b="1" spc="70" kern="0" dirty="0">
+                <a:solidFill>
+                  <a:srgbClr val="8FD3FF"/>
+                </a:solidFill>
+                <a:latin typeface="Consolas" pitchFamily="34" charset="0"/>
+                <a:ea typeface="Consolas" pitchFamily="34" charset="-122"/>
+                <a:cs typeface="Consolas" pitchFamily="34" charset="-120"/>
+              </a:rPr>
+              <a:t>tests/test_pricing.py</a:t>
+            </a:r>
+            <a:endParaRPr lang="en-US" sz="850" dirty="0"/>
+          </a:p>
+        </p:txBody>
+      </p:sp>
+      <p:sp>
+        <p:nvSpPr>
+          <p:cNvPr id="11" name="Text 9"/>
+          <p:cNvSpPr/>
+          <p:nvPr/>
+        </p:nvSpPr>
+        <p:spPr>
+          <a:xfrm>
+            <a:off x="877824" y="2395728"/>
+            <a:ext cx="6327648" cy="3246120"/>
+          </a:xfrm>
+          <a:prstGeom prst="rect">
+            <a:avLst/>
+          </a:prstGeom>
+          <a:noFill/>
+          <a:ln/>
+        </p:spPr>
+        <p:txBody>
+          <a:bodyPr wrap="square" lIns="0" tIns="0" rIns="0" bIns="0" rtlCol="0" anchor="t">
+            <a:normAutofit/>
+          </a:bodyPr>
+          <a:lstStyle/>
+          <a:p>
+            <a:pPr algn="l" indent="0" marL="0">
+              <a:buNone/>
+            </a:pPr>
+            <a:r>
+              <a:rPr lang="en-US" sz="1650" dirty="0">
+                <a:solidFill>
+                  <a:srgbClr val="F4F7FA"/>
+                </a:solidFill>
+                <a:latin typeface="Consolas" pitchFamily="34" charset="0"/>
+                <a:ea typeface="Consolas" pitchFamily="34" charset="-122"/>
+                <a:cs typeface="Consolas" pitchFamily="34" charset="-120"/>
+              </a:rPr>
+              <a:t>from app.pricing import calculate_discount</a:t>
+            </a:r>
+            <a:endParaRPr lang="en-US" sz="1650" dirty="0"/>
+          </a:p>
+          <a:p>
+            <a:pPr algn="l" indent="0" marL="0">
+              <a:buNone/>
+            </a:pPr>
+            <a:endParaRPr lang="en-US" sz="1650" dirty="0"/>
+          </a:p>
+          <a:p>
+            <a:pPr algn="l" indent="0" marL="0">
+              <a:buNone/>
+            </a:pPr>
+            <a:r>
+              <a:rPr lang="en-US" sz="1650" dirty="0">
+                <a:solidFill>
+                  <a:srgbClr val="F4F7FA"/>
+                </a:solidFill>
+                <a:latin typeface="Consolas" pitchFamily="34" charset="0"/>
+                <a:ea typeface="Consolas" pitchFamily="34" charset="-122"/>
+                <a:cs typeface="Consolas" pitchFamily="34" charset="-120"/>
+              </a:rPr>
+              <a:t>def test_discount_cannot_exceed_price() -&gt; None:</a:t>
+            </a:r>
+            <a:endParaRPr lang="en-US" sz="1650" dirty="0"/>
+          </a:p>
+          <a:p>
+            <a:pPr algn="l" indent="0" marL="0">
+              <a:buNone/>
+            </a:pPr>
+            <a:r>
+              <a:rPr lang="en-US" sz="1650" dirty="0">
+                <a:solidFill>
+                  <a:srgbClr val="F4F7FA"/>
+                </a:solidFill>
+                <a:latin typeface="Consolas" pitchFamily="34" charset="0"/>
+                <a:ea typeface="Consolas" pitchFamily="34" charset="-122"/>
+                <a:cs typeface="Consolas" pitchFamily="34" charset="-120"/>
+              </a:rPr>
+              <a:t>    assert calculate_discount(100, 1.2) &gt;= 0</a:t>
+            </a:r>
+            <a:endParaRPr lang="en-US" sz="1650" dirty="0"/>
+          </a:p>
+        </p:txBody>
+      </p:sp>
+      <p:sp>
+        <p:nvSpPr>
+          <p:cNvPr id="12" name="Shape 10"/>
+          <p:cNvSpPr/>
+          <p:nvPr/>
+        </p:nvSpPr>
+        <p:spPr>
+          <a:xfrm>
+            <a:off x="7909560" y="1901952"/>
+            <a:ext cx="0" cy="3566160"/>
+          </a:xfrm>
+          <a:prstGeom prst="line">
+            <a:avLst/>
+          </a:prstGeom>
+          <a:noFill/>
           <a:ln w="12700">
             <a:solidFill>
               <a:srgbClr val="1877B9"/>
@@ -12629,41 +9301,14 @@
       </p:sp>
       <p:sp>
         <p:nvSpPr>
-          <p:cNvPr id="12" name="Shape 10"/>
-          <p:cNvSpPr/>
-          <p:nvPr/>
-        </p:nvSpPr>
-        <p:spPr>
-          <a:xfrm>
-            <a:off x="3593592" y="2834640"/>
-            <a:ext cx="2450592" cy="1042416"/>
-          </a:xfrm>
-          <a:prstGeom prst="roundRect">
-            <a:avLst>
-              <a:gd name="adj" fmla="val 4386"/>
-            </a:avLst>
-          </a:prstGeom>
-          <a:solidFill>
-            <a:srgbClr val="EAF3F7"/>
-          </a:solidFill>
-          <a:ln w="12700">
-            <a:solidFill>
-              <a:srgbClr val="9DCCDD"/>
-            </a:solidFill>
-            <a:prstDash val="solid"/>
-          </a:ln>
-        </p:spPr>
-      </p:sp>
-      <p:sp>
-        <p:nvSpPr>
           <p:cNvPr id="13" name="Text 11"/>
           <p:cNvSpPr/>
           <p:nvPr/>
         </p:nvSpPr>
         <p:spPr>
           <a:xfrm>
-            <a:off x="3739896" y="3063240"/>
-            <a:ext cx="2157984" cy="548640"/>
+            <a:off x="8229600" y="2130552"/>
+            <a:ext cx="2743200" cy="2468880"/>
           </a:xfrm>
           <a:prstGeom prst="rect">
             <a:avLst/>
@@ -12672,212 +9317,26 @@
           <a:ln/>
         </p:spPr>
         <p:txBody>
-          <a:bodyPr wrap="square" lIns="0" tIns="0" rIns="0" bIns="0" rtlCol="0" anchor="ctr">
+          <a:bodyPr wrap="square" lIns="0" tIns="0" rIns="0" bIns="0" rtlCol="0" anchor="t">
             <a:normAutofit/>
           </a:bodyPr>
           <a:lstStyle/>
           <a:p>
-            <a:pPr algn="ctr" indent="0" marL="0">
-              <a:buNone/>
-            </a:pPr>
-            <a:r>
-              <a:rPr lang="en-US" sz="1700" b="1" dirty="0">
-                <a:solidFill>
-                  <a:srgbClr val="16324F"/>
+            <a:pPr algn="l" indent="0" marL="0">
+              <a:buNone/>
+            </a:pPr>
+            <a:r>
+              <a:rPr lang="en-US" sz="1800" dirty="0">
+                <a:solidFill>
+                  <a:srgbClr val="5E6B78"/>
                 </a:solidFill>
                 <a:latin typeface="Aptos" pitchFamily="34" charset="0"/>
                 <a:ea typeface="Aptos" pitchFamily="34" charset="-122"/>
                 <a:cs typeface="Aptos" pitchFamily="34" charset="-120"/>
               </a:rPr>
-              <a:t>funkcia</a:t>
-            </a:r>
-            <a:endParaRPr lang="en-US" sz="1700" dirty="0"/>
-          </a:p>
-        </p:txBody>
-      </p:sp>
-      <p:sp>
-        <p:nvSpPr>
-          <p:cNvPr id="14" name="Shape 12"/>
-          <p:cNvSpPr/>
-          <p:nvPr/>
-        </p:nvSpPr>
-        <p:spPr>
-          <a:xfrm>
-            <a:off x="6181344" y="3209544"/>
-            <a:ext cx="182880" cy="292608"/>
-          </a:xfrm>
-          <a:prstGeom prst="chevron">
-            <a:avLst/>
-          </a:prstGeom>
-          <a:solidFill>
-            <a:srgbClr val="1877B9"/>
-          </a:solidFill>
-          <a:ln w="12700">
-            <a:solidFill>
-              <a:srgbClr val="1877B9"/>
-            </a:solidFill>
-            <a:prstDash val="solid"/>
-          </a:ln>
-        </p:spPr>
-      </p:sp>
-      <p:sp>
-        <p:nvSpPr>
-          <p:cNvPr id="15" name="Shape 13"/>
-          <p:cNvSpPr/>
-          <p:nvPr/>
-        </p:nvSpPr>
-        <p:spPr>
-          <a:xfrm>
-            <a:off x="6455664" y="2834640"/>
-            <a:ext cx="2450592" cy="1042416"/>
-          </a:xfrm>
-          <a:prstGeom prst="roundRect">
-            <a:avLst>
-              <a:gd name="adj" fmla="val 4386"/>
-            </a:avLst>
-          </a:prstGeom>
-          <a:solidFill>
-            <a:srgbClr val="F3F6F8"/>
-          </a:solidFill>
-          <a:ln w="12700">
-            <a:solidFill>
-              <a:srgbClr val="D8E0E6"/>
-            </a:solidFill>
-            <a:prstDash val="solid"/>
-          </a:ln>
-        </p:spPr>
-      </p:sp>
-      <p:sp>
-        <p:nvSpPr>
-          <p:cNvPr id="16" name="Text 14"/>
-          <p:cNvSpPr/>
-          <p:nvPr/>
-        </p:nvSpPr>
-        <p:spPr>
-          <a:xfrm>
-            <a:off x="6601968" y="3063240"/>
-            <a:ext cx="2157984" cy="548640"/>
-          </a:xfrm>
-          <a:prstGeom prst="rect">
-            <a:avLst/>
-          </a:prstGeom>
-          <a:noFill/>
-          <a:ln/>
-        </p:spPr>
-        <p:txBody>
-          <a:bodyPr wrap="square" lIns="0" tIns="0" rIns="0" bIns="0" rtlCol="0" anchor="ctr">
-            <a:normAutofit/>
-          </a:bodyPr>
-          <a:lstStyle/>
-          <a:p>
-            <a:pPr algn="ctr" indent="0" marL="0">
-              <a:buNone/>
-            </a:pPr>
-            <a:r>
-              <a:rPr lang="en-US" sz="1700" b="1" dirty="0">
-                <a:solidFill>
-                  <a:srgbClr val="16324F"/>
-                </a:solidFill>
-                <a:latin typeface="Aptos" pitchFamily="34" charset="0"/>
-                <a:ea typeface="Aptos" pitchFamily="34" charset="-122"/>
-                <a:cs typeface="Aptos" pitchFamily="34" charset="-120"/>
-              </a:rPr>
-              <a:t>skutočný výsledok</a:t>
-            </a:r>
-            <a:endParaRPr lang="en-US" sz="1700" dirty="0"/>
-          </a:p>
-        </p:txBody>
-      </p:sp>
-      <p:sp>
-        <p:nvSpPr>
-          <p:cNvPr id="17" name="Shape 15"/>
-          <p:cNvSpPr/>
-          <p:nvPr/>
-        </p:nvSpPr>
-        <p:spPr>
-          <a:xfrm>
-            <a:off x="9043416" y="3209544"/>
-            <a:ext cx="182880" cy="292608"/>
-          </a:xfrm>
-          <a:prstGeom prst="chevron">
-            <a:avLst/>
-          </a:prstGeom>
-          <a:solidFill>
-            <a:srgbClr val="1877B9"/>
-          </a:solidFill>
-          <a:ln w="12700">
-            <a:solidFill>
-              <a:srgbClr val="1877B9"/>
-            </a:solidFill>
-            <a:prstDash val="solid"/>
-          </a:ln>
-        </p:spPr>
-      </p:sp>
-      <p:sp>
-        <p:nvSpPr>
-          <p:cNvPr id="18" name="Shape 16"/>
-          <p:cNvSpPr/>
-          <p:nvPr/>
-        </p:nvSpPr>
-        <p:spPr>
-          <a:xfrm>
-            <a:off x="9317736" y="2834640"/>
-            <a:ext cx="2450592" cy="1042416"/>
-          </a:xfrm>
-          <a:prstGeom prst="roundRect">
-            <a:avLst>
-              <a:gd name="adj" fmla="val 4386"/>
-            </a:avLst>
-          </a:prstGeom>
-          <a:solidFill>
-            <a:srgbClr val="EAF3F7"/>
-          </a:solidFill>
-          <a:ln w="12700">
-            <a:solidFill>
-              <a:srgbClr val="9DCCDD"/>
-            </a:solidFill>
-            <a:prstDash val="solid"/>
-          </a:ln>
-        </p:spPr>
-      </p:sp>
-      <p:sp>
-        <p:nvSpPr>
-          <p:cNvPr id="19" name="Text 17"/>
-          <p:cNvSpPr/>
-          <p:nvPr/>
-        </p:nvSpPr>
-        <p:spPr>
-          <a:xfrm>
-            <a:off x="9464040" y="3063240"/>
-            <a:ext cx="2157984" cy="548640"/>
-          </a:xfrm>
-          <a:prstGeom prst="rect">
-            <a:avLst/>
-          </a:prstGeom>
-          <a:noFill/>
-          <a:ln/>
-        </p:spPr>
-        <p:txBody>
-          <a:bodyPr wrap="square" lIns="0" tIns="0" rIns="0" bIns="0" rtlCol="0" anchor="ctr">
-            <a:normAutofit/>
-          </a:bodyPr>
-          <a:lstStyle/>
-          <a:p>
-            <a:pPr algn="ctr" indent="0" marL="0">
-              <a:buNone/>
-            </a:pPr>
-            <a:r>
-              <a:rPr lang="en-US" sz="1700" b="1" dirty="0">
-                <a:solidFill>
-                  <a:srgbClr val="16324F"/>
-                </a:solidFill>
-                <a:latin typeface="Aptos" pitchFamily="34" charset="0"/>
-                <a:ea typeface="Aptos" pitchFamily="34" charset="-122"/>
-                <a:cs typeface="Aptos" pitchFamily="34" charset="-120"/>
-              </a:rPr>
-              <a:t>očakávanie</a:t>
-            </a:r>
-            <a:endParaRPr lang="en-US" sz="1700" dirty="0"/>
+              <a:t>Test zlyhá, kým bug existuje. Takýto failing test je začiatok opravy, nie zlyhanie procesu.</a:t>
+            </a:r>
+            <a:endParaRPr lang="en-US" sz="1800" dirty="0"/>
           </a:p>
         </p:txBody>
       </p:sp>
@@ -13115,8 +9574,152 @@
         </p:nvSpPr>
         <p:spPr>
           <a:xfrm>
-            <a:off x="713232" y="1353312"/>
-            <a:ext cx="1280160" cy="548640"/>
+            <a:off x="658368" y="932688"/>
+            <a:ext cx="10789920" cy="713232"/>
+          </a:xfrm>
+          <a:prstGeom prst="rect">
+            <a:avLst/>
+          </a:prstGeom>
+          <a:noFill/>
+          <a:ln/>
+        </p:spPr>
+        <p:txBody>
+          <a:bodyPr wrap="square" lIns="0" tIns="0" rIns="0" bIns="0" rtlCol="0" anchor="t">
+            <a:normAutofit/>
+          </a:bodyPr>
+          <a:lstStyle/>
+          <a:p>
+            <a:pPr algn="l" indent="0" marL="0">
+              <a:buNone/>
+            </a:pPr>
+            <a:r>
+              <a:rPr lang="en-US" sz="2900" b="1" dirty="0">
+                <a:solidFill>
+                  <a:srgbClr val="16324F"/>
+                </a:solidFill>
+                <a:latin typeface="Aptos" pitchFamily="34" charset="0"/>
+                <a:ea typeface="Aptos" pitchFamily="34" charset="-122"/>
+                <a:cs typeface="Aptos" pitchFamily="34" charset="-120"/>
+              </a:rPr>
+              <a:t>Opravujeme kontrakt, nie iba jeden vstup</a:t>
+            </a:r>
+            <a:endParaRPr lang="en-US" sz="2900" dirty="0"/>
+          </a:p>
+        </p:txBody>
+      </p:sp>
+      <p:sp>
+        <p:nvSpPr>
+          <p:cNvPr id="9" name="Text 7"/>
+          <p:cNvSpPr/>
+          <p:nvPr/>
+        </p:nvSpPr>
+        <p:spPr>
+          <a:xfrm>
+            <a:off x="749808" y="1920240"/>
+            <a:ext cx="4160520" cy="3886200"/>
+          </a:xfrm>
+          <a:prstGeom prst="rect">
+            <a:avLst/>
+          </a:prstGeom>
+          <a:noFill/>
+          <a:ln/>
+        </p:spPr>
+        <p:txBody>
+          <a:bodyPr wrap="square" lIns="508" tIns="508" rIns="508" bIns="508" rtlCol="0" anchor="t">
+            <a:normAutofit/>
+          </a:bodyPr>
+          <a:lstStyle/>
+          <a:p>
+            <a:pPr marL="228600" indent="-228600">
+              <a:buSzPct val="100000"/>
+              <a:buChar char="•"/>
+            </a:pPr>
+            <a:r>
+              <a:rPr lang="en-US" sz="1700" dirty="0">
+                <a:solidFill>
+                  <a:srgbClr val="18212B"/>
+                </a:solidFill>
+                <a:latin typeface="Aptos" pitchFamily="34" charset="0"/>
+                <a:ea typeface="Aptos" pitchFamily="34" charset="-122"/>
+                <a:cs typeface="Aptos" pitchFamily="34" charset="-120"/>
+              </a:rPr>
+              <a:t>cena nesmie byť záporná</a:t>
+            </a:r>
+            <a:endParaRPr lang="en-US" sz="1700" dirty="0"/>
+          </a:p>
+          <a:p>
+            <a:pPr marL="228600" indent="-228600">
+              <a:buSzPct val="100000"/>
+              <a:buChar char="•"/>
+            </a:pPr>
+            <a:r>
+              <a:rPr lang="en-US" sz="1700" dirty="0">
+                <a:solidFill>
+                  <a:srgbClr val="18212B"/>
+                </a:solidFill>
+                <a:latin typeface="Aptos" pitchFamily="34" charset="0"/>
+                <a:ea typeface="Aptos" pitchFamily="34" charset="-122"/>
+                <a:cs typeface="Aptos" pitchFamily="34" charset="-120"/>
+              </a:rPr>
+              <a:t>discount patrí do intervalu 0 až 1</a:t>
+            </a:r>
+            <a:endParaRPr lang="en-US" sz="1700" dirty="0"/>
+          </a:p>
+          <a:p>
+            <a:pPr marL="228600" indent="-228600">
+              <a:buSzPct val="100000"/>
+              <a:buChar char="•"/>
+            </a:pPr>
+            <a:r>
+              <a:rPr lang="en-US" sz="1700" dirty="0">
+                <a:solidFill>
+                  <a:srgbClr val="18212B"/>
+                </a:solidFill>
+                <a:latin typeface="Aptos" pitchFamily="34" charset="0"/>
+                <a:ea typeface="Aptos" pitchFamily="34" charset="-122"/>
+                <a:cs typeface="Aptos" pitchFamily="34" charset="-120"/>
+              </a:rPr>
+              <a:t>neplatný vstup musí byť viditeľný</a:t>
+            </a:r>
+            <a:endParaRPr lang="en-US" sz="1700" dirty="0"/>
+          </a:p>
+        </p:txBody>
+      </p:sp>
+      <p:sp>
+        <p:nvSpPr>
+          <p:cNvPr id="10" name="Shape 8"/>
+          <p:cNvSpPr/>
+          <p:nvPr/>
+        </p:nvSpPr>
+        <p:spPr>
+          <a:xfrm>
+            <a:off x="5394960" y="1792224"/>
+            <a:ext cx="5943600" cy="4160520"/>
+          </a:xfrm>
+          <a:prstGeom prst="rect">
+            <a:avLst/>
+          </a:prstGeom>
+          <a:solidFill>
+            <a:srgbClr val="17212B"/>
+          </a:solidFill>
+          <a:ln w="12700">
+            <a:solidFill>
+              <a:srgbClr val="17212B"/>
+            </a:solidFill>
+            <a:prstDash val="solid"/>
+          </a:ln>
+        </p:spPr>
+      </p:sp>
+      <p:sp>
+        <p:nvSpPr>
+          <p:cNvPr id="11" name="Text 9"/>
+          <p:cNvSpPr/>
+          <p:nvPr/>
+        </p:nvSpPr>
+        <p:spPr>
+          <a:xfrm>
+            <a:off x="5641848" y="1993392"/>
+            <a:ext cx="5394960" cy="182880"/>
           </a:xfrm>
           <a:prstGeom prst="rect">
             <a:avLst/>
@@ -13134,30 +9737,30 @@
               <a:buNone/>
             </a:pPr>
             <a:r>
-              <a:rPr lang="en-US" sz="1800" b="1" dirty="0">
-                <a:solidFill>
-                  <a:srgbClr val="1877B9"/>
+              <a:rPr lang="en-US" sz="850" b="1" spc="70" kern="0" dirty="0">
+                <a:solidFill>
+                  <a:srgbClr val="8FD3FF"/>
                 </a:solidFill>
                 <a:latin typeface="Consolas" pitchFamily="34" charset="0"/>
                 <a:ea typeface="Consolas" pitchFamily="34" charset="-122"/>
                 <a:cs typeface="Consolas" pitchFamily="34" charset="-120"/>
               </a:rPr>
-              <a:t>01</a:t>
-            </a:r>
-            <a:endParaRPr lang="en-US" sz="1800" dirty="0"/>
-          </a:p>
-        </p:txBody>
-      </p:sp>
-      <p:sp>
-        <p:nvSpPr>
-          <p:cNvPr id="9" name="Text 7"/>
-          <p:cNvSpPr/>
-          <p:nvPr/>
-        </p:nvSpPr>
-        <p:spPr>
-          <a:xfrm>
-            <a:off x="713232" y="2011680"/>
-            <a:ext cx="9875520" cy="822960"/>
+              <a:t>python</a:t>
+            </a:r>
+            <a:endParaRPr lang="en-US" sz="850" dirty="0"/>
+          </a:p>
+        </p:txBody>
+      </p:sp>
+      <p:sp>
+        <p:nvSpPr>
+          <p:cNvPr id="12" name="Text 10"/>
+          <p:cNvSpPr/>
+          <p:nvPr/>
+        </p:nvSpPr>
+        <p:spPr>
+          <a:xfrm>
+            <a:off x="5641848" y="2395728"/>
+            <a:ext cx="5330952" cy="3127248"/>
           </a:xfrm>
           <a:prstGeom prst="rect">
             <a:avLst/>
@@ -13175,85 +9778,104 @@
               <a:buNone/>
             </a:pPr>
             <a:r>
-              <a:rPr lang="en-US" sz="3700" b="1" dirty="0">
-                <a:solidFill>
-                  <a:srgbClr val="16324F"/>
-                </a:solidFill>
-                <a:latin typeface="Aptos" pitchFamily="34" charset="0"/>
-                <a:ea typeface="Aptos" pitchFamily="34" charset="-122"/>
-                <a:cs typeface="Aptos" pitchFamily="34" charset="-120"/>
-              </a:rPr>
-              <a:t>pytest a malé testy</a:t>
-            </a:r>
-            <a:endParaRPr lang="en-US" sz="3700" dirty="0"/>
-          </a:p>
-        </p:txBody>
-      </p:sp>
-      <p:sp>
-        <p:nvSpPr>
-          <p:cNvPr id="10" name="Text 8"/>
-          <p:cNvSpPr/>
-          <p:nvPr/>
-        </p:nvSpPr>
-        <p:spPr>
-          <a:xfrm>
-            <a:off x="749808" y="3063240"/>
-            <a:ext cx="7863840" cy="411480"/>
-          </a:xfrm>
-          <a:prstGeom prst="rect">
-            <a:avLst/>
-          </a:prstGeom>
-          <a:noFill/>
-          <a:ln/>
-        </p:spPr>
-        <p:txBody>
-          <a:bodyPr wrap="square" lIns="0" tIns="0" rIns="0" bIns="0" rtlCol="0" anchor="t">
-            <a:normAutofit/>
-          </a:bodyPr>
-          <a:lstStyle/>
+              <a:rPr lang="en-US" sz="1560" dirty="0">
+                <a:solidFill>
+                  <a:srgbClr val="F4F7FA"/>
+                </a:solidFill>
+                <a:latin typeface="Consolas" pitchFamily="34" charset="0"/>
+                <a:ea typeface="Consolas" pitchFamily="34" charset="-122"/>
+                <a:cs typeface="Consolas" pitchFamily="34" charset="-120"/>
+              </a:rPr>
+              <a:t>def calculate_discount(price: float, discount: float) -&gt; float:</a:t>
+            </a:r>
+            <a:endParaRPr lang="en-US" sz="1560" dirty="0"/>
+          </a:p>
           <a:p>
             <a:pPr algn="l" indent="0" marL="0">
               <a:buNone/>
             </a:pPr>
             <a:r>
-              <a:rPr lang="en-US" sz="2000" dirty="0">
-                <a:solidFill>
-                  <a:srgbClr val="5E6B78"/>
-                </a:solidFill>
-                <a:latin typeface="Aptos" pitchFamily="34" charset="0"/>
-                <a:ea typeface="Aptos" pitchFamily="34" charset="-122"/>
-                <a:cs typeface="Aptos" pitchFamily="34" charset="-120"/>
-              </a:rPr>
-              <a:t>Testujeme správanie, nie implementačné detaily.</a:t>
-            </a:r>
-            <a:endParaRPr lang="en-US" sz="2000" dirty="0"/>
-          </a:p>
-        </p:txBody>
-      </p:sp>
-      <p:sp>
-        <p:nvSpPr>
-          <p:cNvPr id="11" name="Shape 9"/>
-          <p:cNvSpPr/>
-          <p:nvPr/>
-        </p:nvSpPr>
-        <p:spPr>
-          <a:xfrm>
-            <a:off x="731520" y="3977640"/>
-            <a:ext cx="2834640" cy="128016"/>
-          </a:xfrm>
-          <a:prstGeom prst="rect">
-            <a:avLst/>
-          </a:prstGeom>
-          <a:solidFill>
-            <a:srgbClr val="1877B9"/>
-          </a:solidFill>
-          <a:ln w="12700">
-            <a:solidFill>
-              <a:srgbClr val="1877B9"/>
-            </a:solidFill>
-            <a:prstDash val="solid"/>
-          </a:ln>
-        </p:spPr>
+              <a:rPr lang="en-US" sz="1560" dirty="0">
+                <a:solidFill>
+                  <a:srgbClr val="F4F7FA"/>
+                </a:solidFill>
+                <a:latin typeface="Consolas" pitchFamily="34" charset="0"/>
+                <a:ea typeface="Consolas" pitchFamily="34" charset="-122"/>
+                <a:cs typeface="Consolas" pitchFamily="34" charset="-120"/>
+              </a:rPr>
+              <a:t>    if price &lt; 0:</a:t>
+            </a:r>
+            <a:endParaRPr lang="en-US" sz="1560" dirty="0"/>
+          </a:p>
+          <a:p>
+            <a:pPr algn="l" indent="0" marL="0">
+              <a:buNone/>
+            </a:pPr>
+            <a:r>
+              <a:rPr lang="en-US" sz="1560" dirty="0">
+                <a:solidFill>
+                  <a:srgbClr val="F4F7FA"/>
+                </a:solidFill>
+                <a:latin typeface="Consolas" pitchFamily="34" charset="0"/>
+                <a:ea typeface="Consolas" pitchFamily="34" charset="-122"/>
+                <a:cs typeface="Consolas" pitchFamily="34" charset="-120"/>
+              </a:rPr>
+              <a:t>        raise ValueError("price must be non-negative")</a:t>
+            </a:r>
+            <a:endParaRPr lang="en-US" sz="1560" dirty="0"/>
+          </a:p>
+          <a:p>
+            <a:pPr algn="l" indent="0" marL="0">
+              <a:buNone/>
+            </a:pPr>
+            <a:r>
+              <a:rPr lang="en-US" sz="1560" dirty="0">
+                <a:solidFill>
+                  <a:srgbClr val="F4F7FA"/>
+                </a:solidFill>
+                <a:latin typeface="Consolas" pitchFamily="34" charset="0"/>
+                <a:ea typeface="Consolas" pitchFamily="34" charset="-122"/>
+                <a:cs typeface="Consolas" pitchFamily="34" charset="-120"/>
+              </a:rPr>
+              <a:t>    if not 0 &lt;= discount &lt;= 1:</a:t>
+            </a:r>
+            <a:endParaRPr lang="en-US" sz="1560" dirty="0"/>
+          </a:p>
+          <a:p>
+            <a:pPr algn="l" indent="0" marL="0">
+              <a:buNone/>
+            </a:pPr>
+            <a:r>
+              <a:rPr lang="en-US" sz="1560" dirty="0">
+                <a:solidFill>
+                  <a:srgbClr val="F4F7FA"/>
+                </a:solidFill>
+                <a:latin typeface="Consolas" pitchFamily="34" charset="0"/>
+                <a:ea typeface="Consolas" pitchFamily="34" charset="-122"/>
+                <a:cs typeface="Consolas" pitchFamily="34" charset="-120"/>
+              </a:rPr>
+              <a:t>        raise ValueError("discount must be between 0 and 1")</a:t>
+            </a:r>
+            <a:endParaRPr lang="en-US" sz="1560" dirty="0"/>
+          </a:p>
+          <a:p>
+            <a:pPr algn="l" indent="0" marL="0">
+              <a:buNone/>
+            </a:pPr>
+            <a:r>
+              <a:rPr lang="en-US" sz="1560" dirty="0">
+                <a:solidFill>
+                  <a:srgbClr val="F4F7FA"/>
+                </a:solidFill>
+                <a:latin typeface="Consolas" pitchFamily="34" charset="0"/>
+                <a:ea typeface="Consolas" pitchFamily="34" charset="-122"/>
+                <a:cs typeface="Consolas" pitchFamily="34" charset="-120"/>
+              </a:rPr>
+              <a:t>    return price * (1 - discount)</a:t>
+            </a:r>
+            <a:endParaRPr lang="en-US" sz="1560" dirty="0"/>
+          </a:p>
+        </p:txBody>
       </p:sp>
     </p:spTree>
   </p:cSld>
@@ -13516,7 +10138,7 @@
                 <a:ea typeface="Aptos" pitchFamily="34" charset="-122"/>
                 <a:cs typeface="Aptos" pitchFamily="34" charset="-120"/>
               </a:rPr>
-              <a:t>Prvý test</a:t>
+              <a:t>pytest spúšťa testy bez vlastného runnera</a:t>
             </a:r>
             <a:endParaRPr lang="en-US" sz="2900" dirty="0"/>
           </a:p>
@@ -13584,7 +10206,7 @@
                 <a:ea typeface="Consolas" pitchFamily="34" charset="-122"/>
                 <a:cs typeface="Consolas" pitchFamily="34" charset="-120"/>
               </a:rPr>
-              <a:t>tests/test_discount.py</a:t>
+              <a:t>terminal</a:t>
             </a:r>
             <a:endParaRPr lang="en-US" sz="850" dirty="0"/>
           </a:p>
@@ -13625,7 +10247,7 @@
                 <a:ea typeface="Consolas" pitchFamily="34" charset="-122"/>
                 <a:cs typeface="Consolas" pitchFamily="34" charset="-120"/>
               </a:rPr>
-              <a:t>from app.pricing import calculate_discount</a:t>
+              <a:t>python -m pytest</a:t>
             </a:r>
             <a:endParaRPr lang="en-US" sz="1650" dirty="0"/>
           </a:p>
@@ -13648,7 +10270,7 @@
                 <a:ea typeface="Consolas" pitchFamily="34" charset="-122"/>
                 <a:cs typeface="Consolas" pitchFamily="34" charset="-120"/>
               </a:rPr>
-              <a:t>def test_discount_for_regular_price() -&gt; None:</a:t>
+              <a:t># jeden súbor</a:t>
             </a:r>
             <a:endParaRPr lang="en-US" sz="1650" dirty="0"/>
           </a:p>
@@ -13665,7 +10287,47 @@
                 <a:ea typeface="Consolas" pitchFamily="34" charset="-122"/>
                 <a:cs typeface="Consolas" pitchFamily="34" charset="-120"/>
               </a:rPr>
-              <a:t>    assert calculate_discount(100, 0.2) == 80</a:t>
+              <a:t>python -m pytest tests/test_pricing.py</a:t>
+            </a:r>
+            <a:endParaRPr lang="en-US" sz="1650" dirty="0"/>
+          </a:p>
+          <a:p>
+            <a:pPr algn="l" indent="0" marL="0">
+              <a:buNone/>
+            </a:pPr>
+            <a:endParaRPr lang="en-US" sz="1650" dirty="0"/>
+          </a:p>
+          <a:p>
+            <a:pPr algn="l" indent="0" marL="0">
+              <a:buNone/>
+            </a:pPr>
+            <a:r>
+              <a:rPr lang="en-US" sz="1650" dirty="0">
+                <a:solidFill>
+                  <a:srgbClr val="F4F7FA"/>
+                </a:solidFill>
+                <a:latin typeface="Consolas" pitchFamily="34" charset="0"/>
+                <a:ea typeface="Consolas" pitchFamily="34" charset="-122"/>
+                <a:cs typeface="Consolas" pitchFamily="34" charset="-120"/>
+              </a:rPr>
+              <a:t># podrobnejší výstup</a:t>
+            </a:r>
+            <a:endParaRPr lang="en-US" sz="1650" dirty="0"/>
+          </a:p>
+          <a:p>
+            <a:pPr algn="l" indent="0" marL="0">
+              <a:buNone/>
+            </a:pPr>
+            <a:r>
+              <a:rPr lang="en-US" sz="1650" dirty="0">
+                <a:solidFill>
+                  <a:srgbClr val="F4F7FA"/>
+                </a:solidFill>
+                <a:latin typeface="Consolas" pitchFamily="34" charset="0"/>
+                <a:ea typeface="Consolas" pitchFamily="34" charset="-122"/>
+                <a:cs typeface="Consolas" pitchFamily="34" charset="-120"/>
+              </a:rPr>
+              <a:t>python -m pytest -v</a:t>
             </a:r>
             <a:endParaRPr lang="en-US" sz="1650" dirty="0"/>
           </a:p>
@@ -13729,7 +10391,7 @@
                 <a:ea typeface="Aptos" pitchFamily="34" charset="-122"/>
                 <a:cs typeface="Aptos" pitchFamily="34" charset="-120"/>
               </a:rPr>
-              <a:t>Názov testu opisuje správanie. assert porovnáva výsledok s očakávaním.</a:t>
+              <a:t>Názov súboru a funkcie umožní pytestu test objaviť. Výstup ukáže rozdiel medzi actual a expected.</a:t>
             </a:r>
             <a:endParaRPr lang="en-US" sz="1800" dirty="0"/>
           </a:p>
@@ -13996,7 +10658,7 @@
                 <a:ea typeface="Aptos" pitchFamily="34" charset="-122"/>
                 <a:cs typeface="Aptos" pitchFamily="34" charset="-120"/>
               </a:rPr>
-              <a:t>Spustenie testov</a:t>
+              <a:t>Testovacie prípady vychádzajú z hraníc</a:t>
             </a:r>
             <a:endParaRPr lang="en-US" sz="2900" dirty="0"/>
           </a:p>
@@ -14010,20 +10672,20 @@
         </p:nvSpPr>
         <p:spPr>
           <a:xfrm>
-            <a:off x="658368" y="1828800"/>
-            <a:ext cx="6812280" cy="4069080"/>
+            <a:off x="731520" y="2834640"/>
+            <a:ext cx="2450592" cy="1042416"/>
           </a:xfrm>
           <a:prstGeom prst="roundRect">
             <a:avLst>
-              <a:gd name="adj" fmla="val 1348"/>
+              <a:gd name="adj" fmla="val 4386"/>
             </a:avLst>
           </a:prstGeom>
           <a:solidFill>
-            <a:srgbClr val="17212B"/>
+            <a:srgbClr val="F3F6F8"/>
           </a:solidFill>
           <a:ln w="12700">
             <a:solidFill>
-              <a:srgbClr val="17212B"/>
+              <a:srgbClr val="D8E0E6"/>
             </a:solidFill>
             <a:prstDash val="solid"/>
           </a:ln>
@@ -14037,8 +10699,8 @@
         </p:nvSpPr>
         <p:spPr>
           <a:xfrm>
-            <a:off x="868680" y="2029968"/>
-            <a:ext cx="6309360" cy="182880"/>
+            <a:off x="877824" y="3063240"/>
+            <a:ext cx="2157984" cy="548640"/>
           </a:xfrm>
           <a:prstGeom prst="rect">
             <a:avLst/>
@@ -14052,120 +10714,41 @@
           </a:bodyPr>
           <a:lstStyle/>
           <a:p>
-            <a:pPr algn="l" indent="0" marL="0">
-              <a:buNone/>
-            </a:pPr>
-            <a:r>
-              <a:rPr lang="en-US" sz="850" b="1" spc="70" kern="0" dirty="0">
-                <a:solidFill>
-                  <a:srgbClr val="8FD3FF"/>
-                </a:solidFill>
-                <a:latin typeface="Consolas" pitchFamily="34" charset="0"/>
-                <a:ea typeface="Consolas" pitchFamily="34" charset="-122"/>
-                <a:cs typeface="Consolas" pitchFamily="34" charset="-120"/>
-              </a:rPr>
-              <a:t>terminal</a:t>
-            </a:r>
-            <a:endParaRPr lang="en-US" sz="850" dirty="0"/>
-          </a:p>
-        </p:txBody>
-      </p:sp>
-      <p:sp>
-        <p:nvSpPr>
-          <p:cNvPr id="11" name="Text 9"/>
-          <p:cNvSpPr/>
-          <p:nvPr/>
-        </p:nvSpPr>
-        <p:spPr>
-          <a:xfrm>
-            <a:off x="877824" y="2395728"/>
-            <a:ext cx="6327648" cy="3246120"/>
-          </a:xfrm>
-          <a:prstGeom prst="rect">
-            <a:avLst/>
-          </a:prstGeom>
-          <a:noFill/>
-          <a:ln/>
-        </p:spPr>
-        <p:txBody>
-          <a:bodyPr wrap="square" lIns="0" tIns="0" rIns="0" bIns="0" rtlCol="0" anchor="t">
-            <a:normAutofit/>
-          </a:bodyPr>
-          <a:lstStyle/>
-          <a:p>
-            <a:pPr algn="l" indent="0" marL="0">
-              <a:buNone/>
-            </a:pPr>
-            <a:r>
-              <a:rPr lang="en-US" sz="1650" dirty="0">
-                <a:solidFill>
-                  <a:srgbClr val="F4F7FA"/>
-                </a:solidFill>
-                <a:latin typeface="Consolas" pitchFamily="34" charset="0"/>
-                <a:ea typeface="Consolas" pitchFamily="34" charset="-122"/>
-                <a:cs typeface="Consolas" pitchFamily="34" charset="-120"/>
-              </a:rPr>
-              <a:t>python -m pytest</a:t>
-            </a:r>
-            <a:endParaRPr lang="en-US" sz="1650" dirty="0"/>
-          </a:p>
-          <a:p>
-            <a:pPr algn="l" indent="0" marL="0">
-              <a:buNone/>
-            </a:pPr>
-            <a:endParaRPr lang="en-US" sz="1650" dirty="0"/>
-          </a:p>
-          <a:p>
-            <a:pPr algn="l" indent="0" marL="0">
-              <a:buNone/>
-            </a:pPr>
-            <a:r>
-              <a:rPr lang="en-US" sz="1650" dirty="0">
-                <a:solidFill>
-                  <a:srgbClr val="F4F7FA"/>
-                </a:solidFill>
-                <a:latin typeface="Consolas" pitchFamily="34" charset="0"/>
-                <a:ea typeface="Consolas" pitchFamily="34" charset="-122"/>
-                <a:cs typeface="Consolas" pitchFamily="34" charset="-120"/>
-              </a:rPr>
-              <a:t># iba jeden súbor</a:t>
-            </a:r>
-            <a:endParaRPr lang="en-US" sz="1650" dirty="0"/>
-          </a:p>
-          <a:p>
-            <a:pPr algn="l" indent="0" marL="0">
-              <a:buNone/>
-            </a:pPr>
-            <a:r>
-              <a:rPr lang="en-US" sz="1650" dirty="0">
-                <a:solidFill>
-                  <a:srgbClr val="F4F7FA"/>
-                </a:solidFill>
-                <a:latin typeface="Consolas" pitchFamily="34" charset="0"/>
-                <a:ea typeface="Consolas" pitchFamily="34" charset="-122"/>
-                <a:cs typeface="Consolas" pitchFamily="34" charset="-120"/>
-              </a:rPr>
-              <a:t>python -m pytest tests/test_discount.py</a:t>
-            </a:r>
-            <a:endParaRPr lang="en-US" sz="1650" dirty="0"/>
-          </a:p>
-        </p:txBody>
-      </p:sp>
-      <p:sp>
-        <p:nvSpPr>
-          <p:cNvPr id="12" name="Shape 10"/>
-          <p:cNvSpPr/>
-          <p:nvPr/>
-        </p:nvSpPr>
-        <p:spPr>
-          <a:xfrm>
-            <a:off x="7909560" y="1901952"/>
-            <a:ext cx="0" cy="3566160"/>
-          </a:xfrm>
-          <a:prstGeom prst="line">
-            <a:avLst/>
-          </a:prstGeom>
-          <a:noFill/>
+            <a:pPr algn="ctr" indent="0" marL="0">
+              <a:buNone/>
+            </a:pPr>
+            <a:r>
+              <a:rPr lang="en-US" sz="1700" b="1" dirty="0">
+                <a:solidFill>
+                  <a:srgbClr val="16324F"/>
+                </a:solidFill>
+                <a:latin typeface="Aptos" pitchFamily="34" charset="0"/>
+                <a:ea typeface="Aptos" pitchFamily="34" charset="-122"/>
+                <a:cs typeface="Aptos" pitchFamily="34" charset="-120"/>
+              </a:rPr>
+              <a:t>bežný vstup</a:t>
+            </a:r>
+            <a:endParaRPr lang="en-US" sz="1700" dirty="0"/>
+          </a:p>
+        </p:txBody>
+      </p:sp>
+      <p:sp>
+        <p:nvSpPr>
+          <p:cNvPr id="11" name="Shape 9"/>
+          <p:cNvSpPr/>
+          <p:nvPr/>
+        </p:nvSpPr>
+        <p:spPr>
+          <a:xfrm>
+            <a:off x="3319272" y="3209544"/>
+            <a:ext cx="182880" cy="292608"/>
+          </a:xfrm>
+          <a:prstGeom prst="chevron">
+            <a:avLst/>
+          </a:prstGeom>
+          <a:solidFill>
+            <a:srgbClr val="1877B9"/>
+          </a:solidFill>
           <a:ln w="12700">
             <a:solidFill>
               <a:srgbClr val="1877B9"/>
@@ -14176,14 +10759,41 @@
       </p:sp>
       <p:sp>
         <p:nvSpPr>
+          <p:cNvPr id="12" name="Shape 10"/>
+          <p:cNvSpPr/>
+          <p:nvPr/>
+        </p:nvSpPr>
+        <p:spPr>
+          <a:xfrm>
+            <a:off x="3593592" y="2834640"/>
+            <a:ext cx="2450592" cy="1042416"/>
+          </a:xfrm>
+          <a:prstGeom prst="roundRect">
+            <a:avLst>
+              <a:gd name="adj" fmla="val 4386"/>
+            </a:avLst>
+          </a:prstGeom>
+          <a:solidFill>
+            <a:srgbClr val="EAF3F7"/>
+          </a:solidFill>
+          <a:ln w="12700">
+            <a:solidFill>
+              <a:srgbClr val="9DCCDD"/>
+            </a:solidFill>
+            <a:prstDash val="solid"/>
+          </a:ln>
+        </p:spPr>
+      </p:sp>
+      <p:sp>
+        <p:nvSpPr>
           <p:cNvPr id="13" name="Text 11"/>
           <p:cNvSpPr/>
           <p:nvPr/>
         </p:nvSpPr>
         <p:spPr>
           <a:xfrm>
-            <a:off x="8229600" y="2130552"/>
-            <a:ext cx="2743200" cy="2468880"/>
+            <a:off x="3739896" y="3063240"/>
+            <a:ext cx="2157984" cy="548640"/>
           </a:xfrm>
           <a:prstGeom prst="rect">
             <a:avLst/>
@@ -14192,26 +10802,212 @@
           <a:ln/>
         </p:spPr>
         <p:txBody>
-          <a:bodyPr wrap="square" lIns="0" tIns="0" rIns="0" bIns="0" rtlCol="0" anchor="t">
+          <a:bodyPr wrap="square" lIns="0" tIns="0" rIns="0" bIns="0" rtlCol="0" anchor="ctr">
             <a:normAutofit/>
           </a:bodyPr>
           <a:lstStyle/>
           <a:p>
-            <a:pPr algn="l" indent="0" marL="0">
-              <a:buNone/>
-            </a:pPr>
-            <a:r>
-              <a:rPr lang="en-US" sz="1800" dirty="0">
-                <a:solidFill>
-                  <a:srgbClr val="5E6B78"/>
+            <a:pPr algn="ctr" indent="0" marL="0">
+              <a:buNone/>
+            </a:pPr>
+            <a:r>
+              <a:rPr lang="en-US" sz="1700" b="1" dirty="0">
+                <a:solidFill>
+                  <a:srgbClr val="16324F"/>
                 </a:solidFill>
                 <a:latin typeface="Aptos" pitchFamily="34" charset="0"/>
                 <a:ea typeface="Aptos" pitchFamily="34" charset="-122"/>
                 <a:cs typeface="Aptos" pitchFamily="34" charset="-120"/>
               </a:rPr>
-              <a:t>pytest nájde súbory a funkcie s vhodným názvom. Výstup ukáže presné miesto zlyhania.</a:t>
-            </a:r>
-            <a:endParaRPr lang="en-US" sz="1800" dirty="0"/>
+              <a:t>hranica 0 / 1</a:t>
+            </a:r>
+            <a:endParaRPr lang="en-US" sz="1700" dirty="0"/>
+          </a:p>
+        </p:txBody>
+      </p:sp>
+      <p:sp>
+        <p:nvSpPr>
+          <p:cNvPr id="14" name="Shape 12"/>
+          <p:cNvSpPr/>
+          <p:nvPr/>
+        </p:nvSpPr>
+        <p:spPr>
+          <a:xfrm>
+            <a:off x="6181344" y="3209544"/>
+            <a:ext cx="182880" cy="292608"/>
+          </a:xfrm>
+          <a:prstGeom prst="chevron">
+            <a:avLst/>
+          </a:prstGeom>
+          <a:solidFill>
+            <a:srgbClr val="1877B9"/>
+          </a:solidFill>
+          <a:ln w="12700">
+            <a:solidFill>
+              <a:srgbClr val="1877B9"/>
+            </a:solidFill>
+            <a:prstDash val="solid"/>
+          </a:ln>
+        </p:spPr>
+      </p:sp>
+      <p:sp>
+        <p:nvSpPr>
+          <p:cNvPr id="15" name="Shape 13"/>
+          <p:cNvSpPr/>
+          <p:nvPr/>
+        </p:nvSpPr>
+        <p:spPr>
+          <a:xfrm>
+            <a:off x="6455664" y="2834640"/>
+            <a:ext cx="2450592" cy="1042416"/>
+          </a:xfrm>
+          <a:prstGeom prst="roundRect">
+            <a:avLst>
+              <a:gd name="adj" fmla="val 4386"/>
+            </a:avLst>
+          </a:prstGeom>
+          <a:solidFill>
+            <a:srgbClr val="F3F6F8"/>
+          </a:solidFill>
+          <a:ln w="12700">
+            <a:solidFill>
+              <a:srgbClr val="D8E0E6"/>
+            </a:solidFill>
+            <a:prstDash val="solid"/>
+          </a:ln>
+        </p:spPr>
+      </p:sp>
+      <p:sp>
+        <p:nvSpPr>
+          <p:cNvPr id="16" name="Text 14"/>
+          <p:cNvSpPr/>
+          <p:nvPr/>
+        </p:nvSpPr>
+        <p:spPr>
+          <a:xfrm>
+            <a:off x="6601968" y="3063240"/>
+            <a:ext cx="2157984" cy="548640"/>
+          </a:xfrm>
+          <a:prstGeom prst="rect">
+            <a:avLst/>
+          </a:prstGeom>
+          <a:noFill/>
+          <a:ln/>
+        </p:spPr>
+        <p:txBody>
+          <a:bodyPr wrap="square" lIns="0" tIns="0" rIns="0" bIns="0" rtlCol="0" anchor="ctr">
+            <a:normAutofit/>
+          </a:bodyPr>
+          <a:lstStyle/>
+          <a:p>
+            <a:pPr algn="ctr" indent="0" marL="0">
+              <a:buNone/>
+            </a:pPr>
+            <a:r>
+              <a:rPr lang="en-US" sz="1700" b="1" dirty="0">
+                <a:solidFill>
+                  <a:srgbClr val="16324F"/>
+                </a:solidFill>
+                <a:latin typeface="Aptos" pitchFamily="34" charset="0"/>
+                <a:ea typeface="Aptos" pitchFamily="34" charset="-122"/>
+                <a:cs typeface="Aptos" pitchFamily="34" charset="-120"/>
+              </a:rPr>
+              <a:t>neplatný vstup</a:t>
+            </a:r>
+            <a:endParaRPr lang="en-US" sz="1700" dirty="0"/>
+          </a:p>
+        </p:txBody>
+      </p:sp>
+      <p:sp>
+        <p:nvSpPr>
+          <p:cNvPr id="17" name="Shape 15"/>
+          <p:cNvSpPr/>
+          <p:nvPr/>
+        </p:nvSpPr>
+        <p:spPr>
+          <a:xfrm>
+            <a:off x="9043416" y="3209544"/>
+            <a:ext cx="182880" cy="292608"/>
+          </a:xfrm>
+          <a:prstGeom prst="chevron">
+            <a:avLst/>
+          </a:prstGeom>
+          <a:solidFill>
+            <a:srgbClr val="1877B9"/>
+          </a:solidFill>
+          <a:ln w="12700">
+            <a:solidFill>
+              <a:srgbClr val="1877B9"/>
+            </a:solidFill>
+            <a:prstDash val="solid"/>
+          </a:ln>
+        </p:spPr>
+      </p:sp>
+      <p:sp>
+        <p:nvSpPr>
+          <p:cNvPr id="18" name="Shape 16"/>
+          <p:cNvSpPr/>
+          <p:nvPr/>
+        </p:nvSpPr>
+        <p:spPr>
+          <a:xfrm>
+            <a:off x="9317736" y="2834640"/>
+            <a:ext cx="2450592" cy="1042416"/>
+          </a:xfrm>
+          <a:prstGeom prst="roundRect">
+            <a:avLst>
+              <a:gd name="adj" fmla="val 4386"/>
+            </a:avLst>
+          </a:prstGeom>
+          <a:solidFill>
+            <a:srgbClr val="EAF3F7"/>
+          </a:solidFill>
+          <a:ln w="12700">
+            <a:solidFill>
+              <a:srgbClr val="9DCCDD"/>
+            </a:solidFill>
+            <a:prstDash val="solid"/>
+          </a:ln>
+        </p:spPr>
+      </p:sp>
+      <p:sp>
+        <p:nvSpPr>
+          <p:cNvPr id="19" name="Text 17"/>
+          <p:cNvSpPr/>
+          <p:nvPr/>
+        </p:nvSpPr>
+        <p:spPr>
+          <a:xfrm>
+            <a:off x="9464040" y="3063240"/>
+            <a:ext cx="2157984" cy="548640"/>
+          </a:xfrm>
+          <a:prstGeom prst="rect">
+            <a:avLst/>
+          </a:prstGeom>
+          <a:noFill/>
+          <a:ln/>
+        </p:spPr>
+        <p:txBody>
+          <a:bodyPr wrap="square" lIns="0" tIns="0" rIns="0" bIns="0" rtlCol="0" anchor="ctr">
+            <a:normAutofit/>
+          </a:bodyPr>
+          <a:lstStyle/>
+          <a:p>
+            <a:pPr algn="ctr" indent="0" marL="0">
+              <a:buNone/>
+            </a:pPr>
+            <a:r>
+              <a:rPr lang="en-US" sz="1700" b="1" dirty="0">
+                <a:solidFill>
+                  <a:srgbClr val="16324F"/>
+                </a:solidFill>
+                <a:latin typeface="Aptos" pitchFamily="34" charset="0"/>
+                <a:ea typeface="Aptos" pitchFamily="34" charset="-122"/>
+                <a:cs typeface="Aptos" pitchFamily="34" charset="-120"/>
+              </a:rPr>
+              <a:t>bug z minulosti</a:t>
+            </a:r>
+            <a:endParaRPr lang="en-US" sz="1700" dirty="0"/>
           </a:p>
         </p:txBody>
       </p:sp>
@@ -14476,7 +11272,7 @@
                 <a:ea typeface="Aptos" pitchFamily="34" charset="-122"/>
                 <a:cs typeface="Aptos" pitchFamily="34" charset="-120"/>
               </a:rPr>
-              <a:t>Jeden príklad nestačí</a:t>
+              <a:t>Parametrizácia pomenuje podobné prípady</a:t>
             </a:r>
             <a:endParaRPr lang="en-US" sz="2900" dirty="0"/>
           </a:p>
@@ -14484,14 +11280,39 @@
       </p:sp>
       <p:sp>
         <p:nvSpPr>
-          <p:cNvPr id="9" name="Text 7"/>
-          <p:cNvSpPr/>
-          <p:nvPr/>
-        </p:nvSpPr>
-        <p:spPr>
-          <a:xfrm>
-            <a:off x="868680" y="1938528"/>
-            <a:ext cx="9921240" cy="3886200"/>
+          <p:cNvPr id="9" name="Shape 7"/>
+          <p:cNvSpPr/>
+          <p:nvPr/>
+        </p:nvSpPr>
+        <p:spPr>
+          <a:xfrm>
+            <a:off x="658368" y="1783080"/>
+            <a:ext cx="10899648" cy="4069080"/>
+          </a:xfrm>
+          <a:prstGeom prst="rect">
+            <a:avLst/>
+          </a:prstGeom>
+          <a:solidFill>
+            <a:srgbClr val="17212B"/>
+          </a:solidFill>
+          <a:ln w="12700">
+            <a:solidFill>
+              <a:srgbClr val="17212B"/>
+            </a:solidFill>
+            <a:prstDash val="solid"/>
+          </a:ln>
+        </p:spPr>
+      </p:sp>
+      <p:sp>
+        <p:nvSpPr>
+          <p:cNvPr id="10" name="Text 8"/>
+          <p:cNvSpPr/>
+          <p:nvPr/>
+        </p:nvSpPr>
+        <p:spPr>
+          <a:xfrm>
+            <a:off x="896112" y="1984248"/>
+            <a:ext cx="9966960" cy="182880"/>
           </a:xfrm>
           <a:prstGeom prst="rect">
             <a:avLst/>
@@ -14500,81 +11321,233 @@
           <a:ln/>
         </p:spPr>
         <p:txBody>
-          <a:bodyPr wrap="square" lIns="508" tIns="508" rIns="508" bIns="508" rtlCol="0" anchor="t">
+          <a:bodyPr wrap="square" lIns="0" tIns="0" rIns="0" bIns="0" rtlCol="0" anchor="ctr">
             <a:normAutofit/>
           </a:bodyPr>
           <a:lstStyle/>
           <a:p>
-            <a:pPr marL="228600" indent="-228600">
-              <a:buSzPct val="100000"/>
-              <a:buChar char="•"/>
-            </a:pPr>
-            <a:r>
-              <a:rPr lang="en-US" sz="1800" dirty="0">
-                <a:solidFill>
-                  <a:srgbClr val="18212B"/>
+            <a:pPr algn="l" indent="0" marL="0">
+              <a:buNone/>
+            </a:pPr>
+            <a:r>
+              <a:rPr lang="en-US" sz="850" b="1" spc="70" kern="0" dirty="0">
+                <a:solidFill>
+                  <a:srgbClr val="8FD3FF"/>
+                </a:solidFill>
+                <a:latin typeface="Consolas" pitchFamily="34" charset="0"/>
+                <a:ea typeface="Consolas" pitchFamily="34" charset="-122"/>
+                <a:cs typeface="Consolas" pitchFamily="34" charset="-120"/>
+              </a:rPr>
+              <a:t>python</a:t>
+            </a:r>
+            <a:endParaRPr lang="en-US" sz="850" dirty="0"/>
+          </a:p>
+        </p:txBody>
+      </p:sp>
+      <p:sp>
+        <p:nvSpPr>
+          <p:cNvPr id="11" name="Text 9"/>
+          <p:cNvSpPr/>
+          <p:nvPr/>
+        </p:nvSpPr>
+        <p:spPr>
+          <a:xfrm>
+            <a:off x="896112" y="2395728"/>
+            <a:ext cx="9893808" cy="3063240"/>
+          </a:xfrm>
+          <a:prstGeom prst="rect">
+            <a:avLst/>
+          </a:prstGeom>
+          <a:noFill/>
+          <a:ln/>
+        </p:spPr>
+        <p:txBody>
+          <a:bodyPr wrap="square" lIns="0" tIns="0" rIns="0" bIns="0" rtlCol="0" anchor="t">
+            <a:normAutofit/>
+          </a:bodyPr>
+          <a:lstStyle/>
+          <a:p>
+            <a:pPr algn="l" indent="0" marL="0">
+              <a:buNone/>
+            </a:pPr>
+            <a:r>
+              <a:rPr lang="en-US" sz="1750" dirty="0">
+                <a:solidFill>
+                  <a:srgbClr val="F4F7FA"/>
+                </a:solidFill>
+                <a:latin typeface="Consolas" pitchFamily="34" charset="0"/>
+                <a:ea typeface="Consolas" pitchFamily="34" charset="-122"/>
+                <a:cs typeface="Consolas" pitchFamily="34" charset="-120"/>
+              </a:rPr>
+              <a:t>import pytest</a:t>
+            </a:r>
+            <a:endParaRPr lang="en-US" sz="1750" dirty="0"/>
+          </a:p>
+          <a:p>
+            <a:pPr algn="l" indent="0" marL="0">
+              <a:buNone/>
+            </a:pPr>
+            <a:endParaRPr lang="en-US" sz="1750" dirty="0"/>
+          </a:p>
+          <a:p>
+            <a:pPr algn="l" indent="0" marL="0">
+              <a:buNone/>
+            </a:pPr>
+            <a:r>
+              <a:rPr lang="en-US" sz="1750" dirty="0">
+                <a:solidFill>
+                  <a:srgbClr val="F4F7FA"/>
+                </a:solidFill>
+                <a:latin typeface="Consolas" pitchFamily="34" charset="0"/>
+                <a:ea typeface="Consolas" pitchFamily="34" charset="-122"/>
+                <a:cs typeface="Consolas" pitchFamily="34" charset="-120"/>
+              </a:rPr>
+              <a:t>@pytest.mark.parametrize(("price", "discount", "expected"), [</a:t>
+            </a:r>
+            <a:endParaRPr lang="en-US" sz="1750" dirty="0"/>
+          </a:p>
+          <a:p>
+            <a:pPr algn="l" indent="0" marL="0">
+              <a:buNone/>
+            </a:pPr>
+            <a:r>
+              <a:rPr lang="en-US" sz="1750" dirty="0">
+                <a:solidFill>
+                  <a:srgbClr val="F4F7FA"/>
+                </a:solidFill>
+                <a:latin typeface="Consolas" pitchFamily="34" charset="0"/>
+                <a:ea typeface="Consolas" pitchFamily="34" charset="-122"/>
+                <a:cs typeface="Consolas" pitchFamily="34" charset="-120"/>
+              </a:rPr>
+              <a:t>    (100, 0.0, 100),</a:t>
+            </a:r>
+            <a:endParaRPr lang="en-US" sz="1750" dirty="0"/>
+          </a:p>
+          <a:p>
+            <a:pPr algn="l" indent="0" marL="0">
+              <a:buNone/>
+            </a:pPr>
+            <a:r>
+              <a:rPr lang="en-US" sz="1750" dirty="0">
+                <a:solidFill>
+                  <a:srgbClr val="F4F7FA"/>
+                </a:solidFill>
+                <a:latin typeface="Consolas" pitchFamily="34" charset="0"/>
+                <a:ea typeface="Consolas" pitchFamily="34" charset="-122"/>
+                <a:cs typeface="Consolas" pitchFamily="34" charset="-120"/>
+              </a:rPr>
+              <a:t>    (100, 0.2, 80),</a:t>
+            </a:r>
+            <a:endParaRPr lang="en-US" sz="1750" dirty="0"/>
+          </a:p>
+          <a:p>
+            <a:pPr algn="l" indent="0" marL="0">
+              <a:buNone/>
+            </a:pPr>
+            <a:r>
+              <a:rPr lang="en-US" sz="1750" dirty="0">
+                <a:solidFill>
+                  <a:srgbClr val="F4F7FA"/>
+                </a:solidFill>
+                <a:latin typeface="Consolas" pitchFamily="34" charset="0"/>
+                <a:ea typeface="Consolas" pitchFamily="34" charset="-122"/>
+                <a:cs typeface="Consolas" pitchFamily="34" charset="-120"/>
+              </a:rPr>
+              <a:t>    (100, 1.0, 0),</a:t>
+            </a:r>
+            <a:endParaRPr lang="en-US" sz="1750" dirty="0"/>
+          </a:p>
+          <a:p>
+            <a:pPr algn="l" indent="0" marL="0">
+              <a:buNone/>
+            </a:pPr>
+            <a:r>
+              <a:rPr lang="en-US" sz="1750" dirty="0">
+                <a:solidFill>
+                  <a:srgbClr val="F4F7FA"/>
+                </a:solidFill>
+                <a:latin typeface="Consolas" pitchFamily="34" charset="0"/>
+                <a:ea typeface="Consolas" pitchFamily="34" charset="-122"/>
+                <a:cs typeface="Consolas" pitchFamily="34" charset="-120"/>
+              </a:rPr>
+              <a:t>])</a:t>
+            </a:r>
+            <a:endParaRPr lang="en-US" sz="1750" dirty="0"/>
+          </a:p>
+          <a:p>
+            <a:pPr algn="l" indent="0" marL="0">
+              <a:buNone/>
+            </a:pPr>
+            <a:r>
+              <a:rPr lang="en-US" sz="1750" dirty="0">
+                <a:solidFill>
+                  <a:srgbClr val="F4F7FA"/>
+                </a:solidFill>
+                <a:latin typeface="Consolas" pitchFamily="34" charset="0"/>
+                <a:ea typeface="Consolas" pitchFamily="34" charset="-122"/>
+                <a:cs typeface="Consolas" pitchFamily="34" charset="-120"/>
+              </a:rPr>
+              <a:t>def test_discount(price: float, discount: float, expected: float) -&gt; None:</a:t>
+            </a:r>
+            <a:endParaRPr lang="en-US" sz="1750" dirty="0"/>
+          </a:p>
+          <a:p>
+            <a:pPr algn="l" indent="0" marL="0">
+              <a:buNone/>
+            </a:pPr>
+            <a:r>
+              <a:rPr lang="en-US" sz="1750" dirty="0">
+                <a:solidFill>
+                  <a:srgbClr val="F4F7FA"/>
+                </a:solidFill>
+                <a:latin typeface="Consolas" pitchFamily="34" charset="0"/>
+                <a:ea typeface="Consolas" pitchFamily="34" charset="-122"/>
+                <a:cs typeface="Consolas" pitchFamily="34" charset="-120"/>
+              </a:rPr>
+              <a:t>    assert calculate_discount(price, discount) == expected</a:t>
+            </a:r>
+            <a:endParaRPr lang="en-US" sz="1750" dirty="0"/>
+          </a:p>
+        </p:txBody>
+      </p:sp>
+      <p:sp>
+        <p:nvSpPr>
+          <p:cNvPr id="12" name="Text 10"/>
+          <p:cNvSpPr/>
+          <p:nvPr/>
+        </p:nvSpPr>
+        <p:spPr>
+          <a:xfrm>
+            <a:off x="768096" y="6053328"/>
+            <a:ext cx="9921240" cy="237744"/>
+          </a:xfrm>
+          <a:prstGeom prst="rect">
+            <a:avLst/>
+          </a:prstGeom>
+          <a:noFill/>
+          <a:ln/>
+        </p:spPr>
+        <p:txBody>
+          <a:bodyPr wrap="square" lIns="0" tIns="0" rIns="0" bIns="0" rtlCol="0" anchor="t">
+            <a:normAutofit/>
+          </a:bodyPr>
+          <a:lstStyle/>
+          <a:p>
+            <a:pPr algn="l" indent="0" marL="0">
+              <a:buNone/>
+            </a:pPr>
+            <a:r>
+              <a:rPr lang="en-US" sz="1550" dirty="0">
+                <a:solidFill>
+                  <a:srgbClr val="5E6B78"/>
                 </a:solidFill>
                 <a:latin typeface="Aptos" pitchFamily="34" charset="0"/>
                 <a:ea typeface="Aptos" pitchFamily="34" charset="-122"/>
                 <a:cs typeface="Aptos" pitchFamily="34" charset="-120"/>
               </a:rPr>
-              <a:t>bežný vstup ukáže hlavný use-case</a:t>
-            </a:r>
-            <a:endParaRPr lang="en-US" sz="1800" dirty="0"/>
-          </a:p>
-          <a:p>
-            <a:pPr marL="228600" indent="-228600">
-              <a:buSzPct val="100000"/>
-              <a:buChar char="•"/>
-            </a:pPr>
-            <a:r>
-              <a:rPr lang="en-US" sz="1800" dirty="0">
-                <a:solidFill>
-                  <a:srgbClr val="18212B"/>
-                </a:solidFill>
-                <a:latin typeface="Aptos" pitchFamily="34" charset="0"/>
-                <a:ea typeface="Aptos" pitchFamily="34" charset="-122"/>
-                <a:cs typeface="Aptos" pitchFamily="34" charset="-120"/>
-              </a:rPr>
-              <a:t>hraničný vstup preverí nulové a prázdne hodnoty</a:t>
-            </a:r>
-            <a:endParaRPr lang="en-US" sz="1800" dirty="0"/>
-          </a:p>
-          <a:p>
-            <a:pPr marL="228600" indent="-228600">
-              <a:buSzPct val="100000"/>
-              <a:buChar char="•"/>
-            </a:pPr>
-            <a:r>
-              <a:rPr lang="en-US" sz="1800" dirty="0">
-                <a:solidFill>
-                  <a:srgbClr val="18212B"/>
-                </a:solidFill>
-                <a:latin typeface="Aptos" pitchFamily="34" charset="0"/>
-                <a:ea typeface="Aptos" pitchFamily="34" charset="-122"/>
-                <a:cs typeface="Aptos" pitchFamily="34" charset="-120"/>
-              </a:rPr>
-              <a:t>neplatný vstup preverí validáciu</a:t>
-            </a:r>
-            <a:endParaRPr lang="en-US" sz="1800" dirty="0"/>
-          </a:p>
-          <a:p>
-            <a:pPr marL="228600" indent="-228600">
-              <a:buSzPct val="100000"/>
-              <a:buChar char="•"/>
-            </a:pPr>
-            <a:r>
-              <a:rPr lang="en-US" sz="1800" dirty="0">
-                <a:solidFill>
-                  <a:srgbClr val="18212B"/>
-                </a:solidFill>
-                <a:latin typeface="Aptos" pitchFamily="34" charset="0"/>
-                <a:ea typeface="Aptos" pitchFamily="34" charset="-122"/>
-                <a:cs typeface="Aptos" pitchFamily="34" charset="-120"/>
-              </a:rPr>
-              <a:t>každý bug si zaslúži vlastný regression test</a:t>
-            </a:r>
-            <a:endParaRPr lang="en-US" sz="1800" dirty="0"/>
+              <a:t>Parametrizácia odstraňuje duplicitu bez toho, aby skrývala jednotlivé scenáre.</a:t>
+            </a:r>
+            <a:endParaRPr lang="en-US" sz="1550" dirty="0"/>
           </a:p>
         </p:txBody>
       </p:sp>
@@ -14839,7 +11812,7 @@
                 <a:ea typeface="Aptos" pitchFamily="34" charset="-122"/>
                 <a:cs typeface="Aptos" pitchFamily="34" charset="-120"/>
               </a:rPr>
-              <a:t>Parametrizácia podobných prípadov</a:t>
+              <a:t>Výnimka je tiež očakávané správanie</a:t>
             </a:r>
             <a:endParaRPr lang="en-US" sz="2900" dirty="0"/>
           </a:p>
@@ -14971,7 +11944,7 @@
                 <a:ea typeface="Consolas" pitchFamily="34" charset="-122"/>
                 <a:cs typeface="Consolas" pitchFamily="34" charset="-120"/>
               </a:rPr>
-              <a:t>@pytest.mark.parametrize(("price", "discount", "expected"), [</a:t>
+              <a:t>def test_discount_rejects_invalid_percentage() -&gt; None:</a:t>
             </a:r>
             <a:endParaRPr lang="en-US" sz="1650" dirty="0"/>
           </a:p>
@@ -14988,7 +11961,7 @@
                 <a:ea typeface="Consolas" pitchFamily="34" charset="-122"/>
                 <a:cs typeface="Consolas" pitchFamily="34" charset="-120"/>
               </a:rPr>
-              <a:t>    (100, 0.0, 100),</a:t>
+              <a:t>    with pytest.raises(ValueError):</a:t>
             </a:r>
             <a:endParaRPr lang="en-US" sz="1650" dirty="0"/>
           </a:p>
@@ -15005,75 +11978,7 @@
                 <a:ea typeface="Consolas" pitchFamily="34" charset="-122"/>
                 <a:cs typeface="Consolas" pitchFamily="34" charset="-120"/>
               </a:rPr>
-              <a:t>    (100, 0.2, 80),</a:t>
-            </a:r>
-            <a:endParaRPr lang="en-US" sz="1650" dirty="0"/>
-          </a:p>
-          <a:p>
-            <a:pPr algn="l" indent="0" marL="0">
-              <a:buNone/>
-            </a:pPr>
-            <a:r>
-              <a:rPr lang="en-US" sz="1650" dirty="0">
-                <a:solidFill>
-                  <a:srgbClr val="F4F7FA"/>
-                </a:solidFill>
-                <a:latin typeface="Consolas" pitchFamily="34" charset="0"/>
-                <a:ea typeface="Consolas" pitchFamily="34" charset="-122"/>
-                <a:cs typeface="Consolas" pitchFamily="34" charset="-120"/>
-              </a:rPr>
-              <a:t>    (50, 0.5, 25),</a:t>
-            </a:r>
-            <a:endParaRPr lang="en-US" sz="1650" dirty="0"/>
-          </a:p>
-          <a:p>
-            <a:pPr algn="l" indent="0" marL="0">
-              <a:buNone/>
-            </a:pPr>
-            <a:r>
-              <a:rPr lang="en-US" sz="1650" dirty="0">
-                <a:solidFill>
-                  <a:srgbClr val="F4F7FA"/>
-                </a:solidFill>
-                <a:latin typeface="Consolas" pitchFamily="34" charset="0"/>
-                <a:ea typeface="Consolas" pitchFamily="34" charset="-122"/>
-                <a:cs typeface="Consolas" pitchFamily="34" charset="-120"/>
-              </a:rPr>
-              <a:t>])</a:t>
-            </a:r>
-            <a:endParaRPr lang="en-US" sz="1650" dirty="0"/>
-          </a:p>
-          <a:p>
-            <a:pPr algn="l" indent="0" marL="0">
-              <a:buNone/>
-            </a:pPr>
-            <a:r>
-              <a:rPr lang="en-US" sz="1650" dirty="0">
-                <a:solidFill>
-                  <a:srgbClr val="F4F7FA"/>
-                </a:solidFill>
-                <a:latin typeface="Consolas" pitchFamily="34" charset="0"/>
-                <a:ea typeface="Consolas" pitchFamily="34" charset="-122"/>
-                <a:cs typeface="Consolas" pitchFamily="34" charset="-120"/>
-              </a:rPr>
-              <a:t>def test_discount(price, discount, expected):</a:t>
-            </a:r>
-            <a:endParaRPr lang="en-US" sz="1650" dirty="0"/>
-          </a:p>
-          <a:p>
-            <a:pPr algn="l" indent="0" marL="0">
-              <a:buNone/>
-            </a:pPr>
-            <a:r>
-              <a:rPr lang="en-US" sz="1650" dirty="0">
-                <a:solidFill>
-                  <a:srgbClr val="F4F7FA"/>
-                </a:solidFill>
-                <a:latin typeface="Consolas" pitchFamily="34" charset="0"/>
-                <a:ea typeface="Consolas" pitchFamily="34" charset="-122"/>
-                <a:cs typeface="Consolas" pitchFamily="34" charset="-120"/>
-              </a:rPr>
-              <a:t>    assert calculate_discount(price, discount) == expected</a:t>
+              <a:t>        calculate_discount(100, 1.2)</a:t>
             </a:r>
             <a:endParaRPr lang="en-US" sz="1650" dirty="0"/>
           </a:p>
@@ -15137,7 +12042,7 @@
                 <a:ea typeface="Aptos" pitchFamily="34" charset="-122"/>
                 <a:cs typeface="Aptos" pitchFamily="34" charset="-120"/>
               </a:rPr>
-              <a:t>Parametrizácia odstráni duplicitu, ale každý riadok ostáva samostatný testovací prípad.</a:t>
+              <a:t>Test neoveruje text správy, ak text nie je súčasť verejného API. Overuje význam kontraktu.</a:t>
             </a:r>
             <a:endParaRPr lang="en-US" sz="1800" dirty="0"/>
           </a:p>

--- a/presentations/04-testovanie-debugging-kvalita.sk.pptx
+++ b/presentations/04-testovanie-debugging-kvalita.sk.pptx
@@ -2397,7 +2397,7 @@
         <p:spPr>
           <a:xfrm>
             <a:off x="0" y="0"/>
-            <a:ext cx="237744" cy="6858000"/>
+            <a:ext cx="201168" cy="6858000"/>
           </a:xfrm>
           <a:prstGeom prst="rect">
             <a:avLst/>
@@ -2440,7 +2440,7 @@
               <a:buNone/>
             </a:pPr>
             <a:r>
-              <a:rPr lang="en-US" sz="1000" b="1" spc="110" kern="0" dirty="0">
+              <a:rPr lang="en-US" sz="950" b="1" spc="80" kern="0" dirty="0">
                 <a:solidFill>
                   <a:srgbClr val="1877B9"/>
                 </a:solidFill>
@@ -2450,7 +2450,7 @@
               </a:rPr>
               <a:t>PROGRAMOVANIE V PYTHONE</a:t>
             </a:r>
-            <a:endParaRPr lang="en-US" sz="1000" dirty="0"/>
+            <a:endParaRPr lang="en-US" sz="950" dirty="0"/>
           </a:p>
         </p:txBody>
       </p:sp>
@@ -2462,8 +2462,49 @@
         </p:nvSpPr>
         <p:spPr>
           <a:xfrm>
-            <a:off x="749808" y="2148840"/>
-            <a:ext cx="9784080" cy="914400"/>
+            <a:off x="9829800" y="685800"/>
+            <a:ext cx="1691640" cy="219456"/>
+          </a:xfrm>
+          <a:prstGeom prst="rect">
+            <a:avLst/>
+          </a:prstGeom>
+          <a:noFill/>
+          <a:ln/>
+        </p:spPr>
+        <p:txBody>
+          <a:bodyPr wrap="square" lIns="0" tIns="0" rIns="0" bIns="0" rtlCol="0" anchor="ctr">
+            <a:normAutofit/>
+          </a:bodyPr>
+          <a:lstStyle/>
+          <a:p>
+            <a:pPr algn="r" indent="0" marL="0">
+              <a:buNone/>
+            </a:pPr>
+            <a:r>
+              <a:rPr lang="en-US" sz="920" b="1" dirty="0">
+                <a:solidFill>
+                  <a:srgbClr val="5E6B78"/>
+                </a:solidFill>
+                <a:latin typeface="Consolas" pitchFamily="34" charset="0"/>
+                <a:ea typeface="Consolas" pitchFamily="34" charset="-122"/>
+                <a:cs typeface="Consolas" pitchFamily="34" charset="-120"/>
+              </a:rPr>
+              <a:t>PREDNÁŠKA 04</a:t>
+            </a:r>
+            <a:endParaRPr lang="en-US" sz="920" dirty="0"/>
+          </a:p>
+        </p:txBody>
+      </p:sp>
+      <p:sp>
+        <p:nvSpPr>
+          <p:cNvPr id="5" name="Text 3"/>
+          <p:cNvSpPr/>
+          <p:nvPr/>
+        </p:nvSpPr>
+        <p:spPr>
+          <a:xfrm>
+            <a:off x="749808" y="2066544"/>
+            <a:ext cx="9921240" cy="969264"/>
           </a:xfrm>
           <a:prstGeom prst="rect">
             <a:avLst/>
@@ -2485,67 +2526,67 @@
                 <a:solidFill>
                   <a:srgbClr val="16324F"/>
                 </a:solidFill>
+                <a:latin typeface="Aptos Display" pitchFamily="34" charset="0"/>
+                <a:ea typeface="Aptos Display" pitchFamily="34" charset="-122"/>
+                <a:cs typeface="Aptos Display" pitchFamily="34" charset="-120"/>
+              </a:rPr>
+              <a:t>Testovanie, debugging a kvalita kódu</a:t>
+            </a:r>
+            <a:endParaRPr lang="en-US" sz="4200" dirty="0"/>
+          </a:p>
+        </p:txBody>
+      </p:sp>
+      <p:sp>
+        <p:nvSpPr>
+          <p:cNvPr id="6" name="Text 4"/>
+          <p:cNvSpPr/>
+          <p:nvPr/>
+        </p:nvSpPr>
+        <p:spPr>
+          <a:xfrm>
+            <a:off x="786384" y="3273552"/>
+            <a:ext cx="8503920" cy="420624"/>
+          </a:xfrm>
+          <a:prstGeom prst="rect">
+            <a:avLst/>
+          </a:prstGeom>
+          <a:noFill/>
+          <a:ln/>
+        </p:spPr>
+        <p:txBody>
+          <a:bodyPr wrap="square" lIns="0" tIns="0" rIns="0" bIns="0" rtlCol="0" anchor="t">
+            <a:normAutofit/>
+          </a:bodyPr>
+          <a:lstStyle/>
+          <a:p>
+            <a:pPr algn="l" indent="0" marL="0">
+              <a:buNone/>
+            </a:pPr>
+            <a:r>
+              <a:rPr lang="en-US" sz="1950" dirty="0">
+                <a:solidFill>
+                  <a:srgbClr val="5E6B78"/>
+                </a:solidFill>
                 <a:latin typeface="Aptos" pitchFamily="34" charset="0"/>
                 <a:ea typeface="Aptos" pitchFamily="34" charset="-122"/>
                 <a:cs typeface="Aptos" pitchFamily="34" charset="-120"/>
               </a:rPr>
-              <a:t>Testovanie, debugging a kvalita kódu</a:t>
-            </a:r>
-            <a:endParaRPr lang="en-US" sz="4200" dirty="0"/>
-          </a:p>
-        </p:txBody>
-      </p:sp>
-      <p:sp>
-        <p:nvSpPr>
-          <p:cNvPr id="5" name="Text 3"/>
-          <p:cNvSpPr/>
-          <p:nvPr/>
-        </p:nvSpPr>
-        <p:spPr>
-          <a:xfrm>
-            <a:off x="786384" y="3310128"/>
-            <a:ext cx="8321040" cy="384048"/>
-          </a:xfrm>
-          <a:prstGeom prst="rect">
-            <a:avLst/>
-          </a:prstGeom>
-          <a:noFill/>
-          <a:ln/>
-        </p:spPr>
-        <p:txBody>
-          <a:bodyPr wrap="square" lIns="0" tIns="0" rIns="0" bIns="0" rtlCol="0" anchor="t">
-            <a:normAutofit/>
-          </a:bodyPr>
-          <a:lstStyle/>
-          <a:p>
-            <a:pPr algn="l" indent="0" marL="0">
-              <a:buNone/>
-            </a:pPr>
-            <a:r>
-              <a:rPr lang="en-US" sz="2000" dirty="0">
-                <a:solidFill>
-                  <a:srgbClr val="5E6B78"/>
-                </a:solidFill>
-                <a:latin typeface="Aptos" pitchFamily="34" charset="0"/>
-                <a:ea typeface="Aptos" pitchFamily="34" charset="-122"/>
-                <a:cs typeface="Aptos" pitchFamily="34" charset="-120"/>
-              </a:rPr>
               <a:t>Od bug reportu k opakovateľnému vývojovému workflow</a:t>
             </a:r>
-            <a:endParaRPr lang="en-US" sz="2000" dirty="0"/>
-          </a:p>
-        </p:txBody>
-      </p:sp>
-      <p:sp>
-        <p:nvSpPr>
-          <p:cNvPr id="6" name="Shape 4"/>
-          <p:cNvSpPr/>
-          <p:nvPr/>
-        </p:nvSpPr>
-        <p:spPr>
-          <a:xfrm>
-            <a:off x="749808" y="5193792"/>
-            <a:ext cx="2560320" cy="118872"/>
+            <a:endParaRPr lang="en-US" sz="1950" dirty="0"/>
+          </a:p>
+        </p:txBody>
+      </p:sp>
+      <p:sp>
+        <p:nvSpPr>
+          <p:cNvPr id="7" name="Shape 5"/>
+          <p:cNvSpPr/>
+          <p:nvPr/>
+        </p:nvSpPr>
+        <p:spPr>
+          <a:xfrm>
+            <a:off x="749808" y="5212080"/>
+            <a:ext cx="2240280" cy="91440"/>
           </a:xfrm>
           <a:prstGeom prst="rect">
             <a:avLst/>
@@ -2563,7 +2604,7 @@
       </p:sp>
       <p:sp>
         <p:nvSpPr>
-          <p:cNvPr id="7" name="Text 5"/>
+          <p:cNvPr id="8" name="Text 6"/>
           <p:cNvSpPr/>
           <p:nvPr/>
         </p:nvSpPr>
@@ -2588,7 +2629,7 @@
               <a:buNone/>
             </a:pPr>
             <a:r>
-              <a:rPr lang="en-US" sz="1000" b="1" dirty="0">
+              <a:rPr lang="en-US" sz="950" b="1" dirty="0">
                 <a:solidFill>
                   <a:srgbClr val="5E6B78"/>
                 </a:solidFill>
@@ -2598,20 +2639,20 @@
               </a:rPr>
               <a:t>TUKE FEI</a:t>
             </a:r>
-            <a:endParaRPr lang="en-US" sz="1000" dirty="0"/>
-          </a:p>
-        </p:txBody>
-      </p:sp>
-      <p:sp>
-        <p:nvSpPr>
-          <p:cNvPr id="8" name="Text 6"/>
-          <p:cNvSpPr/>
-          <p:nvPr/>
-        </p:nvSpPr>
-        <p:spPr>
-          <a:xfrm>
-            <a:off x="10927080" y="6254496"/>
-            <a:ext cx="566928" cy="182880"/>
+            <a:endParaRPr lang="en-US" sz="950" dirty="0"/>
+          </a:p>
+        </p:txBody>
+      </p:sp>
+      <p:sp>
+        <p:nvSpPr>
+          <p:cNvPr id="9" name="Text 7"/>
+          <p:cNvSpPr/>
+          <p:nvPr/>
+        </p:nvSpPr>
+        <p:spPr>
+          <a:xfrm>
+            <a:off x="10680192" y="6254496"/>
+            <a:ext cx="822960" cy="182880"/>
           </a:xfrm>
           <a:prstGeom prst="rect">
             <a:avLst/>
@@ -2629,7 +2670,7 @@
               <a:buNone/>
             </a:pPr>
             <a:r>
-              <a:rPr lang="en-US" sz="900" dirty="0">
+              <a:rPr lang="en-US" sz="800" dirty="0">
                 <a:solidFill>
                   <a:srgbClr val="5E6B78"/>
                 </a:solidFill>
@@ -2637,9 +2678,9 @@
                 <a:ea typeface="Consolas" pitchFamily="34" charset="-122"/>
                 <a:cs typeface="Consolas" pitchFamily="34" charset="-120"/>
               </a:rPr>
-              <a:t>01</a:t>
-            </a:r>
-            <a:endParaRPr lang="en-US" sz="900" dirty="0"/>
+              <a:t>01 / 18</a:t>
+            </a:r>
+            <a:endParaRPr lang="en-US" sz="800" dirty="0"/>
           </a:p>
         </p:txBody>
       </p:sp>
@@ -2684,7 +2725,7 @@
         <p:spPr>
           <a:xfrm>
             <a:off x="0" y="0"/>
-            <a:ext cx="12191695" cy="155448"/>
+            <a:ext cx="12191695" cy="109728"/>
           </a:xfrm>
           <a:prstGeom prst="rect">
             <a:avLst/>
@@ -2708,7 +2749,7 @@
         </p:nvSpPr>
         <p:spPr>
           <a:xfrm>
-            <a:off x="566928" y="320040"/>
+            <a:off x="566928" y="310896"/>
             <a:ext cx="4663440" cy="182880"/>
           </a:xfrm>
           <a:prstGeom prst="rect">
@@ -2727,7 +2768,7 @@
               <a:buNone/>
             </a:pPr>
             <a:r>
-              <a:rPr lang="en-US" sz="900" b="1" spc="80" kern="0" dirty="0">
+              <a:rPr lang="en-US" sz="880" b="1" spc="50" kern="0" dirty="0">
                 <a:solidFill>
                   <a:srgbClr val="1877B9"/>
                 </a:solidFill>
@@ -2737,7 +2778,7 @@
               </a:rPr>
               <a:t>PROGRAMOVANIE V PYTHONE</a:t>
             </a:r>
-            <a:endParaRPr lang="en-US" sz="900" dirty="0"/>
+            <a:endParaRPr lang="en-US" sz="880" dirty="0"/>
           </a:p>
         </p:txBody>
       </p:sp>
@@ -2749,7 +2790,7 @@
         </p:nvSpPr>
         <p:spPr>
           <a:xfrm>
-            <a:off x="9829800" y="320040"/>
+            <a:off x="9829800" y="310896"/>
             <a:ext cx="1783080" cy="182880"/>
           </a:xfrm>
           <a:prstGeom prst="rect">
@@ -2768,7 +2809,7 @@
               <a:buNone/>
             </a:pPr>
             <a:r>
-              <a:rPr lang="en-US" sz="900" b="1" dirty="0">
+              <a:rPr lang="en-US" sz="880" b="1" dirty="0">
                 <a:solidFill>
                   <a:srgbClr val="5E6B78"/>
                 </a:solidFill>
@@ -2778,7 +2819,7 @@
               </a:rPr>
               <a:t>PREDNÁŠKA 04</a:t>
             </a:r>
-            <a:endParaRPr lang="en-US" sz="900" dirty="0"/>
+            <a:endParaRPr lang="en-US" sz="880" dirty="0"/>
           </a:p>
         </p:txBody>
       </p:sp>
@@ -2836,8 +2877,8 @@
         </p:nvSpPr>
         <p:spPr>
           <a:xfrm>
-            <a:off x="11109960" y="6501384"/>
-            <a:ext cx="457200" cy="146304"/>
+            <a:off x="10771632" y="6501384"/>
+            <a:ext cx="804672" cy="146304"/>
           </a:xfrm>
           <a:prstGeom prst="rect">
             <a:avLst/>
@@ -2855,7 +2896,7 @@
               <a:buNone/>
             </a:pPr>
             <a:r>
-              <a:rPr lang="en-US" sz="800" dirty="0">
+              <a:rPr lang="en-US" sz="780" dirty="0">
                 <a:solidFill>
                   <a:srgbClr val="5E6B78"/>
                 </a:solidFill>
@@ -2863,9 +2904,9 @@
                 <a:ea typeface="Consolas" pitchFamily="34" charset="-122"/>
                 <a:cs typeface="Consolas" pitchFamily="34" charset="-120"/>
               </a:rPr>
-              <a:t>10</a:t>
-            </a:r>
-            <a:endParaRPr lang="en-US" sz="800" dirty="0"/>
+              <a:t>10 / 18</a:t>
+            </a:r>
+            <a:endParaRPr lang="en-US" sz="780" dirty="0"/>
           </a:p>
         </p:txBody>
       </p:sp>
@@ -2877,8 +2918,8 @@
         </p:nvSpPr>
         <p:spPr>
           <a:xfrm>
-            <a:off x="749808" y="1554480"/>
-            <a:ext cx="10424160" cy="1508760"/>
+            <a:off x="749808" y="1481328"/>
+            <a:ext cx="10287000" cy="1554480"/>
           </a:xfrm>
           <a:prstGeom prst="rect">
             <a:avLst/>
@@ -2896,17 +2937,17 @@
               <a:buNone/>
             </a:pPr>
             <a:r>
-              <a:rPr lang="en-US" sz="3400" b="1" dirty="0">
+              <a:rPr lang="en-US" sz="3300" b="1" dirty="0">
                 <a:solidFill>
                   <a:srgbClr val="16324F"/>
                 </a:solidFill>
-                <a:latin typeface="Aptos" pitchFamily="34" charset="0"/>
-                <a:ea typeface="Aptos" pitchFamily="34" charset="-122"/>
-                <a:cs typeface="Aptos" pitchFamily="34" charset="-120"/>
+                <a:latin typeface="Aptos Display" pitchFamily="34" charset="0"/>
+                <a:ea typeface="Aptos Display" pitchFamily="34" charset="-122"/>
+                <a:cs typeface="Aptos Display" pitchFamily="34" charset="-120"/>
               </a:rPr>
               <a:t>Regression test zostáva po oprave v projekte.</a:t>
             </a:r>
-            <a:endParaRPr lang="en-US" sz="3400" dirty="0"/>
+            <a:endParaRPr lang="en-US" sz="3300" dirty="0"/>
           </a:p>
         </p:txBody>
       </p:sp>
@@ -2918,8 +2959,8 @@
         </p:nvSpPr>
         <p:spPr>
           <a:xfrm>
-            <a:off x="768096" y="3456432"/>
-            <a:ext cx="1417320" cy="109728"/>
+            <a:off x="768096" y="3438144"/>
+            <a:ext cx="1280160" cy="91440"/>
           </a:xfrm>
           <a:prstGeom prst="rect">
             <a:avLst/>
@@ -2943,8 +2984,8 @@
         </p:nvSpPr>
         <p:spPr>
           <a:xfrm>
-            <a:off x="768096" y="3913632"/>
-            <a:ext cx="8869680" cy="731520"/>
+            <a:off x="768096" y="3858768"/>
+            <a:ext cx="9006840" cy="804672"/>
           </a:xfrm>
           <a:prstGeom prst="rect">
             <a:avLst/>
@@ -2962,7 +3003,7 @@
               <a:buNone/>
             </a:pPr>
             <a:r>
-              <a:rPr lang="en-US" sz="2200" dirty="0">
+              <a:rPr lang="en-US" sz="2100" dirty="0">
                 <a:solidFill>
                   <a:srgbClr val="5E6B78"/>
                 </a:solidFill>
@@ -2972,7 +3013,7 @@
               </a:rPr>
               <a:t>Chráni presne ten prípad, ktorý už raz zlyhal, pred návratom pri ďalšej zmene.</a:t>
             </a:r>
-            <a:endParaRPr lang="en-US" sz="2200" dirty="0"/>
+            <a:endParaRPr lang="en-US" sz="2100" dirty="0"/>
           </a:p>
         </p:txBody>
       </p:sp>
@@ -3017,7 +3058,7 @@
         <p:spPr>
           <a:xfrm>
             <a:off x="0" y="0"/>
-            <a:ext cx="12191695" cy="155448"/>
+            <a:ext cx="12191695" cy="109728"/>
           </a:xfrm>
           <a:prstGeom prst="rect">
             <a:avLst/>
@@ -3041,7 +3082,7 @@
         </p:nvSpPr>
         <p:spPr>
           <a:xfrm>
-            <a:off x="566928" y="320040"/>
+            <a:off x="566928" y="310896"/>
             <a:ext cx="4663440" cy="182880"/>
           </a:xfrm>
           <a:prstGeom prst="rect">
@@ -3060,7 +3101,7 @@
               <a:buNone/>
             </a:pPr>
             <a:r>
-              <a:rPr lang="en-US" sz="900" b="1" spc="80" kern="0" dirty="0">
+              <a:rPr lang="en-US" sz="880" b="1" spc="50" kern="0" dirty="0">
                 <a:solidFill>
                   <a:srgbClr val="1877B9"/>
                 </a:solidFill>
@@ -3070,7 +3111,7 @@
               </a:rPr>
               <a:t>PROGRAMOVANIE V PYTHONE</a:t>
             </a:r>
-            <a:endParaRPr lang="en-US" sz="900" dirty="0"/>
+            <a:endParaRPr lang="en-US" sz="880" dirty="0"/>
           </a:p>
         </p:txBody>
       </p:sp>
@@ -3082,7 +3123,7 @@
         </p:nvSpPr>
         <p:spPr>
           <a:xfrm>
-            <a:off x="9829800" y="320040"/>
+            <a:off x="9829800" y="310896"/>
             <a:ext cx="1783080" cy="182880"/>
           </a:xfrm>
           <a:prstGeom prst="rect">
@@ -3101,7 +3142,7 @@
               <a:buNone/>
             </a:pPr>
             <a:r>
-              <a:rPr lang="en-US" sz="900" b="1" dirty="0">
+              <a:rPr lang="en-US" sz="880" b="1" dirty="0">
                 <a:solidFill>
                   <a:srgbClr val="5E6B78"/>
                 </a:solidFill>
@@ -3111,7 +3152,7 @@
               </a:rPr>
               <a:t>PREDNÁŠKA 04</a:t>
             </a:r>
-            <a:endParaRPr lang="en-US" sz="900" dirty="0"/>
+            <a:endParaRPr lang="en-US" sz="880" dirty="0"/>
           </a:p>
         </p:txBody>
       </p:sp>
@@ -3169,8 +3210,8 @@
         </p:nvSpPr>
         <p:spPr>
           <a:xfrm>
-            <a:off x="11109960" y="6501384"/>
-            <a:ext cx="457200" cy="146304"/>
+            <a:off x="10771632" y="6501384"/>
+            <a:ext cx="804672" cy="146304"/>
           </a:xfrm>
           <a:prstGeom prst="rect">
             <a:avLst/>
@@ -3188,7 +3229,7 @@
               <a:buNone/>
             </a:pPr>
             <a:r>
-              <a:rPr lang="en-US" sz="800" dirty="0">
+              <a:rPr lang="en-US" sz="780" dirty="0">
                 <a:solidFill>
                   <a:srgbClr val="5E6B78"/>
                 </a:solidFill>
@@ -3196,9 +3237,9 @@
                 <a:ea typeface="Consolas" pitchFamily="34" charset="-122"/>
                 <a:cs typeface="Consolas" pitchFamily="34" charset="-120"/>
               </a:rPr>
-              <a:t>11</a:t>
-            </a:r>
-            <a:endParaRPr lang="en-US" sz="800" dirty="0"/>
+              <a:t>11 / 18</a:t>
+            </a:r>
+            <a:endParaRPr lang="en-US" sz="780" dirty="0"/>
           </a:p>
         </p:txBody>
       </p:sp>
@@ -3210,8 +3251,8 @@
         </p:nvSpPr>
         <p:spPr>
           <a:xfrm>
-            <a:off x="658368" y="932688"/>
-            <a:ext cx="10789920" cy="713232"/>
+            <a:off x="658368" y="914400"/>
+            <a:ext cx="10881360" cy="713232"/>
           </a:xfrm>
           <a:prstGeom prst="rect">
             <a:avLst/>
@@ -3229,49 +3270,67 @@
               <a:buNone/>
             </a:pPr>
             <a:r>
-              <a:rPr lang="en-US" sz="2900" b="1" dirty="0">
+              <a:rPr lang="en-US" sz="2850" b="1" dirty="0">
                 <a:solidFill>
                   <a:srgbClr val="16324F"/>
+                </a:solidFill>
+                <a:latin typeface="Aptos Display" pitchFamily="34" charset="0"/>
+                <a:ea typeface="Aptos Display" pitchFamily="34" charset="-122"/>
+                <a:cs typeface="Aptos Display" pitchFamily="34" charset="-120"/>
+              </a:rPr>
+              <a:t>Fixture pripraví opakovaný kontext</a:t>
+            </a:r>
+            <a:endParaRPr lang="en-US" sz="2850" dirty="0"/>
+          </a:p>
+        </p:txBody>
+      </p:sp>
+      <p:sp>
+        <p:nvSpPr>
+          <p:cNvPr id="9" name="Text 7"/>
+          <p:cNvSpPr/>
+          <p:nvPr/>
+        </p:nvSpPr>
+        <p:spPr>
+          <a:xfrm>
+            <a:off x="749808" y="1920240"/>
+            <a:ext cx="4160520" cy="3886200"/>
+          </a:xfrm>
+          <a:prstGeom prst="rect">
+            <a:avLst/>
+          </a:prstGeom>
+          <a:noFill/>
+          <a:ln/>
+        </p:spPr>
+        <p:txBody>
+          <a:bodyPr wrap="square" lIns="508" tIns="508" rIns="508" bIns="508" rtlCol="0" anchor="t">
+            <a:normAutofit/>
+          </a:bodyPr>
+          <a:lstStyle/>
+          <a:p>
+            <a:pPr marL="228600" indent="-228600">
+              <a:buSzPct val="100000"/>
+              <a:buChar char="•"/>
+            </a:pPr>
+            <a:r>
+              <a:rPr lang="en-US" sz="1650" dirty="0">
+                <a:solidFill>
+                  <a:srgbClr val="18212B"/>
                 </a:solidFill>
                 <a:latin typeface="Aptos" pitchFamily="34" charset="0"/>
                 <a:ea typeface="Aptos" pitchFamily="34" charset="-122"/>
                 <a:cs typeface="Aptos" pitchFamily="34" charset="-120"/>
               </a:rPr>
-              <a:t>Fixture pripraví opakovaný kontext</a:t>
-            </a:r>
-            <a:endParaRPr lang="en-US" sz="2900" dirty="0"/>
-          </a:p>
-        </p:txBody>
-      </p:sp>
-      <p:sp>
-        <p:nvSpPr>
-          <p:cNvPr id="9" name="Text 7"/>
-          <p:cNvSpPr/>
-          <p:nvPr/>
-        </p:nvSpPr>
-        <p:spPr>
-          <a:xfrm>
-            <a:off x="749808" y="1920240"/>
-            <a:ext cx="4160520" cy="3886200"/>
-          </a:xfrm>
-          <a:prstGeom prst="rect">
-            <a:avLst/>
-          </a:prstGeom>
-          <a:noFill/>
-          <a:ln/>
-        </p:spPr>
-        <p:txBody>
-          <a:bodyPr wrap="square" lIns="508" tIns="508" rIns="508" bIns="508" rtlCol="0" anchor="t">
-            <a:normAutofit/>
-          </a:bodyPr>
-          <a:lstStyle/>
+              <a:t>setup sa neopakuje v každom teste</a:t>
+            </a:r>
+            <a:endParaRPr lang="en-US" sz="1650" dirty="0"/>
+          </a:p>
           <a:p>
             <a:pPr marL="228600" indent="-228600">
               <a:buSzPct val="100000"/>
               <a:buChar char="•"/>
             </a:pPr>
             <a:r>
-              <a:rPr lang="en-US" sz="1700" dirty="0">
+              <a:rPr lang="en-US" sz="1650" dirty="0">
                 <a:solidFill>
                   <a:srgbClr val="18212B"/>
                 </a:solidFill>
@@ -3279,9 +3338,9 @@
                 <a:ea typeface="Aptos" pitchFamily="34" charset="-122"/>
                 <a:cs typeface="Aptos" pitchFamily="34" charset="-120"/>
               </a:rPr>
-              <a:t>setup sa neopakuje v každom teste</a:t>
-            </a:r>
-            <a:endParaRPr lang="en-US" sz="1700" dirty="0"/>
+              <a:t>fixture má opisovať dáta, nie testovací framework</a:t>
+            </a:r>
+            <a:endParaRPr lang="en-US" sz="1650" dirty="0"/>
           </a:p>
           <a:p>
             <a:pPr marL="228600" indent="-228600">
@@ -3289,7 +3348,7 @@
               <a:buChar char="•"/>
             </a:pPr>
             <a:r>
-              <a:rPr lang="en-US" sz="1700" dirty="0">
+              <a:rPr lang="en-US" sz="1650" dirty="0">
                 <a:solidFill>
                   <a:srgbClr val="18212B"/>
                 </a:solidFill>
@@ -3297,27 +3356,9 @@
                 <a:ea typeface="Aptos" pitchFamily="34" charset="-122"/>
                 <a:cs typeface="Aptos" pitchFamily="34" charset="-120"/>
               </a:rPr>
-              <a:t>fixture má opisovať dáta, nie testovací framework</a:t>
-            </a:r>
-            <a:endParaRPr lang="en-US" sz="1700" dirty="0"/>
-          </a:p>
-          <a:p>
-            <a:pPr marL="228600" indent="-228600">
-              <a:buSzPct val="100000"/>
-              <a:buChar char="•"/>
-            </a:pPr>
-            <a:r>
-              <a:rPr lang="en-US" sz="1700" dirty="0">
-                <a:solidFill>
-                  <a:srgbClr val="18212B"/>
-                </a:solidFill>
-                <a:latin typeface="Aptos" pitchFamily="34" charset="0"/>
-                <a:ea typeface="Aptos" pitchFamily="34" charset="-122"/>
-                <a:cs typeface="Aptos" pitchFamily="34" charset="-120"/>
-              </a:rPr>
               <a:t>malé testy ostávajú samostatné</a:t>
             </a:r>
-            <a:endParaRPr lang="en-US" sz="1700" dirty="0"/>
+            <a:endParaRPr lang="en-US" sz="1650" dirty="0"/>
           </a:p>
         </p:txBody>
       </p:sp>
@@ -3329,8 +3370,8 @@
         </p:nvSpPr>
         <p:spPr>
           <a:xfrm>
-            <a:off x="5394960" y="1792224"/>
-            <a:ext cx="5943600" cy="4160520"/>
+            <a:off x="5413248" y="1792224"/>
+            <a:ext cx="5925312" cy="4160520"/>
           </a:xfrm>
           <a:prstGeom prst="rect">
             <a:avLst/>
@@ -3340,7 +3381,7 @@
           </a:solidFill>
           <a:ln w="12700">
             <a:solidFill>
-              <a:srgbClr val="17212B"/>
+              <a:srgbClr val="243242"/>
             </a:solidFill>
             <a:prstDash val="solid"/>
           </a:ln>
@@ -3348,14 +3389,39 @@
       </p:sp>
       <p:sp>
         <p:nvSpPr>
-          <p:cNvPr id="11" name="Text 9"/>
-          <p:cNvSpPr/>
-          <p:nvPr/>
-        </p:nvSpPr>
-        <p:spPr>
-          <a:xfrm>
-            <a:off x="5641848" y="1993392"/>
-            <a:ext cx="5394960" cy="182880"/>
+          <p:cNvPr id="11" name="Shape 9"/>
+          <p:cNvSpPr/>
+          <p:nvPr/>
+        </p:nvSpPr>
+        <p:spPr>
+          <a:xfrm>
+            <a:off x="5413248" y="1792224"/>
+            <a:ext cx="5925312" cy="329184"/>
+          </a:xfrm>
+          <a:prstGeom prst="rect">
+            <a:avLst/>
+          </a:prstGeom>
+          <a:solidFill>
+            <a:srgbClr val="223044"/>
+          </a:solidFill>
+          <a:ln w="12700">
+            <a:solidFill>
+              <a:srgbClr val="223044"/>
+            </a:solidFill>
+            <a:prstDash val="solid"/>
+          </a:ln>
+        </p:spPr>
+      </p:sp>
+      <p:sp>
+        <p:nvSpPr>
+          <p:cNvPr id="12" name="Text 10"/>
+          <p:cNvSpPr/>
+          <p:nvPr/>
+        </p:nvSpPr>
+        <p:spPr>
+          <a:xfrm>
+            <a:off x="5641848" y="1901952"/>
+            <a:ext cx="5394960" cy="146304"/>
           </a:xfrm>
           <a:prstGeom prst="rect">
             <a:avLst/>
@@ -3373,7 +3439,7 @@
               <a:buNone/>
             </a:pPr>
             <a:r>
-              <a:rPr lang="en-US" sz="850" b="1" spc="70" kern="0" dirty="0">
+              <a:rPr lang="en-US" sz="810" b="1" spc="35" kern="0" dirty="0">
                 <a:solidFill>
                   <a:srgbClr val="8FD3FF"/>
                 </a:solidFill>
@@ -3383,20 +3449,20 @@
               </a:rPr>
               <a:t>python</a:t>
             </a:r>
-            <a:endParaRPr lang="en-US" sz="850" dirty="0"/>
-          </a:p>
-        </p:txBody>
-      </p:sp>
-      <p:sp>
-        <p:nvSpPr>
-          <p:cNvPr id="12" name="Text 10"/>
-          <p:cNvSpPr/>
-          <p:nvPr/>
-        </p:nvSpPr>
-        <p:spPr>
-          <a:xfrm>
-            <a:off x="5641848" y="2395728"/>
-            <a:ext cx="5330952" cy="3127248"/>
+            <a:endParaRPr lang="en-US" sz="810" dirty="0"/>
+          </a:p>
+        </p:txBody>
+      </p:sp>
+      <p:sp>
+        <p:nvSpPr>
+          <p:cNvPr id="13" name="Text 11"/>
+          <p:cNvSpPr/>
+          <p:nvPr/>
+        </p:nvSpPr>
+        <p:spPr>
+          <a:xfrm>
+            <a:off x="5641848" y="2331720"/>
+            <a:ext cx="5340096" cy="3182112"/>
           </a:xfrm>
           <a:prstGeom prst="rect">
             <a:avLst/>
@@ -3414,7 +3480,7 @@
               <a:buNone/>
             </a:pPr>
             <a:r>
-              <a:rPr lang="en-US" sz="1560" dirty="0">
+              <a:rPr lang="en-US" sz="1500" dirty="0">
                 <a:solidFill>
                   <a:srgbClr val="F4F7FA"/>
                 </a:solidFill>
@@ -3424,14 +3490,14 @@
               </a:rPr>
               <a:t>@pytest.fixture</a:t>
             </a:r>
-            <a:endParaRPr lang="en-US" sz="1560" dirty="0"/>
+            <a:endParaRPr lang="en-US" sz="1500" dirty="0"/>
           </a:p>
           <a:p>
             <a:pPr algn="l" indent="0" marL="0">
               <a:buNone/>
             </a:pPr>
             <a:r>
-              <a:rPr lang="en-US" sz="1560" dirty="0">
+              <a:rPr lang="en-US" sz="1500" dirty="0">
                 <a:solidFill>
                   <a:srgbClr val="F4F7FA"/>
                 </a:solidFill>
@@ -3441,14 +3507,14 @@
               </a:rPr>
               <a:t>def sample_results() -&gt; list[Result]:</a:t>
             </a:r>
-            <a:endParaRPr lang="en-US" sz="1560" dirty="0"/>
+            <a:endParaRPr lang="en-US" sz="1500" dirty="0"/>
           </a:p>
           <a:p>
             <a:pPr algn="l" indent="0" marL="0">
               <a:buNone/>
             </a:pPr>
             <a:r>
-              <a:rPr lang="en-US" sz="1560" dirty="0">
+              <a:rPr lang="en-US" sz="1500" dirty="0">
                 <a:solidFill>
                   <a:srgbClr val="F4F7FA"/>
                 </a:solidFill>
@@ -3458,14 +3524,14 @@
               </a:rPr>
               <a:t>    return [</a:t>
             </a:r>
-            <a:endParaRPr lang="en-US" sz="1560" dirty="0"/>
+            <a:endParaRPr lang="en-US" sz="1500" dirty="0"/>
           </a:p>
           <a:p>
             <a:pPr algn="l" indent="0" marL="0">
               <a:buNone/>
             </a:pPr>
             <a:r>
-              <a:rPr lang="en-US" sz="1560" dirty="0">
+              <a:rPr lang="en-US" sz="1500" dirty="0">
                 <a:solidFill>
                   <a:srgbClr val="F4F7FA"/>
                 </a:solidFill>
@@ -3475,14 +3541,14 @@
               </a:rPr>
               <a:t>        Result("Anna", "Python", 92),</a:t>
             </a:r>
-            <a:endParaRPr lang="en-US" sz="1560" dirty="0"/>
+            <a:endParaRPr lang="en-US" sz="1500" dirty="0"/>
           </a:p>
           <a:p>
             <a:pPr algn="l" indent="0" marL="0">
               <a:buNone/>
             </a:pPr>
             <a:r>
-              <a:rPr lang="en-US" sz="1560" dirty="0">
+              <a:rPr lang="en-US" sz="1500" dirty="0">
                 <a:solidFill>
                   <a:srgbClr val="F4F7FA"/>
                 </a:solidFill>
@@ -3492,14 +3558,14 @@
               </a:rPr>
               <a:t>        Result("Peter", "Python", 67),</a:t>
             </a:r>
-            <a:endParaRPr lang="en-US" sz="1560" dirty="0"/>
+            <a:endParaRPr lang="en-US" sz="1500" dirty="0"/>
           </a:p>
           <a:p>
             <a:pPr algn="l" indent="0" marL="0">
               <a:buNone/>
             </a:pPr>
             <a:r>
-              <a:rPr lang="en-US" sz="1560" dirty="0">
+              <a:rPr lang="en-US" sz="1500" dirty="0">
                 <a:solidFill>
                   <a:srgbClr val="F4F7FA"/>
                 </a:solidFill>
@@ -3509,20 +3575,20 @@
               </a:rPr>
               <a:t>    ]</a:t>
             </a:r>
-            <a:endParaRPr lang="en-US" sz="1560" dirty="0"/>
+            <a:endParaRPr lang="en-US" sz="1500" dirty="0"/>
           </a:p>
           <a:p>
             <a:pPr algn="l" indent="0" marL="0">
               <a:buNone/>
             </a:pPr>
-            <a:endParaRPr lang="en-US" sz="1560" dirty="0"/>
+            <a:endParaRPr lang="en-US" sz="1500" dirty="0"/>
           </a:p>
           <a:p>
             <a:pPr algn="l" indent="0" marL="0">
               <a:buNone/>
             </a:pPr>
             <a:r>
-              <a:rPr lang="en-US" sz="1560" dirty="0">
+              <a:rPr lang="en-US" sz="1500" dirty="0">
                 <a:solidFill>
                   <a:srgbClr val="F4F7FA"/>
                 </a:solidFill>
@@ -3532,14 +3598,14 @@
               </a:rPr>
               <a:t>def test_average(sample_results):</a:t>
             </a:r>
-            <a:endParaRPr lang="en-US" sz="1560" dirty="0"/>
+            <a:endParaRPr lang="en-US" sz="1500" dirty="0"/>
           </a:p>
           <a:p>
             <a:pPr algn="l" indent="0" marL="0">
               <a:buNone/>
             </a:pPr>
             <a:r>
-              <a:rPr lang="en-US" sz="1560" dirty="0">
+              <a:rPr lang="en-US" sz="1500" dirty="0">
                 <a:solidFill>
                   <a:srgbClr val="F4F7FA"/>
                 </a:solidFill>
@@ -3549,7 +3615,7 @@
               </a:rPr>
               <a:t>    assert average(sample_results) == 79.5</a:t>
             </a:r>
-            <a:endParaRPr lang="en-US" sz="1560" dirty="0"/>
+            <a:endParaRPr lang="en-US" sz="1500" dirty="0"/>
           </a:p>
         </p:txBody>
       </p:sp>
@@ -3594,7 +3660,7 @@
         <p:spPr>
           <a:xfrm>
             <a:off x="0" y="0"/>
-            <a:ext cx="12191695" cy="155448"/>
+            <a:ext cx="12191695" cy="109728"/>
           </a:xfrm>
           <a:prstGeom prst="rect">
             <a:avLst/>
@@ -3618,7 +3684,7 @@
         </p:nvSpPr>
         <p:spPr>
           <a:xfrm>
-            <a:off x="566928" y="320040"/>
+            <a:off x="566928" y="310896"/>
             <a:ext cx="4663440" cy="182880"/>
           </a:xfrm>
           <a:prstGeom prst="rect">
@@ -3637,7 +3703,7 @@
               <a:buNone/>
             </a:pPr>
             <a:r>
-              <a:rPr lang="en-US" sz="900" b="1" spc="80" kern="0" dirty="0">
+              <a:rPr lang="en-US" sz="880" b="1" spc="50" kern="0" dirty="0">
                 <a:solidFill>
                   <a:srgbClr val="1877B9"/>
                 </a:solidFill>
@@ -3647,7 +3713,7 @@
               </a:rPr>
               <a:t>PROGRAMOVANIE V PYTHONE</a:t>
             </a:r>
-            <a:endParaRPr lang="en-US" sz="900" dirty="0"/>
+            <a:endParaRPr lang="en-US" sz="880" dirty="0"/>
           </a:p>
         </p:txBody>
       </p:sp>
@@ -3659,7 +3725,7 @@
         </p:nvSpPr>
         <p:spPr>
           <a:xfrm>
-            <a:off x="9829800" y="320040"/>
+            <a:off x="9829800" y="310896"/>
             <a:ext cx="1783080" cy="182880"/>
           </a:xfrm>
           <a:prstGeom prst="rect">
@@ -3678,7 +3744,7 @@
               <a:buNone/>
             </a:pPr>
             <a:r>
-              <a:rPr lang="en-US" sz="900" b="1" dirty="0">
+              <a:rPr lang="en-US" sz="880" b="1" dirty="0">
                 <a:solidFill>
                   <a:srgbClr val="5E6B78"/>
                 </a:solidFill>
@@ -3688,7 +3754,7 @@
               </a:rPr>
               <a:t>PREDNÁŠKA 04</a:t>
             </a:r>
-            <a:endParaRPr lang="en-US" sz="900" dirty="0"/>
+            <a:endParaRPr lang="en-US" sz="880" dirty="0"/>
           </a:p>
         </p:txBody>
       </p:sp>
@@ -3746,8 +3812,8 @@
         </p:nvSpPr>
         <p:spPr>
           <a:xfrm>
-            <a:off x="11109960" y="6501384"/>
-            <a:ext cx="457200" cy="146304"/>
+            <a:off x="10771632" y="6501384"/>
+            <a:ext cx="804672" cy="146304"/>
           </a:xfrm>
           <a:prstGeom prst="rect">
             <a:avLst/>
@@ -3765,7 +3831,7 @@
               <a:buNone/>
             </a:pPr>
             <a:r>
-              <a:rPr lang="en-US" sz="800" dirty="0">
+              <a:rPr lang="en-US" sz="780" dirty="0">
                 <a:solidFill>
                   <a:srgbClr val="5E6B78"/>
                 </a:solidFill>
@@ -3773,9 +3839,9 @@
                 <a:ea typeface="Consolas" pitchFamily="34" charset="-122"/>
                 <a:cs typeface="Consolas" pitchFamily="34" charset="-120"/>
               </a:rPr>
-              <a:t>12</a:t>
-            </a:r>
-            <a:endParaRPr lang="en-US" sz="800" dirty="0"/>
+              <a:t>12 / 18</a:t>
+            </a:r>
+            <a:endParaRPr lang="en-US" sz="780" dirty="0"/>
           </a:p>
         </p:txBody>
       </p:sp>
@@ -3787,8 +3853,8 @@
         </p:nvSpPr>
         <p:spPr>
           <a:xfrm>
-            <a:off x="658368" y="932688"/>
-            <a:ext cx="10789920" cy="713232"/>
+            <a:off x="658368" y="914400"/>
+            <a:ext cx="10881360" cy="713232"/>
           </a:xfrm>
           <a:prstGeom prst="rect">
             <a:avLst/>
@@ -3806,17 +3872,17 @@
               <a:buNone/>
             </a:pPr>
             <a:r>
-              <a:rPr lang="en-US" sz="2900" b="1" dirty="0">
+              <a:rPr lang="en-US" sz="2850" b="1" dirty="0">
                 <a:solidFill>
                   <a:srgbClr val="16324F"/>
                 </a:solidFill>
-                <a:latin typeface="Aptos" pitchFamily="34" charset="0"/>
-                <a:ea typeface="Aptos" pitchFamily="34" charset="-122"/>
-                <a:cs typeface="Aptos" pitchFamily="34" charset="-120"/>
+                <a:latin typeface="Aptos Display" pitchFamily="34" charset="0"/>
+                <a:ea typeface="Aptos Display" pitchFamily="34" charset="-122"/>
+                <a:cs typeface="Aptos Display" pitchFamily="34" charset="-120"/>
               </a:rPr>
               <a:t>tmp_path izoluje prácu so súborom</a:t>
             </a:r>
-            <a:endParaRPr lang="en-US" sz="2900" dirty="0"/>
+            <a:endParaRPr lang="en-US" sz="2850" dirty="0"/>
           </a:p>
         </p:txBody>
       </p:sp>
@@ -3829,19 +3895,17 @@
         <p:spPr>
           <a:xfrm>
             <a:off x="658368" y="1828800"/>
-            <a:ext cx="6812280" cy="4069080"/>
-          </a:xfrm>
-          <a:prstGeom prst="roundRect">
-            <a:avLst>
-              <a:gd name="adj" fmla="val 1348"/>
-            </a:avLst>
+            <a:ext cx="6903720" cy="4069080"/>
+          </a:xfrm>
+          <a:prstGeom prst="rect">
+            <a:avLst/>
           </a:prstGeom>
           <a:solidFill>
             <a:srgbClr val="17212B"/>
           </a:solidFill>
           <a:ln w="12700">
             <a:solidFill>
-              <a:srgbClr val="17212B"/>
+              <a:srgbClr val="243242"/>
             </a:solidFill>
             <a:prstDash val="solid"/>
           </a:ln>
@@ -3849,14 +3913,39 @@
       </p:sp>
       <p:sp>
         <p:nvSpPr>
-          <p:cNvPr id="10" name="Text 8"/>
-          <p:cNvSpPr/>
-          <p:nvPr/>
-        </p:nvSpPr>
-        <p:spPr>
-          <a:xfrm>
-            <a:off x="868680" y="2029968"/>
-            <a:ext cx="6309360" cy="182880"/>
+          <p:cNvPr id="10" name="Shape 8"/>
+          <p:cNvSpPr/>
+          <p:nvPr/>
+        </p:nvSpPr>
+        <p:spPr>
+          <a:xfrm>
+            <a:off x="658368" y="1828800"/>
+            <a:ext cx="6903720" cy="347472"/>
+          </a:xfrm>
+          <a:prstGeom prst="rect">
+            <a:avLst/>
+          </a:prstGeom>
+          <a:solidFill>
+            <a:srgbClr val="223044"/>
+          </a:solidFill>
+          <a:ln w="12700">
+            <a:solidFill>
+              <a:srgbClr val="223044"/>
+            </a:solidFill>
+            <a:prstDash val="solid"/>
+          </a:ln>
+        </p:spPr>
+      </p:sp>
+      <p:sp>
+        <p:nvSpPr>
+          <p:cNvPr id="11" name="Text 9"/>
+          <p:cNvSpPr/>
+          <p:nvPr/>
+        </p:nvSpPr>
+        <p:spPr>
+          <a:xfrm>
+            <a:off x="868680" y="1947672"/>
+            <a:ext cx="6309360" cy="146304"/>
           </a:xfrm>
           <a:prstGeom prst="rect">
             <a:avLst/>
@@ -3874,7 +3963,7 @@
               <a:buNone/>
             </a:pPr>
             <a:r>
-              <a:rPr lang="en-US" sz="850" b="1" spc="70" kern="0" dirty="0">
+              <a:rPr lang="en-US" sz="820" b="1" spc="35" kern="0" dirty="0">
                 <a:solidFill>
                   <a:srgbClr val="8FD3FF"/>
                 </a:solidFill>
@@ -3884,20 +3973,20 @@
               </a:rPr>
               <a:t>python</a:t>
             </a:r>
-            <a:endParaRPr lang="en-US" sz="850" dirty="0"/>
-          </a:p>
-        </p:txBody>
-      </p:sp>
-      <p:sp>
-        <p:nvSpPr>
-          <p:cNvPr id="11" name="Text 9"/>
-          <p:cNvSpPr/>
-          <p:nvPr/>
-        </p:nvSpPr>
-        <p:spPr>
-          <a:xfrm>
-            <a:off x="877824" y="2395728"/>
-            <a:ext cx="6327648" cy="3246120"/>
+            <a:endParaRPr lang="en-US" sz="820" dirty="0"/>
+          </a:p>
+        </p:txBody>
+      </p:sp>
+      <p:sp>
+        <p:nvSpPr>
+          <p:cNvPr id="12" name="Text 10"/>
+          <p:cNvSpPr/>
+          <p:nvPr/>
+        </p:nvSpPr>
+        <p:spPr>
+          <a:xfrm>
+            <a:off x="877824" y="2359152"/>
+            <a:ext cx="6382512" cy="3246120"/>
           </a:xfrm>
           <a:prstGeom prst="rect">
             <a:avLst/>
@@ -3915,7 +4004,7 @@
               <a:buNone/>
             </a:pPr>
             <a:r>
-              <a:rPr lang="en-US" sz="1650" dirty="0">
+              <a:rPr lang="en-US" sz="1600" dirty="0">
                 <a:solidFill>
                   <a:srgbClr val="F4F7FA"/>
                 </a:solidFill>
@@ -3925,14 +4014,14 @@
               </a:rPr>
               <a:t>def test_save_report(tmp_path) -&gt; None:</a:t>
             </a:r>
-            <a:endParaRPr lang="en-US" sz="1650" dirty="0"/>
+            <a:endParaRPr lang="en-US" sz="1600" dirty="0"/>
           </a:p>
           <a:p>
             <a:pPr algn="l" indent="0" marL="0">
               <a:buNone/>
             </a:pPr>
             <a:r>
-              <a:rPr lang="en-US" sz="1650" dirty="0">
+              <a:rPr lang="en-US" sz="1600" dirty="0">
                 <a:solidFill>
                   <a:srgbClr val="F4F7FA"/>
                 </a:solidFill>
@@ -3942,14 +4031,14 @@
               </a:rPr>
               <a:t>    path = tmp_path / "report.txt"</a:t>
             </a:r>
-            <a:endParaRPr lang="en-US" sz="1650" dirty="0"/>
+            <a:endParaRPr lang="en-US" sz="1600" dirty="0"/>
           </a:p>
           <a:p>
             <a:pPr algn="l" indent="0" marL="0">
               <a:buNone/>
             </a:pPr>
             <a:r>
-              <a:rPr lang="en-US" sz="1650" dirty="0">
+              <a:rPr lang="en-US" sz="1600" dirty="0">
                 <a:solidFill>
                   <a:srgbClr val="F4F7FA"/>
                 </a:solidFill>
@@ -3959,20 +4048,20 @@
               </a:rPr>
               <a:t>    save_report(path, "Done")</a:t>
             </a:r>
-            <a:endParaRPr lang="en-US" sz="1650" dirty="0"/>
+            <a:endParaRPr lang="en-US" sz="1600" dirty="0"/>
           </a:p>
           <a:p>
             <a:pPr algn="l" indent="0" marL="0">
               <a:buNone/>
             </a:pPr>
-            <a:endParaRPr lang="en-US" sz="1650" dirty="0"/>
+            <a:endParaRPr lang="en-US" sz="1600" dirty="0"/>
           </a:p>
           <a:p>
             <a:pPr algn="l" indent="0" marL="0">
               <a:buNone/>
             </a:pPr>
             <a:r>
-              <a:rPr lang="en-US" sz="1650" dirty="0">
+              <a:rPr lang="en-US" sz="1600" dirty="0">
                 <a:solidFill>
                   <a:srgbClr val="F4F7FA"/>
                 </a:solidFill>
@@ -3982,20 +4071,20 @@
               </a:rPr>
               <a:t>    assert path.read_text(encoding="utf-8") == "Done"</a:t>
             </a:r>
-            <a:endParaRPr lang="en-US" sz="1650" dirty="0"/>
-          </a:p>
-        </p:txBody>
-      </p:sp>
-      <p:sp>
-        <p:nvSpPr>
-          <p:cNvPr id="12" name="Shape 10"/>
-          <p:cNvSpPr/>
-          <p:nvPr/>
-        </p:nvSpPr>
-        <p:spPr>
-          <a:xfrm>
-            <a:off x="7909560" y="1901952"/>
-            <a:ext cx="0" cy="3566160"/>
+            <a:endParaRPr lang="en-US" sz="1600" dirty="0"/>
+          </a:p>
+        </p:txBody>
+      </p:sp>
+      <p:sp>
+        <p:nvSpPr>
+          <p:cNvPr id="13" name="Shape 11"/>
+          <p:cNvSpPr/>
+          <p:nvPr/>
+        </p:nvSpPr>
+        <p:spPr>
+          <a:xfrm>
+            <a:off x="7936992" y="1883664"/>
+            <a:ext cx="0" cy="3639312"/>
           </a:xfrm>
           <a:prstGeom prst="line">
             <a:avLst/>
@@ -4011,14 +4100,14 @@
       </p:sp>
       <p:sp>
         <p:nvSpPr>
-          <p:cNvPr id="13" name="Text 11"/>
-          <p:cNvSpPr/>
-          <p:nvPr/>
-        </p:nvSpPr>
-        <p:spPr>
-          <a:xfrm>
-            <a:off x="8229600" y="2130552"/>
-            <a:ext cx="2743200" cy="2468880"/>
+          <p:cNvPr id="14" name="Text 12"/>
+          <p:cNvSpPr/>
+          <p:nvPr/>
+        </p:nvSpPr>
+        <p:spPr>
+          <a:xfrm>
+            <a:off x="8229600" y="2084832"/>
+            <a:ext cx="2816352" cy="2514600"/>
           </a:xfrm>
           <a:prstGeom prst="rect">
             <a:avLst/>
@@ -4036,7 +4125,7 @@
               <a:buNone/>
             </a:pPr>
             <a:r>
-              <a:rPr lang="en-US" sz="1800" dirty="0">
+              <a:rPr lang="en-US" sz="1720" dirty="0">
                 <a:solidFill>
                   <a:srgbClr val="5E6B78"/>
                 </a:solidFill>
@@ -4046,7 +4135,7 @@
               </a:rPr>
               <a:t>Test nezapisuje do Downloads ani do repozitára. pytest vytvorí vlastný dočasný adresár.</a:t>
             </a:r>
-            <a:endParaRPr lang="en-US" sz="1800" dirty="0"/>
+            <a:endParaRPr lang="en-US" sz="1720" dirty="0"/>
           </a:p>
         </p:txBody>
       </p:sp>
@@ -4091,7 +4180,7 @@
         <p:spPr>
           <a:xfrm>
             <a:off x="0" y="0"/>
-            <a:ext cx="12191695" cy="155448"/>
+            <a:ext cx="12191695" cy="109728"/>
           </a:xfrm>
           <a:prstGeom prst="rect">
             <a:avLst/>
@@ -4115,7 +4204,7 @@
         </p:nvSpPr>
         <p:spPr>
           <a:xfrm>
-            <a:off x="566928" y="320040"/>
+            <a:off x="566928" y="310896"/>
             <a:ext cx="4663440" cy="182880"/>
           </a:xfrm>
           <a:prstGeom prst="rect">
@@ -4134,7 +4223,7 @@
               <a:buNone/>
             </a:pPr>
             <a:r>
-              <a:rPr lang="en-US" sz="900" b="1" spc="80" kern="0" dirty="0">
+              <a:rPr lang="en-US" sz="880" b="1" spc="50" kern="0" dirty="0">
                 <a:solidFill>
                   <a:srgbClr val="1877B9"/>
                 </a:solidFill>
@@ -4144,7 +4233,7 @@
               </a:rPr>
               <a:t>PROGRAMOVANIE V PYTHONE</a:t>
             </a:r>
-            <a:endParaRPr lang="en-US" sz="900" dirty="0"/>
+            <a:endParaRPr lang="en-US" sz="880" dirty="0"/>
           </a:p>
         </p:txBody>
       </p:sp>
@@ -4156,7 +4245,7 @@
         </p:nvSpPr>
         <p:spPr>
           <a:xfrm>
-            <a:off x="9829800" y="320040"/>
+            <a:off x="9829800" y="310896"/>
             <a:ext cx="1783080" cy="182880"/>
           </a:xfrm>
           <a:prstGeom prst="rect">
@@ -4175,7 +4264,7 @@
               <a:buNone/>
             </a:pPr>
             <a:r>
-              <a:rPr lang="en-US" sz="900" b="1" dirty="0">
+              <a:rPr lang="en-US" sz="880" b="1" dirty="0">
                 <a:solidFill>
                   <a:srgbClr val="5E6B78"/>
                 </a:solidFill>
@@ -4185,7 +4274,7 @@
               </a:rPr>
               <a:t>PREDNÁŠKA 04</a:t>
             </a:r>
-            <a:endParaRPr lang="en-US" sz="900" dirty="0"/>
+            <a:endParaRPr lang="en-US" sz="880" dirty="0"/>
           </a:p>
         </p:txBody>
       </p:sp>
@@ -4243,8 +4332,8 @@
         </p:nvSpPr>
         <p:spPr>
           <a:xfrm>
-            <a:off x="11109960" y="6501384"/>
-            <a:ext cx="457200" cy="146304"/>
+            <a:off x="10771632" y="6501384"/>
+            <a:ext cx="804672" cy="146304"/>
           </a:xfrm>
           <a:prstGeom prst="rect">
             <a:avLst/>
@@ -4262,7 +4351,7 @@
               <a:buNone/>
             </a:pPr>
             <a:r>
-              <a:rPr lang="en-US" sz="800" dirty="0">
+              <a:rPr lang="en-US" sz="780" dirty="0">
                 <a:solidFill>
                   <a:srgbClr val="5E6B78"/>
                 </a:solidFill>
@@ -4270,9 +4359,9 @@
                 <a:ea typeface="Consolas" pitchFamily="34" charset="-122"/>
                 <a:cs typeface="Consolas" pitchFamily="34" charset="-120"/>
               </a:rPr>
-              <a:t>13</a:t>
-            </a:r>
-            <a:endParaRPr lang="en-US" sz="800" dirty="0"/>
+              <a:t>13 / 18</a:t>
+            </a:r>
+            <a:endParaRPr lang="en-US" sz="780" dirty="0"/>
           </a:p>
         </p:txBody>
       </p:sp>
@@ -4284,8 +4373,8 @@
         </p:nvSpPr>
         <p:spPr>
           <a:xfrm>
-            <a:off x="658368" y="932688"/>
-            <a:ext cx="10789920" cy="713232"/>
+            <a:off x="658368" y="914400"/>
+            <a:ext cx="10881360" cy="713232"/>
           </a:xfrm>
           <a:prstGeom prst="rect">
             <a:avLst/>
@@ -4303,17 +4392,17 @@
               <a:buNone/>
             </a:pPr>
             <a:r>
-              <a:rPr lang="en-US" sz="2900" b="1" dirty="0">
+              <a:rPr lang="en-US" sz="2850" b="1" dirty="0">
                 <a:solidFill>
                   <a:srgbClr val="16324F"/>
                 </a:solidFill>
-                <a:latin typeface="Aptos" pitchFamily="34" charset="0"/>
-                <a:ea typeface="Aptos" pitchFamily="34" charset="-122"/>
-                <a:cs typeface="Aptos" pitchFamily="34" charset="-120"/>
+                <a:latin typeface="Aptos Display" pitchFamily="34" charset="0"/>
+                <a:ea typeface="Aptos Display" pitchFamily="34" charset="-122"/>
+                <a:cs typeface="Aptos Display" pitchFamily="34" charset="-120"/>
               </a:rPr>
               <a:t>Test alebo debugger?</a:t>
             </a:r>
-            <a:endParaRPr lang="en-US" sz="2900" dirty="0"/>
+            <a:endParaRPr lang="en-US" sz="2850" dirty="0"/>
           </a:p>
         </p:txBody>
       </p:sp>
@@ -4325,15 +4414,13 @@
         </p:nvSpPr>
         <p:spPr>
           <a:xfrm>
-            <a:off x="713232" y="1874520"/>
-            <a:ext cx="5010912" cy="109728"/>
-          </a:xfrm>
-          <a:prstGeom prst="rect">
-            <a:avLst/>
-          </a:prstGeom>
-          <a:solidFill>
-            <a:srgbClr val="167C80"/>
-          </a:solidFill>
+            <a:off x="713232" y="1883664"/>
+            <a:ext cx="5010912" cy="0"/>
+          </a:xfrm>
+          <a:prstGeom prst="line">
+            <a:avLst/>
+          </a:prstGeom>
+          <a:noFill/>
           <a:ln w="12700">
             <a:solidFill>
               <a:srgbClr val="167C80"/>
@@ -4350,7 +4437,7 @@
         </p:nvSpPr>
         <p:spPr>
           <a:xfrm>
-            <a:off x="713232" y="2212848"/>
+            <a:off x="713232" y="2139696"/>
             <a:ext cx="5010912" cy="365760"/>
           </a:xfrm>
           <a:prstGeom prst="rect">
@@ -4369,7 +4456,7 @@
               <a:buNone/>
             </a:pPr>
             <a:r>
-              <a:rPr lang="en-US" sz="2000" b="1" dirty="0">
+              <a:rPr lang="en-US" sz="1950" b="1" dirty="0">
                 <a:solidFill>
                   <a:srgbClr val="16324F"/>
                 </a:solidFill>
@@ -4379,7 +4466,7 @@
               </a:rPr>
               <a:t>Test</a:t>
             </a:r>
-            <a:endParaRPr lang="en-US" sz="2000" dirty="0"/>
+            <a:endParaRPr lang="en-US" sz="1950" dirty="0"/>
           </a:p>
         </p:txBody>
       </p:sp>
@@ -4391,7 +4478,7 @@
         </p:nvSpPr>
         <p:spPr>
           <a:xfrm>
-            <a:off x="768096" y="2788920"/>
+            <a:off x="749808" y="2688336"/>
             <a:ext cx="4919472" cy="3886200"/>
           </a:xfrm>
           <a:prstGeom prst="rect">
@@ -4411,7 +4498,7 @@
               <a:buChar char="•"/>
             </a:pPr>
             <a:r>
-              <a:rPr lang="en-US" sz="1650" dirty="0">
+              <a:rPr lang="en-US" sz="1620" dirty="0">
                 <a:solidFill>
                   <a:srgbClr val="18212B"/>
                 </a:solidFill>
@@ -4421,7 +4508,7 @@
               </a:rPr>
               <a:t>čo má program robiť</a:t>
             </a:r>
-            <a:endParaRPr lang="en-US" sz="1650" dirty="0"/>
+            <a:endParaRPr lang="en-US" sz="1620" dirty="0"/>
           </a:p>
           <a:p>
             <a:pPr marL="228600" indent="-228600">
@@ -4429,7 +4516,7 @@
               <a:buChar char="•"/>
             </a:pPr>
             <a:r>
-              <a:rPr lang="en-US" sz="1650" dirty="0">
+              <a:rPr lang="en-US" sz="1620" dirty="0">
                 <a:solidFill>
                   <a:srgbClr val="18212B"/>
                 </a:solidFill>
@@ -4439,7 +4526,7 @@
               </a:rPr>
               <a:t>opakovateľný scenár</a:t>
             </a:r>
-            <a:endParaRPr lang="en-US" sz="1650" dirty="0"/>
+            <a:endParaRPr lang="en-US" sz="1620" dirty="0"/>
           </a:p>
           <a:p>
             <a:pPr marL="228600" indent="-228600">
@@ -4447,7 +4534,7 @@
               <a:buChar char="•"/>
             </a:pPr>
             <a:r>
-              <a:rPr lang="en-US" sz="1650" dirty="0">
+              <a:rPr lang="en-US" sz="1620" dirty="0">
                 <a:solidFill>
                   <a:srgbClr val="18212B"/>
                 </a:solidFill>
@@ -4457,7 +4544,7 @@
               </a:rPr>
               <a:t>ochrana pred regresiou</a:t>
             </a:r>
-            <a:endParaRPr lang="en-US" sz="1650" dirty="0"/>
+            <a:endParaRPr lang="en-US" sz="1620" dirty="0"/>
           </a:p>
         </p:txBody>
       </p:sp>
@@ -4469,15 +4556,13 @@
         </p:nvSpPr>
         <p:spPr>
           <a:xfrm>
-            <a:off x="6373368" y="1874520"/>
-            <a:ext cx="5010912" cy="109728"/>
-          </a:xfrm>
-          <a:prstGeom prst="rect">
-            <a:avLst/>
-          </a:prstGeom>
-          <a:solidFill>
-            <a:srgbClr val="E0A03A"/>
-          </a:solidFill>
+            <a:off x="6373368" y="1883664"/>
+            <a:ext cx="5010912" cy="0"/>
+          </a:xfrm>
+          <a:prstGeom prst="line">
+            <a:avLst/>
+          </a:prstGeom>
+          <a:noFill/>
           <a:ln w="12700">
             <a:solidFill>
               <a:srgbClr val="E0A03A"/>
@@ -4494,7 +4579,7 @@
         </p:nvSpPr>
         <p:spPr>
           <a:xfrm>
-            <a:off x="6373368" y="2212848"/>
+            <a:off x="6373368" y="2139696"/>
             <a:ext cx="5010912" cy="365760"/>
           </a:xfrm>
           <a:prstGeom prst="rect">
@@ -4513,7 +4598,7 @@
               <a:buNone/>
             </a:pPr>
             <a:r>
-              <a:rPr lang="en-US" sz="2000" b="1" dirty="0">
+              <a:rPr lang="en-US" sz="1950" b="1" dirty="0">
                 <a:solidFill>
                   <a:srgbClr val="16324F"/>
                 </a:solidFill>
@@ -4523,7 +4608,7 @@
               </a:rPr>
               <a:t>Debugger</a:t>
             </a:r>
-            <a:endParaRPr lang="en-US" sz="2000" dirty="0"/>
+            <a:endParaRPr lang="en-US" sz="1950" dirty="0"/>
           </a:p>
         </p:txBody>
       </p:sp>
@@ -4535,7 +4620,7 @@
         </p:nvSpPr>
         <p:spPr>
           <a:xfrm>
-            <a:off x="6428232" y="2788920"/>
+            <a:off x="6409944" y="2688336"/>
             <a:ext cx="4919472" cy="3886200"/>
           </a:xfrm>
           <a:prstGeom prst="rect">
@@ -4555,7 +4640,7 @@
               <a:buChar char="•"/>
             </a:pPr>
             <a:r>
-              <a:rPr lang="en-US" sz="1650" dirty="0">
+              <a:rPr lang="en-US" sz="1620" dirty="0">
                 <a:solidFill>
                   <a:srgbClr val="18212B"/>
                 </a:solidFill>
@@ -4565,7 +4650,7 @@
               </a:rPr>
               <a:t>čo robí práve teraz</a:t>
             </a:r>
-            <a:endParaRPr lang="en-US" sz="1650" dirty="0"/>
+            <a:endParaRPr lang="en-US" sz="1620" dirty="0"/>
           </a:p>
           <a:p>
             <a:pPr marL="228600" indent="-228600">
@@ -4573,7 +4658,7 @@
               <a:buChar char="•"/>
             </a:pPr>
             <a:r>
-              <a:rPr lang="en-US" sz="1650" dirty="0">
+              <a:rPr lang="en-US" sz="1620" dirty="0">
                 <a:solidFill>
                   <a:srgbClr val="18212B"/>
                 </a:solidFill>
@@ -4583,7 +4668,7 @@
               </a:rPr>
               <a:t>hodnoty a vetvy</a:t>
             </a:r>
-            <a:endParaRPr lang="en-US" sz="1650" dirty="0"/>
+            <a:endParaRPr lang="en-US" sz="1620" dirty="0"/>
           </a:p>
           <a:p>
             <a:pPr marL="228600" indent="-228600">
@@ -4591,7 +4676,7 @@
               <a:buChar char="•"/>
             </a:pPr>
             <a:r>
-              <a:rPr lang="en-US" sz="1650" dirty="0">
+              <a:rPr lang="en-US" sz="1620" dirty="0">
                 <a:solidFill>
                   <a:srgbClr val="18212B"/>
                 </a:solidFill>
@@ -4601,7 +4686,7 @@
               </a:rPr>
               <a:t>vyšetrovanie nejasného stavu</a:t>
             </a:r>
-            <a:endParaRPr lang="en-US" sz="1650" dirty="0"/>
+            <a:endParaRPr lang="en-US" sz="1620" dirty="0"/>
           </a:p>
         </p:txBody>
       </p:sp>
@@ -4646,7 +4731,7 @@
         <p:spPr>
           <a:xfrm>
             <a:off x="0" y="0"/>
-            <a:ext cx="12191695" cy="155448"/>
+            <a:ext cx="12191695" cy="109728"/>
           </a:xfrm>
           <a:prstGeom prst="rect">
             <a:avLst/>
@@ -4670,7 +4755,7 @@
         </p:nvSpPr>
         <p:spPr>
           <a:xfrm>
-            <a:off x="566928" y="320040"/>
+            <a:off x="566928" y="310896"/>
             <a:ext cx="4663440" cy="182880"/>
           </a:xfrm>
           <a:prstGeom prst="rect">
@@ -4689,7 +4774,7 @@
               <a:buNone/>
             </a:pPr>
             <a:r>
-              <a:rPr lang="en-US" sz="900" b="1" spc="80" kern="0" dirty="0">
+              <a:rPr lang="en-US" sz="880" b="1" spc="50" kern="0" dirty="0">
                 <a:solidFill>
                   <a:srgbClr val="1877B9"/>
                 </a:solidFill>
@@ -4699,7 +4784,7 @@
               </a:rPr>
               <a:t>PROGRAMOVANIE V PYTHONE</a:t>
             </a:r>
-            <a:endParaRPr lang="en-US" sz="900" dirty="0"/>
+            <a:endParaRPr lang="en-US" sz="880" dirty="0"/>
           </a:p>
         </p:txBody>
       </p:sp>
@@ -4711,7 +4796,7 @@
         </p:nvSpPr>
         <p:spPr>
           <a:xfrm>
-            <a:off x="9829800" y="320040"/>
+            <a:off x="9829800" y="310896"/>
             <a:ext cx="1783080" cy="182880"/>
           </a:xfrm>
           <a:prstGeom prst="rect">
@@ -4730,7 +4815,7 @@
               <a:buNone/>
             </a:pPr>
             <a:r>
-              <a:rPr lang="en-US" sz="900" b="1" dirty="0">
+              <a:rPr lang="en-US" sz="880" b="1" dirty="0">
                 <a:solidFill>
                   <a:srgbClr val="5E6B78"/>
                 </a:solidFill>
@@ -4740,7 +4825,7 @@
               </a:rPr>
               <a:t>PREDNÁŠKA 04</a:t>
             </a:r>
-            <a:endParaRPr lang="en-US" sz="900" dirty="0"/>
+            <a:endParaRPr lang="en-US" sz="880" dirty="0"/>
           </a:p>
         </p:txBody>
       </p:sp>
@@ -4798,8 +4883,8 @@
         </p:nvSpPr>
         <p:spPr>
           <a:xfrm>
-            <a:off x="11109960" y="6501384"/>
-            <a:ext cx="457200" cy="146304"/>
+            <a:off x="10771632" y="6501384"/>
+            <a:ext cx="804672" cy="146304"/>
           </a:xfrm>
           <a:prstGeom prst="rect">
             <a:avLst/>
@@ -4817,7 +4902,7 @@
               <a:buNone/>
             </a:pPr>
             <a:r>
-              <a:rPr lang="en-US" sz="800" dirty="0">
+              <a:rPr lang="en-US" sz="780" dirty="0">
                 <a:solidFill>
                   <a:srgbClr val="5E6B78"/>
                 </a:solidFill>
@@ -4825,9 +4910,9 @@
                 <a:ea typeface="Consolas" pitchFamily="34" charset="-122"/>
                 <a:cs typeface="Consolas" pitchFamily="34" charset="-120"/>
               </a:rPr>
-              <a:t>14</a:t>
-            </a:r>
-            <a:endParaRPr lang="en-US" sz="800" dirty="0"/>
+              <a:t>14 / 18</a:t>
+            </a:r>
+            <a:endParaRPr lang="en-US" sz="780" dirty="0"/>
           </a:p>
         </p:txBody>
       </p:sp>
@@ -4839,8 +4924,8 @@
         </p:nvSpPr>
         <p:spPr>
           <a:xfrm>
-            <a:off x="658368" y="932688"/>
-            <a:ext cx="10789920" cy="713232"/>
+            <a:off x="658368" y="914400"/>
+            <a:ext cx="10881360" cy="713232"/>
           </a:xfrm>
           <a:prstGeom prst="rect">
             <a:avLst/>
@@ -4858,17 +4943,17 @@
               <a:buNone/>
             </a:pPr>
             <a:r>
-              <a:rPr lang="en-US" sz="2900" b="1" dirty="0">
+              <a:rPr lang="en-US" sz="2850" b="1" dirty="0">
                 <a:solidFill>
                   <a:srgbClr val="16324F"/>
                 </a:solidFill>
-                <a:latin typeface="Aptos" pitchFamily="34" charset="0"/>
-                <a:ea typeface="Aptos" pitchFamily="34" charset="-122"/>
-                <a:cs typeface="Aptos" pitchFamily="34" charset="-120"/>
+                <a:latin typeface="Aptos Display" pitchFamily="34" charset="0"/>
+                <a:ea typeface="Aptos Display" pitchFamily="34" charset="-122"/>
+                <a:cs typeface="Aptos Display" pitchFamily="34" charset="-120"/>
               </a:rPr>
               <a:t>Traceback čítame od konca</a:t>
             </a:r>
-            <a:endParaRPr lang="en-US" sz="2900" dirty="0"/>
+            <a:endParaRPr lang="en-US" sz="2850" dirty="0"/>
           </a:p>
         </p:txBody>
       </p:sp>
@@ -4880,13 +4965,11 @@
         </p:nvSpPr>
         <p:spPr>
           <a:xfrm>
-            <a:off x="731520" y="2834640"/>
-            <a:ext cx="2450592" cy="1042416"/>
-          </a:xfrm>
-          <a:prstGeom prst="roundRect">
-            <a:avLst>
-              <a:gd name="adj" fmla="val 4386"/>
-            </a:avLst>
+            <a:off x="694944" y="2834640"/>
+            <a:ext cx="2400300" cy="1042416"/>
+          </a:xfrm>
+          <a:prstGeom prst="rect">
+            <a:avLst/>
           </a:prstGeom>
           <a:solidFill>
             <a:srgbClr val="F3F6F8"/>
@@ -4907,8 +4990,8 @@
         </p:nvSpPr>
         <p:spPr>
           <a:xfrm>
-            <a:off x="877824" y="3063240"/>
-            <a:ext cx="2157984" cy="548640"/>
+            <a:off x="804672" y="3063240"/>
+            <a:ext cx="2180844" cy="548640"/>
           </a:xfrm>
           <a:prstGeom prst="rect">
             <a:avLst/>
@@ -4948,7 +5031,7 @@
         </p:nvSpPr>
         <p:spPr>
           <a:xfrm>
-            <a:off x="3319272" y="3209544"/>
+            <a:off x="3232404" y="3209544"/>
             <a:ext cx="182880" cy="292608"/>
           </a:xfrm>
           <a:prstGeom prst="chevron">
@@ -4973,13 +5056,11 @@
         </p:nvSpPr>
         <p:spPr>
           <a:xfrm>
-            <a:off x="3593592" y="2834640"/>
-            <a:ext cx="2450592" cy="1042416"/>
-          </a:xfrm>
-          <a:prstGeom prst="roundRect">
-            <a:avLst>
-              <a:gd name="adj" fmla="val 4386"/>
-            </a:avLst>
+            <a:off x="3506724" y="2834640"/>
+            <a:ext cx="2400300" cy="1042416"/>
+          </a:xfrm>
+          <a:prstGeom prst="rect">
+            <a:avLst/>
           </a:prstGeom>
           <a:solidFill>
             <a:srgbClr val="EAF3F7"/>
@@ -5000,8 +5081,8 @@
         </p:nvSpPr>
         <p:spPr>
           <a:xfrm>
-            <a:off x="3739896" y="3063240"/>
-            <a:ext cx="2157984" cy="548640"/>
+            <a:off x="3616452" y="3063240"/>
+            <a:ext cx="2180844" cy="548640"/>
           </a:xfrm>
           <a:prstGeom prst="rect">
             <a:avLst/>
@@ -5041,7 +5122,7 @@
         </p:nvSpPr>
         <p:spPr>
           <a:xfrm>
-            <a:off x="6181344" y="3209544"/>
+            <a:off x="6044184" y="3209544"/>
             <a:ext cx="182880" cy="292608"/>
           </a:xfrm>
           <a:prstGeom prst="chevron">
@@ -5066,13 +5147,11 @@
         </p:nvSpPr>
         <p:spPr>
           <a:xfrm>
-            <a:off x="6455664" y="2834640"/>
-            <a:ext cx="2450592" cy="1042416"/>
-          </a:xfrm>
-          <a:prstGeom prst="roundRect">
-            <a:avLst>
-              <a:gd name="adj" fmla="val 4386"/>
-            </a:avLst>
+            <a:off x="6318504" y="2834640"/>
+            <a:ext cx="2400300" cy="1042416"/>
+          </a:xfrm>
+          <a:prstGeom prst="rect">
+            <a:avLst/>
           </a:prstGeom>
           <a:solidFill>
             <a:srgbClr val="F3F6F8"/>
@@ -5093,8 +5172,8 @@
         </p:nvSpPr>
         <p:spPr>
           <a:xfrm>
-            <a:off x="6601968" y="3063240"/>
-            <a:ext cx="2157984" cy="548640"/>
+            <a:off x="6428232" y="3063240"/>
+            <a:ext cx="2180844" cy="548640"/>
           </a:xfrm>
           <a:prstGeom prst="rect">
             <a:avLst/>
@@ -5134,7 +5213,7 @@
         </p:nvSpPr>
         <p:spPr>
           <a:xfrm>
-            <a:off x="9043416" y="3209544"/>
+            <a:off x="8855964" y="3209544"/>
             <a:ext cx="182880" cy="292608"/>
           </a:xfrm>
           <a:prstGeom prst="chevron">
@@ -5159,13 +5238,11 @@
         </p:nvSpPr>
         <p:spPr>
           <a:xfrm>
-            <a:off x="9317736" y="2834640"/>
-            <a:ext cx="2450592" cy="1042416"/>
-          </a:xfrm>
-          <a:prstGeom prst="roundRect">
-            <a:avLst>
-              <a:gd name="adj" fmla="val 4386"/>
-            </a:avLst>
+            <a:off x="9130284" y="2834640"/>
+            <a:ext cx="2400300" cy="1042416"/>
+          </a:xfrm>
+          <a:prstGeom prst="rect">
+            <a:avLst/>
           </a:prstGeom>
           <a:solidFill>
             <a:srgbClr val="EAF3F7"/>
@@ -5186,8 +5263,8 @@
         </p:nvSpPr>
         <p:spPr>
           <a:xfrm>
-            <a:off x="9464040" y="3063240"/>
-            <a:ext cx="2157984" cy="548640"/>
+            <a:off x="9240012" y="3063240"/>
+            <a:ext cx="2180844" cy="548640"/>
           </a:xfrm>
           <a:prstGeom prst="rect">
             <a:avLst/>
@@ -5260,7 +5337,7 @@
         <p:spPr>
           <a:xfrm>
             <a:off x="0" y="0"/>
-            <a:ext cx="12191695" cy="155448"/>
+            <a:ext cx="12191695" cy="109728"/>
           </a:xfrm>
           <a:prstGeom prst="rect">
             <a:avLst/>
@@ -5284,7 +5361,7 @@
         </p:nvSpPr>
         <p:spPr>
           <a:xfrm>
-            <a:off x="566928" y="320040"/>
+            <a:off x="566928" y="310896"/>
             <a:ext cx="4663440" cy="182880"/>
           </a:xfrm>
           <a:prstGeom prst="rect">
@@ -5303,7 +5380,7 @@
               <a:buNone/>
             </a:pPr>
             <a:r>
-              <a:rPr lang="en-US" sz="900" b="1" spc="80" kern="0" dirty="0">
+              <a:rPr lang="en-US" sz="880" b="1" spc="50" kern="0" dirty="0">
                 <a:solidFill>
                   <a:srgbClr val="1877B9"/>
                 </a:solidFill>
@@ -5313,7 +5390,7 @@
               </a:rPr>
               <a:t>PROGRAMOVANIE V PYTHONE</a:t>
             </a:r>
-            <a:endParaRPr lang="en-US" sz="900" dirty="0"/>
+            <a:endParaRPr lang="en-US" sz="880" dirty="0"/>
           </a:p>
         </p:txBody>
       </p:sp>
@@ -5325,7 +5402,7 @@
         </p:nvSpPr>
         <p:spPr>
           <a:xfrm>
-            <a:off x="9829800" y="320040"/>
+            <a:off x="9829800" y="310896"/>
             <a:ext cx="1783080" cy="182880"/>
           </a:xfrm>
           <a:prstGeom prst="rect">
@@ -5344,7 +5421,7 @@
               <a:buNone/>
             </a:pPr>
             <a:r>
-              <a:rPr lang="en-US" sz="900" b="1" dirty="0">
+              <a:rPr lang="en-US" sz="880" b="1" dirty="0">
                 <a:solidFill>
                   <a:srgbClr val="5E6B78"/>
                 </a:solidFill>
@@ -5354,7 +5431,7 @@
               </a:rPr>
               <a:t>PREDNÁŠKA 04</a:t>
             </a:r>
-            <a:endParaRPr lang="en-US" sz="900" dirty="0"/>
+            <a:endParaRPr lang="en-US" sz="880" dirty="0"/>
           </a:p>
         </p:txBody>
       </p:sp>
@@ -5412,8 +5489,8 @@
         </p:nvSpPr>
         <p:spPr>
           <a:xfrm>
-            <a:off x="11109960" y="6501384"/>
-            <a:ext cx="457200" cy="146304"/>
+            <a:off x="10771632" y="6501384"/>
+            <a:ext cx="804672" cy="146304"/>
           </a:xfrm>
           <a:prstGeom prst="rect">
             <a:avLst/>
@@ -5431,7 +5508,7 @@
               <a:buNone/>
             </a:pPr>
             <a:r>
-              <a:rPr lang="en-US" sz="800" dirty="0">
+              <a:rPr lang="en-US" sz="780" dirty="0">
                 <a:solidFill>
                   <a:srgbClr val="5E6B78"/>
                 </a:solidFill>
@@ -5439,9 +5516,9 @@
                 <a:ea typeface="Consolas" pitchFamily="34" charset="-122"/>
                 <a:cs typeface="Consolas" pitchFamily="34" charset="-120"/>
               </a:rPr>
-              <a:t>15</a:t>
-            </a:r>
-            <a:endParaRPr lang="en-US" sz="800" dirty="0"/>
+              <a:t>15 / 18</a:t>
+            </a:r>
+            <a:endParaRPr lang="en-US" sz="780" dirty="0"/>
           </a:p>
         </p:txBody>
       </p:sp>
@@ -5453,8 +5530,8 @@
         </p:nvSpPr>
         <p:spPr>
           <a:xfrm>
-            <a:off x="658368" y="932688"/>
-            <a:ext cx="10789920" cy="713232"/>
+            <a:off x="658368" y="914400"/>
+            <a:ext cx="10881360" cy="713232"/>
           </a:xfrm>
           <a:prstGeom prst="rect">
             <a:avLst/>
@@ -5472,17 +5549,17 @@
               <a:buNone/>
             </a:pPr>
             <a:r>
-              <a:rPr lang="en-US" sz="2900" b="1" dirty="0">
+              <a:rPr lang="en-US" sz="2850" b="1" dirty="0">
                 <a:solidFill>
                   <a:srgbClr val="16324F"/>
                 </a:solidFill>
-                <a:latin typeface="Aptos" pitchFamily="34" charset="0"/>
-                <a:ea typeface="Aptos" pitchFamily="34" charset="-122"/>
-                <a:cs typeface="Aptos" pitchFamily="34" charset="-120"/>
+                <a:latin typeface="Aptos Display" pitchFamily="34" charset="0"/>
+                <a:ea typeface="Aptos Display" pitchFamily="34" charset="-122"/>
+                <a:cs typeface="Aptos Display" pitchFamily="34" charset="-120"/>
               </a:rPr>
               <a:t>Breakpoint je konkrétna otázka</a:t>
             </a:r>
-            <a:endParaRPr lang="en-US" sz="2900" dirty="0"/>
+            <a:endParaRPr lang="en-US" sz="2850" dirty="0"/>
           </a:p>
         </p:txBody>
       </p:sp>
@@ -5623,7 +5700,7 @@
         <p:spPr>
           <a:xfrm>
             <a:off x="0" y="0"/>
-            <a:ext cx="12191695" cy="155448"/>
+            <a:ext cx="12191695" cy="109728"/>
           </a:xfrm>
           <a:prstGeom prst="rect">
             <a:avLst/>
@@ -5647,7 +5724,7 @@
         </p:nvSpPr>
         <p:spPr>
           <a:xfrm>
-            <a:off x="566928" y="320040"/>
+            <a:off x="566928" y="310896"/>
             <a:ext cx="4663440" cy="182880"/>
           </a:xfrm>
           <a:prstGeom prst="rect">
@@ -5666,7 +5743,7 @@
               <a:buNone/>
             </a:pPr>
             <a:r>
-              <a:rPr lang="en-US" sz="900" b="1" spc="80" kern="0" dirty="0">
+              <a:rPr lang="en-US" sz="880" b="1" spc="50" kern="0" dirty="0">
                 <a:solidFill>
                   <a:srgbClr val="1877B9"/>
                 </a:solidFill>
@@ -5676,7 +5753,7 @@
               </a:rPr>
               <a:t>PROGRAMOVANIE V PYTHONE</a:t>
             </a:r>
-            <a:endParaRPr lang="en-US" sz="900" dirty="0"/>
+            <a:endParaRPr lang="en-US" sz="880" dirty="0"/>
           </a:p>
         </p:txBody>
       </p:sp>
@@ -5688,7 +5765,7 @@
         </p:nvSpPr>
         <p:spPr>
           <a:xfrm>
-            <a:off x="9829800" y="320040"/>
+            <a:off x="9829800" y="310896"/>
             <a:ext cx="1783080" cy="182880"/>
           </a:xfrm>
           <a:prstGeom prst="rect">
@@ -5707,7 +5784,7 @@
               <a:buNone/>
             </a:pPr>
             <a:r>
-              <a:rPr lang="en-US" sz="900" b="1" dirty="0">
+              <a:rPr lang="en-US" sz="880" b="1" dirty="0">
                 <a:solidFill>
                   <a:srgbClr val="5E6B78"/>
                 </a:solidFill>
@@ -5717,7 +5794,7 @@
               </a:rPr>
               <a:t>PREDNÁŠKA 04</a:t>
             </a:r>
-            <a:endParaRPr lang="en-US" sz="900" dirty="0"/>
+            <a:endParaRPr lang="en-US" sz="880" dirty="0"/>
           </a:p>
         </p:txBody>
       </p:sp>
@@ -5775,8 +5852,8 @@
         </p:nvSpPr>
         <p:spPr>
           <a:xfrm>
-            <a:off x="11109960" y="6501384"/>
-            <a:ext cx="457200" cy="146304"/>
+            <a:off x="10771632" y="6501384"/>
+            <a:ext cx="804672" cy="146304"/>
           </a:xfrm>
           <a:prstGeom prst="rect">
             <a:avLst/>
@@ -5794,7 +5871,7 @@
               <a:buNone/>
             </a:pPr>
             <a:r>
-              <a:rPr lang="en-US" sz="800" dirty="0">
+              <a:rPr lang="en-US" sz="780" dirty="0">
                 <a:solidFill>
                   <a:srgbClr val="5E6B78"/>
                 </a:solidFill>
@@ -5802,9 +5879,9 @@
                 <a:ea typeface="Consolas" pitchFamily="34" charset="-122"/>
                 <a:cs typeface="Consolas" pitchFamily="34" charset="-120"/>
               </a:rPr>
-              <a:t>16</a:t>
-            </a:r>
-            <a:endParaRPr lang="en-US" sz="800" dirty="0"/>
+              <a:t>16 / 18</a:t>
+            </a:r>
+            <a:endParaRPr lang="en-US" sz="780" dirty="0"/>
           </a:p>
         </p:txBody>
       </p:sp>
@@ -5816,8 +5893,8 @@
         </p:nvSpPr>
         <p:spPr>
           <a:xfrm>
-            <a:off x="658368" y="932688"/>
-            <a:ext cx="10789920" cy="713232"/>
+            <a:off x="658368" y="914400"/>
+            <a:ext cx="10881360" cy="713232"/>
           </a:xfrm>
           <a:prstGeom prst="rect">
             <a:avLst/>
@@ -5835,17 +5912,17 @@
               <a:buNone/>
             </a:pPr>
             <a:r>
-              <a:rPr lang="en-US" sz="2900" b="1" dirty="0">
+              <a:rPr lang="en-US" sz="2850" b="1" dirty="0">
                 <a:solidFill>
                   <a:srgbClr val="16324F"/>
                 </a:solidFill>
-                <a:latin typeface="Aptos" pitchFamily="34" charset="0"/>
-                <a:ea typeface="Aptos" pitchFamily="34" charset="-122"/>
-                <a:cs typeface="Aptos" pitchFamily="34" charset="-120"/>
+                <a:latin typeface="Aptos Display" pitchFamily="34" charset="0"/>
+                <a:ea typeface="Aptos Display" pitchFamily="34" charset="-122"/>
+                <a:cs typeface="Aptos Display" pitchFamily="34" charset="-120"/>
               </a:rPr>
               <a:t>Logging je diagnostika, nie náhodný print</a:t>
             </a:r>
-            <a:endParaRPr lang="en-US" sz="2900" dirty="0"/>
+            <a:endParaRPr lang="en-US" sz="2850" dirty="0"/>
           </a:p>
         </p:txBody>
       </p:sp>
@@ -5858,19 +5935,17 @@
         <p:spPr>
           <a:xfrm>
             <a:off x="658368" y="1828800"/>
-            <a:ext cx="6812280" cy="4069080"/>
-          </a:xfrm>
-          <a:prstGeom prst="roundRect">
-            <a:avLst>
-              <a:gd name="adj" fmla="val 1348"/>
-            </a:avLst>
+            <a:ext cx="6903720" cy="4069080"/>
+          </a:xfrm>
+          <a:prstGeom prst="rect">
+            <a:avLst/>
           </a:prstGeom>
           <a:solidFill>
             <a:srgbClr val="17212B"/>
           </a:solidFill>
           <a:ln w="12700">
             <a:solidFill>
-              <a:srgbClr val="17212B"/>
+              <a:srgbClr val="243242"/>
             </a:solidFill>
             <a:prstDash val="solid"/>
           </a:ln>
@@ -5878,14 +5953,39 @@
       </p:sp>
       <p:sp>
         <p:nvSpPr>
-          <p:cNvPr id="10" name="Text 8"/>
-          <p:cNvSpPr/>
-          <p:nvPr/>
-        </p:nvSpPr>
-        <p:spPr>
-          <a:xfrm>
-            <a:off x="868680" y="2029968"/>
-            <a:ext cx="6309360" cy="182880"/>
+          <p:cNvPr id="10" name="Shape 8"/>
+          <p:cNvSpPr/>
+          <p:nvPr/>
+        </p:nvSpPr>
+        <p:spPr>
+          <a:xfrm>
+            <a:off x="658368" y="1828800"/>
+            <a:ext cx="6903720" cy="347472"/>
+          </a:xfrm>
+          <a:prstGeom prst="rect">
+            <a:avLst/>
+          </a:prstGeom>
+          <a:solidFill>
+            <a:srgbClr val="223044"/>
+          </a:solidFill>
+          <a:ln w="12700">
+            <a:solidFill>
+              <a:srgbClr val="223044"/>
+            </a:solidFill>
+            <a:prstDash val="solid"/>
+          </a:ln>
+        </p:spPr>
+      </p:sp>
+      <p:sp>
+        <p:nvSpPr>
+          <p:cNvPr id="11" name="Text 9"/>
+          <p:cNvSpPr/>
+          <p:nvPr/>
+        </p:nvSpPr>
+        <p:spPr>
+          <a:xfrm>
+            <a:off x="868680" y="1947672"/>
+            <a:ext cx="6309360" cy="146304"/>
           </a:xfrm>
           <a:prstGeom prst="rect">
             <a:avLst/>
@@ -5903,7 +6003,7 @@
               <a:buNone/>
             </a:pPr>
             <a:r>
-              <a:rPr lang="en-US" sz="850" b="1" spc="70" kern="0" dirty="0">
+              <a:rPr lang="en-US" sz="820" b="1" spc="35" kern="0" dirty="0">
                 <a:solidFill>
                   <a:srgbClr val="8FD3FF"/>
                 </a:solidFill>
@@ -5913,20 +6013,20 @@
               </a:rPr>
               <a:t>python</a:t>
             </a:r>
-            <a:endParaRPr lang="en-US" sz="850" dirty="0"/>
-          </a:p>
-        </p:txBody>
-      </p:sp>
-      <p:sp>
-        <p:nvSpPr>
-          <p:cNvPr id="11" name="Text 9"/>
-          <p:cNvSpPr/>
-          <p:nvPr/>
-        </p:nvSpPr>
-        <p:spPr>
-          <a:xfrm>
-            <a:off x="877824" y="2395728"/>
-            <a:ext cx="6327648" cy="3246120"/>
+            <a:endParaRPr lang="en-US" sz="820" dirty="0"/>
+          </a:p>
+        </p:txBody>
+      </p:sp>
+      <p:sp>
+        <p:nvSpPr>
+          <p:cNvPr id="12" name="Text 10"/>
+          <p:cNvSpPr/>
+          <p:nvPr/>
+        </p:nvSpPr>
+        <p:spPr>
+          <a:xfrm>
+            <a:off x="877824" y="2359152"/>
+            <a:ext cx="6382512" cy="3246120"/>
           </a:xfrm>
           <a:prstGeom prst="rect">
             <a:avLst/>
@@ -5944,7 +6044,7 @@
               <a:buNone/>
             </a:pPr>
             <a:r>
-              <a:rPr lang="en-US" sz="1650" dirty="0">
+              <a:rPr lang="en-US" sz="1600" dirty="0">
                 <a:solidFill>
                   <a:srgbClr val="F4F7FA"/>
                 </a:solidFill>
@@ -5954,20 +6054,20 @@
               </a:rPr>
               <a:t>import logging</a:t>
             </a:r>
-            <a:endParaRPr lang="en-US" sz="1650" dirty="0"/>
+            <a:endParaRPr lang="en-US" sz="1600" dirty="0"/>
           </a:p>
           <a:p>
             <a:pPr algn="l" indent="0" marL="0">
               <a:buNone/>
             </a:pPr>
-            <a:endParaRPr lang="en-US" sz="1650" dirty="0"/>
+            <a:endParaRPr lang="en-US" sz="1600" dirty="0"/>
           </a:p>
           <a:p>
             <a:pPr algn="l" indent="0" marL="0">
               <a:buNone/>
             </a:pPr>
             <a:r>
-              <a:rPr lang="en-US" sz="1650" dirty="0">
+              <a:rPr lang="en-US" sz="1600" dirty="0">
                 <a:solidFill>
                   <a:srgbClr val="F4F7FA"/>
                 </a:solidFill>
@@ -5977,14 +6077,14 @@
               </a:rPr>
               <a:t>logging.info("Processing %s records", len(records))</a:t>
             </a:r>
-            <a:endParaRPr lang="en-US" sz="1650" dirty="0"/>
+            <a:endParaRPr lang="en-US" sz="1600" dirty="0"/>
           </a:p>
           <a:p>
             <a:pPr algn="l" indent="0" marL="0">
               <a:buNone/>
             </a:pPr>
             <a:r>
-              <a:rPr lang="en-US" sz="1650" dirty="0">
+              <a:rPr lang="en-US" sz="1600" dirty="0">
                 <a:solidFill>
                   <a:srgbClr val="F4F7FA"/>
                 </a:solidFill>
@@ -5994,14 +6094,14 @@
               </a:rPr>
               <a:t>logging.warning("Unknown course: %s", course)</a:t>
             </a:r>
-            <a:endParaRPr lang="en-US" sz="1650" dirty="0"/>
+            <a:endParaRPr lang="en-US" sz="1600" dirty="0"/>
           </a:p>
           <a:p>
             <a:pPr algn="l" indent="0" marL="0">
               <a:buNone/>
             </a:pPr>
             <a:r>
-              <a:rPr lang="en-US" sz="1650" dirty="0">
+              <a:rPr lang="en-US" sz="1600" dirty="0">
                 <a:solidFill>
                   <a:srgbClr val="F4F7FA"/>
                 </a:solidFill>
@@ -6011,20 +6111,20 @@
               </a:rPr>
               <a:t>logging.error("Cannot read %s", path)</a:t>
             </a:r>
-            <a:endParaRPr lang="en-US" sz="1650" dirty="0"/>
-          </a:p>
-        </p:txBody>
-      </p:sp>
-      <p:sp>
-        <p:nvSpPr>
-          <p:cNvPr id="12" name="Shape 10"/>
-          <p:cNvSpPr/>
-          <p:nvPr/>
-        </p:nvSpPr>
-        <p:spPr>
-          <a:xfrm>
-            <a:off x="7909560" y="1901952"/>
-            <a:ext cx="0" cy="3566160"/>
+            <a:endParaRPr lang="en-US" sz="1600" dirty="0"/>
+          </a:p>
+        </p:txBody>
+      </p:sp>
+      <p:sp>
+        <p:nvSpPr>
+          <p:cNvPr id="13" name="Shape 11"/>
+          <p:cNvSpPr/>
+          <p:nvPr/>
+        </p:nvSpPr>
+        <p:spPr>
+          <a:xfrm>
+            <a:off x="7936992" y="1883664"/>
+            <a:ext cx="0" cy="3639312"/>
           </a:xfrm>
           <a:prstGeom prst="line">
             <a:avLst/>
@@ -6040,14 +6140,14 @@
       </p:sp>
       <p:sp>
         <p:nvSpPr>
-          <p:cNvPr id="13" name="Text 11"/>
-          <p:cNvSpPr/>
-          <p:nvPr/>
-        </p:nvSpPr>
-        <p:spPr>
-          <a:xfrm>
-            <a:off x="8229600" y="2130552"/>
-            <a:ext cx="2743200" cy="2468880"/>
+          <p:cNvPr id="14" name="Text 12"/>
+          <p:cNvSpPr/>
+          <p:nvPr/>
+        </p:nvSpPr>
+        <p:spPr>
+          <a:xfrm>
+            <a:off x="8229600" y="2084832"/>
+            <a:ext cx="2816352" cy="2514600"/>
           </a:xfrm>
           <a:prstGeom prst="rect">
             <a:avLst/>
@@ -6065,7 +6165,7 @@
               <a:buNone/>
             </a:pPr>
             <a:r>
-              <a:rPr lang="en-US" sz="1800" dirty="0">
+              <a:rPr lang="en-US" sz="1720" dirty="0">
                 <a:solidFill>
                   <a:srgbClr val="5E6B78"/>
                 </a:solidFill>
@@ -6075,7 +6175,7 @@
               </a:rPr>
               <a:t>Úrovne logov umožnia zapnúť diagnostiku podľa potreby bez miešania s používateľským výstupom.</a:t>
             </a:r>
-            <a:endParaRPr lang="en-US" sz="1800" dirty="0"/>
+            <a:endParaRPr lang="en-US" sz="1720" dirty="0"/>
           </a:p>
         </p:txBody>
       </p:sp>
@@ -6120,7 +6220,7 @@
         <p:spPr>
           <a:xfrm>
             <a:off x="0" y="0"/>
-            <a:ext cx="12191695" cy="155448"/>
+            <a:ext cx="12191695" cy="109728"/>
           </a:xfrm>
           <a:prstGeom prst="rect">
             <a:avLst/>
@@ -6144,7 +6244,7 @@
         </p:nvSpPr>
         <p:spPr>
           <a:xfrm>
-            <a:off x="566928" y="320040"/>
+            <a:off x="566928" y="310896"/>
             <a:ext cx="4663440" cy="182880"/>
           </a:xfrm>
           <a:prstGeom prst="rect">
@@ -6163,7 +6263,7 @@
               <a:buNone/>
             </a:pPr>
             <a:r>
-              <a:rPr lang="en-US" sz="900" b="1" spc="80" kern="0" dirty="0">
+              <a:rPr lang="en-US" sz="880" b="1" spc="50" kern="0" dirty="0">
                 <a:solidFill>
                   <a:srgbClr val="1877B9"/>
                 </a:solidFill>
@@ -6173,7 +6273,7 @@
               </a:rPr>
               <a:t>PROGRAMOVANIE V PYTHONE</a:t>
             </a:r>
-            <a:endParaRPr lang="en-US" sz="900" dirty="0"/>
+            <a:endParaRPr lang="en-US" sz="880" dirty="0"/>
           </a:p>
         </p:txBody>
       </p:sp>
@@ -6185,7 +6285,7 @@
         </p:nvSpPr>
         <p:spPr>
           <a:xfrm>
-            <a:off x="9829800" y="320040"/>
+            <a:off x="9829800" y="310896"/>
             <a:ext cx="1783080" cy="182880"/>
           </a:xfrm>
           <a:prstGeom prst="rect">
@@ -6204,7 +6304,7 @@
               <a:buNone/>
             </a:pPr>
             <a:r>
-              <a:rPr lang="en-US" sz="900" b="1" dirty="0">
+              <a:rPr lang="en-US" sz="880" b="1" dirty="0">
                 <a:solidFill>
                   <a:srgbClr val="5E6B78"/>
                 </a:solidFill>
@@ -6214,7 +6314,7 @@
               </a:rPr>
               <a:t>PREDNÁŠKA 04</a:t>
             </a:r>
-            <a:endParaRPr lang="en-US" sz="900" dirty="0"/>
+            <a:endParaRPr lang="en-US" sz="880" dirty="0"/>
           </a:p>
         </p:txBody>
       </p:sp>
@@ -6272,8 +6372,8 @@
         </p:nvSpPr>
         <p:spPr>
           <a:xfrm>
-            <a:off x="11109960" y="6501384"/>
-            <a:ext cx="457200" cy="146304"/>
+            <a:off x="10771632" y="6501384"/>
+            <a:ext cx="804672" cy="146304"/>
           </a:xfrm>
           <a:prstGeom prst="rect">
             <a:avLst/>
@@ -6291,7 +6391,7 @@
               <a:buNone/>
             </a:pPr>
             <a:r>
-              <a:rPr lang="en-US" sz="800" dirty="0">
+              <a:rPr lang="en-US" sz="780" dirty="0">
                 <a:solidFill>
                   <a:srgbClr val="5E6B78"/>
                 </a:solidFill>
@@ -6299,9 +6399,9 @@
                 <a:ea typeface="Consolas" pitchFamily="34" charset="-122"/>
                 <a:cs typeface="Consolas" pitchFamily="34" charset="-120"/>
               </a:rPr>
-              <a:t>17</a:t>
-            </a:r>
-            <a:endParaRPr lang="en-US" sz="800" dirty="0"/>
+              <a:t>17 / 18</a:t>
+            </a:r>
+            <a:endParaRPr lang="en-US" sz="780" dirty="0"/>
           </a:p>
         </p:txBody>
       </p:sp>
@@ -6313,8 +6413,8 @@
         </p:nvSpPr>
         <p:spPr>
           <a:xfrm>
-            <a:off x="658368" y="932688"/>
-            <a:ext cx="10789920" cy="713232"/>
+            <a:off x="658368" y="914400"/>
+            <a:ext cx="10881360" cy="713232"/>
           </a:xfrm>
           <a:prstGeom prst="rect">
             <a:avLst/>
@@ -6332,17 +6432,17 @@
               <a:buNone/>
             </a:pPr>
             <a:r>
-              <a:rPr lang="en-US" sz="2900" b="1" dirty="0">
+              <a:rPr lang="en-US" sz="2850" b="1" dirty="0">
                 <a:solidFill>
                   <a:srgbClr val="16324F"/>
                 </a:solidFill>
-                <a:latin typeface="Aptos" pitchFamily="34" charset="0"/>
-                <a:ea typeface="Aptos" pitchFamily="34" charset="-122"/>
-                <a:cs typeface="Aptos" pitchFamily="34" charset="-120"/>
+                <a:latin typeface="Aptos Display" pitchFamily="34" charset="0"/>
+                <a:ea typeface="Aptos Display" pitchFamily="34" charset="-122"/>
+                <a:cs typeface="Aptos Display" pitchFamily="34" charset="-120"/>
               </a:rPr>
               <a:t>Nástroje odpovedajú na rozdielne otázky</a:t>
             </a:r>
-            <a:endParaRPr lang="en-US" sz="2900" dirty="0"/>
+            <a:endParaRPr lang="en-US" sz="2850" dirty="0"/>
           </a:p>
         </p:txBody>
       </p:sp>
@@ -6361,8 +6461,8 @@
           </p:nvPr>
         </p:nvGraphicFramePr>
         <p:xfrm>
-          <a:off x="658368" y="1847088"/>
-          <a:ext cx="10899648" cy="3520440"/>
+          <a:off x="658368" y="1828800"/>
+          <a:ext cx="10899648" cy="3566160"/>
         </p:xfrm>
         <a:graphic>
           <a:graphicData uri="http://schemas.openxmlformats.org/drawingml/2006/table">
@@ -6373,7 +6473,7 @@
                 <a:gridCol w="4846320"/>
                 <a:gridCol w="4224528"/>
               </a:tblGrid>
-              <a:tr h="548640">
+              <a:tr h="566928">
                 <a:tc>
                   <a:txBody>
                     <a:bodyPr/>
@@ -6383,7 +6483,7 @@
                         <a:buNone/>
                       </a:pPr>
                       <a:r>
-                        <a:rPr lang="en-US" sz="1550" dirty="0">
+                        <a:rPr lang="en-US" sz="1500" dirty="0">
                           <a:solidFill>
                             <a:srgbClr val="18212B"/>
                           </a:solidFill>
@@ -6393,15 +6493,15 @@
                         </a:rPr>
                         <a:t>Nástroj</a:t>
                       </a:r>
-                      <a:endParaRPr lang="en-US" sz="1550" dirty="0">
+                      <a:endParaRPr lang="en-US" sz="1500" dirty="0">
                         <a:latin typeface="Aptos" charset="0"/>
                         <a:ea typeface="Aptos" charset="0"/>
                         <a:cs typeface="Aptos" charset="0"/>
                       </a:endParaRPr>
                     </a:p>
                   </a:txBody>
-                  <a:tcPr marL="82296" marR="82296" marT="82296" marB="82296" anchor="mid">
-                    <a:lnL w="7620" cap="flat" cmpd="sng" algn="ctr">
+                  <a:tcPr marL="91440" marR="91440" marT="91440" marB="91440" anchor="mid">
+                    <a:lnL w="5715" cap="flat" cmpd="sng" algn="ctr">
                       <a:solidFill>
                         <a:srgbClr val="D8E0E6"/>
                       </a:solidFill>
@@ -6410,7 +6510,7 @@
                       <a:headEnd type="none" w="med" len="med"/>
                       <a:tailEnd type="none" w="med" len="med"/>
                     </a:lnL>
-                    <a:lnR w="7620" cap="flat" cmpd="sng" algn="ctr">
+                    <a:lnR w="5715" cap="flat" cmpd="sng" algn="ctr">
                       <a:solidFill>
                         <a:srgbClr val="D8E0E6"/>
                       </a:solidFill>
@@ -6419,7 +6519,7 @@
                       <a:headEnd type="none" w="med" len="med"/>
                       <a:tailEnd type="none" w="med" len="med"/>
                     </a:lnR>
-                    <a:lnT w="7620" cap="flat" cmpd="sng" algn="ctr">
+                    <a:lnT w="5715" cap="flat" cmpd="sng" algn="ctr">
                       <a:solidFill>
                         <a:srgbClr val="D8E0E6"/>
                       </a:solidFill>
@@ -6428,7 +6528,7 @@
                       <a:headEnd type="none" w="med" len="med"/>
                       <a:tailEnd type="none" w="med" len="med"/>
                     </a:lnT>
-                    <a:lnB w="7620" cap="flat" cmpd="sng" algn="ctr">
+                    <a:lnB w="5715" cap="flat" cmpd="sng" algn="ctr">
                       <a:solidFill>
                         <a:srgbClr val="D8E0E6"/>
                       </a:solidFill>
@@ -6451,7 +6551,7 @@
                         <a:buNone/>
                       </a:pPr>
                       <a:r>
-                        <a:rPr lang="en-US" sz="1550" dirty="0">
+                        <a:rPr lang="en-US" sz="1500" dirty="0">
                           <a:solidFill>
                             <a:srgbClr val="18212B"/>
                           </a:solidFill>
@@ -6461,15 +6561,15 @@
                         </a:rPr>
                         <a:t>Otázka</a:t>
                       </a:r>
-                      <a:endParaRPr lang="en-US" sz="1550" dirty="0">
+                      <a:endParaRPr lang="en-US" sz="1500" dirty="0">
                         <a:latin typeface="Aptos" charset="0"/>
                         <a:ea typeface="Aptos" charset="0"/>
                         <a:cs typeface="Aptos" charset="0"/>
                       </a:endParaRPr>
                     </a:p>
                   </a:txBody>
-                  <a:tcPr marL="82296" marR="82296" marT="82296" marB="82296" anchor="mid">
-                    <a:lnL w="7620" cap="flat" cmpd="sng" algn="ctr">
+                  <a:tcPr marL="91440" marR="91440" marT="91440" marB="91440" anchor="mid">
+                    <a:lnL w="5715" cap="flat" cmpd="sng" algn="ctr">
                       <a:solidFill>
                         <a:srgbClr val="D8E0E6"/>
                       </a:solidFill>
@@ -6478,7 +6578,7 @@
                       <a:headEnd type="none" w="med" len="med"/>
                       <a:tailEnd type="none" w="med" len="med"/>
                     </a:lnL>
-                    <a:lnR w="7620" cap="flat" cmpd="sng" algn="ctr">
+                    <a:lnR w="5715" cap="flat" cmpd="sng" algn="ctr">
                       <a:solidFill>
                         <a:srgbClr val="D8E0E6"/>
                       </a:solidFill>
@@ -6487,7 +6587,7 @@
                       <a:headEnd type="none" w="med" len="med"/>
                       <a:tailEnd type="none" w="med" len="med"/>
                     </a:lnR>
-                    <a:lnT w="7620" cap="flat" cmpd="sng" algn="ctr">
+                    <a:lnT w="5715" cap="flat" cmpd="sng" algn="ctr">
                       <a:solidFill>
                         <a:srgbClr val="D8E0E6"/>
                       </a:solidFill>
@@ -6496,7 +6596,7 @@
                       <a:headEnd type="none" w="med" len="med"/>
                       <a:tailEnd type="none" w="med" len="med"/>
                     </a:lnT>
-                    <a:lnB w="7620" cap="flat" cmpd="sng" algn="ctr">
+                    <a:lnB w="5715" cap="flat" cmpd="sng" algn="ctr">
                       <a:solidFill>
                         <a:srgbClr val="D8E0E6"/>
                       </a:solidFill>
@@ -6519,7 +6619,7 @@
                         <a:buNone/>
                       </a:pPr>
                       <a:r>
-                        <a:rPr lang="en-US" sz="1550" dirty="0">
+                        <a:rPr lang="en-US" sz="1500" dirty="0">
                           <a:solidFill>
                             <a:srgbClr val="18212B"/>
                           </a:solidFill>
@@ -6529,15 +6629,15 @@
                         </a:rPr>
                         <a:t>Príklad</a:t>
                       </a:r>
-                      <a:endParaRPr lang="en-US" sz="1550" dirty="0">
+                      <a:endParaRPr lang="en-US" sz="1500" dirty="0">
                         <a:latin typeface="Aptos" charset="0"/>
                         <a:ea typeface="Aptos" charset="0"/>
                         <a:cs typeface="Aptos" charset="0"/>
                       </a:endParaRPr>
                     </a:p>
                   </a:txBody>
-                  <a:tcPr marL="82296" marR="82296" marT="82296" marB="82296" anchor="mid">
-                    <a:lnL w="7620" cap="flat" cmpd="sng" algn="ctr">
+                  <a:tcPr marL="91440" marR="91440" marT="91440" marB="91440" anchor="mid">
+                    <a:lnL w="5715" cap="flat" cmpd="sng" algn="ctr">
                       <a:solidFill>
                         <a:srgbClr val="D8E0E6"/>
                       </a:solidFill>
@@ -6546,7 +6646,7 @@
                       <a:headEnd type="none" w="med" len="med"/>
                       <a:tailEnd type="none" w="med" len="med"/>
                     </a:lnL>
-                    <a:lnR w="7620" cap="flat" cmpd="sng" algn="ctr">
+                    <a:lnR w="5715" cap="flat" cmpd="sng" algn="ctr">
                       <a:solidFill>
                         <a:srgbClr val="D8E0E6"/>
                       </a:solidFill>
@@ -6555,7 +6655,7 @@
                       <a:headEnd type="none" w="med" len="med"/>
                       <a:tailEnd type="none" w="med" len="med"/>
                     </a:lnR>
-                    <a:lnT w="7620" cap="flat" cmpd="sng" algn="ctr">
+                    <a:lnT w="5715" cap="flat" cmpd="sng" algn="ctr">
                       <a:solidFill>
                         <a:srgbClr val="D8E0E6"/>
                       </a:solidFill>
@@ -6564,7 +6664,7 @@
                       <a:headEnd type="none" w="med" len="med"/>
                       <a:tailEnd type="none" w="med" len="med"/>
                     </a:lnT>
-                    <a:lnB w="7620" cap="flat" cmpd="sng" algn="ctr">
+                    <a:lnB w="5715" cap="flat" cmpd="sng" algn="ctr">
                       <a:solidFill>
                         <a:srgbClr val="D8E0E6"/>
                       </a:solidFill>
@@ -6579,7 +6679,7 @@
                   </a:tcPr>
                 </a:tc>
               </a:tr>
-              <a:tr h="548640">
+              <a:tr h="566928">
                 <a:tc>
                   <a:txBody>
                     <a:bodyPr/>
@@ -6589,7 +6689,7 @@
                         <a:buNone/>
                       </a:pPr>
                       <a:r>
-                        <a:rPr lang="en-US" sz="1550" dirty="0">
+                        <a:rPr lang="en-US" sz="1500" dirty="0">
                           <a:solidFill>
                             <a:srgbClr val="18212B"/>
                           </a:solidFill>
@@ -6599,15 +6699,15 @@
                         </a:rPr>
                         <a:t>formatter</a:t>
                       </a:r>
-                      <a:endParaRPr lang="en-US" sz="1550" dirty="0">
+                      <a:endParaRPr lang="en-US" sz="1500" dirty="0">
                         <a:latin typeface="Aptos" charset="0"/>
                         <a:ea typeface="Aptos" charset="0"/>
                         <a:cs typeface="Aptos" charset="0"/>
                       </a:endParaRPr>
                     </a:p>
                   </a:txBody>
-                  <a:tcPr marL="82296" marR="82296" marT="82296" marB="82296" anchor="mid">
-                    <a:lnL w="7620" cap="flat" cmpd="sng" algn="ctr">
+                  <a:tcPr marL="91440" marR="91440" marT="91440" marB="91440" anchor="mid">
+                    <a:lnL w="5715" cap="flat" cmpd="sng" algn="ctr">
                       <a:solidFill>
                         <a:srgbClr val="D8E0E6"/>
                       </a:solidFill>
@@ -6616,7 +6716,7 @@
                       <a:headEnd type="none" w="med" len="med"/>
                       <a:tailEnd type="none" w="med" len="med"/>
                     </a:lnL>
-                    <a:lnR w="7620" cap="flat" cmpd="sng" algn="ctr">
+                    <a:lnR w="5715" cap="flat" cmpd="sng" algn="ctr">
                       <a:solidFill>
                         <a:srgbClr val="D8E0E6"/>
                       </a:solidFill>
@@ -6625,7 +6725,7 @@
                       <a:headEnd type="none" w="med" len="med"/>
                       <a:tailEnd type="none" w="med" len="med"/>
                     </a:lnR>
-                    <a:lnT w="7620" cap="flat" cmpd="sng" algn="ctr">
+                    <a:lnT w="5715" cap="flat" cmpd="sng" algn="ctr">
                       <a:solidFill>
                         <a:srgbClr val="D8E0E6"/>
                       </a:solidFill>
@@ -6634,7 +6734,7 @@
                       <a:headEnd type="none" w="med" len="med"/>
                       <a:tailEnd type="none" w="med" len="med"/>
                     </a:lnT>
-                    <a:lnB w="7620" cap="flat" cmpd="sng" algn="ctr">
+                    <a:lnB w="5715" cap="flat" cmpd="sng" algn="ctr">
                       <a:solidFill>
                         <a:srgbClr val="D8E0E6"/>
                       </a:solidFill>
@@ -6657,7 +6757,7 @@
                         <a:buNone/>
                       </a:pPr>
                       <a:r>
-                        <a:rPr lang="en-US" sz="1550" dirty="0">
+                        <a:rPr lang="en-US" sz="1500" dirty="0">
                           <a:solidFill>
                             <a:srgbClr val="18212B"/>
                           </a:solidFill>
@@ -6667,15 +6767,15 @@
                         </a:rPr>
                         <a:t>je zápis konzistentný?</a:t>
                       </a:r>
-                      <a:endParaRPr lang="en-US" sz="1550" dirty="0">
+                      <a:endParaRPr lang="en-US" sz="1500" dirty="0">
                         <a:latin typeface="Aptos" charset="0"/>
                         <a:ea typeface="Aptos" charset="0"/>
                         <a:cs typeface="Aptos" charset="0"/>
                       </a:endParaRPr>
                     </a:p>
                   </a:txBody>
-                  <a:tcPr marL="82296" marR="82296" marT="82296" marB="82296" anchor="mid">
-                    <a:lnL w="7620" cap="flat" cmpd="sng" algn="ctr">
+                  <a:tcPr marL="91440" marR="91440" marT="91440" marB="91440" anchor="mid">
+                    <a:lnL w="5715" cap="flat" cmpd="sng" algn="ctr">
                       <a:solidFill>
                         <a:srgbClr val="D8E0E6"/>
                       </a:solidFill>
@@ -6684,7 +6784,7 @@
                       <a:headEnd type="none" w="med" len="med"/>
                       <a:tailEnd type="none" w="med" len="med"/>
                     </a:lnL>
-                    <a:lnR w="7620" cap="flat" cmpd="sng" algn="ctr">
+                    <a:lnR w="5715" cap="flat" cmpd="sng" algn="ctr">
                       <a:solidFill>
                         <a:srgbClr val="D8E0E6"/>
                       </a:solidFill>
@@ -6693,7 +6793,7 @@
                       <a:headEnd type="none" w="med" len="med"/>
                       <a:tailEnd type="none" w="med" len="med"/>
                     </a:lnR>
-                    <a:lnT w="7620" cap="flat" cmpd="sng" algn="ctr">
+                    <a:lnT w="5715" cap="flat" cmpd="sng" algn="ctr">
                       <a:solidFill>
                         <a:srgbClr val="D8E0E6"/>
                       </a:solidFill>
@@ -6702,7 +6802,7 @@
                       <a:headEnd type="none" w="med" len="med"/>
                       <a:tailEnd type="none" w="med" len="med"/>
                     </a:lnT>
-                    <a:lnB w="7620" cap="flat" cmpd="sng" algn="ctr">
+                    <a:lnB w="5715" cap="flat" cmpd="sng" algn="ctr">
                       <a:solidFill>
                         <a:srgbClr val="D8E0E6"/>
                       </a:solidFill>
@@ -6725,7 +6825,7 @@
                         <a:buNone/>
                       </a:pPr>
                       <a:r>
-                        <a:rPr lang="en-US" sz="1550" dirty="0">
+                        <a:rPr lang="en-US" sz="1500" dirty="0">
                           <a:solidFill>
                             <a:srgbClr val="18212B"/>
                           </a:solidFill>
@@ -6735,15 +6835,15 @@
                         </a:rPr>
                         <a:t>ruff format .</a:t>
                       </a:r>
-                      <a:endParaRPr lang="en-US" sz="1550" dirty="0">
+                      <a:endParaRPr lang="en-US" sz="1500" dirty="0">
                         <a:latin typeface="Aptos" charset="0"/>
                         <a:ea typeface="Aptos" charset="0"/>
                         <a:cs typeface="Aptos" charset="0"/>
                       </a:endParaRPr>
                     </a:p>
                   </a:txBody>
-                  <a:tcPr marL="82296" marR="82296" marT="82296" marB="82296" anchor="mid">
-                    <a:lnL w="7620" cap="flat" cmpd="sng" algn="ctr">
+                  <a:tcPr marL="91440" marR="91440" marT="91440" marB="91440" anchor="mid">
+                    <a:lnL w="5715" cap="flat" cmpd="sng" algn="ctr">
                       <a:solidFill>
                         <a:srgbClr val="D8E0E6"/>
                       </a:solidFill>
@@ -6752,7 +6852,7 @@
                       <a:headEnd type="none" w="med" len="med"/>
                       <a:tailEnd type="none" w="med" len="med"/>
                     </a:lnL>
-                    <a:lnR w="7620" cap="flat" cmpd="sng" algn="ctr">
+                    <a:lnR w="5715" cap="flat" cmpd="sng" algn="ctr">
                       <a:solidFill>
                         <a:srgbClr val="D8E0E6"/>
                       </a:solidFill>
@@ -6761,7 +6861,7 @@
                       <a:headEnd type="none" w="med" len="med"/>
                       <a:tailEnd type="none" w="med" len="med"/>
                     </a:lnR>
-                    <a:lnT w="7620" cap="flat" cmpd="sng" algn="ctr">
+                    <a:lnT w="5715" cap="flat" cmpd="sng" algn="ctr">
                       <a:solidFill>
                         <a:srgbClr val="D8E0E6"/>
                       </a:solidFill>
@@ -6770,7 +6870,7 @@
                       <a:headEnd type="none" w="med" len="med"/>
                       <a:tailEnd type="none" w="med" len="med"/>
                     </a:lnT>
-                    <a:lnB w="7620" cap="flat" cmpd="sng" algn="ctr">
+                    <a:lnB w="5715" cap="flat" cmpd="sng" algn="ctr">
                       <a:solidFill>
                         <a:srgbClr val="D8E0E6"/>
                       </a:solidFill>
@@ -6785,7 +6885,7 @@
                   </a:tcPr>
                 </a:tc>
               </a:tr>
-              <a:tr h="548640">
+              <a:tr h="566928">
                 <a:tc>
                   <a:txBody>
                     <a:bodyPr/>
@@ -6795,7 +6895,7 @@
                         <a:buNone/>
                       </a:pPr>
                       <a:r>
-                        <a:rPr lang="en-US" sz="1550" dirty="0">
+                        <a:rPr lang="en-US" sz="1500" dirty="0">
                           <a:solidFill>
                             <a:srgbClr val="18212B"/>
                           </a:solidFill>
@@ -6805,15 +6905,15 @@
                         </a:rPr>
                         <a:t>linter</a:t>
                       </a:r>
-                      <a:endParaRPr lang="en-US" sz="1550" dirty="0">
+                      <a:endParaRPr lang="en-US" sz="1500" dirty="0">
                         <a:latin typeface="Aptos" charset="0"/>
                         <a:ea typeface="Aptos" charset="0"/>
                         <a:cs typeface="Aptos" charset="0"/>
                       </a:endParaRPr>
                     </a:p>
                   </a:txBody>
-                  <a:tcPr marL="82296" marR="82296" marT="82296" marB="82296" anchor="mid">
-                    <a:lnL w="7620" cap="flat" cmpd="sng" algn="ctr">
+                  <a:tcPr marL="91440" marR="91440" marT="91440" marB="91440" anchor="mid">
+                    <a:lnL w="5715" cap="flat" cmpd="sng" algn="ctr">
                       <a:solidFill>
                         <a:srgbClr val="D8E0E6"/>
                       </a:solidFill>
@@ -6822,7 +6922,7 @@
                       <a:headEnd type="none" w="med" len="med"/>
                       <a:tailEnd type="none" w="med" len="med"/>
                     </a:lnL>
-                    <a:lnR w="7620" cap="flat" cmpd="sng" algn="ctr">
+                    <a:lnR w="5715" cap="flat" cmpd="sng" algn="ctr">
                       <a:solidFill>
                         <a:srgbClr val="D8E0E6"/>
                       </a:solidFill>
@@ -6831,7 +6931,7 @@
                       <a:headEnd type="none" w="med" len="med"/>
                       <a:tailEnd type="none" w="med" len="med"/>
                     </a:lnR>
-                    <a:lnT w="7620" cap="flat" cmpd="sng" algn="ctr">
+                    <a:lnT w="5715" cap="flat" cmpd="sng" algn="ctr">
                       <a:solidFill>
                         <a:srgbClr val="D8E0E6"/>
                       </a:solidFill>
@@ -6840,7 +6940,7 @@
                       <a:headEnd type="none" w="med" len="med"/>
                       <a:tailEnd type="none" w="med" len="med"/>
                     </a:lnT>
-                    <a:lnB w="7620" cap="flat" cmpd="sng" algn="ctr">
+                    <a:lnB w="5715" cap="flat" cmpd="sng" algn="ctr">
                       <a:solidFill>
                         <a:srgbClr val="D8E0E6"/>
                       </a:solidFill>
@@ -6863,7 +6963,7 @@
                         <a:buNone/>
                       </a:pPr>
                       <a:r>
-                        <a:rPr lang="en-US" sz="1550" dirty="0">
+                        <a:rPr lang="en-US" sz="1500" dirty="0">
                           <a:solidFill>
                             <a:srgbClr val="18212B"/>
                           </a:solidFill>
@@ -6873,15 +6973,15 @@
                         </a:rPr>
                         <a:t>je v kóde podozrivý vzor?</a:t>
                       </a:r>
-                      <a:endParaRPr lang="en-US" sz="1550" dirty="0">
+                      <a:endParaRPr lang="en-US" sz="1500" dirty="0">
                         <a:latin typeface="Aptos" charset="0"/>
                         <a:ea typeface="Aptos" charset="0"/>
                         <a:cs typeface="Aptos" charset="0"/>
                       </a:endParaRPr>
                     </a:p>
                   </a:txBody>
-                  <a:tcPr marL="82296" marR="82296" marT="82296" marB="82296" anchor="mid">
-                    <a:lnL w="7620" cap="flat" cmpd="sng" algn="ctr">
+                  <a:tcPr marL="91440" marR="91440" marT="91440" marB="91440" anchor="mid">
+                    <a:lnL w="5715" cap="flat" cmpd="sng" algn="ctr">
                       <a:solidFill>
                         <a:srgbClr val="D8E0E6"/>
                       </a:solidFill>
@@ -6890,7 +6990,7 @@
                       <a:headEnd type="none" w="med" len="med"/>
                       <a:tailEnd type="none" w="med" len="med"/>
                     </a:lnL>
-                    <a:lnR w="7620" cap="flat" cmpd="sng" algn="ctr">
+                    <a:lnR w="5715" cap="flat" cmpd="sng" algn="ctr">
                       <a:solidFill>
                         <a:srgbClr val="D8E0E6"/>
                       </a:solidFill>
@@ -6899,7 +6999,7 @@
                       <a:headEnd type="none" w="med" len="med"/>
                       <a:tailEnd type="none" w="med" len="med"/>
                     </a:lnR>
-                    <a:lnT w="7620" cap="flat" cmpd="sng" algn="ctr">
+                    <a:lnT w="5715" cap="flat" cmpd="sng" algn="ctr">
                       <a:solidFill>
                         <a:srgbClr val="D8E0E6"/>
                       </a:solidFill>
@@ -6908,7 +7008,7 @@
                       <a:headEnd type="none" w="med" len="med"/>
                       <a:tailEnd type="none" w="med" len="med"/>
                     </a:lnT>
-                    <a:lnB w="7620" cap="flat" cmpd="sng" algn="ctr">
+                    <a:lnB w="5715" cap="flat" cmpd="sng" algn="ctr">
                       <a:solidFill>
                         <a:srgbClr val="D8E0E6"/>
                       </a:solidFill>
@@ -6931,7 +7031,7 @@
                         <a:buNone/>
                       </a:pPr>
                       <a:r>
-                        <a:rPr lang="en-US" sz="1550" dirty="0">
+                        <a:rPr lang="en-US" sz="1500" dirty="0">
                           <a:solidFill>
                             <a:srgbClr val="18212B"/>
                           </a:solidFill>
@@ -6941,15 +7041,15 @@
                         </a:rPr>
                         <a:t>ruff check .</a:t>
                       </a:r>
-                      <a:endParaRPr lang="en-US" sz="1550" dirty="0">
+                      <a:endParaRPr lang="en-US" sz="1500" dirty="0">
                         <a:latin typeface="Aptos" charset="0"/>
                         <a:ea typeface="Aptos" charset="0"/>
                         <a:cs typeface="Aptos" charset="0"/>
                       </a:endParaRPr>
                     </a:p>
                   </a:txBody>
-                  <a:tcPr marL="82296" marR="82296" marT="82296" marB="82296" anchor="mid">
-                    <a:lnL w="7620" cap="flat" cmpd="sng" algn="ctr">
+                  <a:tcPr marL="91440" marR="91440" marT="91440" marB="91440" anchor="mid">
+                    <a:lnL w="5715" cap="flat" cmpd="sng" algn="ctr">
                       <a:solidFill>
                         <a:srgbClr val="D8E0E6"/>
                       </a:solidFill>
@@ -6958,7 +7058,7 @@
                       <a:headEnd type="none" w="med" len="med"/>
                       <a:tailEnd type="none" w="med" len="med"/>
                     </a:lnL>
-                    <a:lnR w="7620" cap="flat" cmpd="sng" algn="ctr">
+                    <a:lnR w="5715" cap="flat" cmpd="sng" algn="ctr">
                       <a:solidFill>
                         <a:srgbClr val="D8E0E6"/>
                       </a:solidFill>
@@ -6967,7 +7067,7 @@
                       <a:headEnd type="none" w="med" len="med"/>
                       <a:tailEnd type="none" w="med" len="med"/>
                     </a:lnR>
-                    <a:lnT w="7620" cap="flat" cmpd="sng" algn="ctr">
+                    <a:lnT w="5715" cap="flat" cmpd="sng" algn="ctr">
                       <a:solidFill>
                         <a:srgbClr val="D8E0E6"/>
                       </a:solidFill>
@@ -6976,7 +7076,7 @@
                       <a:headEnd type="none" w="med" len="med"/>
                       <a:tailEnd type="none" w="med" len="med"/>
                     </a:lnT>
-                    <a:lnB w="7620" cap="flat" cmpd="sng" algn="ctr">
+                    <a:lnB w="5715" cap="flat" cmpd="sng" algn="ctr">
                       <a:solidFill>
                         <a:srgbClr val="D8E0E6"/>
                       </a:solidFill>
@@ -6991,7 +7091,7 @@
                   </a:tcPr>
                 </a:tc>
               </a:tr>
-              <a:tr h="548640">
+              <a:tr h="566928">
                 <a:tc>
                   <a:txBody>
                     <a:bodyPr/>
@@ -7001,7 +7101,7 @@
                         <a:buNone/>
                       </a:pPr>
                       <a:r>
-                        <a:rPr lang="en-US" sz="1550" dirty="0">
+                        <a:rPr lang="en-US" sz="1500" dirty="0">
                           <a:solidFill>
                             <a:srgbClr val="18212B"/>
                           </a:solidFill>
@@ -7011,15 +7111,15 @@
                         </a:rPr>
                         <a:t>type checker</a:t>
                       </a:r>
-                      <a:endParaRPr lang="en-US" sz="1550" dirty="0">
+                      <a:endParaRPr lang="en-US" sz="1500" dirty="0">
                         <a:latin typeface="Aptos" charset="0"/>
                         <a:ea typeface="Aptos" charset="0"/>
                         <a:cs typeface="Aptos" charset="0"/>
                       </a:endParaRPr>
                     </a:p>
                   </a:txBody>
-                  <a:tcPr marL="82296" marR="82296" marT="82296" marB="82296" anchor="mid">
-                    <a:lnL w="7620" cap="flat" cmpd="sng" algn="ctr">
+                  <a:tcPr marL="91440" marR="91440" marT="91440" marB="91440" anchor="mid">
+                    <a:lnL w="5715" cap="flat" cmpd="sng" algn="ctr">
                       <a:solidFill>
                         <a:srgbClr val="D8E0E6"/>
                       </a:solidFill>
@@ -7028,7 +7128,7 @@
                       <a:headEnd type="none" w="med" len="med"/>
                       <a:tailEnd type="none" w="med" len="med"/>
                     </a:lnL>
-                    <a:lnR w="7620" cap="flat" cmpd="sng" algn="ctr">
+                    <a:lnR w="5715" cap="flat" cmpd="sng" algn="ctr">
                       <a:solidFill>
                         <a:srgbClr val="D8E0E6"/>
                       </a:solidFill>
@@ -7037,7 +7137,7 @@
                       <a:headEnd type="none" w="med" len="med"/>
                       <a:tailEnd type="none" w="med" len="med"/>
                     </a:lnR>
-                    <a:lnT w="7620" cap="flat" cmpd="sng" algn="ctr">
+                    <a:lnT w="5715" cap="flat" cmpd="sng" algn="ctr">
                       <a:solidFill>
                         <a:srgbClr val="D8E0E6"/>
                       </a:solidFill>
@@ -7046,7 +7146,7 @@
                       <a:headEnd type="none" w="med" len="med"/>
                       <a:tailEnd type="none" w="med" len="med"/>
                     </a:lnT>
-                    <a:lnB w="7620" cap="flat" cmpd="sng" algn="ctr">
+                    <a:lnB w="5715" cap="flat" cmpd="sng" algn="ctr">
                       <a:solidFill>
                         <a:srgbClr val="D8E0E6"/>
                       </a:solidFill>
@@ -7069,7 +7169,7 @@
                         <a:buNone/>
                       </a:pPr>
                       <a:r>
-                        <a:rPr lang="en-US" sz="1550" dirty="0">
+                        <a:rPr lang="en-US" sz="1500" dirty="0">
                           <a:solidFill>
                             <a:srgbClr val="18212B"/>
                           </a:solidFill>
@@ -7079,15 +7179,15 @@
                         </a:rPr>
                         <a:t>sedia deklarované typy?</a:t>
                       </a:r>
-                      <a:endParaRPr lang="en-US" sz="1550" dirty="0">
+                      <a:endParaRPr lang="en-US" sz="1500" dirty="0">
                         <a:latin typeface="Aptos" charset="0"/>
                         <a:ea typeface="Aptos" charset="0"/>
                         <a:cs typeface="Aptos" charset="0"/>
                       </a:endParaRPr>
                     </a:p>
                   </a:txBody>
-                  <a:tcPr marL="82296" marR="82296" marT="82296" marB="82296" anchor="mid">
-                    <a:lnL w="7620" cap="flat" cmpd="sng" algn="ctr">
+                  <a:tcPr marL="91440" marR="91440" marT="91440" marB="91440" anchor="mid">
+                    <a:lnL w="5715" cap="flat" cmpd="sng" algn="ctr">
                       <a:solidFill>
                         <a:srgbClr val="D8E0E6"/>
                       </a:solidFill>
@@ -7096,7 +7196,7 @@
                       <a:headEnd type="none" w="med" len="med"/>
                       <a:tailEnd type="none" w="med" len="med"/>
                     </a:lnL>
-                    <a:lnR w="7620" cap="flat" cmpd="sng" algn="ctr">
+                    <a:lnR w="5715" cap="flat" cmpd="sng" algn="ctr">
                       <a:solidFill>
                         <a:srgbClr val="D8E0E6"/>
                       </a:solidFill>
@@ -7105,7 +7205,7 @@
                       <a:headEnd type="none" w="med" len="med"/>
                       <a:tailEnd type="none" w="med" len="med"/>
                     </a:lnR>
-                    <a:lnT w="7620" cap="flat" cmpd="sng" algn="ctr">
+                    <a:lnT w="5715" cap="flat" cmpd="sng" algn="ctr">
                       <a:solidFill>
                         <a:srgbClr val="D8E0E6"/>
                       </a:solidFill>
@@ -7114,7 +7214,7 @@
                       <a:headEnd type="none" w="med" len="med"/>
                       <a:tailEnd type="none" w="med" len="med"/>
                     </a:lnT>
-                    <a:lnB w="7620" cap="flat" cmpd="sng" algn="ctr">
+                    <a:lnB w="5715" cap="flat" cmpd="sng" algn="ctr">
                       <a:solidFill>
                         <a:srgbClr val="D8E0E6"/>
                       </a:solidFill>
@@ -7137,7 +7237,7 @@
                         <a:buNone/>
                       </a:pPr>
                       <a:r>
-                        <a:rPr lang="en-US" sz="1550" dirty="0">
+                        <a:rPr lang="en-US" sz="1500" dirty="0">
                           <a:solidFill>
                             <a:srgbClr val="18212B"/>
                           </a:solidFill>
@@ -7147,15 +7247,15 @@
                         </a:rPr>
                         <a:t>pyright</a:t>
                       </a:r>
-                      <a:endParaRPr lang="en-US" sz="1550" dirty="0">
+                      <a:endParaRPr lang="en-US" sz="1500" dirty="0">
                         <a:latin typeface="Aptos" charset="0"/>
                         <a:ea typeface="Aptos" charset="0"/>
                         <a:cs typeface="Aptos" charset="0"/>
                       </a:endParaRPr>
                     </a:p>
                   </a:txBody>
-                  <a:tcPr marL="82296" marR="82296" marT="82296" marB="82296" anchor="mid">
-                    <a:lnL w="7620" cap="flat" cmpd="sng" algn="ctr">
+                  <a:tcPr marL="91440" marR="91440" marT="91440" marB="91440" anchor="mid">
+                    <a:lnL w="5715" cap="flat" cmpd="sng" algn="ctr">
                       <a:solidFill>
                         <a:srgbClr val="D8E0E6"/>
                       </a:solidFill>
@@ -7164,7 +7264,7 @@
                       <a:headEnd type="none" w="med" len="med"/>
                       <a:tailEnd type="none" w="med" len="med"/>
                     </a:lnL>
-                    <a:lnR w="7620" cap="flat" cmpd="sng" algn="ctr">
+                    <a:lnR w="5715" cap="flat" cmpd="sng" algn="ctr">
                       <a:solidFill>
                         <a:srgbClr val="D8E0E6"/>
                       </a:solidFill>
@@ -7173,7 +7273,7 @@
                       <a:headEnd type="none" w="med" len="med"/>
                       <a:tailEnd type="none" w="med" len="med"/>
                     </a:lnR>
-                    <a:lnT w="7620" cap="flat" cmpd="sng" algn="ctr">
+                    <a:lnT w="5715" cap="flat" cmpd="sng" algn="ctr">
                       <a:solidFill>
                         <a:srgbClr val="D8E0E6"/>
                       </a:solidFill>
@@ -7182,7 +7282,7 @@
                       <a:headEnd type="none" w="med" len="med"/>
                       <a:tailEnd type="none" w="med" len="med"/>
                     </a:lnT>
-                    <a:lnB w="7620" cap="flat" cmpd="sng" algn="ctr">
+                    <a:lnB w="5715" cap="flat" cmpd="sng" algn="ctr">
                       <a:solidFill>
                         <a:srgbClr val="D8E0E6"/>
                       </a:solidFill>
@@ -7197,7 +7297,7 @@
                   </a:tcPr>
                 </a:tc>
               </a:tr>
-              <a:tr h="548640">
+              <a:tr h="566928">
                 <a:tc>
                   <a:txBody>
                     <a:bodyPr/>
@@ -7207,7 +7307,7 @@
                         <a:buNone/>
                       </a:pPr>
                       <a:r>
-                        <a:rPr lang="en-US" sz="1550" dirty="0">
+                        <a:rPr lang="en-US" sz="1500" dirty="0">
                           <a:solidFill>
                             <a:srgbClr val="18212B"/>
                           </a:solidFill>
@@ -7217,15 +7317,15 @@
                         </a:rPr>
                         <a:t>pytest</a:t>
                       </a:r>
-                      <a:endParaRPr lang="en-US" sz="1550" dirty="0">
+                      <a:endParaRPr lang="en-US" sz="1500" dirty="0">
                         <a:latin typeface="Aptos" charset="0"/>
                         <a:ea typeface="Aptos" charset="0"/>
                         <a:cs typeface="Aptos" charset="0"/>
                       </a:endParaRPr>
                     </a:p>
                   </a:txBody>
-                  <a:tcPr marL="82296" marR="82296" marT="82296" marB="82296" anchor="mid">
-                    <a:lnL w="7620" cap="flat" cmpd="sng" algn="ctr">
+                  <a:tcPr marL="91440" marR="91440" marT="91440" marB="91440" anchor="mid">
+                    <a:lnL w="5715" cap="flat" cmpd="sng" algn="ctr">
                       <a:solidFill>
                         <a:srgbClr val="D8E0E6"/>
                       </a:solidFill>
@@ -7234,7 +7334,7 @@
                       <a:headEnd type="none" w="med" len="med"/>
                       <a:tailEnd type="none" w="med" len="med"/>
                     </a:lnL>
-                    <a:lnR w="7620" cap="flat" cmpd="sng" algn="ctr">
+                    <a:lnR w="5715" cap="flat" cmpd="sng" algn="ctr">
                       <a:solidFill>
                         <a:srgbClr val="D8E0E6"/>
                       </a:solidFill>
@@ -7243,7 +7343,7 @@
                       <a:headEnd type="none" w="med" len="med"/>
                       <a:tailEnd type="none" w="med" len="med"/>
                     </a:lnR>
-                    <a:lnT w="7620" cap="flat" cmpd="sng" algn="ctr">
+                    <a:lnT w="5715" cap="flat" cmpd="sng" algn="ctr">
                       <a:solidFill>
                         <a:srgbClr val="D8E0E6"/>
                       </a:solidFill>
@@ -7252,7 +7352,7 @@
                       <a:headEnd type="none" w="med" len="med"/>
                       <a:tailEnd type="none" w="med" len="med"/>
                     </a:lnT>
-                    <a:lnB w="7620" cap="flat" cmpd="sng" algn="ctr">
+                    <a:lnB w="5715" cap="flat" cmpd="sng" algn="ctr">
                       <a:solidFill>
                         <a:srgbClr val="D8E0E6"/>
                       </a:solidFill>
@@ -7275,7 +7375,7 @@
                         <a:buNone/>
                       </a:pPr>
                       <a:r>
-                        <a:rPr lang="en-US" sz="1550" dirty="0">
+                        <a:rPr lang="en-US" sz="1500" dirty="0">
                           <a:solidFill>
                             <a:srgbClr val="18212B"/>
                           </a:solidFill>
@@ -7285,15 +7385,15 @@
                         </a:rPr>
                         <a:t>funguje správanie?</a:t>
                       </a:r>
-                      <a:endParaRPr lang="en-US" sz="1550" dirty="0">
+                      <a:endParaRPr lang="en-US" sz="1500" dirty="0">
                         <a:latin typeface="Aptos" charset="0"/>
                         <a:ea typeface="Aptos" charset="0"/>
                         <a:cs typeface="Aptos" charset="0"/>
                       </a:endParaRPr>
                     </a:p>
                   </a:txBody>
-                  <a:tcPr marL="82296" marR="82296" marT="82296" marB="82296" anchor="mid">
-                    <a:lnL w="7620" cap="flat" cmpd="sng" algn="ctr">
+                  <a:tcPr marL="91440" marR="91440" marT="91440" marB="91440" anchor="mid">
+                    <a:lnL w="5715" cap="flat" cmpd="sng" algn="ctr">
                       <a:solidFill>
                         <a:srgbClr val="D8E0E6"/>
                       </a:solidFill>
@@ -7302,7 +7402,7 @@
                       <a:headEnd type="none" w="med" len="med"/>
                       <a:tailEnd type="none" w="med" len="med"/>
                     </a:lnL>
-                    <a:lnR w="7620" cap="flat" cmpd="sng" algn="ctr">
+                    <a:lnR w="5715" cap="flat" cmpd="sng" algn="ctr">
                       <a:solidFill>
                         <a:srgbClr val="D8E0E6"/>
                       </a:solidFill>
@@ -7311,7 +7411,7 @@
                       <a:headEnd type="none" w="med" len="med"/>
                       <a:tailEnd type="none" w="med" len="med"/>
                     </a:lnR>
-                    <a:lnT w="7620" cap="flat" cmpd="sng" algn="ctr">
+                    <a:lnT w="5715" cap="flat" cmpd="sng" algn="ctr">
                       <a:solidFill>
                         <a:srgbClr val="D8E0E6"/>
                       </a:solidFill>
@@ -7320,7 +7420,7 @@
                       <a:headEnd type="none" w="med" len="med"/>
                       <a:tailEnd type="none" w="med" len="med"/>
                     </a:lnT>
-                    <a:lnB w="7620" cap="flat" cmpd="sng" algn="ctr">
+                    <a:lnB w="5715" cap="flat" cmpd="sng" algn="ctr">
                       <a:solidFill>
                         <a:srgbClr val="D8E0E6"/>
                       </a:solidFill>
@@ -7343,7 +7443,7 @@
                         <a:buNone/>
                       </a:pPr>
                       <a:r>
-                        <a:rPr lang="en-US" sz="1550" dirty="0">
+                        <a:rPr lang="en-US" sz="1500" dirty="0">
                           <a:solidFill>
                             <a:srgbClr val="18212B"/>
                           </a:solidFill>
@@ -7353,15 +7453,15 @@
                         </a:rPr>
                         <a:t>python -m pytest</a:t>
                       </a:r>
-                      <a:endParaRPr lang="en-US" sz="1550" dirty="0">
+                      <a:endParaRPr lang="en-US" sz="1500" dirty="0">
                         <a:latin typeface="Aptos" charset="0"/>
                         <a:ea typeface="Aptos" charset="0"/>
                         <a:cs typeface="Aptos" charset="0"/>
                       </a:endParaRPr>
                     </a:p>
                   </a:txBody>
-                  <a:tcPr marL="82296" marR="82296" marT="82296" marB="82296" anchor="mid">
-                    <a:lnL w="7620" cap="flat" cmpd="sng" algn="ctr">
+                  <a:tcPr marL="91440" marR="91440" marT="91440" marB="91440" anchor="mid">
+                    <a:lnL w="5715" cap="flat" cmpd="sng" algn="ctr">
                       <a:solidFill>
                         <a:srgbClr val="D8E0E6"/>
                       </a:solidFill>
@@ -7370,7 +7470,7 @@
                       <a:headEnd type="none" w="med" len="med"/>
                       <a:tailEnd type="none" w="med" len="med"/>
                     </a:lnL>
-                    <a:lnR w="7620" cap="flat" cmpd="sng" algn="ctr">
+                    <a:lnR w="5715" cap="flat" cmpd="sng" algn="ctr">
                       <a:solidFill>
                         <a:srgbClr val="D8E0E6"/>
                       </a:solidFill>
@@ -7379,7 +7479,7 @@
                       <a:headEnd type="none" w="med" len="med"/>
                       <a:tailEnd type="none" w="med" len="med"/>
                     </a:lnR>
-                    <a:lnT w="7620" cap="flat" cmpd="sng" algn="ctr">
+                    <a:lnT w="5715" cap="flat" cmpd="sng" algn="ctr">
                       <a:solidFill>
                         <a:srgbClr val="D8E0E6"/>
                       </a:solidFill>
@@ -7388,7 +7488,7 @@
                       <a:headEnd type="none" w="med" len="med"/>
                       <a:tailEnd type="none" w="med" len="med"/>
                     </a:lnT>
-                    <a:lnB w="7620" cap="flat" cmpd="sng" algn="ctr">
+                    <a:lnB w="5715" cap="flat" cmpd="sng" algn="ctr">
                       <a:solidFill>
                         <a:srgbClr val="D8E0E6"/>
                       </a:solidFill>
@@ -7415,8 +7515,8 @@
         </p:nvSpPr>
         <p:spPr>
           <a:xfrm>
-            <a:off x="658368" y="1847088"/>
-            <a:ext cx="10899648" cy="548640"/>
+            <a:off x="658368" y="1828800"/>
+            <a:ext cx="10899648" cy="530352"/>
           </a:xfrm>
           <a:prstGeom prst="rect">
             <a:avLst/>
@@ -7440,7 +7540,7 @@
         </p:nvSpPr>
         <p:spPr>
           <a:xfrm>
-            <a:off x="786384" y="1993392"/>
+            <a:off x="786384" y="1965960"/>
             <a:ext cx="1554480" cy="201168"/>
           </a:xfrm>
           <a:prstGeom prst="rect">
@@ -7459,7 +7559,7 @@
               <a:buNone/>
             </a:pPr>
             <a:r>
-              <a:rPr lang="en-US" sz="1400" b="1" dirty="0">
+              <a:rPr lang="en-US" sz="1350" b="1" dirty="0">
                 <a:solidFill>
                   <a:srgbClr val="FFFFFF"/>
                 </a:solidFill>
@@ -7469,7 +7569,7 @@
               </a:rPr>
               <a:t>Nástroj</a:t>
             </a:r>
-            <a:endParaRPr lang="en-US" sz="1400" dirty="0"/>
+            <a:endParaRPr lang="en-US" sz="1350" dirty="0"/>
           </a:p>
         </p:txBody>
       </p:sp>
@@ -7481,7 +7581,7 @@
         </p:nvSpPr>
         <p:spPr>
           <a:xfrm>
-            <a:off x="2615184" y="1993392"/>
+            <a:off x="2615184" y="1965960"/>
             <a:ext cx="4617720" cy="201168"/>
           </a:xfrm>
           <a:prstGeom prst="rect">
@@ -7500,7 +7600,7 @@
               <a:buNone/>
             </a:pPr>
             <a:r>
-              <a:rPr lang="en-US" sz="1400" b="1" dirty="0">
+              <a:rPr lang="en-US" sz="1350" b="1" dirty="0">
                 <a:solidFill>
                   <a:srgbClr val="FFFFFF"/>
                 </a:solidFill>
@@ -7510,7 +7610,7 @@
               </a:rPr>
               <a:t>Otázka</a:t>
             </a:r>
-            <a:endParaRPr lang="en-US" sz="1400" dirty="0"/>
+            <a:endParaRPr lang="en-US" sz="1350" dirty="0"/>
           </a:p>
         </p:txBody>
       </p:sp>
@@ -7522,7 +7622,7 @@
         </p:nvSpPr>
         <p:spPr>
           <a:xfrm>
-            <a:off x="7461504" y="1993392"/>
+            <a:off x="7461504" y="1965960"/>
             <a:ext cx="3840480" cy="201168"/>
           </a:xfrm>
           <a:prstGeom prst="rect">
@@ -7541,7 +7641,7 @@
               <a:buNone/>
             </a:pPr>
             <a:r>
-              <a:rPr lang="en-US" sz="1400" b="1" dirty="0">
+              <a:rPr lang="en-US" sz="1350" b="1" dirty="0">
                 <a:solidFill>
                   <a:srgbClr val="FFFFFF"/>
                 </a:solidFill>
@@ -7551,7 +7651,7 @@
               </a:rPr>
               <a:t>Príklad</a:t>
             </a:r>
-            <a:endParaRPr lang="en-US" sz="1400" dirty="0"/>
+            <a:endParaRPr lang="en-US" sz="1350" dirty="0"/>
           </a:p>
         </p:txBody>
       </p:sp>
@@ -7596,7 +7696,7 @@
         <p:spPr>
           <a:xfrm>
             <a:off x="0" y="0"/>
-            <a:ext cx="12191695" cy="155448"/>
+            <a:ext cx="12191695" cy="109728"/>
           </a:xfrm>
           <a:prstGeom prst="rect">
             <a:avLst/>
@@ -7620,7 +7720,7 @@
         </p:nvSpPr>
         <p:spPr>
           <a:xfrm>
-            <a:off x="566928" y="320040"/>
+            <a:off x="566928" y="310896"/>
             <a:ext cx="4663440" cy="182880"/>
           </a:xfrm>
           <a:prstGeom prst="rect">
@@ -7639,7 +7739,7 @@
               <a:buNone/>
             </a:pPr>
             <a:r>
-              <a:rPr lang="en-US" sz="900" b="1" spc="80" kern="0" dirty="0">
+              <a:rPr lang="en-US" sz="880" b="1" spc="50" kern="0" dirty="0">
                 <a:solidFill>
                   <a:srgbClr val="1877B9"/>
                 </a:solidFill>
@@ -7649,7 +7749,7 @@
               </a:rPr>
               <a:t>PROGRAMOVANIE V PYTHONE</a:t>
             </a:r>
-            <a:endParaRPr lang="en-US" sz="900" dirty="0"/>
+            <a:endParaRPr lang="en-US" sz="880" dirty="0"/>
           </a:p>
         </p:txBody>
       </p:sp>
@@ -7661,7 +7761,7 @@
         </p:nvSpPr>
         <p:spPr>
           <a:xfrm>
-            <a:off x="9829800" y="320040"/>
+            <a:off x="9829800" y="310896"/>
             <a:ext cx="1783080" cy="182880"/>
           </a:xfrm>
           <a:prstGeom prst="rect">
@@ -7680,7 +7780,7 @@
               <a:buNone/>
             </a:pPr>
             <a:r>
-              <a:rPr lang="en-US" sz="900" b="1" dirty="0">
+              <a:rPr lang="en-US" sz="880" b="1" dirty="0">
                 <a:solidFill>
                   <a:srgbClr val="5E6B78"/>
                 </a:solidFill>
@@ -7690,7 +7790,7 @@
               </a:rPr>
               <a:t>PREDNÁŠKA 04</a:t>
             </a:r>
-            <a:endParaRPr lang="en-US" sz="900" dirty="0"/>
+            <a:endParaRPr lang="en-US" sz="880" dirty="0"/>
           </a:p>
         </p:txBody>
       </p:sp>
@@ -7748,8 +7848,8 @@
         </p:nvSpPr>
         <p:spPr>
           <a:xfrm>
-            <a:off x="11109960" y="6501384"/>
-            <a:ext cx="457200" cy="146304"/>
+            <a:off x="10771632" y="6501384"/>
+            <a:ext cx="804672" cy="146304"/>
           </a:xfrm>
           <a:prstGeom prst="rect">
             <a:avLst/>
@@ -7767,7 +7867,7 @@
               <a:buNone/>
             </a:pPr>
             <a:r>
-              <a:rPr lang="en-US" sz="800" dirty="0">
+              <a:rPr lang="en-US" sz="780" dirty="0">
                 <a:solidFill>
                   <a:srgbClr val="5E6B78"/>
                 </a:solidFill>
@@ -7775,9 +7875,9 @@
                 <a:ea typeface="Consolas" pitchFamily="34" charset="-122"/>
                 <a:cs typeface="Consolas" pitchFamily="34" charset="-120"/>
               </a:rPr>
-              <a:t>18</a:t>
-            </a:r>
-            <a:endParaRPr lang="en-US" sz="800" dirty="0"/>
+              <a:t>18 / 18</a:t>
+            </a:r>
+            <a:endParaRPr lang="en-US" sz="780" dirty="0"/>
           </a:p>
         </p:txBody>
       </p:sp>
@@ -7789,8 +7889,8 @@
         </p:nvSpPr>
         <p:spPr>
           <a:xfrm>
-            <a:off x="658368" y="932688"/>
-            <a:ext cx="10789920" cy="713232"/>
+            <a:off x="658368" y="914400"/>
+            <a:ext cx="10881360" cy="713232"/>
           </a:xfrm>
           <a:prstGeom prst="rect">
             <a:avLst/>
@@ -7808,17 +7908,17 @@
               <a:buNone/>
             </a:pPr>
             <a:r>
-              <a:rPr lang="en-US" sz="2900" b="1" dirty="0">
+              <a:rPr lang="en-US" sz="2850" b="1" dirty="0">
                 <a:solidFill>
                   <a:srgbClr val="16324F"/>
                 </a:solidFill>
-                <a:latin typeface="Aptos" pitchFamily="34" charset="0"/>
-                <a:ea typeface="Aptos" pitchFamily="34" charset="-122"/>
-                <a:cs typeface="Aptos" pitchFamily="34" charset="-120"/>
+                <a:latin typeface="Aptos Display" pitchFamily="34" charset="0"/>
+                <a:ea typeface="Aptos Display" pitchFamily="34" charset="-122"/>
+                <a:cs typeface="Aptos Display" pitchFamily="34" charset="-120"/>
               </a:rPr>
               <a:t>Vývojový cyklus po zmene</a:t>
             </a:r>
-            <a:endParaRPr lang="en-US" sz="2900" dirty="0"/>
+            <a:endParaRPr lang="en-US" sz="2850" dirty="0"/>
           </a:p>
         </p:txBody>
       </p:sp>
@@ -7830,8 +7930,8 @@
         </p:nvSpPr>
         <p:spPr>
           <a:xfrm>
-            <a:off x="658368" y="1783080"/>
-            <a:ext cx="10899648" cy="4069080"/>
+            <a:off x="658368" y="1755648"/>
+            <a:ext cx="10899648" cy="4096512"/>
           </a:xfrm>
           <a:prstGeom prst="rect">
             <a:avLst/>
@@ -7841,7 +7941,7 @@
           </a:solidFill>
           <a:ln w="12700">
             <a:solidFill>
-              <a:srgbClr val="17212B"/>
+              <a:srgbClr val="243242"/>
             </a:solidFill>
             <a:prstDash val="solid"/>
           </a:ln>
@@ -7849,14 +7949,39 @@
       </p:sp>
       <p:sp>
         <p:nvSpPr>
-          <p:cNvPr id="10" name="Text 8"/>
-          <p:cNvSpPr/>
-          <p:nvPr/>
-        </p:nvSpPr>
-        <p:spPr>
-          <a:xfrm>
-            <a:off x="896112" y="1984248"/>
-            <a:ext cx="9966960" cy="182880"/>
+          <p:cNvPr id="10" name="Shape 8"/>
+          <p:cNvSpPr/>
+          <p:nvPr/>
+        </p:nvSpPr>
+        <p:spPr>
+          <a:xfrm>
+            <a:off x="658368" y="1755648"/>
+            <a:ext cx="10899648" cy="347472"/>
+          </a:xfrm>
+          <a:prstGeom prst="rect">
+            <a:avLst/>
+          </a:prstGeom>
+          <a:solidFill>
+            <a:srgbClr val="223044"/>
+          </a:solidFill>
+          <a:ln w="12700">
+            <a:solidFill>
+              <a:srgbClr val="223044"/>
+            </a:solidFill>
+            <a:prstDash val="solid"/>
+          </a:ln>
+        </p:spPr>
+      </p:sp>
+      <p:sp>
+        <p:nvSpPr>
+          <p:cNvPr id="11" name="Text 9"/>
+          <p:cNvSpPr/>
+          <p:nvPr/>
+        </p:nvSpPr>
+        <p:spPr>
+          <a:xfrm>
+            <a:off x="896112" y="1874520"/>
+            <a:ext cx="9966960" cy="146304"/>
           </a:xfrm>
           <a:prstGeom prst="rect">
             <a:avLst/>
@@ -7874,7 +7999,7 @@
               <a:buNone/>
             </a:pPr>
             <a:r>
-              <a:rPr lang="en-US" sz="850" b="1" spc="70" kern="0" dirty="0">
+              <a:rPr lang="en-US" sz="820" b="1" spc="35" kern="0" dirty="0">
                 <a:solidFill>
                   <a:srgbClr val="8FD3FF"/>
                 </a:solidFill>
@@ -7884,20 +8009,20 @@
               </a:rPr>
               <a:t>terminal</a:t>
             </a:r>
-            <a:endParaRPr lang="en-US" sz="850" dirty="0"/>
-          </a:p>
-        </p:txBody>
-      </p:sp>
-      <p:sp>
-        <p:nvSpPr>
-          <p:cNvPr id="11" name="Text 9"/>
-          <p:cNvSpPr/>
-          <p:nvPr/>
-        </p:nvSpPr>
-        <p:spPr>
-          <a:xfrm>
-            <a:off x="896112" y="2395728"/>
-            <a:ext cx="9893808" cy="3063240"/>
+            <a:endParaRPr lang="en-US" sz="820" dirty="0"/>
+          </a:p>
+        </p:txBody>
+      </p:sp>
+      <p:sp>
+        <p:nvSpPr>
+          <p:cNvPr id="12" name="Text 10"/>
+          <p:cNvSpPr/>
+          <p:nvPr/>
+        </p:nvSpPr>
+        <p:spPr>
+          <a:xfrm>
+            <a:off x="896112" y="2304288"/>
+            <a:ext cx="9921240" cy="3127248"/>
           </a:xfrm>
           <a:prstGeom prst="rect">
             <a:avLst/>
@@ -7915,7 +8040,7 @@
               <a:buNone/>
             </a:pPr>
             <a:r>
-              <a:rPr lang="en-US" sz="1750" dirty="0">
+              <a:rPr lang="en-US" sz="1700" dirty="0">
                 <a:solidFill>
                   <a:srgbClr val="F4F7FA"/>
                 </a:solidFill>
@@ -7925,14 +8050,14 @@
               </a:rPr>
               <a:t>ruff format .</a:t>
             </a:r>
-            <a:endParaRPr lang="en-US" sz="1750" dirty="0"/>
+            <a:endParaRPr lang="en-US" sz="1700" dirty="0"/>
           </a:p>
           <a:p>
             <a:pPr algn="l" indent="0" marL="0">
               <a:buNone/>
             </a:pPr>
             <a:r>
-              <a:rPr lang="en-US" sz="1750" dirty="0">
+              <a:rPr lang="en-US" sz="1700" dirty="0">
                 <a:solidFill>
                   <a:srgbClr val="F4F7FA"/>
                 </a:solidFill>
@@ -7942,14 +8067,14 @@
               </a:rPr>
               <a:t>ruff check .</a:t>
             </a:r>
-            <a:endParaRPr lang="en-US" sz="1750" dirty="0"/>
+            <a:endParaRPr lang="en-US" sz="1700" dirty="0"/>
           </a:p>
           <a:p>
             <a:pPr algn="l" indent="0" marL="0">
               <a:buNone/>
             </a:pPr>
             <a:r>
-              <a:rPr lang="en-US" sz="1750" dirty="0">
+              <a:rPr lang="en-US" sz="1700" dirty="0">
                 <a:solidFill>
                   <a:srgbClr val="F4F7FA"/>
                 </a:solidFill>
@@ -7959,14 +8084,14 @@
               </a:rPr>
               <a:t>pyright</a:t>
             </a:r>
-            <a:endParaRPr lang="en-US" sz="1750" dirty="0"/>
+            <a:endParaRPr lang="en-US" sz="1700" dirty="0"/>
           </a:p>
           <a:p>
             <a:pPr algn="l" indent="0" marL="0">
               <a:buNone/>
             </a:pPr>
             <a:r>
-              <a:rPr lang="en-US" sz="1750" dirty="0">
+              <a:rPr lang="en-US" sz="1700" dirty="0">
                 <a:solidFill>
                   <a:srgbClr val="F4F7FA"/>
                 </a:solidFill>
@@ -7976,14 +8101,14 @@
               </a:rPr>
               <a:t>python -m pytest</a:t>
             </a:r>
-            <a:endParaRPr lang="en-US" sz="1750" dirty="0"/>
+            <a:endParaRPr lang="en-US" sz="1700" dirty="0"/>
           </a:p>
           <a:p>
             <a:pPr algn="l" indent="0" marL="0">
               <a:buNone/>
             </a:pPr>
             <a:r>
-              <a:rPr lang="en-US" sz="1750" dirty="0">
+              <a:rPr lang="en-US" sz="1700" dirty="0">
                 <a:solidFill>
                   <a:srgbClr val="F4F7FA"/>
                 </a:solidFill>
@@ -7993,14 +8118,14 @@
               </a:rPr>
               <a:t>git diff</a:t>
             </a:r>
-            <a:endParaRPr lang="en-US" sz="1750" dirty="0"/>
+            <a:endParaRPr lang="en-US" sz="1700" dirty="0"/>
           </a:p>
           <a:p>
             <a:pPr algn="l" indent="0" marL="0">
               <a:buNone/>
             </a:pPr>
             <a:r>
-              <a:rPr lang="en-US" sz="1750" dirty="0">
+              <a:rPr lang="en-US" sz="1700" dirty="0">
                 <a:solidFill>
                   <a:srgbClr val="F4F7FA"/>
                 </a:solidFill>
@@ -8010,20 +8135,20 @@
               </a:rPr>
               <a:t>git commit -m "Fix discount validation"</a:t>
             </a:r>
-            <a:endParaRPr lang="en-US" sz="1750" dirty="0"/>
-          </a:p>
-        </p:txBody>
-      </p:sp>
-      <p:sp>
-        <p:nvSpPr>
-          <p:cNvPr id="12" name="Text 10"/>
+            <a:endParaRPr lang="en-US" sz="1700" dirty="0"/>
+          </a:p>
+        </p:txBody>
+      </p:sp>
+      <p:sp>
+        <p:nvSpPr>
+          <p:cNvPr id="13" name="Text 11"/>
           <p:cNvSpPr/>
           <p:nvPr/>
         </p:nvSpPr>
         <p:spPr>
           <a:xfrm>
             <a:off x="768096" y="6053328"/>
-            <a:ext cx="9921240" cy="237744"/>
+            <a:ext cx="9921240" cy="256032"/>
           </a:xfrm>
           <a:prstGeom prst="rect">
             <a:avLst/>
@@ -8041,7 +8166,7 @@
               <a:buNone/>
             </a:pPr>
             <a:r>
-              <a:rPr lang="en-US" sz="1550" dirty="0">
+              <a:rPr lang="en-US" sz="1520" dirty="0">
                 <a:solidFill>
                   <a:srgbClr val="5E6B78"/>
                 </a:solidFill>
@@ -8051,7 +8176,7 @@
               </a:rPr>
               <a:t>Každý nástroj pokrýva inú chybu. Spolu vytvárajú krátky, opakovateľný pracovný cyklus.</a:t>
             </a:r>
-            <a:endParaRPr lang="en-US" sz="1550" dirty="0"/>
+            <a:endParaRPr lang="en-US" sz="1520" dirty="0"/>
           </a:p>
         </p:txBody>
       </p:sp>
@@ -8096,7 +8221,7 @@
         <p:spPr>
           <a:xfrm>
             <a:off x="0" y="0"/>
-            <a:ext cx="12191695" cy="155448"/>
+            <a:ext cx="12191695" cy="109728"/>
           </a:xfrm>
           <a:prstGeom prst="rect">
             <a:avLst/>
@@ -8120,7 +8245,7 @@
         </p:nvSpPr>
         <p:spPr>
           <a:xfrm>
-            <a:off x="566928" y="320040"/>
+            <a:off x="566928" y="310896"/>
             <a:ext cx="4663440" cy="182880"/>
           </a:xfrm>
           <a:prstGeom prst="rect">
@@ -8139,7 +8264,7 @@
               <a:buNone/>
             </a:pPr>
             <a:r>
-              <a:rPr lang="en-US" sz="900" b="1" spc="80" kern="0" dirty="0">
+              <a:rPr lang="en-US" sz="880" b="1" spc="50" kern="0" dirty="0">
                 <a:solidFill>
                   <a:srgbClr val="1877B9"/>
                 </a:solidFill>
@@ -8149,7 +8274,7 @@
               </a:rPr>
               <a:t>PROGRAMOVANIE V PYTHONE</a:t>
             </a:r>
-            <a:endParaRPr lang="en-US" sz="900" dirty="0"/>
+            <a:endParaRPr lang="en-US" sz="880" dirty="0"/>
           </a:p>
         </p:txBody>
       </p:sp>
@@ -8161,7 +8286,7 @@
         </p:nvSpPr>
         <p:spPr>
           <a:xfrm>
-            <a:off x="9829800" y="320040"/>
+            <a:off x="9829800" y="310896"/>
             <a:ext cx="1783080" cy="182880"/>
           </a:xfrm>
           <a:prstGeom prst="rect">
@@ -8180,7 +8305,7 @@
               <a:buNone/>
             </a:pPr>
             <a:r>
-              <a:rPr lang="en-US" sz="900" b="1" dirty="0">
+              <a:rPr lang="en-US" sz="880" b="1" dirty="0">
                 <a:solidFill>
                   <a:srgbClr val="5E6B78"/>
                 </a:solidFill>
@@ -8190,7 +8315,7 @@
               </a:rPr>
               <a:t>PREDNÁŠKA 04</a:t>
             </a:r>
-            <a:endParaRPr lang="en-US" sz="900" dirty="0"/>
+            <a:endParaRPr lang="en-US" sz="880" dirty="0"/>
           </a:p>
         </p:txBody>
       </p:sp>
@@ -8248,8 +8373,8 @@
         </p:nvSpPr>
         <p:spPr>
           <a:xfrm>
-            <a:off x="11109960" y="6501384"/>
-            <a:ext cx="457200" cy="146304"/>
+            <a:off x="10771632" y="6501384"/>
+            <a:ext cx="804672" cy="146304"/>
           </a:xfrm>
           <a:prstGeom prst="rect">
             <a:avLst/>
@@ -8267,7 +8392,7 @@
               <a:buNone/>
             </a:pPr>
             <a:r>
-              <a:rPr lang="en-US" sz="800" dirty="0">
+              <a:rPr lang="en-US" sz="780" dirty="0">
                 <a:solidFill>
                   <a:srgbClr val="5E6B78"/>
                 </a:solidFill>
@@ -8275,9 +8400,9 @@
                 <a:ea typeface="Consolas" pitchFamily="34" charset="-122"/>
                 <a:cs typeface="Consolas" pitchFamily="34" charset="-120"/>
               </a:rPr>
-              <a:t>02</a:t>
-            </a:r>
-            <a:endParaRPr lang="en-US" sz="800" dirty="0"/>
+              <a:t>02 / 18</a:t>
+            </a:r>
+            <a:endParaRPr lang="en-US" sz="780" dirty="0"/>
           </a:p>
         </p:txBody>
       </p:sp>
@@ -8289,8 +8414,8 @@
         </p:nvSpPr>
         <p:spPr>
           <a:xfrm>
-            <a:off x="749808" y="1554480"/>
-            <a:ext cx="10424160" cy="1508760"/>
+            <a:off x="749808" y="1481328"/>
+            <a:ext cx="10287000" cy="1554480"/>
           </a:xfrm>
           <a:prstGeom prst="rect">
             <a:avLst/>
@@ -8308,17 +8433,17 @@
               <a:buNone/>
             </a:pPr>
             <a:r>
-              <a:rPr lang="en-US" sz="3400" b="1" dirty="0">
+              <a:rPr lang="en-US" sz="3300" b="1" dirty="0">
                 <a:solidFill>
                   <a:srgbClr val="16324F"/>
                 </a:solidFill>
-                <a:latin typeface="Aptos" pitchFamily="34" charset="0"/>
-                <a:ea typeface="Aptos" pitchFamily="34" charset="-122"/>
-                <a:cs typeface="Aptos" pitchFamily="34" charset="-120"/>
+                <a:latin typeface="Aptos Display" pitchFamily="34" charset="0"/>
+                <a:ea typeface="Aptos Display" pitchFamily="34" charset="-122"/>
+                <a:cs typeface="Aptos Display" pitchFamily="34" charset="-120"/>
               </a:rPr>
               <a:t>Bug report: calculate_discount() niekedy vráti zápornú cenu.</a:t>
             </a:r>
-            <a:endParaRPr lang="en-US" sz="3400" dirty="0"/>
+            <a:endParaRPr lang="en-US" sz="3300" dirty="0"/>
           </a:p>
         </p:txBody>
       </p:sp>
@@ -8330,8 +8455,8 @@
         </p:nvSpPr>
         <p:spPr>
           <a:xfrm>
-            <a:off x="768096" y="3456432"/>
-            <a:ext cx="1417320" cy="109728"/>
+            <a:off x="768096" y="3438144"/>
+            <a:ext cx="1280160" cy="91440"/>
           </a:xfrm>
           <a:prstGeom prst="rect">
             <a:avLst/>
@@ -8355,8 +8480,8 @@
         </p:nvSpPr>
         <p:spPr>
           <a:xfrm>
-            <a:off x="768096" y="3913632"/>
-            <a:ext cx="8869680" cy="731520"/>
+            <a:off x="768096" y="3858768"/>
+            <a:ext cx="9006840" cy="804672"/>
           </a:xfrm>
           <a:prstGeom prst="rect">
             <a:avLst/>
@@ -8374,7 +8499,7 @@
               <a:buNone/>
             </a:pPr>
             <a:r>
-              <a:rPr lang="en-US" sz="2200" dirty="0">
+              <a:rPr lang="en-US" sz="2100" dirty="0">
                 <a:solidFill>
                   <a:srgbClr val="5E6B78"/>
                 </a:solidFill>
@@ -8384,7 +8509,7 @@
               </a:rPr>
               <a:t>Namiesto hádania najprv vytvoríme malý príklad, ktorý problém spoľahlivo zopakuje.</a:t>
             </a:r>
-            <a:endParaRPr lang="en-US" sz="2200" dirty="0"/>
+            <a:endParaRPr lang="en-US" sz="2100" dirty="0"/>
           </a:p>
         </p:txBody>
       </p:sp>
@@ -8429,7 +8554,7 @@
         <p:spPr>
           <a:xfrm>
             <a:off x="0" y="0"/>
-            <a:ext cx="12191695" cy="155448"/>
+            <a:ext cx="12191695" cy="109728"/>
           </a:xfrm>
           <a:prstGeom prst="rect">
             <a:avLst/>
@@ -8453,7 +8578,7 @@
         </p:nvSpPr>
         <p:spPr>
           <a:xfrm>
-            <a:off x="566928" y="320040"/>
+            <a:off x="566928" y="310896"/>
             <a:ext cx="4663440" cy="182880"/>
           </a:xfrm>
           <a:prstGeom prst="rect">
@@ -8472,7 +8597,7 @@
               <a:buNone/>
             </a:pPr>
             <a:r>
-              <a:rPr lang="en-US" sz="900" b="1" spc="80" kern="0" dirty="0">
+              <a:rPr lang="en-US" sz="880" b="1" spc="50" kern="0" dirty="0">
                 <a:solidFill>
                   <a:srgbClr val="1877B9"/>
                 </a:solidFill>
@@ -8482,7 +8607,7 @@
               </a:rPr>
               <a:t>PROGRAMOVANIE V PYTHONE</a:t>
             </a:r>
-            <a:endParaRPr lang="en-US" sz="900" dirty="0"/>
+            <a:endParaRPr lang="en-US" sz="880" dirty="0"/>
           </a:p>
         </p:txBody>
       </p:sp>
@@ -8494,7 +8619,7 @@
         </p:nvSpPr>
         <p:spPr>
           <a:xfrm>
-            <a:off x="9829800" y="320040"/>
+            <a:off x="9829800" y="310896"/>
             <a:ext cx="1783080" cy="182880"/>
           </a:xfrm>
           <a:prstGeom prst="rect">
@@ -8513,7 +8638,7 @@
               <a:buNone/>
             </a:pPr>
             <a:r>
-              <a:rPr lang="en-US" sz="900" b="1" dirty="0">
+              <a:rPr lang="en-US" sz="880" b="1" dirty="0">
                 <a:solidFill>
                   <a:srgbClr val="5E6B78"/>
                 </a:solidFill>
@@ -8523,7 +8648,7 @@
               </a:rPr>
               <a:t>PREDNÁŠKA 04</a:t>
             </a:r>
-            <a:endParaRPr lang="en-US" sz="900" dirty="0"/>
+            <a:endParaRPr lang="en-US" sz="880" dirty="0"/>
           </a:p>
         </p:txBody>
       </p:sp>
@@ -8581,8 +8706,8 @@
         </p:nvSpPr>
         <p:spPr>
           <a:xfrm>
-            <a:off x="11109960" y="6501384"/>
-            <a:ext cx="457200" cy="146304"/>
+            <a:off x="10771632" y="6501384"/>
+            <a:ext cx="804672" cy="146304"/>
           </a:xfrm>
           <a:prstGeom prst="rect">
             <a:avLst/>
@@ -8600,7 +8725,7 @@
               <a:buNone/>
             </a:pPr>
             <a:r>
-              <a:rPr lang="en-US" sz="800" dirty="0">
+              <a:rPr lang="en-US" sz="780" dirty="0">
                 <a:solidFill>
                   <a:srgbClr val="5E6B78"/>
                 </a:solidFill>
@@ -8608,9 +8733,9 @@
                 <a:ea typeface="Consolas" pitchFamily="34" charset="-122"/>
                 <a:cs typeface="Consolas" pitchFamily="34" charset="-120"/>
               </a:rPr>
-              <a:t>03</a:t>
-            </a:r>
-            <a:endParaRPr lang="en-US" sz="800" dirty="0"/>
+              <a:t>03 / 18</a:t>
+            </a:r>
+            <a:endParaRPr lang="en-US" sz="780" dirty="0"/>
           </a:p>
         </p:txBody>
       </p:sp>
@@ -8622,8 +8747,8 @@
         </p:nvSpPr>
         <p:spPr>
           <a:xfrm>
-            <a:off x="658368" y="932688"/>
-            <a:ext cx="10789920" cy="713232"/>
+            <a:off x="658368" y="914400"/>
+            <a:ext cx="10881360" cy="713232"/>
           </a:xfrm>
           <a:prstGeom prst="rect">
             <a:avLst/>
@@ -8641,17 +8766,17 @@
               <a:buNone/>
             </a:pPr>
             <a:r>
-              <a:rPr lang="en-US" sz="2900" b="1" dirty="0">
+              <a:rPr lang="en-US" sz="2850" b="1" dirty="0">
                 <a:solidFill>
                   <a:srgbClr val="16324F"/>
                 </a:solidFill>
-                <a:latin typeface="Aptos" pitchFamily="34" charset="0"/>
-                <a:ea typeface="Aptos" pitchFamily="34" charset="-122"/>
-                <a:cs typeface="Aptos" pitchFamily="34" charset="-120"/>
+                <a:latin typeface="Aptos Display" pitchFamily="34" charset="0"/>
+                <a:ea typeface="Aptos Display" pitchFamily="34" charset="-122"/>
+                <a:cs typeface="Aptos Display" pitchFamily="34" charset="-120"/>
               </a:rPr>
               <a:t>Najmenší reprodukovateľný príklad</a:t>
             </a:r>
-            <a:endParaRPr lang="en-US" sz="2900" dirty="0"/>
+            <a:endParaRPr lang="en-US" sz="2850" dirty="0"/>
           </a:p>
         </p:txBody>
       </p:sp>
@@ -8663,8 +8788,8 @@
         </p:nvSpPr>
         <p:spPr>
           <a:xfrm>
-            <a:off x="658368" y="1783080"/>
-            <a:ext cx="10899648" cy="4069080"/>
+            <a:off x="658368" y="1755648"/>
+            <a:ext cx="10899648" cy="4096512"/>
           </a:xfrm>
           <a:prstGeom prst="rect">
             <a:avLst/>
@@ -8674,7 +8799,7 @@
           </a:solidFill>
           <a:ln w="12700">
             <a:solidFill>
-              <a:srgbClr val="17212B"/>
+              <a:srgbClr val="243242"/>
             </a:solidFill>
             <a:prstDash val="solid"/>
           </a:ln>
@@ -8682,14 +8807,39 @@
       </p:sp>
       <p:sp>
         <p:nvSpPr>
-          <p:cNvPr id="10" name="Text 8"/>
-          <p:cNvSpPr/>
-          <p:nvPr/>
-        </p:nvSpPr>
-        <p:spPr>
-          <a:xfrm>
-            <a:off x="896112" y="1984248"/>
-            <a:ext cx="9966960" cy="182880"/>
+          <p:cNvPr id="10" name="Shape 8"/>
+          <p:cNvSpPr/>
+          <p:nvPr/>
+        </p:nvSpPr>
+        <p:spPr>
+          <a:xfrm>
+            <a:off x="658368" y="1755648"/>
+            <a:ext cx="10899648" cy="347472"/>
+          </a:xfrm>
+          <a:prstGeom prst="rect">
+            <a:avLst/>
+          </a:prstGeom>
+          <a:solidFill>
+            <a:srgbClr val="223044"/>
+          </a:solidFill>
+          <a:ln w="12700">
+            <a:solidFill>
+              <a:srgbClr val="223044"/>
+            </a:solidFill>
+            <a:prstDash val="solid"/>
+          </a:ln>
+        </p:spPr>
+      </p:sp>
+      <p:sp>
+        <p:nvSpPr>
+          <p:cNvPr id="11" name="Text 9"/>
+          <p:cNvSpPr/>
+          <p:nvPr/>
+        </p:nvSpPr>
+        <p:spPr>
+          <a:xfrm>
+            <a:off x="896112" y="1874520"/>
+            <a:ext cx="9966960" cy="146304"/>
           </a:xfrm>
           <a:prstGeom prst="rect">
             <a:avLst/>
@@ -8707,7 +8857,7 @@
               <a:buNone/>
             </a:pPr>
             <a:r>
-              <a:rPr lang="en-US" sz="850" b="1" spc="70" kern="0" dirty="0">
+              <a:rPr lang="en-US" sz="820" b="1" spc="35" kern="0" dirty="0">
                 <a:solidFill>
                   <a:srgbClr val="8FD3FF"/>
                 </a:solidFill>
@@ -8717,20 +8867,20 @@
               </a:rPr>
               <a:t>python</a:t>
             </a:r>
-            <a:endParaRPr lang="en-US" sz="850" dirty="0"/>
-          </a:p>
-        </p:txBody>
-      </p:sp>
-      <p:sp>
-        <p:nvSpPr>
-          <p:cNvPr id="11" name="Text 9"/>
-          <p:cNvSpPr/>
-          <p:nvPr/>
-        </p:nvSpPr>
-        <p:spPr>
-          <a:xfrm>
-            <a:off x="896112" y="2395728"/>
-            <a:ext cx="9893808" cy="3063240"/>
+            <a:endParaRPr lang="en-US" sz="820" dirty="0"/>
+          </a:p>
+        </p:txBody>
+      </p:sp>
+      <p:sp>
+        <p:nvSpPr>
+          <p:cNvPr id="12" name="Text 10"/>
+          <p:cNvSpPr/>
+          <p:nvPr/>
+        </p:nvSpPr>
+        <p:spPr>
+          <a:xfrm>
+            <a:off x="896112" y="2304288"/>
+            <a:ext cx="9921240" cy="3127248"/>
           </a:xfrm>
           <a:prstGeom prst="rect">
             <a:avLst/>
@@ -8748,7 +8898,7 @@
               <a:buNone/>
             </a:pPr>
             <a:r>
-              <a:rPr lang="en-US" sz="1750" dirty="0">
+              <a:rPr lang="en-US" sz="1700" dirty="0">
                 <a:solidFill>
                   <a:srgbClr val="F4F7FA"/>
                 </a:solidFill>
@@ -8758,14 +8908,14 @@
               </a:rPr>
               <a:t>def calculate_discount(price: float, discount: float) -&gt; float:</a:t>
             </a:r>
-            <a:endParaRPr lang="en-US" sz="1750" dirty="0"/>
+            <a:endParaRPr lang="en-US" sz="1700" dirty="0"/>
           </a:p>
           <a:p>
             <a:pPr algn="l" indent="0" marL="0">
               <a:buNone/>
             </a:pPr>
             <a:r>
-              <a:rPr lang="en-US" sz="1750" dirty="0">
+              <a:rPr lang="en-US" sz="1700" dirty="0">
                 <a:solidFill>
                   <a:srgbClr val="F4F7FA"/>
                 </a:solidFill>
@@ -8775,20 +8925,20 @@
               </a:rPr>
               <a:t>    return price * (1 - discount)</a:t>
             </a:r>
-            <a:endParaRPr lang="en-US" sz="1750" dirty="0"/>
+            <a:endParaRPr lang="en-US" sz="1700" dirty="0"/>
           </a:p>
           <a:p>
             <a:pPr algn="l" indent="0" marL="0">
               <a:buNone/>
             </a:pPr>
-            <a:endParaRPr lang="en-US" sz="1750" dirty="0"/>
+            <a:endParaRPr lang="en-US" sz="1700" dirty="0"/>
           </a:p>
           <a:p>
             <a:pPr algn="l" indent="0" marL="0">
               <a:buNone/>
             </a:pPr>
             <a:r>
-              <a:rPr lang="en-US" sz="1750" dirty="0">
+              <a:rPr lang="en-US" sz="1700" dirty="0">
                 <a:solidFill>
                   <a:srgbClr val="F4F7FA"/>
                 </a:solidFill>
@@ -8798,14 +8948,14 @@
               </a:rPr>
               <a:t>print(calculate_discount(100, 1.2))</a:t>
             </a:r>
-            <a:endParaRPr lang="en-US" sz="1750" dirty="0"/>
+            <a:endParaRPr lang="en-US" sz="1700" dirty="0"/>
           </a:p>
           <a:p>
             <a:pPr algn="l" indent="0" marL="0">
               <a:buNone/>
             </a:pPr>
             <a:r>
-              <a:rPr lang="en-US" sz="1750" dirty="0">
+              <a:rPr lang="en-US" sz="1700" dirty="0">
                 <a:solidFill>
                   <a:srgbClr val="F4F7FA"/>
                 </a:solidFill>
@@ -8815,20 +8965,20 @@
               </a:rPr>
               <a:t># -19.999999999999996</a:t>
             </a:r>
-            <a:endParaRPr lang="en-US" sz="1750" dirty="0"/>
-          </a:p>
-        </p:txBody>
-      </p:sp>
-      <p:sp>
-        <p:nvSpPr>
-          <p:cNvPr id="12" name="Text 10"/>
+            <a:endParaRPr lang="en-US" sz="1700" dirty="0"/>
+          </a:p>
+        </p:txBody>
+      </p:sp>
+      <p:sp>
+        <p:nvSpPr>
+          <p:cNvPr id="13" name="Text 11"/>
           <p:cNvSpPr/>
           <p:nvPr/>
         </p:nvSpPr>
         <p:spPr>
           <a:xfrm>
             <a:off x="768096" y="6053328"/>
-            <a:ext cx="9921240" cy="237744"/>
+            <a:ext cx="9921240" cy="256032"/>
           </a:xfrm>
           <a:prstGeom prst="rect">
             <a:avLst/>
@@ -8846,7 +8996,7 @@
               <a:buNone/>
             </a:pPr>
             <a:r>
-              <a:rPr lang="en-US" sz="1550" dirty="0">
+              <a:rPr lang="en-US" sz="1520" dirty="0">
                 <a:solidFill>
                   <a:srgbClr val="5E6B78"/>
                 </a:solidFill>
@@ -8856,7 +9006,7 @@
               </a:rPr>
               <a:t>Problém už nie je neurčitý. Vieme presne, aký vstup dáva nesprávny výsledok.</a:t>
             </a:r>
-            <a:endParaRPr lang="en-US" sz="1550" dirty="0"/>
+            <a:endParaRPr lang="en-US" sz="1520" dirty="0"/>
           </a:p>
         </p:txBody>
       </p:sp>
@@ -8901,7 +9051,7 @@
         <p:spPr>
           <a:xfrm>
             <a:off x="0" y="0"/>
-            <a:ext cx="12191695" cy="155448"/>
+            <a:ext cx="12191695" cy="109728"/>
           </a:xfrm>
           <a:prstGeom prst="rect">
             <a:avLst/>
@@ -8925,7 +9075,7 @@
         </p:nvSpPr>
         <p:spPr>
           <a:xfrm>
-            <a:off x="566928" y="320040"/>
+            <a:off x="566928" y="310896"/>
             <a:ext cx="4663440" cy="182880"/>
           </a:xfrm>
           <a:prstGeom prst="rect">
@@ -8944,7 +9094,7 @@
               <a:buNone/>
             </a:pPr>
             <a:r>
-              <a:rPr lang="en-US" sz="900" b="1" spc="80" kern="0" dirty="0">
+              <a:rPr lang="en-US" sz="880" b="1" spc="50" kern="0" dirty="0">
                 <a:solidFill>
                   <a:srgbClr val="1877B9"/>
                 </a:solidFill>
@@ -8954,7 +9104,7 @@
               </a:rPr>
               <a:t>PROGRAMOVANIE V PYTHONE</a:t>
             </a:r>
-            <a:endParaRPr lang="en-US" sz="900" dirty="0"/>
+            <a:endParaRPr lang="en-US" sz="880" dirty="0"/>
           </a:p>
         </p:txBody>
       </p:sp>
@@ -8966,7 +9116,7 @@
         </p:nvSpPr>
         <p:spPr>
           <a:xfrm>
-            <a:off x="9829800" y="320040"/>
+            <a:off x="9829800" y="310896"/>
             <a:ext cx="1783080" cy="182880"/>
           </a:xfrm>
           <a:prstGeom prst="rect">
@@ -8985,7 +9135,7 @@
               <a:buNone/>
             </a:pPr>
             <a:r>
-              <a:rPr lang="en-US" sz="900" b="1" dirty="0">
+              <a:rPr lang="en-US" sz="880" b="1" dirty="0">
                 <a:solidFill>
                   <a:srgbClr val="5E6B78"/>
                 </a:solidFill>
@@ -8995,7 +9145,7 @@
               </a:rPr>
               <a:t>PREDNÁŠKA 04</a:t>
             </a:r>
-            <a:endParaRPr lang="en-US" sz="900" dirty="0"/>
+            <a:endParaRPr lang="en-US" sz="880" dirty="0"/>
           </a:p>
         </p:txBody>
       </p:sp>
@@ -9053,8 +9203,8 @@
         </p:nvSpPr>
         <p:spPr>
           <a:xfrm>
-            <a:off x="11109960" y="6501384"/>
-            <a:ext cx="457200" cy="146304"/>
+            <a:off x="10771632" y="6501384"/>
+            <a:ext cx="804672" cy="146304"/>
           </a:xfrm>
           <a:prstGeom prst="rect">
             <a:avLst/>
@@ -9072,7 +9222,7 @@
               <a:buNone/>
             </a:pPr>
             <a:r>
-              <a:rPr lang="en-US" sz="800" dirty="0">
+              <a:rPr lang="en-US" sz="780" dirty="0">
                 <a:solidFill>
                   <a:srgbClr val="5E6B78"/>
                 </a:solidFill>
@@ -9080,9 +9230,9 @@
                 <a:ea typeface="Consolas" pitchFamily="34" charset="-122"/>
                 <a:cs typeface="Consolas" pitchFamily="34" charset="-120"/>
               </a:rPr>
-              <a:t>04</a:t>
-            </a:r>
-            <a:endParaRPr lang="en-US" sz="800" dirty="0"/>
+              <a:t>04 / 18</a:t>
+            </a:r>
+            <a:endParaRPr lang="en-US" sz="780" dirty="0"/>
           </a:p>
         </p:txBody>
       </p:sp>
@@ -9094,8 +9244,8 @@
         </p:nvSpPr>
         <p:spPr>
           <a:xfrm>
-            <a:off x="658368" y="932688"/>
-            <a:ext cx="10789920" cy="713232"/>
+            <a:off x="658368" y="914400"/>
+            <a:ext cx="10881360" cy="713232"/>
           </a:xfrm>
           <a:prstGeom prst="rect">
             <a:avLst/>
@@ -9113,17 +9263,17 @@
               <a:buNone/>
             </a:pPr>
             <a:r>
-              <a:rPr lang="en-US" sz="2900" b="1" dirty="0">
+              <a:rPr lang="en-US" sz="2850" b="1" dirty="0">
                 <a:solidFill>
                   <a:srgbClr val="16324F"/>
                 </a:solidFill>
-                <a:latin typeface="Aptos" pitchFamily="34" charset="0"/>
-                <a:ea typeface="Aptos" pitchFamily="34" charset="-122"/>
-                <a:cs typeface="Aptos" pitchFamily="34" charset="-120"/>
+                <a:latin typeface="Aptos Display" pitchFamily="34" charset="0"/>
+                <a:ea typeface="Aptos Display" pitchFamily="34" charset="-122"/>
+                <a:cs typeface="Aptos Display" pitchFamily="34" charset="-120"/>
               </a:rPr>
               <a:t>Test je spustiteľné tvrdenie</a:t>
             </a:r>
-            <a:endParaRPr lang="en-US" sz="2900" dirty="0"/>
+            <a:endParaRPr lang="en-US" sz="2850" dirty="0"/>
           </a:p>
         </p:txBody>
       </p:sp>
@@ -9136,19 +9286,17 @@
         <p:spPr>
           <a:xfrm>
             <a:off x="658368" y="1828800"/>
-            <a:ext cx="6812280" cy="4069080"/>
-          </a:xfrm>
-          <a:prstGeom prst="roundRect">
-            <a:avLst>
-              <a:gd name="adj" fmla="val 1348"/>
-            </a:avLst>
+            <a:ext cx="6903720" cy="4069080"/>
+          </a:xfrm>
+          <a:prstGeom prst="rect">
+            <a:avLst/>
           </a:prstGeom>
           <a:solidFill>
             <a:srgbClr val="17212B"/>
           </a:solidFill>
           <a:ln w="12700">
             <a:solidFill>
-              <a:srgbClr val="17212B"/>
+              <a:srgbClr val="243242"/>
             </a:solidFill>
             <a:prstDash val="solid"/>
           </a:ln>
@@ -9156,14 +9304,39 @@
       </p:sp>
       <p:sp>
         <p:nvSpPr>
-          <p:cNvPr id="10" name="Text 8"/>
-          <p:cNvSpPr/>
-          <p:nvPr/>
-        </p:nvSpPr>
-        <p:spPr>
-          <a:xfrm>
-            <a:off x="868680" y="2029968"/>
-            <a:ext cx="6309360" cy="182880"/>
+          <p:cNvPr id="10" name="Shape 8"/>
+          <p:cNvSpPr/>
+          <p:nvPr/>
+        </p:nvSpPr>
+        <p:spPr>
+          <a:xfrm>
+            <a:off x="658368" y="1828800"/>
+            <a:ext cx="6903720" cy="347472"/>
+          </a:xfrm>
+          <a:prstGeom prst="rect">
+            <a:avLst/>
+          </a:prstGeom>
+          <a:solidFill>
+            <a:srgbClr val="223044"/>
+          </a:solidFill>
+          <a:ln w="12700">
+            <a:solidFill>
+              <a:srgbClr val="223044"/>
+            </a:solidFill>
+            <a:prstDash val="solid"/>
+          </a:ln>
+        </p:spPr>
+      </p:sp>
+      <p:sp>
+        <p:nvSpPr>
+          <p:cNvPr id="11" name="Text 9"/>
+          <p:cNvSpPr/>
+          <p:nvPr/>
+        </p:nvSpPr>
+        <p:spPr>
+          <a:xfrm>
+            <a:off x="868680" y="1947672"/>
+            <a:ext cx="6309360" cy="146304"/>
           </a:xfrm>
           <a:prstGeom prst="rect">
             <a:avLst/>
@@ -9181,7 +9354,7 @@
               <a:buNone/>
             </a:pPr>
             <a:r>
-              <a:rPr lang="en-US" sz="850" b="1" spc="70" kern="0" dirty="0">
+              <a:rPr lang="en-US" sz="820" b="1" spc="35" kern="0" dirty="0">
                 <a:solidFill>
                   <a:srgbClr val="8FD3FF"/>
                 </a:solidFill>
@@ -9191,20 +9364,20 @@
               </a:rPr>
               <a:t>tests/test_pricing.py</a:t>
             </a:r>
-            <a:endParaRPr lang="en-US" sz="850" dirty="0"/>
-          </a:p>
-        </p:txBody>
-      </p:sp>
-      <p:sp>
-        <p:nvSpPr>
-          <p:cNvPr id="11" name="Text 9"/>
-          <p:cNvSpPr/>
-          <p:nvPr/>
-        </p:nvSpPr>
-        <p:spPr>
-          <a:xfrm>
-            <a:off x="877824" y="2395728"/>
-            <a:ext cx="6327648" cy="3246120"/>
+            <a:endParaRPr lang="en-US" sz="820" dirty="0"/>
+          </a:p>
+        </p:txBody>
+      </p:sp>
+      <p:sp>
+        <p:nvSpPr>
+          <p:cNvPr id="12" name="Text 10"/>
+          <p:cNvSpPr/>
+          <p:nvPr/>
+        </p:nvSpPr>
+        <p:spPr>
+          <a:xfrm>
+            <a:off x="877824" y="2359152"/>
+            <a:ext cx="6382512" cy="3246120"/>
           </a:xfrm>
           <a:prstGeom prst="rect">
             <a:avLst/>
@@ -9222,7 +9395,7 @@
               <a:buNone/>
             </a:pPr>
             <a:r>
-              <a:rPr lang="en-US" sz="1650" dirty="0">
+              <a:rPr lang="en-US" sz="1600" dirty="0">
                 <a:solidFill>
                   <a:srgbClr val="F4F7FA"/>
                 </a:solidFill>
@@ -9232,20 +9405,20 @@
               </a:rPr>
               <a:t>from app.pricing import calculate_discount</a:t>
             </a:r>
-            <a:endParaRPr lang="en-US" sz="1650" dirty="0"/>
+            <a:endParaRPr lang="en-US" sz="1600" dirty="0"/>
           </a:p>
           <a:p>
             <a:pPr algn="l" indent="0" marL="0">
               <a:buNone/>
             </a:pPr>
-            <a:endParaRPr lang="en-US" sz="1650" dirty="0"/>
+            <a:endParaRPr lang="en-US" sz="1600" dirty="0"/>
           </a:p>
           <a:p>
             <a:pPr algn="l" indent="0" marL="0">
               <a:buNone/>
             </a:pPr>
             <a:r>
-              <a:rPr lang="en-US" sz="1650" dirty="0">
+              <a:rPr lang="en-US" sz="1600" dirty="0">
                 <a:solidFill>
                   <a:srgbClr val="F4F7FA"/>
                 </a:solidFill>
@@ -9255,14 +9428,14 @@
               </a:rPr>
               <a:t>def test_discount_cannot_exceed_price() -&gt; None:</a:t>
             </a:r>
-            <a:endParaRPr lang="en-US" sz="1650" dirty="0"/>
+            <a:endParaRPr lang="en-US" sz="1600" dirty="0"/>
           </a:p>
           <a:p>
             <a:pPr algn="l" indent="0" marL="0">
               <a:buNone/>
             </a:pPr>
             <a:r>
-              <a:rPr lang="en-US" sz="1650" dirty="0">
+              <a:rPr lang="en-US" sz="1600" dirty="0">
                 <a:solidFill>
                   <a:srgbClr val="F4F7FA"/>
                 </a:solidFill>
@@ -9272,20 +9445,20 @@
               </a:rPr>
               <a:t>    assert calculate_discount(100, 1.2) &gt;= 0</a:t>
             </a:r>
-            <a:endParaRPr lang="en-US" sz="1650" dirty="0"/>
-          </a:p>
-        </p:txBody>
-      </p:sp>
-      <p:sp>
-        <p:nvSpPr>
-          <p:cNvPr id="12" name="Shape 10"/>
-          <p:cNvSpPr/>
-          <p:nvPr/>
-        </p:nvSpPr>
-        <p:spPr>
-          <a:xfrm>
-            <a:off x="7909560" y="1901952"/>
-            <a:ext cx="0" cy="3566160"/>
+            <a:endParaRPr lang="en-US" sz="1600" dirty="0"/>
+          </a:p>
+        </p:txBody>
+      </p:sp>
+      <p:sp>
+        <p:nvSpPr>
+          <p:cNvPr id="13" name="Shape 11"/>
+          <p:cNvSpPr/>
+          <p:nvPr/>
+        </p:nvSpPr>
+        <p:spPr>
+          <a:xfrm>
+            <a:off x="7936992" y="1883664"/>
+            <a:ext cx="0" cy="3639312"/>
           </a:xfrm>
           <a:prstGeom prst="line">
             <a:avLst/>
@@ -9301,14 +9474,14 @@
       </p:sp>
       <p:sp>
         <p:nvSpPr>
-          <p:cNvPr id="13" name="Text 11"/>
-          <p:cNvSpPr/>
-          <p:nvPr/>
-        </p:nvSpPr>
-        <p:spPr>
-          <a:xfrm>
-            <a:off x="8229600" y="2130552"/>
-            <a:ext cx="2743200" cy="2468880"/>
+          <p:cNvPr id="14" name="Text 12"/>
+          <p:cNvSpPr/>
+          <p:nvPr/>
+        </p:nvSpPr>
+        <p:spPr>
+          <a:xfrm>
+            <a:off x="8229600" y="2084832"/>
+            <a:ext cx="2816352" cy="2514600"/>
           </a:xfrm>
           <a:prstGeom prst="rect">
             <a:avLst/>
@@ -9326,7 +9499,7 @@
               <a:buNone/>
             </a:pPr>
             <a:r>
-              <a:rPr lang="en-US" sz="1800" dirty="0">
+              <a:rPr lang="en-US" sz="1720" dirty="0">
                 <a:solidFill>
                   <a:srgbClr val="5E6B78"/>
                 </a:solidFill>
@@ -9336,7 +9509,7 @@
               </a:rPr>
               <a:t>Test zlyhá, kým bug existuje. Takýto failing test je začiatok opravy, nie zlyhanie procesu.</a:t>
             </a:r>
-            <a:endParaRPr lang="en-US" sz="1800" dirty="0"/>
+            <a:endParaRPr lang="en-US" sz="1720" dirty="0"/>
           </a:p>
         </p:txBody>
       </p:sp>
@@ -9381,7 +9554,7 @@
         <p:spPr>
           <a:xfrm>
             <a:off x="0" y="0"/>
-            <a:ext cx="12191695" cy="155448"/>
+            <a:ext cx="12191695" cy="109728"/>
           </a:xfrm>
           <a:prstGeom prst="rect">
             <a:avLst/>
@@ -9405,7 +9578,7 @@
         </p:nvSpPr>
         <p:spPr>
           <a:xfrm>
-            <a:off x="566928" y="320040"/>
+            <a:off x="566928" y="310896"/>
             <a:ext cx="4663440" cy="182880"/>
           </a:xfrm>
           <a:prstGeom prst="rect">
@@ -9424,7 +9597,7 @@
               <a:buNone/>
             </a:pPr>
             <a:r>
-              <a:rPr lang="en-US" sz="900" b="1" spc="80" kern="0" dirty="0">
+              <a:rPr lang="en-US" sz="880" b="1" spc="50" kern="0" dirty="0">
                 <a:solidFill>
                   <a:srgbClr val="1877B9"/>
                 </a:solidFill>
@@ -9434,7 +9607,7 @@
               </a:rPr>
               <a:t>PROGRAMOVANIE V PYTHONE</a:t>
             </a:r>
-            <a:endParaRPr lang="en-US" sz="900" dirty="0"/>
+            <a:endParaRPr lang="en-US" sz="880" dirty="0"/>
           </a:p>
         </p:txBody>
       </p:sp>
@@ -9446,7 +9619,7 @@
         </p:nvSpPr>
         <p:spPr>
           <a:xfrm>
-            <a:off x="9829800" y="320040"/>
+            <a:off x="9829800" y="310896"/>
             <a:ext cx="1783080" cy="182880"/>
           </a:xfrm>
           <a:prstGeom prst="rect">
@@ -9465,7 +9638,7 @@
               <a:buNone/>
             </a:pPr>
             <a:r>
-              <a:rPr lang="en-US" sz="900" b="1" dirty="0">
+              <a:rPr lang="en-US" sz="880" b="1" dirty="0">
                 <a:solidFill>
                   <a:srgbClr val="5E6B78"/>
                 </a:solidFill>
@@ -9475,7 +9648,7 @@
               </a:rPr>
               <a:t>PREDNÁŠKA 04</a:t>
             </a:r>
-            <a:endParaRPr lang="en-US" sz="900" dirty="0"/>
+            <a:endParaRPr lang="en-US" sz="880" dirty="0"/>
           </a:p>
         </p:txBody>
       </p:sp>
@@ -9533,8 +9706,8 @@
         </p:nvSpPr>
         <p:spPr>
           <a:xfrm>
-            <a:off x="11109960" y="6501384"/>
-            <a:ext cx="457200" cy="146304"/>
+            <a:off x="10771632" y="6501384"/>
+            <a:ext cx="804672" cy="146304"/>
           </a:xfrm>
           <a:prstGeom prst="rect">
             <a:avLst/>
@@ -9552,7 +9725,7 @@
               <a:buNone/>
             </a:pPr>
             <a:r>
-              <a:rPr lang="en-US" sz="800" dirty="0">
+              <a:rPr lang="en-US" sz="780" dirty="0">
                 <a:solidFill>
                   <a:srgbClr val="5E6B78"/>
                 </a:solidFill>
@@ -9560,9 +9733,9 @@
                 <a:ea typeface="Consolas" pitchFamily="34" charset="-122"/>
                 <a:cs typeface="Consolas" pitchFamily="34" charset="-120"/>
               </a:rPr>
-              <a:t>05</a:t>
-            </a:r>
-            <a:endParaRPr lang="en-US" sz="800" dirty="0"/>
+              <a:t>05 / 18</a:t>
+            </a:r>
+            <a:endParaRPr lang="en-US" sz="780" dirty="0"/>
           </a:p>
         </p:txBody>
       </p:sp>
@@ -9574,8 +9747,8 @@
         </p:nvSpPr>
         <p:spPr>
           <a:xfrm>
-            <a:off x="658368" y="932688"/>
-            <a:ext cx="10789920" cy="713232"/>
+            <a:off x="658368" y="914400"/>
+            <a:ext cx="10881360" cy="713232"/>
           </a:xfrm>
           <a:prstGeom prst="rect">
             <a:avLst/>
@@ -9593,49 +9766,67 @@
               <a:buNone/>
             </a:pPr>
             <a:r>
-              <a:rPr lang="en-US" sz="2900" b="1" dirty="0">
+              <a:rPr lang="en-US" sz="2850" b="1" dirty="0">
                 <a:solidFill>
                   <a:srgbClr val="16324F"/>
+                </a:solidFill>
+                <a:latin typeface="Aptos Display" pitchFamily="34" charset="0"/>
+                <a:ea typeface="Aptos Display" pitchFamily="34" charset="-122"/>
+                <a:cs typeface="Aptos Display" pitchFamily="34" charset="-120"/>
+              </a:rPr>
+              <a:t>Opravujeme kontrakt, nie iba jeden vstup</a:t>
+            </a:r>
+            <a:endParaRPr lang="en-US" sz="2850" dirty="0"/>
+          </a:p>
+        </p:txBody>
+      </p:sp>
+      <p:sp>
+        <p:nvSpPr>
+          <p:cNvPr id="9" name="Text 7"/>
+          <p:cNvSpPr/>
+          <p:nvPr/>
+        </p:nvSpPr>
+        <p:spPr>
+          <a:xfrm>
+            <a:off x="749808" y="1920240"/>
+            <a:ext cx="4160520" cy="3886200"/>
+          </a:xfrm>
+          <a:prstGeom prst="rect">
+            <a:avLst/>
+          </a:prstGeom>
+          <a:noFill/>
+          <a:ln/>
+        </p:spPr>
+        <p:txBody>
+          <a:bodyPr wrap="square" lIns="508" tIns="508" rIns="508" bIns="508" rtlCol="0" anchor="t">
+            <a:normAutofit/>
+          </a:bodyPr>
+          <a:lstStyle/>
+          <a:p>
+            <a:pPr marL="228600" indent="-228600">
+              <a:buSzPct val="100000"/>
+              <a:buChar char="•"/>
+            </a:pPr>
+            <a:r>
+              <a:rPr lang="en-US" sz="1650" dirty="0">
+                <a:solidFill>
+                  <a:srgbClr val="18212B"/>
                 </a:solidFill>
                 <a:latin typeface="Aptos" pitchFamily="34" charset="0"/>
                 <a:ea typeface="Aptos" pitchFamily="34" charset="-122"/>
                 <a:cs typeface="Aptos" pitchFamily="34" charset="-120"/>
               </a:rPr>
-              <a:t>Opravujeme kontrakt, nie iba jeden vstup</a:t>
-            </a:r>
-            <a:endParaRPr lang="en-US" sz="2900" dirty="0"/>
-          </a:p>
-        </p:txBody>
-      </p:sp>
-      <p:sp>
-        <p:nvSpPr>
-          <p:cNvPr id="9" name="Text 7"/>
-          <p:cNvSpPr/>
-          <p:nvPr/>
-        </p:nvSpPr>
-        <p:spPr>
-          <a:xfrm>
-            <a:off x="749808" y="1920240"/>
-            <a:ext cx="4160520" cy="3886200"/>
-          </a:xfrm>
-          <a:prstGeom prst="rect">
-            <a:avLst/>
-          </a:prstGeom>
-          <a:noFill/>
-          <a:ln/>
-        </p:spPr>
-        <p:txBody>
-          <a:bodyPr wrap="square" lIns="508" tIns="508" rIns="508" bIns="508" rtlCol="0" anchor="t">
-            <a:normAutofit/>
-          </a:bodyPr>
-          <a:lstStyle/>
+              <a:t>cena nesmie byť záporná</a:t>
+            </a:r>
+            <a:endParaRPr lang="en-US" sz="1650" dirty="0"/>
+          </a:p>
           <a:p>
             <a:pPr marL="228600" indent="-228600">
               <a:buSzPct val="100000"/>
               <a:buChar char="•"/>
             </a:pPr>
             <a:r>
-              <a:rPr lang="en-US" sz="1700" dirty="0">
+              <a:rPr lang="en-US" sz="1650" dirty="0">
                 <a:solidFill>
                   <a:srgbClr val="18212B"/>
                 </a:solidFill>
@@ -9643,9 +9834,9 @@
                 <a:ea typeface="Aptos" pitchFamily="34" charset="-122"/>
                 <a:cs typeface="Aptos" pitchFamily="34" charset="-120"/>
               </a:rPr>
-              <a:t>cena nesmie byť záporná</a:t>
-            </a:r>
-            <a:endParaRPr lang="en-US" sz="1700" dirty="0"/>
+              <a:t>discount patrí do intervalu 0 až 1</a:t>
+            </a:r>
+            <a:endParaRPr lang="en-US" sz="1650" dirty="0"/>
           </a:p>
           <a:p>
             <a:pPr marL="228600" indent="-228600">
@@ -9653,7 +9844,7 @@
               <a:buChar char="•"/>
             </a:pPr>
             <a:r>
-              <a:rPr lang="en-US" sz="1700" dirty="0">
+              <a:rPr lang="en-US" sz="1650" dirty="0">
                 <a:solidFill>
                   <a:srgbClr val="18212B"/>
                 </a:solidFill>
@@ -9661,27 +9852,9 @@
                 <a:ea typeface="Aptos" pitchFamily="34" charset="-122"/>
                 <a:cs typeface="Aptos" pitchFamily="34" charset="-120"/>
               </a:rPr>
-              <a:t>discount patrí do intervalu 0 až 1</a:t>
-            </a:r>
-            <a:endParaRPr lang="en-US" sz="1700" dirty="0"/>
-          </a:p>
-          <a:p>
-            <a:pPr marL="228600" indent="-228600">
-              <a:buSzPct val="100000"/>
-              <a:buChar char="•"/>
-            </a:pPr>
-            <a:r>
-              <a:rPr lang="en-US" sz="1700" dirty="0">
-                <a:solidFill>
-                  <a:srgbClr val="18212B"/>
-                </a:solidFill>
-                <a:latin typeface="Aptos" pitchFamily="34" charset="0"/>
-                <a:ea typeface="Aptos" pitchFamily="34" charset="-122"/>
-                <a:cs typeface="Aptos" pitchFamily="34" charset="-120"/>
-              </a:rPr>
               <a:t>neplatný vstup musí byť viditeľný</a:t>
             </a:r>
-            <a:endParaRPr lang="en-US" sz="1700" dirty="0"/>
+            <a:endParaRPr lang="en-US" sz="1650" dirty="0"/>
           </a:p>
         </p:txBody>
       </p:sp>
@@ -9693,8 +9866,8 @@
         </p:nvSpPr>
         <p:spPr>
           <a:xfrm>
-            <a:off x="5394960" y="1792224"/>
-            <a:ext cx="5943600" cy="4160520"/>
+            <a:off x="5413248" y="1792224"/>
+            <a:ext cx="5925312" cy="4160520"/>
           </a:xfrm>
           <a:prstGeom prst="rect">
             <a:avLst/>
@@ -9704,7 +9877,7 @@
           </a:solidFill>
           <a:ln w="12700">
             <a:solidFill>
-              <a:srgbClr val="17212B"/>
+              <a:srgbClr val="243242"/>
             </a:solidFill>
             <a:prstDash val="solid"/>
           </a:ln>
@@ -9712,14 +9885,39 @@
       </p:sp>
       <p:sp>
         <p:nvSpPr>
-          <p:cNvPr id="11" name="Text 9"/>
-          <p:cNvSpPr/>
-          <p:nvPr/>
-        </p:nvSpPr>
-        <p:spPr>
-          <a:xfrm>
-            <a:off x="5641848" y="1993392"/>
-            <a:ext cx="5394960" cy="182880"/>
+          <p:cNvPr id="11" name="Shape 9"/>
+          <p:cNvSpPr/>
+          <p:nvPr/>
+        </p:nvSpPr>
+        <p:spPr>
+          <a:xfrm>
+            <a:off x="5413248" y="1792224"/>
+            <a:ext cx="5925312" cy="329184"/>
+          </a:xfrm>
+          <a:prstGeom prst="rect">
+            <a:avLst/>
+          </a:prstGeom>
+          <a:solidFill>
+            <a:srgbClr val="223044"/>
+          </a:solidFill>
+          <a:ln w="12700">
+            <a:solidFill>
+              <a:srgbClr val="223044"/>
+            </a:solidFill>
+            <a:prstDash val="solid"/>
+          </a:ln>
+        </p:spPr>
+      </p:sp>
+      <p:sp>
+        <p:nvSpPr>
+          <p:cNvPr id="12" name="Text 10"/>
+          <p:cNvSpPr/>
+          <p:nvPr/>
+        </p:nvSpPr>
+        <p:spPr>
+          <a:xfrm>
+            <a:off x="5641848" y="1901952"/>
+            <a:ext cx="5394960" cy="146304"/>
           </a:xfrm>
           <a:prstGeom prst="rect">
             <a:avLst/>
@@ -9737,7 +9935,7 @@
               <a:buNone/>
             </a:pPr>
             <a:r>
-              <a:rPr lang="en-US" sz="850" b="1" spc="70" kern="0" dirty="0">
+              <a:rPr lang="en-US" sz="810" b="1" spc="35" kern="0" dirty="0">
                 <a:solidFill>
                   <a:srgbClr val="8FD3FF"/>
                 </a:solidFill>
@@ -9747,20 +9945,20 @@
               </a:rPr>
               <a:t>python</a:t>
             </a:r>
-            <a:endParaRPr lang="en-US" sz="850" dirty="0"/>
-          </a:p>
-        </p:txBody>
-      </p:sp>
-      <p:sp>
-        <p:nvSpPr>
-          <p:cNvPr id="12" name="Text 10"/>
-          <p:cNvSpPr/>
-          <p:nvPr/>
-        </p:nvSpPr>
-        <p:spPr>
-          <a:xfrm>
-            <a:off x="5641848" y="2395728"/>
-            <a:ext cx="5330952" cy="3127248"/>
+            <a:endParaRPr lang="en-US" sz="810" dirty="0"/>
+          </a:p>
+        </p:txBody>
+      </p:sp>
+      <p:sp>
+        <p:nvSpPr>
+          <p:cNvPr id="13" name="Text 11"/>
+          <p:cNvSpPr/>
+          <p:nvPr/>
+        </p:nvSpPr>
+        <p:spPr>
+          <a:xfrm>
+            <a:off x="5641848" y="2331720"/>
+            <a:ext cx="5340096" cy="3182112"/>
           </a:xfrm>
           <a:prstGeom prst="rect">
             <a:avLst/>
@@ -9778,7 +9976,7 @@
               <a:buNone/>
             </a:pPr>
             <a:r>
-              <a:rPr lang="en-US" sz="1560" dirty="0">
+              <a:rPr lang="en-US" sz="1520" dirty="0">
                 <a:solidFill>
                   <a:srgbClr val="F4F7FA"/>
                 </a:solidFill>
@@ -9788,14 +9986,14 @@
               </a:rPr>
               <a:t>def calculate_discount(price: float, discount: float) -&gt; float:</a:t>
             </a:r>
-            <a:endParaRPr lang="en-US" sz="1560" dirty="0"/>
+            <a:endParaRPr lang="en-US" sz="1520" dirty="0"/>
           </a:p>
           <a:p>
             <a:pPr algn="l" indent="0" marL="0">
               <a:buNone/>
             </a:pPr>
             <a:r>
-              <a:rPr lang="en-US" sz="1560" dirty="0">
+              <a:rPr lang="en-US" sz="1520" dirty="0">
                 <a:solidFill>
                   <a:srgbClr val="F4F7FA"/>
                 </a:solidFill>
@@ -9805,14 +10003,14 @@
               </a:rPr>
               <a:t>    if price &lt; 0:</a:t>
             </a:r>
-            <a:endParaRPr lang="en-US" sz="1560" dirty="0"/>
+            <a:endParaRPr lang="en-US" sz="1520" dirty="0"/>
           </a:p>
           <a:p>
             <a:pPr algn="l" indent="0" marL="0">
               <a:buNone/>
             </a:pPr>
             <a:r>
-              <a:rPr lang="en-US" sz="1560" dirty="0">
+              <a:rPr lang="en-US" sz="1520" dirty="0">
                 <a:solidFill>
                   <a:srgbClr val="F4F7FA"/>
                 </a:solidFill>
@@ -9822,14 +10020,14 @@
               </a:rPr>
               <a:t>        raise ValueError("price must be non-negative")</a:t>
             </a:r>
-            <a:endParaRPr lang="en-US" sz="1560" dirty="0"/>
+            <a:endParaRPr lang="en-US" sz="1520" dirty="0"/>
           </a:p>
           <a:p>
             <a:pPr algn="l" indent="0" marL="0">
               <a:buNone/>
             </a:pPr>
             <a:r>
-              <a:rPr lang="en-US" sz="1560" dirty="0">
+              <a:rPr lang="en-US" sz="1520" dirty="0">
                 <a:solidFill>
                   <a:srgbClr val="F4F7FA"/>
                 </a:solidFill>
@@ -9839,14 +10037,14 @@
               </a:rPr>
               <a:t>    if not 0 &lt;= discount &lt;= 1:</a:t>
             </a:r>
-            <a:endParaRPr lang="en-US" sz="1560" dirty="0"/>
+            <a:endParaRPr lang="en-US" sz="1520" dirty="0"/>
           </a:p>
           <a:p>
             <a:pPr algn="l" indent="0" marL="0">
               <a:buNone/>
             </a:pPr>
             <a:r>
-              <a:rPr lang="en-US" sz="1560" dirty="0">
+              <a:rPr lang="en-US" sz="1520" dirty="0">
                 <a:solidFill>
                   <a:srgbClr val="F4F7FA"/>
                 </a:solidFill>
@@ -9856,14 +10054,14 @@
               </a:rPr>
               <a:t>        raise ValueError("discount must be between 0 and 1")</a:t>
             </a:r>
-            <a:endParaRPr lang="en-US" sz="1560" dirty="0"/>
+            <a:endParaRPr lang="en-US" sz="1520" dirty="0"/>
           </a:p>
           <a:p>
             <a:pPr algn="l" indent="0" marL="0">
               <a:buNone/>
             </a:pPr>
             <a:r>
-              <a:rPr lang="en-US" sz="1560" dirty="0">
+              <a:rPr lang="en-US" sz="1520" dirty="0">
                 <a:solidFill>
                   <a:srgbClr val="F4F7FA"/>
                 </a:solidFill>
@@ -9873,7 +10071,7 @@
               </a:rPr>
               <a:t>    return price * (1 - discount)</a:t>
             </a:r>
-            <a:endParaRPr lang="en-US" sz="1560" dirty="0"/>
+            <a:endParaRPr lang="en-US" sz="1520" dirty="0"/>
           </a:p>
         </p:txBody>
       </p:sp>
@@ -9918,7 +10116,7 @@
         <p:spPr>
           <a:xfrm>
             <a:off x="0" y="0"/>
-            <a:ext cx="12191695" cy="155448"/>
+            <a:ext cx="12191695" cy="109728"/>
           </a:xfrm>
           <a:prstGeom prst="rect">
             <a:avLst/>
@@ -9942,7 +10140,7 @@
         </p:nvSpPr>
         <p:spPr>
           <a:xfrm>
-            <a:off x="566928" y="320040"/>
+            <a:off x="566928" y="310896"/>
             <a:ext cx="4663440" cy="182880"/>
           </a:xfrm>
           <a:prstGeom prst="rect">
@@ -9961,7 +10159,7 @@
               <a:buNone/>
             </a:pPr>
             <a:r>
-              <a:rPr lang="en-US" sz="900" b="1" spc="80" kern="0" dirty="0">
+              <a:rPr lang="en-US" sz="880" b="1" spc="50" kern="0" dirty="0">
                 <a:solidFill>
                   <a:srgbClr val="1877B9"/>
                 </a:solidFill>
@@ -9971,7 +10169,7 @@
               </a:rPr>
               <a:t>PROGRAMOVANIE V PYTHONE</a:t>
             </a:r>
-            <a:endParaRPr lang="en-US" sz="900" dirty="0"/>
+            <a:endParaRPr lang="en-US" sz="880" dirty="0"/>
           </a:p>
         </p:txBody>
       </p:sp>
@@ -9983,7 +10181,7 @@
         </p:nvSpPr>
         <p:spPr>
           <a:xfrm>
-            <a:off x="9829800" y="320040"/>
+            <a:off x="9829800" y="310896"/>
             <a:ext cx="1783080" cy="182880"/>
           </a:xfrm>
           <a:prstGeom prst="rect">
@@ -10002,7 +10200,7 @@
               <a:buNone/>
             </a:pPr>
             <a:r>
-              <a:rPr lang="en-US" sz="900" b="1" dirty="0">
+              <a:rPr lang="en-US" sz="880" b="1" dirty="0">
                 <a:solidFill>
                   <a:srgbClr val="5E6B78"/>
                 </a:solidFill>
@@ -10012,7 +10210,7 @@
               </a:rPr>
               <a:t>PREDNÁŠKA 04</a:t>
             </a:r>
-            <a:endParaRPr lang="en-US" sz="900" dirty="0"/>
+            <a:endParaRPr lang="en-US" sz="880" dirty="0"/>
           </a:p>
         </p:txBody>
       </p:sp>
@@ -10070,8 +10268,8 @@
         </p:nvSpPr>
         <p:spPr>
           <a:xfrm>
-            <a:off x="11109960" y="6501384"/>
-            <a:ext cx="457200" cy="146304"/>
+            <a:off x="10771632" y="6501384"/>
+            <a:ext cx="804672" cy="146304"/>
           </a:xfrm>
           <a:prstGeom prst="rect">
             <a:avLst/>
@@ -10089,7 +10287,7 @@
               <a:buNone/>
             </a:pPr>
             <a:r>
-              <a:rPr lang="en-US" sz="800" dirty="0">
+              <a:rPr lang="en-US" sz="780" dirty="0">
                 <a:solidFill>
                   <a:srgbClr val="5E6B78"/>
                 </a:solidFill>
@@ -10097,9 +10295,9 @@
                 <a:ea typeface="Consolas" pitchFamily="34" charset="-122"/>
                 <a:cs typeface="Consolas" pitchFamily="34" charset="-120"/>
               </a:rPr>
-              <a:t>06</a:t>
-            </a:r>
-            <a:endParaRPr lang="en-US" sz="800" dirty="0"/>
+              <a:t>06 / 18</a:t>
+            </a:r>
+            <a:endParaRPr lang="en-US" sz="780" dirty="0"/>
           </a:p>
         </p:txBody>
       </p:sp>
@@ -10111,8 +10309,8 @@
         </p:nvSpPr>
         <p:spPr>
           <a:xfrm>
-            <a:off x="658368" y="932688"/>
-            <a:ext cx="10789920" cy="713232"/>
+            <a:off x="658368" y="914400"/>
+            <a:ext cx="10881360" cy="713232"/>
           </a:xfrm>
           <a:prstGeom prst="rect">
             <a:avLst/>
@@ -10130,17 +10328,17 @@
               <a:buNone/>
             </a:pPr>
             <a:r>
-              <a:rPr lang="en-US" sz="2900" b="1" dirty="0">
+              <a:rPr lang="en-US" sz="2850" b="1" dirty="0">
                 <a:solidFill>
                   <a:srgbClr val="16324F"/>
                 </a:solidFill>
-                <a:latin typeface="Aptos" pitchFamily="34" charset="0"/>
-                <a:ea typeface="Aptos" pitchFamily="34" charset="-122"/>
-                <a:cs typeface="Aptos" pitchFamily="34" charset="-120"/>
+                <a:latin typeface="Aptos Display" pitchFamily="34" charset="0"/>
+                <a:ea typeface="Aptos Display" pitchFamily="34" charset="-122"/>
+                <a:cs typeface="Aptos Display" pitchFamily="34" charset="-120"/>
               </a:rPr>
               <a:t>pytest spúšťa testy bez vlastného runnera</a:t>
             </a:r>
-            <a:endParaRPr lang="en-US" sz="2900" dirty="0"/>
+            <a:endParaRPr lang="en-US" sz="2850" dirty="0"/>
           </a:p>
         </p:txBody>
       </p:sp>
@@ -10153,19 +10351,17 @@
         <p:spPr>
           <a:xfrm>
             <a:off x="658368" y="1828800"/>
-            <a:ext cx="6812280" cy="4069080"/>
-          </a:xfrm>
-          <a:prstGeom prst="roundRect">
-            <a:avLst>
-              <a:gd name="adj" fmla="val 1348"/>
-            </a:avLst>
+            <a:ext cx="6903720" cy="4069080"/>
+          </a:xfrm>
+          <a:prstGeom prst="rect">
+            <a:avLst/>
           </a:prstGeom>
           <a:solidFill>
             <a:srgbClr val="17212B"/>
           </a:solidFill>
           <a:ln w="12700">
             <a:solidFill>
-              <a:srgbClr val="17212B"/>
+              <a:srgbClr val="243242"/>
             </a:solidFill>
             <a:prstDash val="solid"/>
           </a:ln>
@@ -10173,14 +10369,39 @@
       </p:sp>
       <p:sp>
         <p:nvSpPr>
-          <p:cNvPr id="10" name="Text 8"/>
-          <p:cNvSpPr/>
-          <p:nvPr/>
-        </p:nvSpPr>
-        <p:spPr>
-          <a:xfrm>
-            <a:off x="868680" y="2029968"/>
-            <a:ext cx="6309360" cy="182880"/>
+          <p:cNvPr id="10" name="Shape 8"/>
+          <p:cNvSpPr/>
+          <p:nvPr/>
+        </p:nvSpPr>
+        <p:spPr>
+          <a:xfrm>
+            <a:off x="658368" y="1828800"/>
+            <a:ext cx="6903720" cy="347472"/>
+          </a:xfrm>
+          <a:prstGeom prst="rect">
+            <a:avLst/>
+          </a:prstGeom>
+          <a:solidFill>
+            <a:srgbClr val="223044"/>
+          </a:solidFill>
+          <a:ln w="12700">
+            <a:solidFill>
+              <a:srgbClr val="223044"/>
+            </a:solidFill>
+            <a:prstDash val="solid"/>
+          </a:ln>
+        </p:spPr>
+      </p:sp>
+      <p:sp>
+        <p:nvSpPr>
+          <p:cNvPr id="11" name="Text 9"/>
+          <p:cNvSpPr/>
+          <p:nvPr/>
+        </p:nvSpPr>
+        <p:spPr>
+          <a:xfrm>
+            <a:off x="868680" y="1947672"/>
+            <a:ext cx="6309360" cy="146304"/>
           </a:xfrm>
           <a:prstGeom prst="rect">
             <a:avLst/>
@@ -10198,7 +10419,7 @@
               <a:buNone/>
             </a:pPr>
             <a:r>
-              <a:rPr lang="en-US" sz="850" b="1" spc="70" kern="0" dirty="0">
+              <a:rPr lang="en-US" sz="820" b="1" spc="35" kern="0" dirty="0">
                 <a:solidFill>
                   <a:srgbClr val="8FD3FF"/>
                 </a:solidFill>
@@ -10208,20 +10429,20 @@
               </a:rPr>
               <a:t>terminal</a:t>
             </a:r>
-            <a:endParaRPr lang="en-US" sz="850" dirty="0"/>
-          </a:p>
-        </p:txBody>
-      </p:sp>
-      <p:sp>
-        <p:nvSpPr>
-          <p:cNvPr id="11" name="Text 9"/>
-          <p:cNvSpPr/>
-          <p:nvPr/>
-        </p:nvSpPr>
-        <p:spPr>
-          <a:xfrm>
-            <a:off x="877824" y="2395728"/>
-            <a:ext cx="6327648" cy="3246120"/>
+            <a:endParaRPr lang="en-US" sz="820" dirty="0"/>
+          </a:p>
+        </p:txBody>
+      </p:sp>
+      <p:sp>
+        <p:nvSpPr>
+          <p:cNvPr id="12" name="Text 10"/>
+          <p:cNvSpPr/>
+          <p:nvPr/>
+        </p:nvSpPr>
+        <p:spPr>
+          <a:xfrm>
+            <a:off x="877824" y="2359152"/>
+            <a:ext cx="6382512" cy="3246120"/>
           </a:xfrm>
           <a:prstGeom prst="rect">
             <a:avLst/>
@@ -10239,7 +10460,7 @@
               <a:buNone/>
             </a:pPr>
             <a:r>
-              <a:rPr lang="en-US" sz="1650" dirty="0">
+              <a:rPr lang="en-US" sz="1600" dirty="0">
                 <a:solidFill>
                   <a:srgbClr val="F4F7FA"/>
                 </a:solidFill>
@@ -10249,20 +10470,20 @@
               </a:rPr>
               <a:t>python -m pytest</a:t>
             </a:r>
-            <a:endParaRPr lang="en-US" sz="1650" dirty="0"/>
+            <a:endParaRPr lang="en-US" sz="1600" dirty="0"/>
           </a:p>
           <a:p>
             <a:pPr algn="l" indent="0" marL="0">
               <a:buNone/>
             </a:pPr>
-            <a:endParaRPr lang="en-US" sz="1650" dirty="0"/>
+            <a:endParaRPr lang="en-US" sz="1600" dirty="0"/>
           </a:p>
           <a:p>
             <a:pPr algn="l" indent="0" marL="0">
               <a:buNone/>
             </a:pPr>
             <a:r>
-              <a:rPr lang="en-US" sz="1650" dirty="0">
+              <a:rPr lang="en-US" sz="1600" dirty="0">
                 <a:solidFill>
                   <a:srgbClr val="F4F7FA"/>
                 </a:solidFill>
@@ -10272,14 +10493,14 @@
               </a:rPr>
               <a:t># jeden súbor</a:t>
             </a:r>
-            <a:endParaRPr lang="en-US" sz="1650" dirty="0"/>
+            <a:endParaRPr lang="en-US" sz="1600" dirty="0"/>
           </a:p>
           <a:p>
             <a:pPr algn="l" indent="0" marL="0">
               <a:buNone/>
             </a:pPr>
             <a:r>
-              <a:rPr lang="en-US" sz="1650" dirty="0">
+              <a:rPr lang="en-US" sz="1600" dirty="0">
                 <a:solidFill>
                   <a:srgbClr val="F4F7FA"/>
                 </a:solidFill>
@@ -10289,20 +10510,20 @@
               </a:rPr>
               <a:t>python -m pytest tests/test_pricing.py</a:t>
             </a:r>
-            <a:endParaRPr lang="en-US" sz="1650" dirty="0"/>
+            <a:endParaRPr lang="en-US" sz="1600" dirty="0"/>
           </a:p>
           <a:p>
             <a:pPr algn="l" indent="0" marL="0">
               <a:buNone/>
             </a:pPr>
-            <a:endParaRPr lang="en-US" sz="1650" dirty="0"/>
+            <a:endParaRPr lang="en-US" sz="1600" dirty="0"/>
           </a:p>
           <a:p>
             <a:pPr algn="l" indent="0" marL="0">
               <a:buNone/>
             </a:pPr>
             <a:r>
-              <a:rPr lang="en-US" sz="1650" dirty="0">
+              <a:rPr lang="en-US" sz="1600" dirty="0">
                 <a:solidFill>
                   <a:srgbClr val="F4F7FA"/>
                 </a:solidFill>
@@ -10312,14 +10533,14 @@
               </a:rPr>
               <a:t># podrobnejší výstup</a:t>
             </a:r>
-            <a:endParaRPr lang="en-US" sz="1650" dirty="0"/>
+            <a:endParaRPr lang="en-US" sz="1600" dirty="0"/>
           </a:p>
           <a:p>
             <a:pPr algn="l" indent="0" marL="0">
               <a:buNone/>
             </a:pPr>
             <a:r>
-              <a:rPr lang="en-US" sz="1650" dirty="0">
+              <a:rPr lang="en-US" sz="1600" dirty="0">
                 <a:solidFill>
                   <a:srgbClr val="F4F7FA"/>
                 </a:solidFill>
@@ -10329,20 +10550,20 @@
               </a:rPr>
               <a:t>python -m pytest -v</a:t>
             </a:r>
-            <a:endParaRPr lang="en-US" sz="1650" dirty="0"/>
-          </a:p>
-        </p:txBody>
-      </p:sp>
-      <p:sp>
-        <p:nvSpPr>
-          <p:cNvPr id="12" name="Shape 10"/>
-          <p:cNvSpPr/>
-          <p:nvPr/>
-        </p:nvSpPr>
-        <p:spPr>
-          <a:xfrm>
-            <a:off x="7909560" y="1901952"/>
-            <a:ext cx="0" cy="3566160"/>
+            <a:endParaRPr lang="en-US" sz="1600" dirty="0"/>
+          </a:p>
+        </p:txBody>
+      </p:sp>
+      <p:sp>
+        <p:nvSpPr>
+          <p:cNvPr id="13" name="Shape 11"/>
+          <p:cNvSpPr/>
+          <p:nvPr/>
+        </p:nvSpPr>
+        <p:spPr>
+          <a:xfrm>
+            <a:off x="7936992" y="1883664"/>
+            <a:ext cx="0" cy="3639312"/>
           </a:xfrm>
           <a:prstGeom prst="line">
             <a:avLst/>
@@ -10358,14 +10579,14 @@
       </p:sp>
       <p:sp>
         <p:nvSpPr>
-          <p:cNvPr id="13" name="Text 11"/>
-          <p:cNvSpPr/>
-          <p:nvPr/>
-        </p:nvSpPr>
-        <p:spPr>
-          <a:xfrm>
-            <a:off x="8229600" y="2130552"/>
-            <a:ext cx="2743200" cy="2468880"/>
+          <p:cNvPr id="14" name="Text 12"/>
+          <p:cNvSpPr/>
+          <p:nvPr/>
+        </p:nvSpPr>
+        <p:spPr>
+          <a:xfrm>
+            <a:off x="8229600" y="2084832"/>
+            <a:ext cx="2816352" cy="2514600"/>
           </a:xfrm>
           <a:prstGeom prst="rect">
             <a:avLst/>
@@ -10383,7 +10604,7 @@
               <a:buNone/>
             </a:pPr>
             <a:r>
-              <a:rPr lang="en-US" sz="1800" dirty="0">
+              <a:rPr lang="en-US" sz="1720" dirty="0">
                 <a:solidFill>
                   <a:srgbClr val="5E6B78"/>
                 </a:solidFill>
@@ -10393,7 +10614,7 @@
               </a:rPr>
               <a:t>Názov súboru a funkcie umožní pytestu test objaviť. Výstup ukáže rozdiel medzi actual a expected.</a:t>
             </a:r>
-            <a:endParaRPr lang="en-US" sz="1800" dirty="0"/>
+            <a:endParaRPr lang="en-US" sz="1720" dirty="0"/>
           </a:p>
         </p:txBody>
       </p:sp>
@@ -10438,7 +10659,7 @@
         <p:spPr>
           <a:xfrm>
             <a:off x="0" y="0"/>
-            <a:ext cx="12191695" cy="155448"/>
+            <a:ext cx="12191695" cy="109728"/>
           </a:xfrm>
           <a:prstGeom prst="rect">
             <a:avLst/>
@@ -10462,7 +10683,7 @@
         </p:nvSpPr>
         <p:spPr>
           <a:xfrm>
-            <a:off x="566928" y="320040"/>
+            <a:off x="566928" y="310896"/>
             <a:ext cx="4663440" cy="182880"/>
           </a:xfrm>
           <a:prstGeom prst="rect">
@@ -10481,7 +10702,7 @@
               <a:buNone/>
             </a:pPr>
             <a:r>
-              <a:rPr lang="en-US" sz="900" b="1" spc="80" kern="0" dirty="0">
+              <a:rPr lang="en-US" sz="880" b="1" spc="50" kern="0" dirty="0">
                 <a:solidFill>
                   <a:srgbClr val="1877B9"/>
                 </a:solidFill>
@@ -10491,7 +10712,7 @@
               </a:rPr>
               <a:t>PROGRAMOVANIE V PYTHONE</a:t>
             </a:r>
-            <a:endParaRPr lang="en-US" sz="900" dirty="0"/>
+            <a:endParaRPr lang="en-US" sz="880" dirty="0"/>
           </a:p>
         </p:txBody>
       </p:sp>
@@ -10503,7 +10724,7 @@
         </p:nvSpPr>
         <p:spPr>
           <a:xfrm>
-            <a:off x="9829800" y="320040"/>
+            <a:off x="9829800" y="310896"/>
             <a:ext cx="1783080" cy="182880"/>
           </a:xfrm>
           <a:prstGeom prst="rect">
@@ -10522,7 +10743,7 @@
               <a:buNone/>
             </a:pPr>
             <a:r>
-              <a:rPr lang="en-US" sz="900" b="1" dirty="0">
+              <a:rPr lang="en-US" sz="880" b="1" dirty="0">
                 <a:solidFill>
                   <a:srgbClr val="5E6B78"/>
                 </a:solidFill>
@@ -10532,7 +10753,7 @@
               </a:rPr>
               <a:t>PREDNÁŠKA 04</a:t>
             </a:r>
-            <a:endParaRPr lang="en-US" sz="900" dirty="0"/>
+            <a:endParaRPr lang="en-US" sz="880" dirty="0"/>
           </a:p>
         </p:txBody>
       </p:sp>
@@ -10590,8 +10811,8 @@
         </p:nvSpPr>
         <p:spPr>
           <a:xfrm>
-            <a:off x="11109960" y="6501384"/>
-            <a:ext cx="457200" cy="146304"/>
+            <a:off x="10771632" y="6501384"/>
+            <a:ext cx="804672" cy="146304"/>
           </a:xfrm>
           <a:prstGeom prst="rect">
             <a:avLst/>
@@ -10609,7 +10830,7 @@
               <a:buNone/>
             </a:pPr>
             <a:r>
-              <a:rPr lang="en-US" sz="800" dirty="0">
+              <a:rPr lang="en-US" sz="780" dirty="0">
                 <a:solidFill>
                   <a:srgbClr val="5E6B78"/>
                 </a:solidFill>
@@ -10617,9 +10838,9 @@
                 <a:ea typeface="Consolas" pitchFamily="34" charset="-122"/>
                 <a:cs typeface="Consolas" pitchFamily="34" charset="-120"/>
               </a:rPr>
-              <a:t>07</a:t>
-            </a:r>
-            <a:endParaRPr lang="en-US" sz="800" dirty="0"/>
+              <a:t>07 / 18</a:t>
+            </a:r>
+            <a:endParaRPr lang="en-US" sz="780" dirty="0"/>
           </a:p>
         </p:txBody>
       </p:sp>
@@ -10631,8 +10852,8 @@
         </p:nvSpPr>
         <p:spPr>
           <a:xfrm>
-            <a:off x="658368" y="932688"/>
-            <a:ext cx="10789920" cy="713232"/>
+            <a:off x="658368" y="914400"/>
+            <a:ext cx="10881360" cy="713232"/>
           </a:xfrm>
           <a:prstGeom prst="rect">
             <a:avLst/>
@@ -10650,17 +10871,17 @@
               <a:buNone/>
             </a:pPr>
             <a:r>
-              <a:rPr lang="en-US" sz="2900" b="1" dirty="0">
+              <a:rPr lang="en-US" sz="2850" b="1" dirty="0">
                 <a:solidFill>
                   <a:srgbClr val="16324F"/>
                 </a:solidFill>
-                <a:latin typeface="Aptos" pitchFamily="34" charset="0"/>
-                <a:ea typeface="Aptos" pitchFamily="34" charset="-122"/>
-                <a:cs typeface="Aptos" pitchFamily="34" charset="-120"/>
+                <a:latin typeface="Aptos Display" pitchFamily="34" charset="0"/>
+                <a:ea typeface="Aptos Display" pitchFamily="34" charset="-122"/>
+                <a:cs typeface="Aptos Display" pitchFamily="34" charset="-120"/>
               </a:rPr>
               <a:t>Testovacie prípady vychádzajú z hraníc</a:t>
             </a:r>
-            <a:endParaRPr lang="en-US" sz="2900" dirty="0"/>
+            <a:endParaRPr lang="en-US" sz="2850" dirty="0"/>
           </a:p>
         </p:txBody>
       </p:sp>
@@ -10672,13 +10893,11 @@
         </p:nvSpPr>
         <p:spPr>
           <a:xfrm>
-            <a:off x="731520" y="2834640"/>
-            <a:ext cx="2450592" cy="1042416"/>
-          </a:xfrm>
-          <a:prstGeom prst="roundRect">
-            <a:avLst>
-              <a:gd name="adj" fmla="val 4386"/>
-            </a:avLst>
+            <a:off x="694944" y="2834640"/>
+            <a:ext cx="2400300" cy="1042416"/>
+          </a:xfrm>
+          <a:prstGeom prst="rect">
+            <a:avLst/>
           </a:prstGeom>
           <a:solidFill>
             <a:srgbClr val="F3F6F8"/>
@@ -10699,8 +10918,8 @@
         </p:nvSpPr>
         <p:spPr>
           <a:xfrm>
-            <a:off x="877824" y="3063240"/>
-            <a:ext cx="2157984" cy="548640"/>
+            <a:off x="804672" y="3063240"/>
+            <a:ext cx="2180844" cy="548640"/>
           </a:xfrm>
           <a:prstGeom prst="rect">
             <a:avLst/>
@@ -10740,7 +10959,7 @@
         </p:nvSpPr>
         <p:spPr>
           <a:xfrm>
-            <a:off x="3319272" y="3209544"/>
+            <a:off x="3232404" y="3209544"/>
             <a:ext cx="182880" cy="292608"/>
           </a:xfrm>
           <a:prstGeom prst="chevron">
@@ -10765,13 +10984,11 @@
         </p:nvSpPr>
         <p:spPr>
           <a:xfrm>
-            <a:off x="3593592" y="2834640"/>
-            <a:ext cx="2450592" cy="1042416"/>
-          </a:xfrm>
-          <a:prstGeom prst="roundRect">
-            <a:avLst>
-              <a:gd name="adj" fmla="val 4386"/>
-            </a:avLst>
+            <a:off x="3506724" y="2834640"/>
+            <a:ext cx="2400300" cy="1042416"/>
+          </a:xfrm>
+          <a:prstGeom prst="rect">
+            <a:avLst/>
           </a:prstGeom>
           <a:solidFill>
             <a:srgbClr val="EAF3F7"/>
@@ -10792,8 +11009,8 @@
         </p:nvSpPr>
         <p:spPr>
           <a:xfrm>
-            <a:off x="3739896" y="3063240"/>
-            <a:ext cx="2157984" cy="548640"/>
+            <a:off x="3616452" y="3063240"/>
+            <a:ext cx="2180844" cy="548640"/>
           </a:xfrm>
           <a:prstGeom prst="rect">
             <a:avLst/>
@@ -10833,7 +11050,7 @@
         </p:nvSpPr>
         <p:spPr>
           <a:xfrm>
-            <a:off x="6181344" y="3209544"/>
+            <a:off x="6044184" y="3209544"/>
             <a:ext cx="182880" cy="292608"/>
           </a:xfrm>
           <a:prstGeom prst="chevron">
@@ -10858,13 +11075,11 @@
         </p:nvSpPr>
         <p:spPr>
           <a:xfrm>
-            <a:off x="6455664" y="2834640"/>
-            <a:ext cx="2450592" cy="1042416"/>
-          </a:xfrm>
-          <a:prstGeom prst="roundRect">
-            <a:avLst>
-              <a:gd name="adj" fmla="val 4386"/>
-            </a:avLst>
+            <a:off x="6318504" y="2834640"/>
+            <a:ext cx="2400300" cy="1042416"/>
+          </a:xfrm>
+          <a:prstGeom prst="rect">
+            <a:avLst/>
           </a:prstGeom>
           <a:solidFill>
             <a:srgbClr val="F3F6F8"/>
@@ -10885,8 +11100,8 @@
         </p:nvSpPr>
         <p:spPr>
           <a:xfrm>
-            <a:off x="6601968" y="3063240"/>
-            <a:ext cx="2157984" cy="548640"/>
+            <a:off x="6428232" y="3063240"/>
+            <a:ext cx="2180844" cy="548640"/>
           </a:xfrm>
           <a:prstGeom prst="rect">
             <a:avLst/>
@@ -10926,7 +11141,7 @@
         </p:nvSpPr>
         <p:spPr>
           <a:xfrm>
-            <a:off x="9043416" y="3209544"/>
+            <a:off x="8855964" y="3209544"/>
             <a:ext cx="182880" cy="292608"/>
           </a:xfrm>
           <a:prstGeom prst="chevron">
@@ -10951,13 +11166,11 @@
         </p:nvSpPr>
         <p:spPr>
           <a:xfrm>
-            <a:off x="9317736" y="2834640"/>
-            <a:ext cx="2450592" cy="1042416"/>
-          </a:xfrm>
-          <a:prstGeom prst="roundRect">
-            <a:avLst>
-              <a:gd name="adj" fmla="val 4386"/>
-            </a:avLst>
+            <a:off x="9130284" y="2834640"/>
+            <a:ext cx="2400300" cy="1042416"/>
+          </a:xfrm>
+          <a:prstGeom prst="rect">
+            <a:avLst/>
           </a:prstGeom>
           <a:solidFill>
             <a:srgbClr val="EAF3F7"/>
@@ -10978,8 +11191,8 @@
         </p:nvSpPr>
         <p:spPr>
           <a:xfrm>
-            <a:off x="9464040" y="3063240"/>
-            <a:ext cx="2157984" cy="548640"/>
+            <a:off x="9240012" y="3063240"/>
+            <a:ext cx="2180844" cy="548640"/>
           </a:xfrm>
           <a:prstGeom prst="rect">
             <a:avLst/>
@@ -11052,7 +11265,7 @@
         <p:spPr>
           <a:xfrm>
             <a:off x="0" y="0"/>
-            <a:ext cx="12191695" cy="155448"/>
+            <a:ext cx="12191695" cy="109728"/>
           </a:xfrm>
           <a:prstGeom prst="rect">
             <a:avLst/>
@@ -11076,7 +11289,7 @@
         </p:nvSpPr>
         <p:spPr>
           <a:xfrm>
-            <a:off x="566928" y="320040"/>
+            <a:off x="566928" y="310896"/>
             <a:ext cx="4663440" cy="182880"/>
           </a:xfrm>
           <a:prstGeom prst="rect">
@@ -11095,7 +11308,7 @@
               <a:buNone/>
             </a:pPr>
             <a:r>
-              <a:rPr lang="en-US" sz="900" b="1" spc="80" kern="0" dirty="0">
+              <a:rPr lang="en-US" sz="880" b="1" spc="50" kern="0" dirty="0">
                 <a:solidFill>
                   <a:srgbClr val="1877B9"/>
                 </a:solidFill>
@@ -11105,7 +11318,7 @@
               </a:rPr>
               <a:t>PROGRAMOVANIE V PYTHONE</a:t>
             </a:r>
-            <a:endParaRPr lang="en-US" sz="900" dirty="0"/>
+            <a:endParaRPr lang="en-US" sz="880" dirty="0"/>
           </a:p>
         </p:txBody>
       </p:sp>
@@ -11117,7 +11330,7 @@
         </p:nvSpPr>
         <p:spPr>
           <a:xfrm>
-            <a:off x="9829800" y="320040"/>
+            <a:off x="9829800" y="310896"/>
             <a:ext cx="1783080" cy="182880"/>
           </a:xfrm>
           <a:prstGeom prst="rect">
@@ -11136,7 +11349,7 @@
               <a:buNone/>
             </a:pPr>
             <a:r>
-              <a:rPr lang="en-US" sz="900" b="1" dirty="0">
+              <a:rPr lang="en-US" sz="880" b="1" dirty="0">
                 <a:solidFill>
                   <a:srgbClr val="5E6B78"/>
                 </a:solidFill>
@@ -11146,7 +11359,7 @@
               </a:rPr>
               <a:t>PREDNÁŠKA 04</a:t>
             </a:r>
-            <a:endParaRPr lang="en-US" sz="900" dirty="0"/>
+            <a:endParaRPr lang="en-US" sz="880" dirty="0"/>
           </a:p>
         </p:txBody>
       </p:sp>
@@ -11204,8 +11417,8 @@
         </p:nvSpPr>
         <p:spPr>
           <a:xfrm>
-            <a:off x="11109960" y="6501384"/>
-            <a:ext cx="457200" cy="146304"/>
+            <a:off x="10771632" y="6501384"/>
+            <a:ext cx="804672" cy="146304"/>
           </a:xfrm>
           <a:prstGeom prst="rect">
             <a:avLst/>
@@ -11223,7 +11436,7 @@
               <a:buNone/>
             </a:pPr>
             <a:r>
-              <a:rPr lang="en-US" sz="800" dirty="0">
+              <a:rPr lang="en-US" sz="780" dirty="0">
                 <a:solidFill>
                   <a:srgbClr val="5E6B78"/>
                 </a:solidFill>
@@ -11231,9 +11444,9 @@
                 <a:ea typeface="Consolas" pitchFamily="34" charset="-122"/>
                 <a:cs typeface="Consolas" pitchFamily="34" charset="-120"/>
               </a:rPr>
-              <a:t>08</a:t>
-            </a:r>
-            <a:endParaRPr lang="en-US" sz="800" dirty="0"/>
+              <a:t>08 / 18</a:t>
+            </a:r>
+            <a:endParaRPr lang="en-US" sz="780" dirty="0"/>
           </a:p>
         </p:txBody>
       </p:sp>
@@ -11245,8 +11458,8 @@
         </p:nvSpPr>
         <p:spPr>
           <a:xfrm>
-            <a:off x="658368" y="932688"/>
-            <a:ext cx="10789920" cy="713232"/>
+            <a:off x="658368" y="914400"/>
+            <a:ext cx="10881360" cy="713232"/>
           </a:xfrm>
           <a:prstGeom prst="rect">
             <a:avLst/>
@@ -11264,17 +11477,17 @@
               <a:buNone/>
             </a:pPr>
             <a:r>
-              <a:rPr lang="en-US" sz="2900" b="1" dirty="0">
+              <a:rPr lang="en-US" sz="2850" b="1" dirty="0">
                 <a:solidFill>
                   <a:srgbClr val="16324F"/>
                 </a:solidFill>
-                <a:latin typeface="Aptos" pitchFamily="34" charset="0"/>
-                <a:ea typeface="Aptos" pitchFamily="34" charset="-122"/>
-                <a:cs typeface="Aptos" pitchFamily="34" charset="-120"/>
+                <a:latin typeface="Aptos Display" pitchFamily="34" charset="0"/>
+                <a:ea typeface="Aptos Display" pitchFamily="34" charset="-122"/>
+                <a:cs typeface="Aptos Display" pitchFamily="34" charset="-120"/>
               </a:rPr>
               <a:t>Parametrizácia pomenuje podobné prípady</a:t>
             </a:r>
-            <a:endParaRPr lang="en-US" sz="2900" dirty="0"/>
+            <a:endParaRPr lang="en-US" sz="2850" dirty="0"/>
           </a:p>
         </p:txBody>
       </p:sp>
@@ -11286,8 +11499,8 @@
         </p:nvSpPr>
         <p:spPr>
           <a:xfrm>
-            <a:off x="658368" y="1783080"/>
-            <a:ext cx="10899648" cy="4069080"/>
+            <a:off x="658368" y="1755648"/>
+            <a:ext cx="10899648" cy="4096512"/>
           </a:xfrm>
           <a:prstGeom prst="rect">
             <a:avLst/>
@@ -11297,7 +11510,7 @@
           </a:solidFill>
           <a:ln w="12700">
             <a:solidFill>
-              <a:srgbClr val="17212B"/>
+              <a:srgbClr val="243242"/>
             </a:solidFill>
             <a:prstDash val="solid"/>
           </a:ln>
@@ -11305,14 +11518,39 @@
       </p:sp>
       <p:sp>
         <p:nvSpPr>
-          <p:cNvPr id="10" name="Text 8"/>
-          <p:cNvSpPr/>
-          <p:nvPr/>
-        </p:nvSpPr>
-        <p:spPr>
-          <a:xfrm>
-            <a:off x="896112" y="1984248"/>
-            <a:ext cx="9966960" cy="182880"/>
+          <p:cNvPr id="10" name="Shape 8"/>
+          <p:cNvSpPr/>
+          <p:nvPr/>
+        </p:nvSpPr>
+        <p:spPr>
+          <a:xfrm>
+            <a:off x="658368" y="1755648"/>
+            <a:ext cx="10899648" cy="347472"/>
+          </a:xfrm>
+          <a:prstGeom prst="rect">
+            <a:avLst/>
+          </a:prstGeom>
+          <a:solidFill>
+            <a:srgbClr val="223044"/>
+          </a:solidFill>
+          <a:ln w="12700">
+            <a:solidFill>
+              <a:srgbClr val="223044"/>
+            </a:solidFill>
+            <a:prstDash val="solid"/>
+          </a:ln>
+        </p:spPr>
+      </p:sp>
+      <p:sp>
+        <p:nvSpPr>
+          <p:cNvPr id="11" name="Text 9"/>
+          <p:cNvSpPr/>
+          <p:nvPr/>
+        </p:nvSpPr>
+        <p:spPr>
+          <a:xfrm>
+            <a:off x="896112" y="1874520"/>
+            <a:ext cx="9966960" cy="146304"/>
           </a:xfrm>
           <a:prstGeom prst="rect">
             <a:avLst/>
@@ -11330,7 +11568,7 @@
               <a:buNone/>
             </a:pPr>
             <a:r>
-              <a:rPr lang="en-US" sz="850" b="1" spc="70" kern="0" dirty="0">
+              <a:rPr lang="en-US" sz="820" b="1" spc="35" kern="0" dirty="0">
                 <a:solidFill>
                   <a:srgbClr val="8FD3FF"/>
                 </a:solidFill>
@@ -11340,20 +11578,20 @@
               </a:rPr>
               <a:t>python</a:t>
             </a:r>
-            <a:endParaRPr lang="en-US" sz="850" dirty="0"/>
-          </a:p>
-        </p:txBody>
-      </p:sp>
-      <p:sp>
-        <p:nvSpPr>
-          <p:cNvPr id="11" name="Text 9"/>
-          <p:cNvSpPr/>
-          <p:nvPr/>
-        </p:nvSpPr>
-        <p:spPr>
-          <a:xfrm>
-            <a:off x="896112" y="2395728"/>
-            <a:ext cx="9893808" cy="3063240"/>
+            <a:endParaRPr lang="en-US" sz="820" dirty="0"/>
+          </a:p>
+        </p:txBody>
+      </p:sp>
+      <p:sp>
+        <p:nvSpPr>
+          <p:cNvPr id="12" name="Text 10"/>
+          <p:cNvSpPr/>
+          <p:nvPr/>
+        </p:nvSpPr>
+        <p:spPr>
+          <a:xfrm>
+            <a:off x="896112" y="2304288"/>
+            <a:ext cx="9921240" cy="3127248"/>
           </a:xfrm>
           <a:prstGeom prst="rect">
             <a:avLst/>
@@ -11371,7 +11609,7 @@
               <a:buNone/>
             </a:pPr>
             <a:r>
-              <a:rPr lang="en-US" sz="1750" dirty="0">
+              <a:rPr lang="en-US" sz="1500" dirty="0">
                 <a:solidFill>
                   <a:srgbClr val="F4F7FA"/>
                 </a:solidFill>
@@ -11381,20 +11619,20 @@
               </a:rPr>
               <a:t>import pytest</a:t>
             </a:r>
-            <a:endParaRPr lang="en-US" sz="1750" dirty="0"/>
+            <a:endParaRPr lang="en-US" sz="1500" dirty="0"/>
           </a:p>
           <a:p>
             <a:pPr algn="l" indent="0" marL="0">
               <a:buNone/>
             </a:pPr>
-            <a:endParaRPr lang="en-US" sz="1750" dirty="0"/>
+            <a:endParaRPr lang="en-US" sz="1500" dirty="0"/>
           </a:p>
           <a:p>
             <a:pPr algn="l" indent="0" marL="0">
               <a:buNone/>
             </a:pPr>
             <a:r>
-              <a:rPr lang="en-US" sz="1750" dirty="0">
+              <a:rPr lang="en-US" sz="1500" dirty="0">
                 <a:solidFill>
                   <a:srgbClr val="F4F7FA"/>
                 </a:solidFill>
@@ -11404,14 +11642,14 @@
               </a:rPr>
               <a:t>@pytest.mark.parametrize(("price", "discount", "expected"), [</a:t>
             </a:r>
-            <a:endParaRPr lang="en-US" sz="1750" dirty="0"/>
+            <a:endParaRPr lang="en-US" sz="1500" dirty="0"/>
           </a:p>
           <a:p>
             <a:pPr algn="l" indent="0" marL="0">
               <a:buNone/>
             </a:pPr>
             <a:r>
-              <a:rPr lang="en-US" sz="1750" dirty="0">
+              <a:rPr lang="en-US" sz="1500" dirty="0">
                 <a:solidFill>
                   <a:srgbClr val="F4F7FA"/>
                 </a:solidFill>
@@ -11421,14 +11659,14 @@
               </a:rPr>
               <a:t>    (100, 0.0, 100),</a:t>
             </a:r>
-            <a:endParaRPr lang="en-US" sz="1750" dirty="0"/>
+            <a:endParaRPr lang="en-US" sz="1500" dirty="0"/>
           </a:p>
           <a:p>
             <a:pPr algn="l" indent="0" marL="0">
               <a:buNone/>
             </a:pPr>
             <a:r>
-              <a:rPr lang="en-US" sz="1750" dirty="0">
+              <a:rPr lang="en-US" sz="1500" dirty="0">
                 <a:solidFill>
                   <a:srgbClr val="F4F7FA"/>
                 </a:solidFill>
@@ -11438,14 +11676,14 @@
               </a:rPr>
               <a:t>    (100, 0.2, 80),</a:t>
             </a:r>
-            <a:endParaRPr lang="en-US" sz="1750" dirty="0"/>
+            <a:endParaRPr lang="en-US" sz="1500" dirty="0"/>
           </a:p>
           <a:p>
             <a:pPr algn="l" indent="0" marL="0">
               <a:buNone/>
             </a:pPr>
             <a:r>
-              <a:rPr lang="en-US" sz="1750" dirty="0">
+              <a:rPr lang="en-US" sz="1500" dirty="0">
                 <a:solidFill>
                   <a:srgbClr val="F4F7FA"/>
                 </a:solidFill>
@@ -11455,14 +11693,14 @@
               </a:rPr>
               <a:t>    (100, 1.0, 0),</a:t>
             </a:r>
-            <a:endParaRPr lang="en-US" sz="1750" dirty="0"/>
+            <a:endParaRPr lang="en-US" sz="1500" dirty="0"/>
           </a:p>
           <a:p>
             <a:pPr algn="l" indent="0" marL="0">
               <a:buNone/>
             </a:pPr>
             <a:r>
-              <a:rPr lang="en-US" sz="1750" dirty="0">
+              <a:rPr lang="en-US" sz="1500" dirty="0">
                 <a:solidFill>
                   <a:srgbClr val="F4F7FA"/>
                 </a:solidFill>
@@ -11472,14 +11710,14 @@
               </a:rPr>
               <a:t>])</a:t>
             </a:r>
-            <a:endParaRPr lang="en-US" sz="1750" dirty="0"/>
+            <a:endParaRPr lang="en-US" sz="1500" dirty="0"/>
           </a:p>
           <a:p>
             <a:pPr algn="l" indent="0" marL="0">
               <a:buNone/>
             </a:pPr>
             <a:r>
-              <a:rPr lang="en-US" sz="1750" dirty="0">
+              <a:rPr lang="en-US" sz="1500" dirty="0">
                 <a:solidFill>
                   <a:srgbClr val="F4F7FA"/>
                 </a:solidFill>
@@ -11489,14 +11727,14 @@
               </a:rPr>
               <a:t>def test_discount(price: float, discount: float, expected: float) -&gt; None:</a:t>
             </a:r>
-            <a:endParaRPr lang="en-US" sz="1750" dirty="0"/>
+            <a:endParaRPr lang="en-US" sz="1500" dirty="0"/>
           </a:p>
           <a:p>
             <a:pPr algn="l" indent="0" marL="0">
               <a:buNone/>
             </a:pPr>
             <a:r>
-              <a:rPr lang="en-US" sz="1750" dirty="0">
+              <a:rPr lang="en-US" sz="1500" dirty="0">
                 <a:solidFill>
                   <a:srgbClr val="F4F7FA"/>
                 </a:solidFill>
@@ -11506,20 +11744,20 @@
               </a:rPr>
               <a:t>    assert calculate_discount(price, discount) == expected</a:t>
             </a:r>
-            <a:endParaRPr lang="en-US" sz="1750" dirty="0"/>
-          </a:p>
-        </p:txBody>
-      </p:sp>
-      <p:sp>
-        <p:nvSpPr>
-          <p:cNvPr id="12" name="Text 10"/>
+            <a:endParaRPr lang="en-US" sz="1500" dirty="0"/>
+          </a:p>
+        </p:txBody>
+      </p:sp>
+      <p:sp>
+        <p:nvSpPr>
+          <p:cNvPr id="13" name="Text 11"/>
           <p:cNvSpPr/>
           <p:nvPr/>
         </p:nvSpPr>
         <p:spPr>
           <a:xfrm>
             <a:off x="768096" y="6053328"/>
-            <a:ext cx="9921240" cy="237744"/>
+            <a:ext cx="9921240" cy="256032"/>
           </a:xfrm>
           <a:prstGeom prst="rect">
             <a:avLst/>
@@ -11537,7 +11775,7 @@
               <a:buNone/>
             </a:pPr>
             <a:r>
-              <a:rPr lang="en-US" sz="1550" dirty="0">
+              <a:rPr lang="en-US" sz="1520" dirty="0">
                 <a:solidFill>
                   <a:srgbClr val="5E6B78"/>
                 </a:solidFill>
@@ -11547,7 +11785,7 @@
               </a:rPr>
               <a:t>Parametrizácia odstraňuje duplicitu bez toho, aby skrývala jednotlivé scenáre.</a:t>
             </a:r>
-            <a:endParaRPr lang="en-US" sz="1550" dirty="0"/>
+            <a:endParaRPr lang="en-US" sz="1520" dirty="0"/>
           </a:p>
         </p:txBody>
       </p:sp>
@@ -11592,7 +11830,7 @@
         <p:spPr>
           <a:xfrm>
             <a:off x="0" y="0"/>
-            <a:ext cx="12191695" cy="155448"/>
+            <a:ext cx="12191695" cy="109728"/>
           </a:xfrm>
           <a:prstGeom prst="rect">
             <a:avLst/>
@@ -11616,7 +11854,7 @@
         </p:nvSpPr>
         <p:spPr>
           <a:xfrm>
-            <a:off x="566928" y="320040"/>
+            <a:off x="566928" y="310896"/>
             <a:ext cx="4663440" cy="182880"/>
           </a:xfrm>
           <a:prstGeom prst="rect">
@@ -11635,7 +11873,7 @@
               <a:buNone/>
             </a:pPr>
             <a:r>
-              <a:rPr lang="en-US" sz="900" b="1" spc="80" kern="0" dirty="0">
+              <a:rPr lang="en-US" sz="880" b="1" spc="50" kern="0" dirty="0">
                 <a:solidFill>
                   <a:srgbClr val="1877B9"/>
                 </a:solidFill>
@@ -11645,7 +11883,7 @@
               </a:rPr>
               <a:t>PROGRAMOVANIE V PYTHONE</a:t>
             </a:r>
-            <a:endParaRPr lang="en-US" sz="900" dirty="0"/>
+            <a:endParaRPr lang="en-US" sz="880" dirty="0"/>
           </a:p>
         </p:txBody>
       </p:sp>
@@ -11657,7 +11895,7 @@
         </p:nvSpPr>
         <p:spPr>
           <a:xfrm>
-            <a:off x="9829800" y="320040"/>
+            <a:off x="9829800" y="310896"/>
             <a:ext cx="1783080" cy="182880"/>
           </a:xfrm>
           <a:prstGeom prst="rect">
@@ -11676,7 +11914,7 @@
               <a:buNone/>
             </a:pPr>
             <a:r>
-              <a:rPr lang="en-US" sz="900" b="1" dirty="0">
+              <a:rPr lang="en-US" sz="880" b="1" dirty="0">
                 <a:solidFill>
                   <a:srgbClr val="5E6B78"/>
                 </a:solidFill>
@@ -11686,7 +11924,7 @@
               </a:rPr>
               <a:t>PREDNÁŠKA 04</a:t>
             </a:r>
-            <a:endParaRPr lang="en-US" sz="900" dirty="0"/>
+            <a:endParaRPr lang="en-US" sz="880" dirty="0"/>
           </a:p>
         </p:txBody>
       </p:sp>
@@ -11744,8 +11982,8 @@
         </p:nvSpPr>
         <p:spPr>
           <a:xfrm>
-            <a:off x="11109960" y="6501384"/>
-            <a:ext cx="457200" cy="146304"/>
+            <a:off x="10771632" y="6501384"/>
+            <a:ext cx="804672" cy="146304"/>
           </a:xfrm>
           <a:prstGeom prst="rect">
             <a:avLst/>
@@ -11763,7 +12001,7 @@
               <a:buNone/>
             </a:pPr>
             <a:r>
-              <a:rPr lang="en-US" sz="800" dirty="0">
+              <a:rPr lang="en-US" sz="780" dirty="0">
                 <a:solidFill>
                   <a:srgbClr val="5E6B78"/>
                 </a:solidFill>
@@ -11771,9 +12009,9 @@
                 <a:ea typeface="Consolas" pitchFamily="34" charset="-122"/>
                 <a:cs typeface="Consolas" pitchFamily="34" charset="-120"/>
               </a:rPr>
-              <a:t>09</a:t>
-            </a:r>
-            <a:endParaRPr lang="en-US" sz="800" dirty="0"/>
+              <a:t>09 / 18</a:t>
+            </a:r>
+            <a:endParaRPr lang="en-US" sz="780" dirty="0"/>
           </a:p>
         </p:txBody>
       </p:sp>
@@ -11785,8 +12023,8 @@
         </p:nvSpPr>
         <p:spPr>
           <a:xfrm>
-            <a:off x="658368" y="932688"/>
-            <a:ext cx="10789920" cy="713232"/>
+            <a:off x="658368" y="914400"/>
+            <a:ext cx="10881360" cy="713232"/>
           </a:xfrm>
           <a:prstGeom prst="rect">
             <a:avLst/>
@@ -11804,17 +12042,17 @@
               <a:buNone/>
             </a:pPr>
             <a:r>
-              <a:rPr lang="en-US" sz="2900" b="1" dirty="0">
+              <a:rPr lang="en-US" sz="2850" b="1" dirty="0">
                 <a:solidFill>
                   <a:srgbClr val="16324F"/>
                 </a:solidFill>
-                <a:latin typeface="Aptos" pitchFamily="34" charset="0"/>
-                <a:ea typeface="Aptos" pitchFamily="34" charset="-122"/>
-                <a:cs typeface="Aptos" pitchFamily="34" charset="-120"/>
+                <a:latin typeface="Aptos Display" pitchFamily="34" charset="0"/>
+                <a:ea typeface="Aptos Display" pitchFamily="34" charset="-122"/>
+                <a:cs typeface="Aptos Display" pitchFamily="34" charset="-120"/>
               </a:rPr>
               <a:t>Výnimka je tiež očakávané správanie</a:t>
             </a:r>
-            <a:endParaRPr lang="en-US" sz="2900" dirty="0"/>
+            <a:endParaRPr lang="en-US" sz="2850" dirty="0"/>
           </a:p>
         </p:txBody>
       </p:sp>
@@ -11827,19 +12065,17 @@
         <p:spPr>
           <a:xfrm>
             <a:off x="658368" y="1828800"/>
-            <a:ext cx="6812280" cy="4069080"/>
-          </a:xfrm>
-          <a:prstGeom prst="roundRect">
-            <a:avLst>
-              <a:gd name="adj" fmla="val 1348"/>
-            </a:avLst>
+            <a:ext cx="6903720" cy="4069080"/>
+          </a:xfrm>
+          <a:prstGeom prst="rect">
+            <a:avLst/>
           </a:prstGeom>
           <a:solidFill>
             <a:srgbClr val="17212B"/>
           </a:solidFill>
           <a:ln w="12700">
             <a:solidFill>
-              <a:srgbClr val="17212B"/>
+              <a:srgbClr val="243242"/>
             </a:solidFill>
             <a:prstDash val="solid"/>
           </a:ln>
@@ -11847,14 +12083,39 @@
       </p:sp>
       <p:sp>
         <p:nvSpPr>
-          <p:cNvPr id="10" name="Text 8"/>
-          <p:cNvSpPr/>
-          <p:nvPr/>
-        </p:nvSpPr>
-        <p:spPr>
-          <a:xfrm>
-            <a:off x="868680" y="2029968"/>
-            <a:ext cx="6309360" cy="182880"/>
+          <p:cNvPr id="10" name="Shape 8"/>
+          <p:cNvSpPr/>
+          <p:nvPr/>
+        </p:nvSpPr>
+        <p:spPr>
+          <a:xfrm>
+            <a:off x="658368" y="1828800"/>
+            <a:ext cx="6903720" cy="347472"/>
+          </a:xfrm>
+          <a:prstGeom prst="rect">
+            <a:avLst/>
+          </a:prstGeom>
+          <a:solidFill>
+            <a:srgbClr val="223044"/>
+          </a:solidFill>
+          <a:ln w="12700">
+            <a:solidFill>
+              <a:srgbClr val="223044"/>
+            </a:solidFill>
+            <a:prstDash val="solid"/>
+          </a:ln>
+        </p:spPr>
+      </p:sp>
+      <p:sp>
+        <p:nvSpPr>
+          <p:cNvPr id="11" name="Text 9"/>
+          <p:cNvSpPr/>
+          <p:nvPr/>
+        </p:nvSpPr>
+        <p:spPr>
+          <a:xfrm>
+            <a:off x="868680" y="1947672"/>
+            <a:ext cx="6309360" cy="146304"/>
           </a:xfrm>
           <a:prstGeom prst="rect">
             <a:avLst/>
@@ -11872,7 +12133,7 @@
               <a:buNone/>
             </a:pPr>
             <a:r>
-              <a:rPr lang="en-US" sz="850" b="1" spc="70" kern="0" dirty="0">
+              <a:rPr lang="en-US" sz="820" b="1" spc="35" kern="0" dirty="0">
                 <a:solidFill>
                   <a:srgbClr val="8FD3FF"/>
                 </a:solidFill>
@@ -11882,20 +12143,20 @@
               </a:rPr>
               <a:t>python</a:t>
             </a:r>
-            <a:endParaRPr lang="en-US" sz="850" dirty="0"/>
-          </a:p>
-        </p:txBody>
-      </p:sp>
-      <p:sp>
-        <p:nvSpPr>
-          <p:cNvPr id="11" name="Text 9"/>
-          <p:cNvSpPr/>
-          <p:nvPr/>
-        </p:nvSpPr>
-        <p:spPr>
-          <a:xfrm>
-            <a:off x="877824" y="2395728"/>
-            <a:ext cx="6327648" cy="3246120"/>
+            <a:endParaRPr lang="en-US" sz="820" dirty="0"/>
+          </a:p>
+        </p:txBody>
+      </p:sp>
+      <p:sp>
+        <p:nvSpPr>
+          <p:cNvPr id="12" name="Text 10"/>
+          <p:cNvSpPr/>
+          <p:nvPr/>
+        </p:nvSpPr>
+        <p:spPr>
+          <a:xfrm>
+            <a:off x="877824" y="2359152"/>
+            <a:ext cx="6382512" cy="3246120"/>
           </a:xfrm>
           <a:prstGeom prst="rect">
             <a:avLst/>
@@ -11913,7 +12174,7 @@
               <a:buNone/>
             </a:pPr>
             <a:r>
-              <a:rPr lang="en-US" sz="1650" dirty="0">
+              <a:rPr lang="en-US" sz="1600" dirty="0">
                 <a:solidFill>
                   <a:srgbClr val="F4F7FA"/>
                 </a:solidFill>
@@ -11923,20 +12184,20 @@
               </a:rPr>
               <a:t>import pytest</a:t>
             </a:r>
-            <a:endParaRPr lang="en-US" sz="1650" dirty="0"/>
+            <a:endParaRPr lang="en-US" sz="1600" dirty="0"/>
           </a:p>
           <a:p>
             <a:pPr algn="l" indent="0" marL="0">
               <a:buNone/>
             </a:pPr>
-            <a:endParaRPr lang="en-US" sz="1650" dirty="0"/>
+            <a:endParaRPr lang="en-US" sz="1600" dirty="0"/>
           </a:p>
           <a:p>
             <a:pPr algn="l" indent="0" marL="0">
               <a:buNone/>
             </a:pPr>
             <a:r>
-              <a:rPr lang="en-US" sz="1650" dirty="0">
+              <a:rPr lang="en-US" sz="1600" dirty="0">
                 <a:solidFill>
                   <a:srgbClr val="F4F7FA"/>
                 </a:solidFill>
@@ -11946,14 +12207,14 @@
               </a:rPr>
               <a:t>def test_discount_rejects_invalid_percentage() -&gt; None:</a:t>
             </a:r>
-            <a:endParaRPr lang="en-US" sz="1650" dirty="0"/>
+            <a:endParaRPr lang="en-US" sz="1600" dirty="0"/>
           </a:p>
           <a:p>
             <a:pPr algn="l" indent="0" marL="0">
               <a:buNone/>
             </a:pPr>
             <a:r>
-              <a:rPr lang="en-US" sz="1650" dirty="0">
+              <a:rPr lang="en-US" sz="1600" dirty="0">
                 <a:solidFill>
                   <a:srgbClr val="F4F7FA"/>
                 </a:solidFill>
@@ -11963,14 +12224,14 @@
               </a:rPr>
               <a:t>    with pytest.raises(ValueError):</a:t>
             </a:r>
-            <a:endParaRPr lang="en-US" sz="1650" dirty="0"/>
+            <a:endParaRPr lang="en-US" sz="1600" dirty="0"/>
           </a:p>
           <a:p>
             <a:pPr algn="l" indent="0" marL="0">
               <a:buNone/>
             </a:pPr>
             <a:r>
-              <a:rPr lang="en-US" sz="1650" dirty="0">
+              <a:rPr lang="en-US" sz="1600" dirty="0">
                 <a:solidFill>
                   <a:srgbClr val="F4F7FA"/>
                 </a:solidFill>
@@ -11980,20 +12241,20 @@
               </a:rPr>
               <a:t>        calculate_discount(100, 1.2)</a:t>
             </a:r>
-            <a:endParaRPr lang="en-US" sz="1650" dirty="0"/>
-          </a:p>
-        </p:txBody>
-      </p:sp>
-      <p:sp>
-        <p:nvSpPr>
-          <p:cNvPr id="12" name="Shape 10"/>
-          <p:cNvSpPr/>
-          <p:nvPr/>
-        </p:nvSpPr>
-        <p:spPr>
-          <a:xfrm>
-            <a:off x="7909560" y="1901952"/>
-            <a:ext cx="0" cy="3566160"/>
+            <a:endParaRPr lang="en-US" sz="1600" dirty="0"/>
+          </a:p>
+        </p:txBody>
+      </p:sp>
+      <p:sp>
+        <p:nvSpPr>
+          <p:cNvPr id="13" name="Shape 11"/>
+          <p:cNvSpPr/>
+          <p:nvPr/>
+        </p:nvSpPr>
+        <p:spPr>
+          <a:xfrm>
+            <a:off x="7936992" y="1883664"/>
+            <a:ext cx="0" cy="3639312"/>
           </a:xfrm>
           <a:prstGeom prst="line">
             <a:avLst/>
@@ -12009,14 +12270,14 @@
       </p:sp>
       <p:sp>
         <p:nvSpPr>
-          <p:cNvPr id="13" name="Text 11"/>
-          <p:cNvSpPr/>
-          <p:nvPr/>
-        </p:nvSpPr>
-        <p:spPr>
-          <a:xfrm>
-            <a:off x="8229600" y="2130552"/>
-            <a:ext cx="2743200" cy="2468880"/>
+          <p:cNvPr id="14" name="Text 12"/>
+          <p:cNvSpPr/>
+          <p:nvPr/>
+        </p:nvSpPr>
+        <p:spPr>
+          <a:xfrm>
+            <a:off x="8229600" y="2084832"/>
+            <a:ext cx="2816352" cy="2514600"/>
           </a:xfrm>
           <a:prstGeom prst="rect">
             <a:avLst/>
@@ -12034,7 +12295,7 @@
               <a:buNone/>
             </a:pPr>
             <a:r>
-              <a:rPr lang="en-US" sz="1800" dirty="0">
+              <a:rPr lang="en-US" sz="1720" dirty="0">
                 <a:solidFill>
                   <a:srgbClr val="5E6B78"/>
                 </a:solidFill>
@@ -12044,7 +12305,7 @@
               </a:rPr>
               <a:t>Test neoveruje text správy, ak text nie je súčasť verejného API. Overuje význam kontraktu.</a:t>
             </a:r>
-            <a:endParaRPr lang="en-US" sz="1800" dirty="0"/>
+            <a:endParaRPr lang="en-US" sz="1720" dirty="0"/>
           </a:p>
         </p:txBody>
       </p:sp>
